--- a/runnerpub-proposal/runnerpub_proposal_naeilsajang.pptx
+++ b/runnerpub-proposal/runnerpub_proposal_naeilsajang.pptx
@@ -3282,7 +3282,7 @@
                 <a:ea typeface="맑은 고딕" pitchFamily="34" charset="-122"/>
                 <a:cs typeface="맑은 고딕" pitchFamily="34" charset="-120"/>
               </a:rPr>
-              <a:t>담당  지윤진 본부장 · jiyj@sajang.app</a:t>
+              <a:t>담당  지용관 본부장 · 010-3629-7778</a:t>
             </a:r>
             <a:endParaRPr lang="en-US" sz="950" dirty="0"/>
           </a:p>
@@ -15545,7 +15545,7 @@
                 <a:ea typeface="맑은 고딕" pitchFamily="34" charset="-122"/>
                 <a:cs typeface="맑은 고딕" pitchFamily="34" charset="-120"/>
               </a:rPr>
-              <a:t>담당  지윤진 본부장 · jiyj@sajang.app</a:t>
+              <a:t>담당  지용관 본부장 · 010-3629-7778</a:t>
             </a:r>
             <a:endParaRPr lang="en-US" sz="1050" dirty="0"/>
           </a:p>

--- a/runnerpub-proposal/runnerpub_proposal_naeilsajang.pptx
+++ b/runnerpub-proposal/runnerpub_proposal_naeilsajang.pptx
@@ -9496,7 +9496,7 @@
         <p:spPr>
           <a:xfrm>
             <a:off x="6931152" y="4800600"/>
-            <a:ext cx="933511" cy="164592"/>
+            <a:ext cx="840242" cy="164592"/>
           </a:xfrm>
           <a:prstGeom prst="rect">
             <a:avLst/>
@@ -9511,8 +9511,8 @@
         </p:nvSpPr>
         <p:spPr>
           <a:xfrm>
-            <a:off x="10116007" y="4754880"/>
-            <a:ext cx="1389888" cy="256032"/>
+            <a:off x="9805111" y="4754880"/>
+            <a:ext cx="1700784" cy="256032"/>
           </a:xfrm>
           <a:prstGeom prst="rect">
             <a:avLst/>
@@ -9541,7 +9541,7 @@
                 <a:ea typeface="맑은 고딕" pitchFamily="34" charset="-122"/>
                 <a:cs typeface="맑은 고딕" pitchFamily="34" charset="-120"/>
               </a:rPr>
-              <a:t>17,700만원</a:t>
+              <a:t>1억 7,700만원</a:t>
             </a:r>
             <a:endParaRPr lang="en-US" sz="1100" dirty="0"/>
           </a:p>
@@ -9608,7 +9608,7 @@
         <p:spPr>
           <a:xfrm>
             <a:off x="6931152" y="5202936"/>
-            <a:ext cx="1555852" cy="164592"/>
+            <a:ext cx="1400404" cy="164592"/>
           </a:xfrm>
           <a:prstGeom prst="rect">
             <a:avLst/>
@@ -9623,8 +9623,8 @@
         </p:nvSpPr>
         <p:spPr>
           <a:xfrm>
-            <a:off x="10116007" y="5157216"/>
-            <a:ext cx="1389888" cy="256032"/>
+            <a:off x="9805111" y="5157216"/>
+            <a:ext cx="1700784" cy="256032"/>
           </a:xfrm>
           <a:prstGeom prst="rect">
             <a:avLst/>
@@ -9653,7 +9653,7 @@
                 <a:ea typeface="맑은 고딕" pitchFamily="34" charset="-122"/>
                 <a:cs typeface="맑은 고딕" pitchFamily="34" charset="-120"/>
               </a:rPr>
-              <a:t>29,500만원</a:t>
+              <a:t>2억 9,500만원</a:t>
             </a:r>
             <a:endParaRPr lang="en-US" sz="1100" dirty="0"/>
           </a:p>
@@ -9720,7 +9720,7 @@
         <p:spPr>
           <a:xfrm>
             <a:off x="6931152" y="5605272"/>
-            <a:ext cx="3111703" cy="164592"/>
+            <a:ext cx="2800807" cy="164592"/>
           </a:xfrm>
           <a:prstGeom prst="rect">
             <a:avLst/>
@@ -9735,8 +9735,8 @@
         </p:nvSpPr>
         <p:spPr>
           <a:xfrm>
-            <a:off x="10116007" y="5559552"/>
-            <a:ext cx="1389888" cy="256032"/>
+            <a:off x="9805111" y="5559552"/>
+            <a:ext cx="1700784" cy="256032"/>
           </a:xfrm>
           <a:prstGeom prst="rect">
             <a:avLst/>
@@ -9765,7 +9765,7 @@
                 <a:ea typeface="맑은 고딕" pitchFamily="34" charset="-122"/>
                 <a:cs typeface="맑은 고딕" pitchFamily="34" charset="-120"/>
               </a:rPr>
-              <a:t>59,000만원</a:t>
+              <a:t>5억 9,000만원</a:t>
             </a:r>
             <a:endParaRPr lang="en-US" sz="1100" dirty="0"/>
           </a:p>
@@ -9809,7 +9809,7 @@
                 <a:ea typeface="맑은 고딕" pitchFamily="34" charset="-122"/>
                 <a:cs typeface="맑은 고딕" pitchFamily="34" charset="-120"/>
               </a:rPr>
-              <a:t>10개점 × 36개월 = 5억 9,000만원   ·   단위 : 만원</a:t>
+              <a:t>가맹비 1,500만원 + 월 로열티 150만원 × 36개월 − 성공보수 1,000만원 기준</a:t>
             </a:r>
             <a:endParaRPr lang="en-US" sz="850" dirty="0"/>
           </a:p>
@@ -11414,7 +11414,7 @@
                 <a:ea typeface="맑은 고딕" pitchFamily="34" charset="-122"/>
                 <a:cs typeface="맑은 고딕" pitchFamily="34" charset="-120"/>
               </a:rPr>
-              <a:t>본사 제공 · 내일사장은 전달 및 설명 보조</a:t>
+              <a:t>본사 제공 · 내일사장은 전달 및 설명 보조 · 인근가맹점 현황문서(법 제7조제2항) 동봉 확인</a:t>
             </a:r>
             <a:endParaRPr lang="en-US" sz="1150" dirty="0"/>
           </a:p>
@@ -28584,8 +28584,52 @@
           </a:xfrm>
           <a:prstGeom prst="roundRect">
             <a:avLst>
-              <a:gd name="adj" fmla="val 22222"/>
+              <a:gd name="adj" fmla="val 16667"/>
             </a:avLst>
+          </a:prstGeom>
+          <a:solidFill>
+            <a:srgbClr val="E7EFFA"/>
+          </a:solidFill>
+          <a:ln>
+            <a:noFill/>
+          </a:ln>
+        </p:spPr>
+      </p:sp>
+      <p:sp>
+        <p:nvSpPr>
+          <p:cNvPr id="14" name="Shape 9"/>
+          <p:cNvSpPr/>
+          <p:nvPr/>
+        </p:nvSpPr>
+        <p:spPr>
+          <a:xfrm>
+            <a:off x="685800" y="5396789"/>
+            <a:ext cx="2526716" cy="164592"/>
+          </a:xfrm>
+          <a:prstGeom prst="rect">
+            <a:avLst/>
+          </a:prstGeom>
+          <a:solidFill>
+            <a:srgbClr val="E7EFFA"/>
+          </a:solidFill>
+          <a:ln>
+            <a:noFill/>
+          </a:ln>
+        </p:spPr>
+      </p:sp>
+      <p:sp>
+        <p:nvSpPr>
+          <p:cNvPr id="15" name="Shape 10"/>
+          <p:cNvSpPr/>
+          <p:nvPr/>
+        </p:nvSpPr>
+        <p:spPr>
+          <a:xfrm>
+            <a:off x="685800" y="5396789"/>
+            <a:ext cx="45720" cy="329184"/>
+          </a:xfrm>
+          <a:prstGeom prst="rect">
+            <a:avLst/>
           </a:prstGeom>
           <a:solidFill>
             <a:srgbClr val="2868F0"/>
@@ -28597,36 +28641,14 @@
       </p:sp>
       <p:sp>
         <p:nvSpPr>
-          <p:cNvPr id="14" name="Shape 9"/>
-          <p:cNvSpPr/>
-          <p:nvPr/>
-        </p:nvSpPr>
-        <p:spPr>
-          <a:xfrm>
-            <a:off x="685800" y="5396789"/>
-            <a:ext cx="2526716" cy="164592"/>
-          </a:xfrm>
-          <a:prstGeom prst="rect">
-            <a:avLst/>
-          </a:prstGeom>
-          <a:solidFill>
-            <a:srgbClr val="2868F0"/>
-          </a:solidFill>
-          <a:ln>
-            <a:noFill/>
-          </a:ln>
-        </p:spPr>
-      </p:sp>
-      <p:sp>
-        <p:nvSpPr>
-          <p:cNvPr id="15" name="Text 10"/>
-          <p:cNvSpPr/>
-          <p:nvPr/>
-        </p:nvSpPr>
-        <p:spPr>
-          <a:xfrm>
-            <a:off x="758952" y="5396789"/>
-            <a:ext cx="2380412" cy="329184"/>
+          <p:cNvPr id="16" name="Text 11"/>
+          <p:cNvSpPr/>
+          <p:nvPr/>
+        </p:nvSpPr>
+        <p:spPr>
+          <a:xfrm>
+            <a:off x="804672" y="5396789"/>
+            <a:ext cx="2334692" cy="329184"/>
           </a:xfrm>
           <a:prstGeom prst="rect">
             <a:avLst/>
@@ -28649,7 +28671,7 @@
             <a:r>
               <a:rPr lang="en-US" sz="900" b="1" spc="80" kern="0" dirty="0">
                 <a:solidFill>
-                  <a:srgbClr val="FFFFFF"/>
+                  <a:srgbClr val="1E3457"/>
                 </a:solidFill>
                 <a:latin typeface="맑은 고딕" pitchFamily="34" charset="0"/>
                 <a:ea typeface="맑은 고딕" pitchFamily="34" charset="-122"/>
@@ -28663,7 +28685,7 @@
       </p:sp>
       <p:sp>
         <p:nvSpPr>
-          <p:cNvPr id="16" name="Shape 11"/>
+          <p:cNvPr id="17" name="Shape 12"/>
           <p:cNvSpPr/>
           <p:nvPr/>
         </p:nvSpPr>
@@ -28685,7 +28707,7 @@
       </p:sp>
       <p:sp>
         <p:nvSpPr>
-          <p:cNvPr id="17" name="Text 12"/>
+          <p:cNvPr id="18" name="Text 13"/>
           <p:cNvSpPr/>
           <p:nvPr/>
         </p:nvSpPr>
@@ -28729,7 +28751,7 @@
       </p:sp>
       <p:sp>
         <p:nvSpPr>
-          <p:cNvPr id="18" name="Shape 13"/>
+          <p:cNvPr id="19" name="Shape 14"/>
           <p:cNvSpPr/>
           <p:nvPr/>
         </p:nvSpPr>
@@ -28753,7 +28775,7 @@
       </p:sp>
       <p:pic>
         <p:nvPicPr>
-          <p:cNvPr id="19" name="Image 3" descr="/home/user/onewillco-meeting-2026/runnerpub-proposal/assets/p07_step2.png">    </p:cNvPr>
+          <p:cNvPr id="20" name="Image 3" descr="/home/user/onewillco-meeting-2026/runnerpub-proposal/assets/p07_step2_flat.png">    </p:cNvPr>
           <p:cNvPicPr>
             <a:picLocks noChangeAspect="1"/>
           </p:cNvPicPr>
@@ -28767,8 +28789,8 @@
         </p:blipFill>
         <p:spPr>
           <a:xfrm>
-            <a:off x="3541700" y="3246485"/>
-            <a:ext cx="2343836" cy="2095440"/>
+            <a:off x="3541700" y="3341638"/>
+            <a:ext cx="2343836" cy="2000287"/>
           </a:xfrm>
           <a:prstGeom prst="rect">
             <a:avLst/>
@@ -28777,7 +28799,7 @@
       </p:pic>
       <p:sp>
         <p:nvSpPr>
-          <p:cNvPr id="20" name="Shape 14"/>
+          <p:cNvPr id="21" name="Shape 15"/>
           <p:cNvSpPr/>
           <p:nvPr/>
         </p:nvSpPr>
@@ -28788,8 +28810,52 @@
           </a:xfrm>
           <a:prstGeom prst="roundRect">
             <a:avLst>
-              <a:gd name="adj" fmla="val 22222"/>
+              <a:gd name="adj" fmla="val 16667"/>
             </a:avLst>
+          </a:prstGeom>
+          <a:solidFill>
+            <a:srgbClr val="E7EFFA"/>
+          </a:solidFill>
+          <a:ln>
+            <a:noFill/>
+          </a:ln>
+        </p:spPr>
+      </p:sp>
+      <p:sp>
+        <p:nvSpPr>
+          <p:cNvPr id="22" name="Shape 16"/>
+          <p:cNvSpPr/>
+          <p:nvPr/>
+        </p:nvSpPr>
+        <p:spPr>
+          <a:xfrm>
+            <a:off x="3450260" y="5396789"/>
+            <a:ext cx="2526716" cy="164592"/>
+          </a:xfrm>
+          <a:prstGeom prst="rect">
+            <a:avLst/>
+          </a:prstGeom>
+          <a:solidFill>
+            <a:srgbClr val="E7EFFA"/>
+          </a:solidFill>
+          <a:ln>
+            <a:noFill/>
+          </a:ln>
+        </p:spPr>
+      </p:sp>
+      <p:sp>
+        <p:nvSpPr>
+          <p:cNvPr id="23" name="Shape 17"/>
+          <p:cNvSpPr/>
+          <p:nvPr/>
+        </p:nvSpPr>
+        <p:spPr>
+          <a:xfrm>
+            <a:off x="3450260" y="5396789"/>
+            <a:ext cx="45720" cy="329184"/>
+          </a:xfrm>
+          <a:prstGeom prst="rect">
+            <a:avLst/>
           </a:prstGeom>
           <a:solidFill>
             <a:srgbClr val="2868F0"/>
@@ -28801,36 +28867,14 @@
       </p:sp>
       <p:sp>
         <p:nvSpPr>
-          <p:cNvPr id="21" name="Shape 15"/>
-          <p:cNvSpPr/>
-          <p:nvPr/>
-        </p:nvSpPr>
-        <p:spPr>
-          <a:xfrm>
-            <a:off x="3450260" y="5396789"/>
-            <a:ext cx="2526716" cy="164592"/>
-          </a:xfrm>
-          <a:prstGeom prst="rect">
-            <a:avLst/>
-          </a:prstGeom>
-          <a:solidFill>
-            <a:srgbClr val="2868F0"/>
-          </a:solidFill>
-          <a:ln>
-            <a:noFill/>
-          </a:ln>
-        </p:spPr>
-      </p:sp>
-      <p:sp>
-        <p:nvSpPr>
-          <p:cNvPr id="22" name="Text 16"/>
-          <p:cNvSpPr/>
-          <p:nvPr/>
-        </p:nvSpPr>
-        <p:spPr>
-          <a:xfrm>
-            <a:off x="3523412" y="5396789"/>
-            <a:ext cx="2380412" cy="329184"/>
+          <p:cNvPr id="24" name="Text 18"/>
+          <p:cNvSpPr/>
+          <p:nvPr/>
+        </p:nvSpPr>
+        <p:spPr>
+          <a:xfrm>
+            <a:off x="3569132" y="5396789"/>
+            <a:ext cx="2334692" cy="329184"/>
           </a:xfrm>
           <a:prstGeom prst="rect">
             <a:avLst/>
@@ -28853,7 +28897,7 @@
             <a:r>
               <a:rPr lang="en-US" sz="900" b="1" spc="80" kern="0" dirty="0">
                 <a:solidFill>
-                  <a:srgbClr val="FFFFFF"/>
+                  <a:srgbClr val="1E3457"/>
                 </a:solidFill>
                 <a:latin typeface="맑은 고딕" pitchFamily="34" charset="0"/>
                 <a:ea typeface="맑은 고딕" pitchFamily="34" charset="-122"/>
@@ -28867,7 +28911,7 @@
       </p:sp>
       <p:sp>
         <p:nvSpPr>
-          <p:cNvPr id="23" name="Shape 17"/>
+          <p:cNvPr id="25" name="Shape 19"/>
           <p:cNvSpPr/>
           <p:nvPr/>
         </p:nvSpPr>
@@ -28889,7 +28933,7 @@
       </p:sp>
       <p:sp>
         <p:nvSpPr>
-          <p:cNvPr id="24" name="Text 18"/>
+          <p:cNvPr id="26" name="Text 20"/>
           <p:cNvSpPr/>
           <p:nvPr/>
         </p:nvSpPr>
@@ -28933,7 +28977,7 @@
       </p:sp>
       <p:sp>
         <p:nvSpPr>
-          <p:cNvPr id="25" name="Shape 19"/>
+          <p:cNvPr id="27" name="Shape 21"/>
           <p:cNvSpPr/>
           <p:nvPr/>
         </p:nvSpPr>
@@ -28957,7 +29001,7 @@
       </p:sp>
       <p:pic>
         <p:nvPicPr>
-          <p:cNvPr id="26" name="Image 4" descr="/home/user/onewillco-meeting-2026/runnerpub-proposal/assets/p07_area.png">    </p:cNvPr>
+          <p:cNvPr id="28" name="Image 4" descr="/home/user/onewillco-meeting-2026/runnerpub-proposal/assets/p07_area.png">    </p:cNvPr>
           <p:cNvPicPr>
             <a:picLocks noChangeAspect="1"/>
           </p:cNvPicPr>
@@ -28981,7 +29025,7 @@
       </p:pic>
       <p:sp>
         <p:nvSpPr>
-          <p:cNvPr id="27" name="Shape 20"/>
+          <p:cNvPr id="29" name="Shape 22"/>
           <p:cNvSpPr/>
           <p:nvPr/>
         </p:nvSpPr>
@@ -28992,8 +29036,52 @@
           </a:xfrm>
           <a:prstGeom prst="roundRect">
             <a:avLst>
-              <a:gd name="adj" fmla="val 22222"/>
+              <a:gd name="adj" fmla="val 16667"/>
             </a:avLst>
+          </a:prstGeom>
+          <a:solidFill>
+            <a:srgbClr val="E7EFFA"/>
+          </a:solidFill>
+          <a:ln>
+            <a:noFill/>
+          </a:ln>
+        </p:spPr>
+      </p:sp>
+      <p:sp>
+        <p:nvSpPr>
+          <p:cNvPr id="30" name="Shape 23"/>
+          <p:cNvSpPr/>
+          <p:nvPr/>
+        </p:nvSpPr>
+        <p:spPr>
+          <a:xfrm>
+            <a:off x="6214720" y="5396789"/>
+            <a:ext cx="2526716" cy="164592"/>
+          </a:xfrm>
+          <a:prstGeom prst="rect">
+            <a:avLst/>
+          </a:prstGeom>
+          <a:solidFill>
+            <a:srgbClr val="E7EFFA"/>
+          </a:solidFill>
+          <a:ln>
+            <a:noFill/>
+          </a:ln>
+        </p:spPr>
+      </p:sp>
+      <p:sp>
+        <p:nvSpPr>
+          <p:cNvPr id="31" name="Shape 24"/>
+          <p:cNvSpPr/>
+          <p:nvPr/>
+        </p:nvSpPr>
+        <p:spPr>
+          <a:xfrm>
+            <a:off x="6214720" y="5396789"/>
+            <a:ext cx="45720" cy="329184"/>
+          </a:xfrm>
+          <a:prstGeom prst="rect">
+            <a:avLst/>
           </a:prstGeom>
           <a:solidFill>
             <a:srgbClr val="2868F0"/>
@@ -29005,36 +29093,14 @@
       </p:sp>
       <p:sp>
         <p:nvSpPr>
-          <p:cNvPr id="28" name="Shape 21"/>
-          <p:cNvSpPr/>
-          <p:nvPr/>
-        </p:nvSpPr>
-        <p:spPr>
-          <a:xfrm>
-            <a:off x="6214720" y="5396789"/>
-            <a:ext cx="2526716" cy="164592"/>
-          </a:xfrm>
-          <a:prstGeom prst="rect">
-            <a:avLst/>
-          </a:prstGeom>
-          <a:solidFill>
-            <a:srgbClr val="2868F0"/>
-          </a:solidFill>
-          <a:ln>
-            <a:noFill/>
-          </a:ln>
-        </p:spPr>
-      </p:sp>
-      <p:sp>
-        <p:nvSpPr>
-          <p:cNvPr id="29" name="Text 22"/>
-          <p:cNvSpPr/>
-          <p:nvPr/>
-        </p:nvSpPr>
-        <p:spPr>
-          <a:xfrm>
-            <a:off x="6287872" y="5396789"/>
-            <a:ext cx="2380412" cy="329184"/>
+          <p:cNvPr id="32" name="Text 25"/>
+          <p:cNvSpPr/>
+          <p:nvPr/>
+        </p:nvSpPr>
+        <p:spPr>
+          <a:xfrm>
+            <a:off x="6333592" y="5396789"/>
+            <a:ext cx="2334692" cy="329184"/>
           </a:xfrm>
           <a:prstGeom prst="rect">
             <a:avLst/>
@@ -29057,7 +29123,7 @@
             <a:r>
               <a:rPr lang="en-US" sz="900" b="1" spc="80" kern="0" dirty="0">
                 <a:solidFill>
-                  <a:srgbClr val="FFFFFF"/>
+                  <a:srgbClr val="1E3457"/>
                 </a:solidFill>
                 <a:latin typeface="맑은 고딕" pitchFamily="34" charset="0"/>
                 <a:ea typeface="맑은 고딕" pitchFamily="34" charset="-122"/>
@@ -29071,7 +29137,7 @@
       </p:sp>
       <p:sp>
         <p:nvSpPr>
-          <p:cNvPr id="30" name="Shape 23"/>
+          <p:cNvPr id="33" name="Shape 26"/>
           <p:cNvSpPr/>
           <p:nvPr/>
         </p:nvSpPr>
@@ -29093,7 +29159,7 @@
       </p:sp>
       <p:sp>
         <p:nvSpPr>
-          <p:cNvPr id="31" name="Text 24"/>
+          <p:cNvPr id="34" name="Text 27"/>
           <p:cNvSpPr/>
           <p:nvPr/>
         </p:nvSpPr>
@@ -29137,7 +29203,7 @@
       </p:sp>
       <p:sp>
         <p:nvSpPr>
-          <p:cNvPr id="32" name="Shape 25"/>
+          <p:cNvPr id="35" name="Shape 28"/>
           <p:cNvSpPr/>
           <p:nvPr/>
         </p:nvSpPr>
@@ -29161,7 +29227,7 @@
       </p:sp>
       <p:pic>
         <p:nvPicPr>
-          <p:cNvPr id="33" name="Image 5" descr="/home/user/onewillco-meeting-2026/runnerpub-proposal/assets/p07_dday.png">    </p:cNvPr>
+          <p:cNvPr id="36" name="Image 5" descr="/home/user/onewillco-meeting-2026/runnerpub-proposal/assets/p07_dday.png">    </p:cNvPr>
           <p:cNvPicPr>
             <a:picLocks noChangeAspect="1"/>
           </p:cNvPicPr>
@@ -29185,7 +29251,7 @@
       </p:pic>
       <p:sp>
         <p:nvSpPr>
-          <p:cNvPr id="34" name="Shape 26"/>
+          <p:cNvPr id="37" name="Shape 29"/>
           <p:cNvSpPr/>
           <p:nvPr/>
         </p:nvSpPr>
@@ -29196,8 +29262,52 @@
           </a:xfrm>
           <a:prstGeom prst="roundRect">
             <a:avLst>
-              <a:gd name="adj" fmla="val 22222"/>
+              <a:gd name="adj" fmla="val 16667"/>
             </a:avLst>
+          </a:prstGeom>
+          <a:solidFill>
+            <a:srgbClr val="E7EFFA"/>
+          </a:solidFill>
+          <a:ln>
+            <a:noFill/>
+          </a:ln>
+        </p:spPr>
+      </p:sp>
+      <p:sp>
+        <p:nvSpPr>
+          <p:cNvPr id="38" name="Shape 30"/>
+          <p:cNvSpPr/>
+          <p:nvPr/>
+        </p:nvSpPr>
+        <p:spPr>
+          <a:xfrm>
+            <a:off x="8979179" y="5396789"/>
+            <a:ext cx="2526716" cy="164592"/>
+          </a:xfrm>
+          <a:prstGeom prst="rect">
+            <a:avLst/>
+          </a:prstGeom>
+          <a:solidFill>
+            <a:srgbClr val="E7EFFA"/>
+          </a:solidFill>
+          <a:ln>
+            <a:noFill/>
+          </a:ln>
+        </p:spPr>
+      </p:sp>
+      <p:sp>
+        <p:nvSpPr>
+          <p:cNvPr id="39" name="Shape 31"/>
+          <p:cNvSpPr/>
+          <p:nvPr/>
+        </p:nvSpPr>
+        <p:spPr>
+          <a:xfrm>
+            <a:off x="8979179" y="5396789"/>
+            <a:ext cx="45720" cy="329184"/>
+          </a:xfrm>
+          <a:prstGeom prst="rect">
+            <a:avLst/>
           </a:prstGeom>
           <a:solidFill>
             <a:srgbClr val="2868F0"/>
@@ -29209,16 +29319,60 @@
       </p:sp>
       <p:sp>
         <p:nvSpPr>
-          <p:cNvPr id="35" name="Shape 27"/>
-          <p:cNvSpPr/>
-          <p:nvPr/>
-        </p:nvSpPr>
-        <p:spPr>
-          <a:xfrm>
-            <a:off x="8979179" y="5396789"/>
-            <a:ext cx="2526716" cy="164592"/>
-          </a:xfrm>
-          <a:prstGeom prst="rect">
+          <p:cNvPr id="40" name="Text 32"/>
+          <p:cNvSpPr/>
+          <p:nvPr/>
+        </p:nvSpPr>
+        <p:spPr>
+          <a:xfrm>
+            <a:off x="9098051" y="5396789"/>
+            <a:ext cx="2334692" cy="329184"/>
+          </a:xfrm>
+          <a:prstGeom prst="rect">
+            <a:avLst/>
+          </a:prstGeom>
+          <a:noFill/>
+          <a:ln>
+            <a:noFill/>
+          </a:ln>
+        </p:spPr>
+        <p:txBody>
+          <a:bodyPr wrap="square" lIns="0" tIns="0" rIns="0" bIns="0" rtlCol="0" anchor="ctr"/>
+          <a:lstStyle/>
+          <a:p>
+            <a:pPr algn="ctr" indent="0" marL="0">
+              <a:lnSpc>
+                <a:spcPts val="1206"/>
+              </a:lnSpc>
+              <a:buNone/>
+            </a:pPr>
+            <a:r>
+              <a:rPr lang="en-US" sz="900" b="1" spc="80" kern="0" dirty="0">
+                <a:solidFill>
+                  <a:srgbClr val="1E3457"/>
+                </a:solidFill>
+                <a:latin typeface="맑은 고딕" pitchFamily="34" charset="0"/>
+                <a:ea typeface="맑은 고딕" pitchFamily="34" charset="-122"/>
+                <a:cs typeface="맑은 고딕" pitchFamily="34" charset="-120"/>
+              </a:rPr>
+              <a:t>정보공개서 D-day 카운트</a:t>
+            </a:r>
+            <a:endParaRPr lang="en-US" sz="900" dirty="0"/>
+          </a:p>
+        </p:txBody>
+      </p:sp>
+      <p:sp>
+        <p:nvSpPr>
+          <p:cNvPr id="41" name="Shape 33"/>
+          <p:cNvSpPr/>
+          <p:nvPr/>
+        </p:nvSpPr>
+        <p:spPr>
+          <a:xfrm>
+            <a:off x="685800" y="5876849"/>
+            <a:ext cx="192024" cy="192024"/>
+          </a:xfrm>
+          <a:prstGeom prst="ellipse">
             <a:avLst/>
           </a:prstGeom>
           <a:solidFill>
@@ -29231,51 +29385,7 @@
       </p:sp>
       <p:sp>
         <p:nvSpPr>
-          <p:cNvPr id="36" name="Text 28"/>
-          <p:cNvSpPr/>
-          <p:nvPr/>
-        </p:nvSpPr>
-        <p:spPr>
-          <a:xfrm>
-            <a:off x="9052331" y="5396789"/>
-            <a:ext cx="2380412" cy="329184"/>
-          </a:xfrm>
-          <a:prstGeom prst="rect">
-            <a:avLst/>
-          </a:prstGeom>
-          <a:noFill/>
-          <a:ln>
-            <a:noFill/>
-          </a:ln>
-        </p:spPr>
-        <p:txBody>
-          <a:bodyPr wrap="square" lIns="0" tIns="0" rIns="0" bIns="0" rtlCol="0" anchor="ctr"/>
-          <a:lstStyle/>
-          <a:p>
-            <a:pPr algn="ctr" indent="0" marL="0">
-              <a:lnSpc>
-                <a:spcPts val="1206"/>
-              </a:lnSpc>
-              <a:buNone/>
-            </a:pPr>
-            <a:r>
-              <a:rPr lang="en-US" sz="900" b="1" spc="80" kern="0" dirty="0">
-                <a:solidFill>
-                  <a:srgbClr val="FFFFFF"/>
-                </a:solidFill>
-                <a:latin typeface="맑은 고딕" pitchFamily="34" charset="0"/>
-                <a:ea typeface="맑은 고딕" pitchFamily="34" charset="-122"/>
-                <a:cs typeface="맑은 고딕" pitchFamily="34" charset="-120"/>
-              </a:rPr>
-              <a:t>정보공개서 D-day 카운트</a:t>
-            </a:r>
-            <a:endParaRPr lang="en-US" sz="900" dirty="0"/>
-          </a:p>
-        </p:txBody>
-      </p:sp>
-      <p:sp>
-        <p:nvSpPr>
-          <p:cNvPr id="37" name="Shape 29"/>
+          <p:cNvPr id="42" name="Text 34"/>
           <p:cNvSpPr/>
           <p:nvPr/>
         </p:nvSpPr>
@@ -29284,28 +29394,6 @@
             <a:off x="685800" y="5876849"/>
             <a:ext cx="192024" cy="192024"/>
           </a:xfrm>
-          <a:prstGeom prst="ellipse">
-            <a:avLst/>
-          </a:prstGeom>
-          <a:solidFill>
-            <a:srgbClr val="2868F0"/>
-          </a:solidFill>
-          <a:ln>
-            <a:noFill/>
-          </a:ln>
-        </p:spPr>
-      </p:sp>
-      <p:sp>
-        <p:nvSpPr>
-          <p:cNvPr id="38" name="Text 30"/>
-          <p:cNvSpPr/>
-          <p:nvPr/>
-        </p:nvSpPr>
-        <p:spPr>
-          <a:xfrm>
-            <a:off x="685800" y="5876849"/>
-            <a:ext cx="192024" cy="192024"/>
-          </a:xfrm>
           <a:prstGeom prst="rect">
             <a:avLst/>
           </a:prstGeom>
@@ -29338,7 +29426,7 @@
       </p:sp>
       <p:sp>
         <p:nvSpPr>
-          <p:cNvPr id="39" name="Text 31"/>
+          <p:cNvPr id="43" name="Text 35"/>
           <p:cNvSpPr/>
           <p:nvPr/>
         </p:nvSpPr>
@@ -29382,7 +29470,7 @@
       </p:sp>
       <p:sp>
         <p:nvSpPr>
-          <p:cNvPr id="40" name="Shape 32"/>
+          <p:cNvPr id="44" name="Shape 36"/>
           <p:cNvSpPr/>
           <p:nvPr/>
         </p:nvSpPr>
@@ -29404,7 +29492,7 @@
       </p:sp>
       <p:sp>
         <p:nvSpPr>
-          <p:cNvPr id="41" name="Shape 33"/>
+          <p:cNvPr id="45" name="Shape 37"/>
           <p:cNvSpPr/>
           <p:nvPr/>
         </p:nvSpPr>
@@ -29428,7 +29516,7 @@
       </p:sp>
       <p:sp>
         <p:nvSpPr>
-          <p:cNvPr id="42" name="Text 34"/>
+          <p:cNvPr id="46" name="Text 38"/>
           <p:cNvSpPr/>
           <p:nvPr/>
         </p:nvSpPr>
@@ -29472,7 +29560,7 @@
       </p:sp>
       <p:sp>
         <p:nvSpPr>
-          <p:cNvPr id="43" name="Shape 35"/>
+          <p:cNvPr id="47" name="Shape 39"/>
           <p:cNvSpPr/>
           <p:nvPr/>
         </p:nvSpPr>
@@ -29496,7 +29584,7 @@
       </p:sp>
       <p:sp>
         <p:nvSpPr>
-          <p:cNvPr id="44" name="Text 36"/>
+          <p:cNvPr id="48" name="Text 40"/>
           <p:cNvSpPr/>
           <p:nvPr/>
         </p:nvSpPr>
@@ -29540,7 +29628,7 @@
       </p:sp>
       <p:sp>
         <p:nvSpPr>
-          <p:cNvPr id="45" name="Shape 37"/>
+          <p:cNvPr id="49" name="Shape 41"/>
           <p:cNvSpPr/>
           <p:nvPr/>
         </p:nvSpPr>
@@ -29564,7 +29652,7 @@
       </p:sp>
       <p:sp>
         <p:nvSpPr>
-          <p:cNvPr id="46" name="Text 38"/>
+          <p:cNvPr id="50" name="Text 42"/>
           <p:cNvSpPr/>
           <p:nvPr/>
         </p:nvSpPr>
@@ -29608,7 +29696,7 @@
       </p:sp>
       <p:sp>
         <p:nvSpPr>
-          <p:cNvPr id="47" name="Shape 39"/>
+          <p:cNvPr id="51" name="Shape 43"/>
           <p:cNvSpPr/>
           <p:nvPr/>
         </p:nvSpPr>
@@ -29632,7 +29720,7 @@
       </p:sp>
       <p:sp>
         <p:nvSpPr>
-          <p:cNvPr id="48" name="Text 40"/>
+          <p:cNvPr id="52" name="Text 44"/>
           <p:cNvSpPr/>
           <p:nvPr/>
         </p:nvSpPr>
@@ -29676,7 +29764,7 @@
       </p:sp>
       <p:sp>
         <p:nvSpPr>
-          <p:cNvPr id="49" name="Shape 41"/>
+          <p:cNvPr id="53" name="Shape 45"/>
           <p:cNvSpPr/>
           <p:nvPr/>
         </p:nvSpPr>
@@ -29700,7 +29788,7 @@
       </p:sp>
       <p:sp>
         <p:nvSpPr>
-          <p:cNvPr id="50" name="Text 42"/>
+          <p:cNvPr id="54" name="Text 46"/>
           <p:cNvSpPr/>
           <p:nvPr/>
         </p:nvSpPr>
@@ -29744,7 +29832,7 @@
       </p:sp>
       <p:sp>
         <p:nvSpPr>
-          <p:cNvPr id="51" name="Shape 43"/>
+          <p:cNvPr id="55" name="Shape 47"/>
           <p:cNvSpPr/>
           <p:nvPr/>
         </p:nvSpPr>
@@ -29768,7 +29856,7 @@
       </p:sp>
       <p:sp>
         <p:nvSpPr>
-          <p:cNvPr id="52" name="Text 44"/>
+          <p:cNvPr id="56" name="Text 48"/>
           <p:cNvSpPr/>
           <p:nvPr/>
         </p:nvSpPr>

--- a/runnerpub-proposal/runnerpub_proposal_naeilsajang.pptx
+++ b/runnerpub-proposal/runnerpub_proposal_naeilsajang.pptx
@@ -4949,7 +4949,7 @@
                 <a:ea typeface="맑은 고딕" pitchFamily="34" charset="-122"/>
                 <a:cs typeface="맑은 고딕" pitchFamily="34" charset="-120"/>
               </a:rPr>
-              <a:t>상권 · 손익 직접 산출</a:t>
+              <a:t>상권 · 손익 산출 (본사 승인 서식)</a:t>
             </a:r>
             <a:endParaRPr lang="en-US" sz="1150" dirty="0"/>
           </a:p>
@@ -8791,7 +8791,27 @@
                 <a:ea typeface="맑은 고딕" pitchFamily="34" charset="-122"/>
                 <a:cs typeface="맑은 고딕" pitchFamily="34" charset="-120"/>
               </a:rPr>
-              <a:t>개설 기본비용 1,600만원 전액 할인 프로모션은 본사 정책 그대로 유지 · 성공보수는 가맹비 1,500만원 범위 안에서만 정산</a:t>
+              <a:t>개설 기본비용 1,600만원 전액 할인 프로모션은 본사 정책 그대로 유지</a:t>
+            </a:r>
+            <a:endParaRPr lang="en-US" sz="1000" dirty="0"/>
+          </a:p>
+          <a:p>
+            <a:pPr algn="l" indent="0" marL="0">
+              <a:lnSpc>
+                <a:spcPts val="1540"/>
+              </a:lnSpc>
+              <a:buNone/>
+            </a:pPr>
+            <a:r>
+              <a:rPr lang="en-US" sz="1000" dirty="0">
+                <a:solidFill>
+                  <a:srgbClr val="1E3457"/>
+                </a:solidFill>
+                <a:latin typeface="맑은 고딕" pitchFamily="34" charset="0"/>
+                <a:ea typeface="맑은 고딕" pitchFamily="34" charset="-122"/>
+                <a:cs typeface="맑은 고딕" pitchFamily="34" charset="-120"/>
+              </a:rPr>
+              <a:t>· 성공보수는 가맹비 1,500만원 범위 안에서만 정산</a:t>
             </a:r>
             <a:endParaRPr lang="en-US" sz="1000" dirty="0"/>
           </a:p>
@@ -8942,7 +8962,7 @@
                 <a:ea typeface="맑은 고딕" pitchFamily="34" charset="-122"/>
                 <a:cs typeface="맑은 고딕" pitchFamily="34" charset="-120"/>
               </a:rPr>
-              <a:t>1개점 누적 본사 순수취 — 성공보수 차감 후</a:t>
+              <a:t>1개점 누적 본사 순수취 — 막대 100% = 5,900만원</a:t>
             </a:r>
             <a:endParaRPr lang="en-US" sz="1250" dirty="0"/>
           </a:p>
@@ -9031,7 +9051,7 @@
         <p:spPr>
           <a:xfrm>
             <a:off x="6931152" y="2935224"/>
-            <a:ext cx="1213037" cy="164592"/>
+            <a:ext cx="1091840" cy="164592"/>
           </a:xfrm>
           <a:prstGeom prst="rect">
             <a:avLst/>
@@ -9046,8 +9066,8 @@
         </p:nvSpPr>
         <p:spPr>
           <a:xfrm>
-            <a:off x="10116007" y="2889504"/>
-            <a:ext cx="1389888" cy="256032"/>
+            <a:off x="9805111" y="2889504"/>
+            <a:ext cx="1700784" cy="256032"/>
           </a:xfrm>
           <a:prstGeom prst="rect">
             <a:avLst/>
@@ -9143,7 +9163,7 @@
         <p:spPr>
           <a:xfrm>
             <a:off x="6931152" y="3374136"/>
-            <a:ext cx="2162370" cy="164592"/>
+            <a:ext cx="1946324" cy="164592"/>
           </a:xfrm>
           <a:prstGeom prst="rect">
             <a:avLst/>
@@ -9158,8 +9178,8 @@
         </p:nvSpPr>
         <p:spPr>
           <a:xfrm>
-            <a:off x="10116007" y="3328416"/>
-            <a:ext cx="1389888" cy="256032"/>
+            <a:off x="9805111" y="3328416"/>
+            <a:ext cx="1700784" cy="256032"/>
           </a:xfrm>
           <a:prstGeom prst="rect">
             <a:avLst/>
@@ -9255,7 +9275,7 @@
         <p:spPr>
           <a:xfrm>
             <a:off x="6931152" y="3813048"/>
-            <a:ext cx="3111703" cy="164592"/>
+            <a:ext cx="2800807" cy="164592"/>
           </a:xfrm>
           <a:prstGeom prst="rect">
             <a:avLst/>
@@ -9270,8 +9290,8 @@
         </p:nvSpPr>
         <p:spPr>
           <a:xfrm>
-            <a:off x="10116007" y="3767328"/>
-            <a:ext cx="1389888" cy="256032"/>
+            <a:off x="9805111" y="3767328"/>
+            <a:ext cx="1700784" cy="256032"/>
           </a:xfrm>
           <a:prstGeom prst="rect">
             <a:avLst/>
@@ -9407,7 +9427,7 @@
                 <a:ea typeface="맑은 고딕" pitchFamily="34" charset="-122"/>
                 <a:cs typeface="맑은 고딕" pitchFamily="34" charset="-120"/>
               </a:rPr>
-              <a:t>출점 규모별 36개월 누적 순수취</a:t>
+              <a:t>출점 규모별 36개월 누적 — 막대 100% = 5억 9,000만원</a:t>
             </a:r>
             <a:endParaRPr lang="en-US" sz="1250" dirty="0"/>
           </a:p>
@@ -11590,7 +11610,7 @@
                 <a:ea typeface="맑은 고딕" pitchFamily="34" charset="-122"/>
                 <a:cs typeface="맑은 고딕" pitchFamily="34" charset="-120"/>
               </a:rPr>
-              <a:t>예상매출 진술</a:t>
+              <a:t>예상매출 · 손익 자료</a:t>
             </a:r>
             <a:endParaRPr lang="en-US" sz="1150" dirty="0"/>
           </a:p>
@@ -11634,7 +11654,7 @@
                 <a:ea typeface="맑은 고딕" pitchFamily="34" charset="-122"/>
                 <a:cs typeface="맑은 고딕" pitchFamily="34" charset="-120"/>
               </a:rPr>
-              <a:t>구두 약속 금지 · 본사 승인 문구만 사용</a:t>
+              <a:t>본사 승인 서식 서면만 사용 · 구두 약속 금지 · 산출근거 본사 제출</a:t>
             </a:r>
             <a:endParaRPr lang="en-US" sz="1150" dirty="0"/>
           </a:p>
@@ -12495,7 +12515,7 @@
                 <a:ea typeface="맑은 고딕" pitchFamily="34" charset="-122"/>
                 <a:cs typeface="맑은 고딕" pitchFamily="34" charset="-120"/>
               </a:rPr>
-              <a:t>본사가 정하시는 항목</a:t>
+              <a:t>파일럿 운영 조건</a:t>
             </a:r>
             <a:endParaRPr lang="en-US" sz="900" dirty="0"/>
           </a:p>
@@ -14502,7 +14522,7 @@
                 <a:ea typeface="맑은 고딕" pitchFamily="34" charset="-122"/>
                 <a:cs typeface="맑은 고딕" pitchFamily="34" charset="-120"/>
               </a:rPr>
-              <a:t>아래 다섯 가지만 정해 주시면 그대로 따릅니다.</a:t>
+              <a:t>착수 전 아래 다섯 가지만 정해 주시면, 파일럿 세부 운영 조건 8항목은 별지로 확정합니다.</a:t>
             </a:r>
             <a:endParaRPr lang="en-US" sz="1300" dirty="0"/>
           </a:p>
@@ -30992,7 +31012,7 @@
                 <a:ea typeface="맑은 고딕" pitchFamily="34" charset="-122"/>
                 <a:cs typeface="맑은 고딕" pitchFamily="34" charset="-120"/>
               </a:rPr>
-              <a:t>승인 문구 사용 · 점주 승인</a:t>
+              <a:t>자료 서식 · 산출근거 · 점주 승인</a:t>
             </a:r>
             <a:endParaRPr lang="en-US" sz="1050" dirty="0"/>
           </a:p>

--- a/runnerpub-proposal/runnerpub_proposal_naeilsajang.pptx
+++ b/runnerpub-proposal/runnerpub_proposal_naeilsajang.pptx
@@ -2337,7 +2337,7 @@
                 <a:ea typeface="맑은 고딕" pitchFamily="34" charset="-122"/>
                 <a:cs typeface="맑은 고딕" pitchFamily="34" charset="-120"/>
               </a:rPr>
-              <a:t>계약이 성사된 건에만 비용이 발생합니다.</a:t>
+              <a:t>계약이 성사된 건에만 비용이 발생하며, 파일럿으로 검증받고 시작합니다.</a:t>
             </a:r>
             <a:endParaRPr lang="en-US" sz="1150" dirty="0"/>
           </a:p>
@@ -4707,7 +4707,7 @@
                 <a:ea typeface="맑은 고딕" pitchFamily="34" charset="-122"/>
                 <a:cs typeface="맑은 고딕" pitchFamily="34" charset="-120"/>
               </a:rPr>
-              <a:t>대행사 재량</a:t>
+              <a:t>대행사별 계약에 따름</a:t>
             </a:r>
             <a:endParaRPr lang="en-US" sz="1150" dirty="0"/>
           </a:p>
@@ -5059,7 +5059,7 @@
                 <a:ea typeface="맑은 고딕" pitchFamily="34" charset="-122"/>
                 <a:cs typeface="맑은 고딕" pitchFamily="34" charset="-120"/>
               </a:rPr>
-              <a:t>담당자 역량</a:t>
+              <a:t>담당자 개별 관리</a:t>
             </a:r>
             <a:endParaRPr lang="en-US" sz="1150" dirty="0"/>
           </a:p>
@@ -5103,7 +5103,7 @@
                 <a:ea typeface="맑은 고딕" pitchFamily="34" charset="-122"/>
                 <a:cs typeface="맑은 고딕" pitchFamily="34" charset="-120"/>
               </a:rPr>
-              <a:t>대행사 재량</a:t>
+              <a:t>대행사별 계약에 따름</a:t>
             </a:r>
             <a:endParaRPr lang="en-US" sz="1150" dirty="0"/>
           </a:p>
@@ -5301,7 +5301,7 @@
                 <a:ea typeface="맑은 고딕" pitchFamily="34" charset="-122"/>
                 <a:cs typeface="맑은 고딕" pitchFamily="34" charset="-120"/>
               </a:rPr>
-              <a:t>관리 인력 필요</a:t>
+              <a:t>본사 관리 담당 배정</a:t>
             </a:r>
             <a:endParaRPr lang="en-US" sz="1150" dirty="0"/>
           </a:p>
@@ -7050,11 +7050,11 @@
         <p:spPr>
           <a:xfrm>
             <a:off x="6775704" y="2798064"/>
-            <a:ext cx="4730191" cy="548640"/>
+            <a:ext cx="4730191" cy="640080"/>
           </a:xfrm>
           <a:prstGeom prst="roundRect">
             <a:avLst>
-              <a:gd name="adj" fmla="val 10000"/>
+              <a:gd name="adj" fmla="val 8571"/>
             </a:avLst>
           </a:prstGeom>
           <a:solidFill>
@@ -7118,7 +7118,7 @@
         <p:spPr>
           <a:xfrm>
             <a:off x="6940296" y="3035808"/>
-            <a:ext cx="4401007" cy="292608"/>
+            <a:ext cx="4401007" cy="384048"/>
           </a:xfrm>
           <a:prstGeom prst="rect">
             <a:avLst/>
@@ -7147,10 +7147,30 @@
                 <a:ea typeface="맑은 고딕" pitchFamily="34" charset="-122"/>
                 <a:cs typeface="맑은 고딕" pitchFamily="34" charset="-120"/>
               </a:rPr>
-              <a:t>할인액 전액 내일사장 성공보수에서 차감 · 본사 가맹비 수취 1,500만원 불변</a:t>
+              <a:t>할인은 건별 본사 승인 범위 안에서만 제시</a:t>
             </a:r>
             <a:endParaRPr lang="en-US" sz="930" dirty="0"/>
           </a:p>
+          <a:p>
+            <a:pPr algn="l" indent="0" marL="0">
+              <a:lnSpc>
+                <a:spcPts val="1430"/>
+              </a:lnSpc>
+              <a:buNone/>
+            </a:pPr>
+            <a:r>
+              <a:rPr lang="en-US" sz="930" dirty="0">
+                <a:solidFill>
+                  <a:srgbClr val="1E3457"/>
+                </a:solidFill>
+                <a:latin typeface="맑은 고딕" pitchFamily="34" charset="0"/>
+                <a:ea typeface="맑은 고딕" pitchFamily="34" charset="-122"/>
+                <a:cs typeface="맑은 고딕" pitchFamily="34" charset="-120"/>
+              </a:rPr>
+              <a:t>승인 할인액 전액 내일사장 성공보수 차감 · 본사 수취 1,500만원 불변</a:t>
+            </a:r>
+            <a:endParaRPr lang="en-US" sz="930" dirty="0"/>
+          </a:p>
         </p:txBody>
       </p:sp>
       <p:sp>
@@ -7161,12 +7181,12 @@
         </p:nvSpPr>
         <p:spPr>
           <a:xfrm>
-            <a:off x="6775704" y="3401568"/>
-            <a:ext cx="4730191" cy="548640"/>
+            <a:off x="6775704" y="3493008"/>
+            <a:ext cx="4730191" cy="640080"/>
           </a:xfrm>
           <a:prstGeom prst="roundRect">
             <a:avLst>
-              <a:gd name="adj" fmla="val 10000"/>
+              <a:gd name="adj" fmla="val 8571"/>
             </a:avLst>
           </a:prstGeom>
           <a:solidFill>
@@ -7185,7 +7205,7 @@
         </p:nvSpPr>
         <p:spPr>
           <a:xfrm>
-            <a:off x="6940296" y="3438144"/>
+            <a:off x="6940296" y="3529584"/>
             <a:ext cx="4401007" cy="201168"/>
           </a:xfrm>
           <a:prstGeom prst="rect">
@@ -7229,8 +7249,8 @@
         </p:nvSpPr>
         <p:spPr>
           <a:xfrm>
-            <a:off x="6940296" y="3639312"/>
-            <a:ext cx="4401007" cy="292608"/>
+            <a:off x="6940296" y="3730752"/>
+            <a:ext cx="4401007" cy="384048"/>
           </a:xfrm>
           <a:prstGeom prst="rect">
             <a:avLst/>
@@ -7273,7 +7293,7 @@
         </p:nvSpPr>
         <p:spPr>
           <a:xfrm>
-            <a:off x="6775704" y="4005072"/>
+            <a:off x="6775704" y="4206240"/>
             <a:ext cx="4730191" cy="201168"/>
           </a:xfrm>
           <a:prstGeom prst="rect">
@@ -7303,7 +7323,7 @@
                 <a:ea typeface="맑은 고딕" pitchFamily="34" charset="-122"/>
                 <a:cs typeface="맑은 고딕" pitchFamily="34" charset="-120"/>
               </a:rPr>
-              <a:t>※ 할인 한도는 건별 본사 승인 후 확정 · 내일사장 단독 조건 제시 없음</a:t>
+              <a:t>※ 사전 승인 없는 할인 제시 건은 성공보수 미청구</a:t>
             </a:r>
             <a:endParaRPr lang="en-US" sz="850" dirty="0"/>
           </a:p>
@@ -7317,7 +7337,7 @@
         </p:nvSpPr>
         <p:spPr>
           <a:xfrm>
-            <a:off x="6775704" y="4338828"/>
+            <a:off x="6775704" y="4448556"/>
             <a:ext cx="192024" cy="192024"/>
           </a:xfrm>
           <a:prstGeom prst="ellipse">
@@ -7339,7 +7359,7 @@
         </p:nvSpPr>
         <p:spPr>
           <a:xfrm>
-            <a:off x="6775704" y="4338828"/>
+            <a:off x="6775704" y="4448556"/>
             <a:ext cx="192024" cy="192024"/>
           </a:xfrm>
           <a:prstGeom prst="rect">
@@ -7380,7 +7400,7 @@
         </p:nvSpPr>
         <p:spPr>
           <a:xfrm>
-            <a:off x="7095744" y="4279392"/>
+            <a:off x="7095744" y="4389120"/>
             <a:ext cx="4355287" cy="310896"/>
           </a:xfrm>
           <a:prstGeom prst="rect">
@@ -7424,7 +7444,7 @@
         </p:nvSpPr>
         <p:spPr>
           <a:xfrm>
-            <a:off x="6775704" y="4579315"/>
+            <a:off x="6775704" y="4689043"/>
             <a:ext cx="4730191" cy="7315"/>
           </a:xfrm>
           <a:prstGeom prst="rect">
@@ -7446,7 +7466,7 @@
         </p:nvSpPr>
         <p:spPr>
           <a:xfrm>
-            <a:off x="6775704" y="4700016"/>
+            <a:off x="6775704" y="4791456"/>
             <a:ext cx="4730191" cy="438912"/>
           </a:xfrm>
           <a:prstGeom prst="roundRect">
@@ -7470,7 +7490,7 @@
         </p:nvSpPr>
         <p:spPr>
           <a:xfrm>
-            <a:off x="6922008" y="4800600"/>
+            <a:off x="6922008" y="4892040"/>
             <a:ext cx="237744" cy="237744"/>
           </a:xfrm>
           <a:prstGeom prst="ellipse">
@@ -7492,7 +7512,7 @@
         </p:nvSpPr>
         <p:spPr>
           <a:xfrm>
-            <a:off x="6922008" y="4800600"/>
+            <a:off x="6922008" y="4892040"/>
             <a:ext cx="237744" cy="237744"/>
           </a:xfrm>
           <a:prstGeom prst="rect">
@@ -7533,7 +7553,7 @@
         </p:nvSpPr>
         <p:spPr>
           <a:xfrm>
-            <a:off x="7269480" y="4718304"/>
+            <a:off x="7269480" y="4809744"/>
             <a:ext cx="4071823" cy="219456"/>
           </a:xfrm>
           <a:prstGeom prst="rect">
@@ -7577,7 +7597,7 @@
         </p:nvSpPr>
         <p:spPr>
           <a:xfrm>
-            <a:off x="7269480" y="4919472"/>
+            <a:off x="7269480" y="5010912"/>
             <a:ext cx="4071823" cy="201168"/>
           </a:xfrm>
           <a:prstGeom prst="rect">
@@ -7621,7 +7641,7 @@
         </p:nvSpPr>
         <p:spPr>
           <a:xfrm>
-            <a:off x="6775704" y="5193792"/>
+            <a:off x="6775704" y="5248656"/>
             <a:ext cx="4730191" cy="438912"/>
           </a:xfrm>
           <a:prstGeom prst="roundRect">
@@ -7645,7 +7665,7 @@
         </p:nvSpPr>
         <p:spPr>
           <a:xfrm>
-            <a:off x="6922008" y="5294376"/>
+            <a:off x="6922008" y="5349240"/>
             <a:ext cx="237744" cy="237744"/>
           </a:xfrm>
           <a:prstGeom prst="ellipse">
@@ -7667,7 +7687,7 @@
         </p:nvSpPr>
         <p:spPr>
           <a:xfrm>
-            <a:off x="6922008" y="5294376"/>
+            <a:off x="6922008" y="5349240"/>
             <a:ext cx="237744" cy="237744"/>
           </a:xfrm>
           <a:prstGeom prst="rect">
@@ -7708,7 +7728,7 @@
         </p:nvSpPr>
         <p:spPr>
           <a:xfrm>
-            <a:off x="7269480" y="5212080"/>
+            <a:off x="7269480" y="5266944"/>
             <a:ext cx="4071823" cy="219456"/>
           </a:xfrm>
           <a:prstGeom prst="rect">
@@ -7752,7 +7772,7 @@
         </p:nvSpPr>
         <p:spPr>
           <a:xfrm>
-            <a:off x="7269480" y="5413248"/>
+            <a:off x="7269480" y="5468112"/>
             <a:ext cx="4071823" cy="201168"/>
           </a:xfrm>
           <a:prstGeom prst="rect">
@@ -7796,7 +7816,7 @@
         </p:nvSpPr>
         <p:spPr>
           <a:xfrm>
-            <a:off x="6775704" y="5687568"/>
+            <a:off x="6775704" y="5705856"/>
             <a:ext cx="4730191" cy="438912"/>
           </a:xfrm>
           <a:prstGeom prst="roundRect">
@@ -7820,7 +7840,7 @@
         </p:nvSpPr>
         <p:spPr>
           <a:xfrm>
-            <a:off x="6922008" y="5788152"/>
+            <a:off x="6922008" y="5806440"/>
             <a:ext cx="237744" cy="237744"/>
           </a:xfrm>
           <a:prstGeom prst="ellipse">
@@ -7842,7 +7862,7 @@
         </p:nvSpPr>
         <p:spPr>
           <a:xfrm>
-            <a:off x="6922008" y="5788152"/>
+            <a:off x="6922008" y="5806440"/>
             <a:ext cx="237744" cy="237744"/>
           </a:xfrm>
           <a:prstGeom prst="rect">
@@ -7883,7 +7903,7 @@
         </p:nvSpPr>
         <p:spPr>
           <a:xfrm>
-            <a:off x="7269480" y="5705856"/>
+            <a:off x="7269480" y="5724144"/>
             <a:ext cx="4071823" cy="219456"/>
           </a:xfrm>
           <a:prstGeom prst="rect">
@@ -7927,7 +7947,7 @@
         </p:nvSpPr>
         <p:spPr>
           <a:xfrm>
-            <a:off x="7269480" y="5907024"/>
+            <a:off x="7269480" y="5925312"/>
             <a:ext cx="4071823" cy="201168"/>
           </a:xfrm>
           <a:prstGeom prst="rect">
@@ -8648,7 +8668,7 @@
                 <a:ea typeface="맑은 고딕" pitchFamily="34" charset="-122"/>
                 <a:cs typeface="맑은 고딕" pitchFamily="34" charset="-120"/>
               </a:rPr>
-              <a:t>계약 시점 본사 순수취</a:t>
+              <a:t>계약 시점 본사 순수취 · 착수금 · 월 고정비 · 광고비 0원</a:t>
             </a:r>
             <a:endParaRPr lang="en-US" sz="900" dirty="0"/>
           </a:p>
@@ -8855,7 +8875,7 @@
                 <a:ea typeface="맑은 고딕" pitchFamily="34" charset="-122"/>
                 <a:cs typeface="맑은 고딕" pitchFamily="34" charset="-120"/>
               </a:rPr>
-              <a:t>※ 러너펍 공개 가맹 안내 기준 시뮬레이션 · 실제 조건은 본사 정책에 따름</a:t>
+              <a:t>※ 가맹비 기준 순수취 · 개설 실비는 본사 산정 기준 · 러너펍 공개 안내 기준 시뮬레이션</a:t>
             </a:r>
             <a:endParaRPr lang="en-US" sz="850" dirty="0"/>
           </a:p>
@@ -9575,7 +9595,7 @@
         </p:nvSpPr>
         <p:spPr>
           <a:xfrm>
-            <a:off x="5998464" y="5157216"/>
+            <a:off x="5998464" y="5193792"/>
             <a:ext cx="877824" cy="256032"/>
           </a:xfrm>
           <a:prstGeom prst="rect">
@@ -9627,7 +9647,7 @@
         </p:blipFill>
         <p:spPr>
           <a:xfrm>
-            <a:off x="6931152" y="5202936"/>
+            <a:off x="6931152" y="5239512"/>
             <a:ext cx="1400404" cy="164592"/>
           </a:xfrm>
           <a:prstGeom prst="rect">
@@ -9643,7 +9663,7 @@
         </p:nvSpPr>
         <p:spPr>
           <a:xfrm>
-            <a:off x="9805111" y="5157216"/>
+            <a:off x="9805111" y="5193792"/>
             <a:ext cx="1700784" cy="256032"/>
           </a:xfrm>
           <a:prstGeom prst="rect">
@@ -9687,7 +9707,7 @@
         </p:nvSpPr>
         <p:spPr>
           <a:xfrm>
-            <a:off x="5998464" y="5559552"/>
+            <a:off x="5998464" y="5632704"/>
             <a:ext cx="877824" cy="256032"/>
           </a:xfrm>
           <a:prstGeom prst="rect">
@@ -9739,7 +9759,7 @@
         </p:blipFill>
         <p:spPr>
           <a:xfrm>
-            <a:off x="6931152" y="5605272"/>
+            <a:off x="6931152" y="5678424"/>
             <a:ext cx="2800807" cy="164592"/>
           </a:xfrm>
           <a:prstGeom prst="rect">
@@ -9755,7 +9775,7 @@
         </p:nvSpPr>
         <p:spPr>
           <a:xfrm>
-            <a:off x="9805111" y="5559552"/>
+            <a:off x="9805111" y="5632704"/>
             <a:ext cx="1700784" cy="256032"/>
           </a:xfrm>
           <a:prstGeom prst="rect">
@@ -11126,7 +11146,7 @@
                 <a:ea typeface="맑은 고딕" pitchFamily="34" charset="-122"/>
                 <a:cs typeface="맑은 고딕" pitchFamily="34" charset="-120"/>
               </a:rPr>
-              <a:t>항목별 준법 기준</a:t>
+              <a:t>위험과 차단 장치</a:t>
             </a:r>
             <a:endParaRPr lang="en-US" sz="1250" dirty="0"/>
           </a:p>
@@ -11251,7 +11271,7 @@
         <p:spPr>
           <a:xfrm>
             <a:off x="685800" y="4114800"/>
-            <a:ext cx="3035808" cy="219456"/>
+            <a:ext cx="3017520" cy="219456"/>
           </a:xfrm>
           <a:prstGeom prst="rect">
             <a:avLst/>
@@ -11280,7 +11300,7 @@
                 <a:ea typeface="맑은 고딕" pitchFamily="34" charset="-122"/>
                 <a:cs typeface="맑은 고딕" pitchFamily="34" charset="-120"/>
               </a:rPr>
-              <a:t>항목</a:t>
+              <a:t>위험</a:t>
             </a:r>
             <a:endParaRPr lang="en-US" sz="900" dirty="0"/>
           </a:p>
@@ -11294,8 +11314,8 @@
         </p:nvSpPr>
         <p:spPr>
           <a:xfrm>
-            <a:off x="3721608" y="4114800"/>
-            <a:ext cx="7784287" cy="219456"/>
+            <a:off x="3703320" y="4114800"/>
+            <a:ext cx="4206240" cy="219456"/>
           </a:xfrm>
           <a:prstGeom prst="rect">
             <a:avLst/>
@@ -11324,7 +11344,7 @@
                 <a:ea typeface="맑은 고딕" pitchFamily="34" charset="-122"/>
                 <a:cs typeface="맑은 고딕" pitchFamily="34" charset="-120"/>
               </a:rPr>
-              <a:t>기준</a:t>
+              <a:t>차단 장치</a:t>
             </a:r>
             <a:endParaRPr lang="en-US" sz="900" dirty="0"/>
           </a:p>
@@ -11332,7 +11352,51 @@
       </p:sp>
       <p:sp>
         <p:nvSpPr>
-          <p:cNvPr id="45" name="Shape 39"/>
+          <p:cNvPr id="45" name="Text 39"/>
+          <p:cNvSpPr/>
+          <p:nvPr/>
+        </p:nvSpPr>
+        <p:spPr>
+          <a:xfrm>
+            <a:off x="7909560" y="4114800"/>
+            <a:ext cx="3596335" cy="219456"/>
+          </a:xfrm>
+          <a:prstGeom prst="rect">
+            <a:avLst/>
+          </a:prstGeom>
+          <a:noFill/>
+          <a:ln>
+            <a:noFill/>
+          </a:ln>
+        </p:spPr>
+        <p:txBody>
+          <a:bodyPr wrap="square" lIns="0" tIns="0" rIns="0" bIns="0" rtlCol="0" anchor="ctr"/>
+          <a:lstStyle/>
+          <a:p>
+            <a:pPr algn="l" indent="0" marL="0">
+              <a:lnSpc>
+                <a:spcPts val="1206"/>
+              </a:lnSpc>
+              <a:buNone/>
+            </a:pPr>
+            <a:r>
+              <a:rPr lang="en-US" sz="900" b="1" spc="80" kern="0" dirty="0">
+                <a:solidFill>
+                  <a:srgbClr val="5C687F"/>
+                </a:solidFill>
+                <a:latin typeface="맑은 고딕" pitchFamily="34" charset="0"/>
+                <a:ea typeface="맑은 고딕" pitchFamily="34" charset="-122"/>
+                <a:cs typeface="맑은 고딕" pitchFamily="34" charset="-120"/>
+              </a:rPr>
+              <a:t>본사 확인 방법</a:t>
+            </a:r>
+            <a:endParaRPr lang="en-US" sz="900" dirty="0"/>
+          </a:p>
+        </p:txBody>
+      </p:sp>
+      <p:sp>
+        <p:nvSpPr>
+          <p:cNvPr id="46" name="Shape 40"/>
           <p:cNvSpPr/>
           <p:nvPr/>
         </p:nvSpPr>
@@ -11354,14 +11418,14 @@
       </p:sp>
       <p:sp>
         <p:nvSpPr>
-          <p:cNvPr id="46" name="Text 40"/>
+          <p:cNvPr id="47" name="Text 41"/>
           <p:cNvSpPr/>
           <p:nvPr/>
         </p:nvSpPr>
         <p:spPr>
           <a:xfrm>
             <a:off x="685800" y="4434840"/>
-            <a:ext cx="2889504" cy="205740"/>
+            <a:ext cx="2871216" cy="205740"/>
           </a:xfrm>
           <a:prstGeom prst="rect">
             <a:avLst/>
@@ -11382,7 +11446,7 @@
               <a:buNone/>
             </a:pPr>
             <a:r>
-              <a:rPr lang="en-US" sz="1150" b="1" dirty="0">
+              <a:rPr lang="en-US" sz="950" b="1" dirty="0">
                 <a:solidFill>
                   <a:srgbClr val="1E3457"/>
                 </a:solidFill>
@@ -11390,22 +11454,22 @@
                 <a:ea typeface="맑은 고딕" pitchFamily="34" charset="-122"/>
                 <a:cs typeface="맑은 고딕" pitchFamily="34" charset="-120"/>
               </a:rPr>
-              <a:t>정보공개서 · 계약서</a:t>
-            </a:r>
-            <a:endParaRPr lang="en-US" sz="1150" dirty="0"/>
-          </a:p>
-        </p:txBody>
-      </p:sp>
-      <p:sp>
-        <p:nvSpPr>
-          <p:cNvPr id="47" name="Text 41"/>
-          <p:cNvSpPr/>
-          <p:nvPr/>
-        </p:nvSpPr>
-        <p:spPr>
-          <a:xfrm>
-            <a:off x="3721608" y="4434840"/>
-            <a:ext cx="7637983" cy="205740"/>
+              <a:t>예상매출 과장 안내</a:t>
+            </a:r>
+            <a:endParaRPr lang="en-US" sz="950" dirty="0"/>
+          </a:p>
+        </p:txBody>
+      </p:sp>
+      <p:sp>
+        <p:nvSpPr>
+          <p:cNvPr id="48" name="Text 42"/>
+          <p:cNvSpPr/>
+          <p:nvPr/>
+        </p:nvSpPr>
+        <p:spPr>
+          <a:xfrm>
+            <a:off x="3703320" y="4434840"/>
+            <a:ext cx="4059936" cy="205740"/>
           </a:xfrm>
           <a:prstGeom prst="rect">
             <a:avLst/>
@@ -11426,7 +11490,7 @@
               <a:buNone/>
             </a:pPr>
             <a:r>
-              <a:rPr lang="en-US" sz="1150" dirty="0">
+              <a:rPr lang="en-US" sz="950" dirty="0">
                 <a:solidFill>
                   <a:srgbClr val="1E3457"/>
                 </a:solidFill>
@@ -11434,15 +11498,59 @@
                 <a:ea typeface="맑은 고딕" pitchFamily="34" charset="-122"/>
                 <a:cs typeface="맑은 고딕" pitchFamily="34" charset="-120"/>
               </a:rPr>
-              <a:t>본사 제공 · 내일사장은 전달 및 설명 보조 · 인근가맹점 현황문서(법 제7조제2항) 동봉 확인</a:t>
-            </a:r>
-            <a:endParaRPr lang="en-US" sz="1150" dirty="0"/>
-          </a:p>
-        </p:txBody>
-      </p:sp>
-      <p:sp>
-        <p:nvSpPr>
-          <p:cNvPr id="48" name="Shape 42"/>
+              <a:t>본사 승인 서식 서면만 사용 · 구두 약속 금지</a:t>
+            </a:r>
+            <a:endParaRPr lang="en-US" sz="950" dirty="0"/>
+          </a:p>
+        </p:txBody>
+      </p:sp>
+      <p:sp>
+        <p:nvSpPr>
+          <p:cNvPr id="49" name="Text 43"/>
+          <p:cNvSpPr/>
+          <p:nvPr/>
+        </p:nvSpPr>
+        <p:spPr>
+          <a:xfrm>
+            <a:off x="7909560" y="4434840"/>
+            <a:ext cx="3450031" cy="205740"/>
+          </a:xfrm>
+          <a:prstGeom prst="rect">
+            <a:avLst/>
+          </a:prstGeom>
+          <a:noFill/>
+          <a:ln>
+            <a:noFill/>
+          </a:ln>
+        </p:spPr>
+        <p:txBody>
+          <a:bodyPr wrap="square" lIns="0" tIns="0" rIns="0" bIns="0" rtlCol="0" anchor="ctr"/>
+          <a:lstStyle/>
+          <a:p>
+            <a:pPr algn="l" indent="0" marL="0">
+              <a:lnSpc>
+                <a:spcPts val="1540"/>
+              </a:lnSpc>
+              <a:buNone/>
+            </a:pPr>
+            <a:r>
+              <a:rPr lang="en-US" sz="950" dirty="0">
+                <a:solidFill>
+                  <a:srgbClr val="1E3457"/>
+                </a:solidFill>
+                <a:latin typeface="맑은 고딕" pitchFamily="34" charset="0"/>
+                <a:ea typeface="맑은 고딕" pitchFamily="34" charset="-122"/>
+                <a:cs typeface="맑은 고딕" pitchFamily="34" charset="-120"/>
+              </a:rPr>
+              <a:t>산출근거 본사 제출</a:t>
+            </a:r>
+            <a:endParaRPr lang="en-US" sz="950" dirty="0"/>
+          </a:p>
+        </p:txBody>
+      </p:sp>
+      <p:sp>
+        <p:nvSpPr>
+          <p:cNvPr id="50" name="Shape 44"/>
           <p:cNvSpPr/>
           <p:nvPr/>
         </p:nvSpPr>
@@ -11464,14 +11572,14 @@
       </p:sp>
       <p:sp>
         <p:nvSpPr>
-          <p:cNvPr id="49" name="Text 43"/>
+          <p:cNvPr id="51" name="Text 45"/>
           <p:cNvSpPr/>
           <p:nvPr/>
         </p:nvSpPr>
         <p:spPr>
           <a:xfrm>
             <a:off x="685800" y="4732020"/>
-            <a:ext cx="2889504" cy="205740"/>
+            <a:ext cx="2871216" cy="205740"/>
           </a:xfrm>
           <a:prstGeom prst="rect">
             <a:avLst/>
@@ -11492,7 +11600,7 @@
               <a:buNone/>
             </a:pPr>
             <a:r>
-              <a:rPr lang="en-US" sz="1150" b="1" dirty="0">
+              <a:rPr lang="en-US" sz="950" b="1" dirty="0">
                 <a:solidFill>
                   <a:srgbClr val="1E3457"/>
                 </a:solidFill>
@@ -11500,22 +11608,22 @@
                 <a:ea typeface="맑은 고딕" pitchFamily="34" charset="-122"/>
                 <a:cs typeface="맑은 고딕" pitchFamily="34" charset="-120"/>
               </a:rPr>
-              <a:t>법정 숙고기간</a:t>
-            </a:r>
-            <a:endParaRPr lang="en-US" sz="1150" dirty="0"/>
-          </a:p>
-        </p:txBody>
-      </p:sp>
-      <p:sp>
-        <p:nvSpPr>
-          <p:cNvPr id="50" name="Text 44"/>
-          <p:cNvSpPr/>
-          <p:nvPr/>
-        </p:nvSpPr>
-        <p:spPr>
-          <a:xfrm>
-            <a:off x="3721608" y="4732020"/>
-            <a:ext cx="7637983" cy="205740"/>
+              <a:t>법정 숙고기간 14일 미준수</a:t>
+            </a:r>
+            <a:endParaRPr lang="en-US" sz="950" dirty="0"/>
+          </a:p>
+        </p:txBody>
+      </p:sp>
+      <p:sp>
+        <p:nvSpPr>
+          <p:cNvPr id="52" name="Text 46"/>
+          <p:cNvSpPr/>
+          <p:nvPr/>
+        </p:nvSpPr>
+        <p:spPr>
+          <a:xfrm>
+            <a:off x="3703320" y="4732020"/>
+            <a:ext cx="4059936" cy="205740"/>
           </a:xfrm>
           <a:prstGeom prst="rect">
             <a:avLst/>
@@ -11536,7 +11644,7 @@
               <a:buNone/>
             </a:pPr>
             <a:r>
-              <a:rPr lang="en-US" sz="1150" dirty="0">
+              <a:rPr lang="en-US" sz="950" dirty="0">
                 <a:solidFill>
                   <a:srgbClr val="1E3457"/>
                 </a:solidFill>
@@ -11544,15 +11652,59 @@
                 <a:ea typeface="맑은 고딕" pitchFamily="34" charset="-122"/>
                 <a:cs typeface="맑은 고딕" pitchFamily="34" charset="-120"/>
               </a:rPr>
-              <a:t>가맹사업법 제7조제3항 14일 준수 · 기간 단축 유도 금지</a:t>
-            </a:r>
-            <a:endParaRPr lang="en-US" sz="1150" dirty="0"/>
-          </a:p>
-        </p:txBody>
-      </p:sp>
-      <p:sp>
-        <p:nvSpPr>
-          <p:cNvPr id="51" name="Shape 45"/>
+              <a:t>D-14 자동 카운트 · 경과 전 전자계약 잠금</a:t>
+            </a:r>
+            <a:endParaRPr lang="en-US" sz="950" dirty="0"/>
+          </a:p>
+        </p:txBody>
+      </p:sp>
+      <p:sp>
+        <p:nvSpPr>
+          <p:cNvPr id="53" name="Text 47"/>
+          <p:cNvSpPr/>
+          <p:nvPr/>
+        </p:nvSpPr>
+        <p:spPr>
+          <a:xfrm>
+            <a:off x="7909560" y="4732020"/>
+            <a:ext cx="3450031" cy="205740"/>
+          </a:xfrm>
+          <a:prstGeom prst="rect">
+            <a:avLst/>
+          </a:prstGeom>
+          <a:noFill/>
+          <a:ln>
+            <a:noFill/>
+          </a:ln>
+        </p:spPr>
+        <p:txBody>
+          <a:bodyPr wrap="square" lIns="0" tIns="0" rIns="0" bIns="0" rtlCol="0" anchor="ctr"/>
+          <a:lstStyle/>
+          <a:p>
+            <a:pPr algn="l" indent="0" marL="0">
+              <a:lnSpc>
+                <a:spcPts val="1540"/>
+              </a:lnSpc>
+              <a:buNone/>
+            </a:pPr>
+            <a:r>
+              <a:rPr lang="en-US" sz="950" dirty="0">
+                <a:solidFill>
+                  <a:srgbClr val="1E3457"/>
+                </a:solidFill>
+                <a:latin typeface="맑은 고딕" pitchFamily="34" charset="0"/>
+                <a:ea typeface="맑은 고딕" pitchFamily="34" charset="-122"/>
+                <a:cs typeface="맑은 고딕" pitchFamily="34" charset="-120"/>
+              </a:rPr>
+              <a:t>발송 · 경과 이력 화면</a:t>
+            </a:r>
+            <a:endParaRPr lang="en-US" sz="950" dirty="0"/>
+          </a:p>
+        </p:txBody>
+      </p:sp>
+      <p:sp>
+        <p:nvSpPr>
+          <p:cNvPr id="54" name="Shape 48"/>
           <p:cNvSpPr/>
           <p:nvPr/>
         </p:nvSpPr>
@@ -11574,14 +11726,14 @@
       </p:sp>
       <p:sp>
         <p:nvSpPr>
-          <p:cNvPr id="52" name="Text 46"/>
+          <p:cNvPr id="55" name="Text 49"/>
           <p:cNvSpPr/>
           <p:nvPr/>
         </p:nvSpPr>
         <p:spPr>
           <a:xfrm>
             <a:off x="685800" y="5029200"/>
-            <a:ext cx="2889504" cy="205740"/>
+            <a:ext cx="2871216" cy="205740"/>
           </a:xfrm>
           <a:prstGeom prst="rect">
             <a:avLst/>
@@ -11602,7 +11754,7 @@
               <a:buNone/>
             </a:pPr>
             <a:r>
-              <a:rPr lang="en-US" sz="1150" b="1" dirty="0">
+              <a:rPr lang="en-US" sz="950" b="1" dirty="0">
                 <a:solidFill>
                   <a:srgbClr val="1E3457"/>
                 </a:solidFill>
@@ -11610,22 +11762,22 @@
                 <a:ea typeface="맑은 고딕" pitchFamily="34" charset="-122"/>
                 <a:cs typeface="맑은 고딕" pitchFamily="34" charset="-120"/>
               </a:rPr>
-              <a:t>예상매출 · 손익 자료</a:t>
-            </a:r>
-            <a:endParaRPr lang="en-US" sz="1150" dirty="0"/>
-          </a:p>
-        </p:txBody>
-      </p:sp>
-      <p:sp>
-        <p:nvSpPr>
-          <p:cNvPr id="53" name="Text 47"/>
-          <p:cNvSpPr/>
-          <p:nvPr/>
-        </p:nvSpPr>
-        <p:spPr>
-          <a:xfrm>
-            <a:off x="3721608" y="5029200"/>
-            <a:ext cx="7637983" cy="205740"/>
+              <a:t>정보공개서 · 계약서 오제공</a:t>
+            </a:r>
+            <a:endParaRPr lang="en-US" sz="950" dirty="0"/>
+          </a:p>
+        </p:txBody>
+      </p:sp>
+      <p:sp>
+        <p:nvSpPr>
+          <p:cNvPr id="56" name="Text 50"/>
+          <p:cNvSpPr/>
+          <p:nvPr/>
+        </p:nvSpPr>
+        <p:spPr>
+          <a:xfrm>
+            <a:off x="3703320" y="5029200"/>
+            <a:ext cx="4059936" cy="205740"/>
           </a:xfrm>
           <a:prstGeom prst="rect">
             <a:avLst/>
@@ -11646,7 +11798,7 @@
               <a:buNone/>
             </a:pPr>
             <a:r>
-              <a:rPr lang="en-US" sz="1150" dirty="0">
+              <a:rPr lang="en-US" sz="950" dirty="0">
                 <a:solidFill>
                   <a:srgbClr val="1E3457"/>
                 </a:solidFill>
@@ -11654,15 +11806,59 @@
                 <a:ea typeface="맑은 고딕" pitchFamily="34" charset="-122"/>
                 <a:cs typeface="맑은 고딕" pitchFamily="34" charset="-120"/>
               </a:rPr>
-              <a:t>본사 승인 서식 서면만 사용 · 구두 약속 금지 · 산출근거 본사 제출</a:t>
-            </a:r>
-            <a:endParaRPr lang="en-US" sz="1150" dirty="0"/>
-          </a:p>
-        </p:txBody>
-      </p:sp>
-      <p:sp>
-        <p:nvSpPr>
-          <p:cNvPr id="54" name="Shape 48"/>
+              <a:t>본사 제공 원본 그대로 전달 · 설명 보조</a:t>
+            </a:r>
+            <a:endParaRPr lang="en-US" sz="950" dirty="0"/>
+          </a:p>
+        </p:txBody>
+      </p:sp>
+      <p:sp>
+        <p:nvSpPr>
+          <p:cNvPr id="57" name="Text 51"/>
+          <p:cNvSpPr/>
+          <p:nvPr/>
+        </p:nvSpPr>
+        <p:spPr>
+          <a:xfrm>
+            <a:off x="7909560" y="5029200"/>
+            <a:ext cx="3450031" cy="205740"/>
+          </a:xfrm>
+          <a:prstGeom prst="rect">
+            <a:avLst/>
+          </a:prstGeom>
+          <a:noFill/>
+          <a:ln>
+            <a:noFill/>
+          </a:ln>
+        </p:spPr>
+        <p:txBody>
+          <a:bodyPr wrap="square" lIns="0" tIns="0" rIns="0" bIns="0" rtlCol="0" anchor="ctr"/>
+          <a:lstStyle/>
+          <a:p>
+            <a:pPr algn="l" indent="0" marL="0">
+              <a:lnSpc>
+                <a:spcPts val="1540"/>
+              </a:lnSpc>
+              <a:buNone/>
+            </a:pPr>
+            <a:r>
+              <a:rPr lang="en-US" sz="950" dirty="0">
+                <a:solidFill>
+                  <a:srgbClr val="1E3457"/>
+                </a:solidFill>
+                <a:latin typeface="맑은 고딕" pitchFamily="34" charset="0"/>
+                <a:ea typeface="맑은 고딕" pitchFamily="34" charset="-122"/>
+                <a:cs typeface="맑은 고딕" pitchFamily="34" charset="-120"/>
+              </a:rPr>
+              <a:t>제공 이력 기록</a:t>
+            </a:r>
+            <a:endParaRPr lang="en-US" sz="950" dirty="0"/>
+          </a:p>
+        </p:txBody>
+      </p:sp>
+      <p:sp>
+        <p:nvSpPr>
+          <p:cNvPr id="58" name="Shape 52"/>
           <p:cNvSpPr/>
           <p:nvPr/>
         </p:nvSpPr>
@@ -11684,14 +11880,14 @@
       </p:sp>
       <p:sp>
         <p:nvSpPr>
-          <p:cNvPr id="55" name="Text 49"/>
+          <p:cNvPr id="59" name="Text 53"/>
           <p:cNvSpPr/>
           <p:nvPr/>
         </p:nvSpPr>
         <p:spPr>
           <a:xfrm>
             <a:off x="685800" y="5326380"/>
-            <a:ext cx="2889504" cy="205740"/>
+            <a:ext cx="2871216" cy="205740"/>
           </a:xfrm>
           <a:prstGeom prst="rect">
             <a:avLst/>
@@ -11712,7 +11908,7 @@
               <a:buNone/>
             </a:pPr>
             <a:r>
-              <a:rPr lang="en-US" sz="1150" b="1" dirty="0">
+              <a:rPr lang="en-US" sz="950" b="1" dirty="0">
                 <a:solidFill>
                   <a:srgbClr val="1E3457"/>
                 </a:solidFill>
@@ -11720,22 +11916,22 @@
                 <a:ea typeface="맑은 고딕" pitchFamily="34" charset="-122"/>
                 <a:cs typeface="맑은 고딕" pitchFamily="34" charset="-120"/>
               </a:rPr>
-              <a:t>광고 · 상담 스크립트</a:t>
-            </a:r>
-            <a:endParaRPr lang="en-US" sz="1150" dirty="0"/>
-          </a:p>
-        </p:txBody>
-      </p:sp>
-      <p:sp>
-        <p:nvSpPr>
-          <p:cNvPr id="56" name="Text 50"/>
-          <p:cNvSpPr/>
-          <p:nvPr/>
-        </p:nvSpPr>
-        <p:spPr>
-          <a:xfrm>
-            <a:off x="3721608" y="5326380"/>
-            <a:ext cx="7637983" cy="205740"/>
+              <a:t>브랜드 자료 · 광고 무단 변형</a:t>
+            </a:r>
+            <a:endParaRPr lang="en-US" sz="950" dirty="0"/>
+          </a:p>
+        </p:txBody>
+      </p:sp>
+      <p:sp>
+        <p:nvSpPr>
+          <p:cNvPr id="60" name="Text 54"/>
+          <p:cNvSpPr/>
+          <p:nvPr/>
+        </p:nvSpPr>
+        <p:spPr>
+          <a:xfrm>
+            <a:off x="3703320" y="5326380"/>
+            <a:ext cx="4059936" cy="205740"/>
           </a:xfrm>
           <a:prstGeom prst="rect">
             <a:avLst/>
@@ -11756,7 +11952,7 @@
               <a:buNone/>
             </a:pPr>
             <a:r>
-              <a:rPr lang="en-US" sz="1150" dirty="0">
+              <a:rPr lang="en-US" sz="950" dirty="0">
                 <a:solidFill>
                   <a:srgbClr val="1E3457"/>
                 </a:solidFill>
@@ -11764,15 +11960,59 @@
                 <a:ea typeface="맑은 고딕" pitchFamily="34" charset="-122"/>
                 <a:cs typeface="맑은 고딕" pitchFamily="34" charset="-120"/>
               </a:rPr>
-              <a:t>본사 사전 승인 후 사용</a:t>
-            </a:r>
-            <a:endParaRPr lang="en-US" sz="1150" dirty="0"/>
-          </a:p>
-        </p:txBody>
-      </p:sp>
-      <p:sp>
-        <p:nvSpPr>
-          <p:cNvPr id="57" name="Shape 51"/>
+              <a:t>광고 · 상담 스크립트 본사 사전 승인 후 사용</a:t>
+            </a:r>
+            <a:endParaRPr lang="en-US" sz="950" dirty="0"/>
+          </a:p>
+        </p:txBody>
+      </p:sp>
+      <p:sp>
+        <p:nvSpPr>
+          <p:cNvPr id="61" name="Text 55"/>
+          <p:cNvSpPr/>
+          <p:nvPr/>
+        </p:nvSpPr>
+        <p:spPr>
+          <a:xfrm>
+            <a:off x="7909560" y="5326380"/>
+            <a:ext cx="3450031" cy="205740"/>
+          </a:xfrm>
+          <a:prstGeom prst="rect">
+            <a:avLst/>
+          </a:prstGeom>
+          <a:noFill/>
+          <a:ln>
+            <a:noFill/>
+          </a:ln>
+        </p:spPr>
+        <p:txBody>
+          <a:bodyPr wrap="square" lIns="0" tIns="0" rIns="0" bIns="0" rtlCol="0" anchor="ctr"/>
+          <a:lstStyle/>
+          <a:p>
+            <a:pPr algn="l" indent="0" marL="0">
+              <a:lnSpc>
+                <a:spcPts val="1540"/>
+              </a:lnSpc>
+              <a:buNone/>
+            </a:pPr>
+            <a:r>
+              <a:rPr lang="en-US" sz="950" dirty="0">
+                <a:solidFill>
+                  <a:srgbClr val="1E3457"/>
+                </a:solidFill>
+                <a:latin typeface="맑은 고딕" pitchFamily="34" charset="0"/>
+                <a:ea typeface="맑은 고딕" pitchFamily="34" charset="-122"/>
+                <a:cs typeface="맑은 고딕" pitchFamily="34" charset="-120"/>
+              </a:rPr>
+              <a:t>승인 건만 집행</a:t>
+            </a:r>
+            <a:endParaRPr lang="en-US" sz="950" dirty="0"/>
+          </a:p>
+        </p:txBody>
+      </p:sp>
+      <p:sp>
+        <p:nvSpPr>
+          <p:cNvPr id="62" name="Shape 56"/>
           <p:cNvSpPr/>
           <p:nvPr/>
         </p:nvSpPr>
@@ -11794,14 +12034,14 @@
       </p:sp>
       <p:sp>
         <p:nvSpPr>
-          <p:cNvPr id="58" name="Text 52"/>
+          <p:cNvPr id="63" name="Text 57"/>
           <p:cNvSpPr/>
           <p:nvPr/>
         </p:nvSpPr>
         <p:spPr>
           <a:xfrm>
             <a:off x="685800" y="5623560"/>
-            <a:ext cx="2889504" cy="205740"/>
+            <a:ext cx="2871216" cy="205740"/>
           </a:xfrm>
           <a:prstGeom prst="rect">
             <a:avLst/>
@@ -11822,7 +12062,7 @@
               <a:buNone/>
             </a:pPr>
             <a:r>
-              <a:rPr lang="en-US" sz="1150" b="1" dirty="0">
+              <a:rPr lang="en-US" sz="950" b="1" dirty="0">
                 <a:solidFill>
                   <a:srgbClr val="1E3457"/>
                 </a:solidFill>
@@ -11830,22 +12070,22 @@
                 <a:ea typeface="맑은 고딕" pitchFamily="34" charset="-122"/>
                 <a:cs typeface="맑은 고딕" pitchFamily="34" charset="-120"/>
               </a:rPr>
-              <a:t>위반 확인 시</a:t>
-            </a:r>
-            <a:endParaRPr lang="en-US" sz="1150" dirty="0"/>
-          </a:p>
-        </p:txBody>
-      </p:sp>
-      <p:sp>
-        <p:nvSpPr>
-          <p:cNvPr id="59" name="Text 53"/>
-          <p:cNvSpPr/>
-          <p:nvPr/>
-        </p:nvSpPr>
-        <p:spPr>
-          <a:xfrm>
-            <a:off x="3721608" y="5623560"/>
-            <a:ext cx="7637983" cy="205740"/>
+              <a:t>부적격 점주 유입</a:t>
+            </a:r>
+            <a:endParaRPr lang="en-US" sz="950" dirty="0"/>
+          </a:p>
+        </p:txBody>
+      </p:sp>
+      <p:sp>
+        <p:nvSpPr>
+          <p:cNvPr id="64" name="Text 58"/>
+          <p:cNvSpPr/>
+          <p:nvPr/>
+        </p:nvSpPr>
+        <p:spPr>
+          <a:xfrm>
+            <a:off x="3703320" y="5623560"/>
+            <a:ext cx="4059936" cy="205740"/>
           </a:xfrm>
           <a:prstGeom prst="rect">
             <a:avLst/>
@@ -11866,7 +12106,7 @@
               <a:buNone/>
             </a:pPr>
             <a:r>
-              <a:rPr lang="en-US" sz="1150" dirty="0">
+              <a:rPr lang="en-US" sz="950" dirty="0">
                 <a:solidFill>
                   <a:srgbClr val="1E3457"/>
                 </a:solidFill>
@@ -11874,15 +12114,59 @@
                 <a:ea typeface="맑은 고딕" pitchFamily="34" charset="-122"/>
                 <a:cs typeface="맑은 고딕" pitchFamily="34" charset="-120"/>
               </a:rPr>
-              <a:t>해당 건 영업 즉시 중단 및 본사 통보</a:t>
-            </a:r>
-            <a:endParaRPr lang="en-US" sz="1150" dirty="0"/>
-          </a:p>
-        </p:txBody>
-      </p:sp>
-      <p:sp>
-        <p:nvSpPr>
-          <p:cNvPr id="60" name="Shape 54"/>
+              <a:t>인·적성검사 결과 제출 후 브리핑</a:t>
+            </a:r>
+            <a:endParaRPr lang="en-US" sz="950" dirty="0"/>
+          </a:p>
+        </p:txBody>
+      </p:sp>
+      <p:sp>
+        <p:nvSpPr>
+          <p:cNvPr id="65" name="Text 59"/>
+          <p:cNvSpPr/>
+          <p:nvPr/>
+        </p:nvSpPr>
+        <p:spPr>
+          <a:xfrm>
+            <a:off x="7909560" y="5623560"/>
+            <a:ext cx="3450031" cy="205740"/>
+          </a:xfrm>
+          <a:prstGeom prst="rect">
+            <a:avLst/>
+          </a:prstGeom>
+          <a:noFill/>
+          <a:ln>
+            <a:noFill/>
+          </a:ln>
+        </p:spPr>
+        <p:txBody>
+          <a:bodyPr wrap="square" lIns="0" tIns="0" rIns="0" bIns="0" rtlCol="0" anchor="ctr"/>
+          <a:lstStyle/>
+          <a:p>
+            <a:pPr algn="l" indent="0" marL="0">
+              <a:lnSpc>
+                <a:spcPts val="1540"/>
+              </a:lnSpc>
+              <a:buNone/>
+            </a:pPr>
+            <a:r>
+              <a:rPr lang="en-US" sz="950" dirty="0">
+                <a:solidFill>
+                  <a:srgbClr val="1E3457"/>
+                </a:solidFill>
+                <a:latin typeface="맑은 고딕" pitchFamily="34" charset="0"/>
+                <a:ea typeface="맑은 고딕" pitchFamily="34" charset="-122"/>
+                <a:cs typeface="맑은 고딕" pitchFamily="34" charset="-120"/>
+              </a:rPr>
+              <a:t>점주 승인은 본사</a:t>
+            </a:r>
+            <a:endParaRPr lang="en-US" sz="950" dirty="0"/>
+          </a:p>
+        </p:txBody>
+      </p:sp>
+      <p:sp>
+        <p:nvSpPr>
+          <p:cNvPr id="66" name="Shape 60"/>
           <p:cNvSpPr/>
           <p:nvPr/>
         </p:nvSpPr>
@@ -11904,14 +12188,14 @@
       </p:sp>
       <p:sp>
         <p:nvSpPr>
-          <p:cNvPr id="61" name="Text 55"/>
+          <p:cNvPr id="67" name="Text 61"/>
           <p:cNvSpPr/>
           <p:nvPr/>
         </p:nvSpPr>
         <p:spPr>
           <a:xfrm>
             <a:off x="685800" y="5920740"/>
-            <a:ext cx="2889504" cy="205740"/>
+            <a:ext cx="2871216" cy="205740"/>
           </a:xfrm>
           <a:prstGeom prst="rect">
             <a:avLst/>
@@ -11932,7 +12216,7 @@
               <a:buNone/>
             </a:pPr>
             <a:r>
-              <a:rPr lang="en-US" sz="1150" b="1" dirty="0">
+              <a:rPr lang="en-US" sz="950" b="1" dirty="0">
                 <a:solidFill>
                   <a:srgbClr val="1E3457"/>
                 </a:solidFill>
@@ -11940,22 +12224,22 @@
                 <a:ea typeface="맑은 고딕" pitchFamily="34" charset="-122"/>
                 <a:cs typeface="맑은 고딕" pitchFamily="34" charset="-120"/>
               </a:rPr>
-              <a:t>업종 인허가 · 게임물 기준</a:t>
-            </a:r>
-            <a:endParaRPr lang="en-US" sz="1150" dirty="0"/>
-          </a:p>
-        </p:txBody>
-      </p:sp>
-      <p:sp>
-        <p:nvSpPr>
-          <p:cNvPr id="62" name="Text 56"/>
-          <p:cNvSpPr/>
-          <p:nvPr/>
-        </p:nvSpPr>
-        <p:spPr>
-          <a:xfrm>
-            <a:off x="3721608" y="5920740"/>
-            <a:ext cx="7637983" cy="205740"/>
+              <a:t>업종 인허가 · 게임물 기준 오안내</a:t>
+            </a:r>
+            <a:endParaRPr lang="en-US" sz="950" dirty="0"/>
+          </a:p>
+        </p:txBody>
+      </p:sp>
+      <p:sp>
+        <p:nvSpPr>
+          <p:cNvPr id="68" name="Text 62"/>
+          <p:cNvSpPr/>
+          <p:nvPr/>
+        </p:nvSpPr>
+        <p:spPr>
+          <a:xfrm>
+            <a:off x="3703320" y="5920740"/>
+            <a:ext cx="4059936" cy="205740"/>
           </a:xfrm>
           <a:prstGeom prst="rect">
             <a:avLst/>
@@ -11976,7 +12260,7 @@
               <a:buNone/>
             </a:pPr>
             <a:r>
-              <a:rPr lang="en-US" sz="1150" dirty="0">
+              <a:rPr lang="en-US" sz="950" dirty="0">
                 <a:solidFill>
                   <a:srgbClr val="1E3457"/>
                 </a:solidFill>
@@ -11984,15 +12268,59 @@
                 <a:ea typeface="맑은 고딕" pitchFamily="34" charset="-122"/>
                 <a:cs typeface="맑은 고딕" pitchFamily="34" charset="-120"/>
               </a:rPr>
-              <a:t>러너펍 본사 기준 그대로 적용 · 내일사장 독자 판단 및 안내 금지</a:t>
-            </a:r>
-            <a:endParaRPr lang="en-US" sz="1150" dirty="0"/>
-          </a:p>
-        </p:txBody>
-      </p:sp>
-      <p:sp>
-        <p:nvSpPr>
-          <p:cNvPr id="63" name="Shape 57"/>
+              <a:t>러너펍 본사 기준 그대로 적용 · 독자 안내 금지</a:t>
+            </a:r>
+            <a:endParaRPr lang="en-US" sz="950" dirty="0"/>
+          </a:p>
+        </p:txBody>
+      </p:sp>
+      <p:sp>
+        <p:nvSpPr>
+          <p:cNvPr id="69" name="Text 63"/>
+          <p:cNvSpPr/>
+          <p:nvPr/>
+        </p:nvSpPr>
+        <p:spPr>
+          <a:xfrm>
+            <a:off x="7909560" y="5920740"/>
+            <a:ext cx="3450031" cy="205740"/>
+          </a:xfrm>
+          <a:prstGeom prst="rect">
+            <a:avLst/>
+          </a:prstGeom>
+          <a:noFill/>
+          <a:ln>
+            <a:noFill/>
+          </a:ln>
+        </p:spPr>
+        <p:txBody>
+          <a:bodyPr wrap="square" lIns="0" tIns="0" rIns="0" bIns="0" rtlCol="0" anchor="ctr"/>
+          <a:lstStyle/>
+          <a:p>
+            <a:pPr algn="l" indent="0" marL="0">
+              <a:lnSpc>
+                <a:spcPts val="1540"/>
+              </a:lnSpc>
+              <a:buNone/>
+            </a:pPr>
+            <a:r>
+              <a:rPr lang="en-US" sz="950" dirty="0">
+                <a:solidFill>
+                  <a:srgbClr val="1E3457"/>
+                </a:solidFill>
+                <a:latin typeface="맑은 고딕" pitchFamily="34" charset="0"/>
+                <a:ea typeface="맑은 고딕" pitchFamily="34" charset="-122"/>
+                <a:cs typeface="맑은 고딕" pitchFamily="34" charset="-120"/>
+              </a:rPr>
+              <a:t>위반 시 즉시 중단 · 본사 통보</a:t>
+            </a:r>
+            <a:endParaRPr lang="en-US" sz="950" dirty="0"/>
+          </a:p>
+        </p:txBody>
+      </p:sp>
+      <p:sp>
+        <p:nvSpPr>
+          <p:cNvPr id="70" name="Shape 64"/>
           <p:cNvSpPr/>
           <p:nvPr/>
         </p:nvSpPr>
@@ -12515,7 +12843,7 @@
                 <a:ea typeface="맑은 고딕" pitchFamily="34" charset="-122"/>
                 <a:cs typeface="맑은 고딕" pitchFamily="34" charset="-120"/>
               </a:rPr>
-              <a:t>파일럿 운영 조건</a:t>
+              <a:t>본사가 정하는 파일럿 조건</a:t>
             </a:r>
             <a:endParaRPr lang="en-US" sz="900" dirty="0"/>
           </a:p>
@@ -12570,7 +12898,7 @@
                 <a:ea typeface="맑은 고딕" pitchFamily="34" charset="-122"/>
                 <a:cs typeface="맑은 고딕" pitchFamily="34" charset="-120"/>
               </a:rPr>
-              <a:t>건</a:t>
+              <a:t>항목</a:t>
             </a:r>
             <a:endParaRPr lang="en-US" sz="3200" dirty="0"/>
           </a:p>
@@ -12677,7 +13005,7 @@
                 <a:ea typeface="맑은 고딕" pitchFamily="34" charset="-122"/>
                 <a:cs typeface="맑은 고딕" pitchFamily="34" charset="-120"/>
               </a:rPr>
-              <a:t>첫 구간 파일럿 운영</a:t>
+              <a:t>첫 구간 파일럿 — 홀덤 적합군 분류부터 검증</a:t>
             </a:r>
             <a:endParaRPr lang="en-US" sz="1100" dirty="0"/>
           </a:p>
@@ -13435,7 +13763,7 @@
                 <a:ea typeface="맑은 고딕" pitchFamily="34" charset="-122"/>
                 <a:cs typeface="맑은 고딕" pitchFamily="34" charset="-120"/>
               </a:rPr>
-              <a:t>검증 기간</a:t>
+              <a:t>중단 기준</a:t>
             </a:r>
             <a:endParaRPr lang="en-US" sz="1150" dirty="0"/>
           </a:p>
@@ -13479,7 +13807,7 @@
                 <a:ea typeface="맑은 고딕" pitchFamily="34" charset="-122"/>
                 <a:cs typeface="맑은 고딕" pitchFamily="34" charset="-120"/>
               </a:rPr>
-              <a:t>착수 전 별지로 기간 확정</a:t>
+              <a:t>본사 판단으로 즉시 중단 — 사유 제한 없음</a:t>
             </a:r>
             <a:endParaRPr lang="en-US" sz="1150" dirty="0"/>
           </a:p>
@@ -13545,7 +13873,7 @@
                 <a:ea typeface="맑은 고딕" pitchFamily="34" charset="-122"/>
                 <a:cs typeface="맑은 고딕" pitchFamily="34" charset="-120"/>
               </a:rPr>
-              <a:t>목표 건수</a:t>
+              <a:t>검증 기간</a:t>
             </a:r>
             <a:endParaRPr lang="en-US" sz="1150" dirty="0"/>
           </a:p>
@@ -13589,7 +13917,7 @@
                 <a:ea typeface="맑은 고딕" pitchFamily="34" charset="-122"/>
                 <a:cs typeface="맑은 고딕" pitchFamily="34" charset="-120"/>
               </a:rPr>
-              <a:t>착수 전 별지로 목표 건수 확정</a:t>
+              <a:t>착수 전 별지로 기간 확정</a:t>
             </a:r>
             <a:endParaRPr lang="en-US" sz="1150" dirty="0"/>
           </a:p>
@@ -13655,7 +13983,7 @@
                 <a:ea typeface="맑은 고딕" pitchFamily="34" charset="-122"/>
                 <a:cs typeface="맑은 고딕" pitchFamily="34" charset="-120"/>
               </a:rPr>
-              <a:t>영업 범위</a:t>
+              <a:t>목표 건수</a:t>
             </a:r>
             <a:endParaRPr lang="en-US" sz="1150" dirty="0"/>
           </a:p>
@@ -13699,7 +14027,7 @@
                 <a:ea typeface="맑은 고딕" pitchFamily="34" charset="-122"/>
                 <a:cs typeface="맑은 고딕" pitchFamily="34" charset="-120"/>
               </a:rPr>
-              <a:t>전국 또는 특정 권역 중 선택</a:t>
+              <a:t>착수 전 별지로 목표 건수 확정</a:t>
             </a:r>
             <a:endParaRPr lang="en-US" sz="1150" dirty="0"/>
           </a:p>
@@ -13765,7 +14093,7 @@
                 <a:ea typeface="맑은 고딕" pitchFamily="34" charset="-122"/>
                 <a:cs typeface="맑은 고딕" pitchFamily="34" charset="-120"/>
               </a:rPr>
-              <a:t>평가 지표</a:t>
+              <a:t>영업 범위</a:t>
             </a:r>
             <a:endParaRPr lang="en-US" sz="1150" dirty="0"/>
           </a:p>
@@ -13809,7 +14137,7 @@
                 <a:ea typeface="맑은 고딕" pitchFamily="34" charset="-122"/>
                 <a:cs typeface="맑은 고딕" pitchFamily="34" charset="-120"/>
               </a:rPr>
-              <a:t>신규 리드 수 · 상담 진행 수 · 계약 체결 건수</a:t>
+              <a:t>전국 또는 특정 권역 중 선택</a:t>
             </a:r>
             <a:endParaRPr lang="en-US" sz="1150" dirty="0"/>
           </a:p>
@@ -13875,7 +14203,7 @@
                 <a:ea typeface="맑은 고딕" pitchFamily="34" charset="-122"/>
                 <a:cs typeface="맑은 고딕" pitchFamily="34" charset="-120"/>
               </a:rPr>
-              <a:t>보고</a:t>
+              <a:t>평가 지표</a:t>
             </a:r>
             <a:endParaRPr lang="en-US" sz="1150" dirty="0"/>
           </a:p>
@@ -13919,7 +14247,7 @@
                 <a:ea typeface="맑은 고딕" pitchFamily="34" charset="-122"/>
                 <a:cs typeface="맑은 고딕" pitchFamily="34" charset="-120"/>
               </a:rPr>
-              <a:t>주 단위 리포트 — 활동 지표 및 단계별 파이프라인</a:t>
+              <a:t>신규 리드 수 · 상담 진행 수 · 계약 체결 건수</a:t>
             </a:r>
             <a:endParaRPr lang="en-US" sz="1150" dirty="0"/>
           </a:p>
@@ -13985,7 +14313,7 @@
                 <a:ea typeface="맑은 고딕" pitchFamily="34" charset="-122"/>
                 <a:cs typeface="맑은 고딕" pitchFamily="34" charset="-120"/>
               </a:rPr>
-              <a:t>착수 조건</a:t>
+              <a:t>보고</a:t>
             </a:r>
             <a:endParaRPr lang="en-US" sz="1150" dirty="0"/>
           </a:p>
@@ -14029,7 +14357,7 @@
                 <a:ea typeface="맑은 고딕" pitchFamily="34" charset="-122"/>
                 <a:cs typeface="맑은 고딕" pitchFamily="34" charset="-120"/>
               </a:rPr>
-              <a:t>본사 승인 자료 확정 후 즉시 착수 · 착수금 없음</a:t>
+              <a:t>주 단위 리포트 — 활동 지표 및 단계별 파이프라인</a:t>
             </a:r>
             <a:endParaRPr lang="en-US" sz="1150" dirty="0"/>
           </a:p>
@@ -14095,7 +14423,7 @@
                 <a:ea typeface="맑은 고딕" pitchFamily="34" charset="-122"/>
                 <a:cs typeface="맑은 고딕" pitchFamily="34" charset="-120"/>
               </a:rPr>
-              <a:t>중단 기준</a:t>
+              <a:t>착수 조건</a:t>
             </a:r>
             <a:endParaRPr lang="en-US" sz="1150" dirty="0"/>
           </a:p>
@@ -14139,7 +14467,7 @@
                 <a:ea typeface="맑은 고딕" pitchFamily="34" charset="-122"/>
                 <a:cs typeface="맑은 고딕" pitchFamily="34" charset="-120"/>
               </a:rPr>
-              <a:t>본사 판단으로 즉시 중단 — 사유 제한 없음</a:t>
+              <a:t>본사 승인 자료 확정 후 즉시 착수 · 착수금 없음</a:t>
             </a:r>
             <a:endParaRPr lang="en-US" sz="1150" dirty="0"/>
           </a:p>
@@ -18475,7 +18803,7 @@
         </p:nvSpPr>
         <p:spPr>
           <a:xfrm>
-            <a:off x="3454832" y="3429000"/>
+            <a:off x="3454832" y="4005072"/>
             <a:ext cx="2513000" cy="7315"/>
           </a:xfrm>
           <a:prstGeom prst="rect">
@@ -18640,7 +18968,7 @@
         </p:nvSpPr>
         <p:spPr>
           <a:xfrm>
-            <a:off x="6223864" y="3429000"/>
+            <a:off x="6223864" y="4005072"/>
             <a:ext cx="2513000" cy="7315"/>
           </a:xfrm>
           <a:prstGeom prst="rect">
@@ -18805,7 +19133,7 @@
         </p:nvSpPr>
         <p:spPr>
           <a:xfrm>
-            <a:off x="8992895" y="3429000"/>
+            <a:off x="8992895" y="4005072"/>
             <a:ext cx="2513000" cy="7315"/>
           </a:xfrm>
           <a:prstGeom prst="rect">
@@ -18964,7 +19292,7 @@
                 <a:ea typeface="맑은 고딕" pitchFamily="34" charset="-122"/>
                 <a:cs typeface="맑은 고딕" pitchFamily="34" charset="-120"/>
               </a:rPr>
-              <a:t>인증 서비스 활용 전후 비교</a:t>
+              <a:t>가맹 모객 실행 실적</a:t>
             </a:r>
             <a:endParaRPr lang="en-US" sz="1250" dirty="0"/>
           </a:p>
@@ -19030,7 +19358,7 @@
                 <a:ea typeface="맑은 고딕" pitchFamily="34" charset="-122"/>
                 <a:cs typeface="맑은 고딕" pitchFamily="34" charset="-120"/>
               </a:rPr>
-              <a:t>자영업자 1년 생존율</a:t>
+              <a:t>호호반점 — '공감' 소구 광고</a:t>
             </a:r>
             <a:endParaRPr lang="en-US" sz="1100" dirty="0"/>
           </a:p>
@@ -19045,7 +19373,7 @@
         <p:spPr>
           <a:xfrm>
             <a:off x="3454603" y="5120640"/>
-            <a:ext cx="2560320" cy="365760"/>
+            <a:ext cx="4023360" cy="365760"/>
           </a:xfrm>
           <a:prstGeom prst="rect">
             <a:avLst/>
@@ -19071,26 +19399,12 @@
                 <a:ea typeface="맑은 고딕" pitchFamily="34" charset="-122"/>
                 <a:cs typeface="맑은 고딕" pitchFamily="34" charset="-120"/>
               </a:rPr>
-              <a:t>67%</a:t>
+              <a:t>월간 모객   </a:t>
             </a:r>
             <a:pPr indent="0" marL="0">
               <a:buNone/>
             </a:pPr>
             <a:r>
-              <a:rPr lang="en-US" sz="1100" dirty="0">
-                <a:solidFill>
-                  <a:srgbClr val="5C687F"/>
-                </a:solidFill>
-                <a:latin typeface="맑은 고딕" pitchFamily="34" charset="0"/>
-                <a:ea typeface="맑은 고딕" pitchFamily="34" charset="-122"/>
-                <a:cs typeface="맑은 고딕" pitchFamily="34" charset="-120"/>
-              </a:rPr>
-              <a:t>   →   </a:t>
-            </a:r>
-            <a:pPr indent="0" marL="0">
-              <a:buNone/>
-            </a:pPr>
-            <a:r>
               <a:rPr lang="en-US" sz="2400" b="1" dirty="0">
                 <a:solidFill>
                   <a:srgbClr val="1E3457"/>
@@ -19099,7 +19413,7 @@
                 <a:ea typeface="맑은 고딕" pitchFamily="34" charset="-122"/>
                 <a:cs typeface="맑은 고딕" pitchFamily="34" charset="-120"/>
               </a:rPr>
-              <a:t>99%</a:t>
+              <a:t>100건 돌파</a:t>
             </a:r>
             <a:endParaRPr lang="en-US" sz="1300" dirty="0"/>
           </a:p>
@@ -19108,50 +19422,6 @@
       <p:sp>
         <p:nvSpPr>
           <p:cNvPr id="39" name="Text 32"/>
-          <p:cNvSpPr/>
-          <p:nvPr/>
-        </p:nvSpPr>
-        <p:spPr>
-          <a:xfrm>
-            <a:off x="6223406" y="5138928"/>
-            <a:ext cx="1463040" cy="310896"/>
-          </a:xfrm>
-          <a:prstGeom prst="rect">
-            <a:avLst/>
-          </a:prstGeom>
-          <a:noFill/>
-          <a:ln>
-            <a:noFill/>
-          </a:ln>
-        </p:spPr>
-        <p:txBody>
-          <a:bodyPr wrap="square" lIns="0" tIns="0" rIns="0" bIns="0" rtlCol="0" anchor="ctr"/>
-          <a:lstStyle/>
-          <a:p>
-            <a:pPr algn="l" indent="0" marL="0">
-              <a:lnSpc>
-                <a:spcPts val="2144"/>
-              </a:lnSpc>
-              <a:buNone/>
-            </a:pPr>
-            <a:r>
-              <a:rPr lang="en-US" sz="1600" b="1" dirty="0">
-                <a:solidFill>
-                  <a:srgbClr val="2868F0"/>
-                </a:solidFill>
-                <a:latin typeface="맑은 고딕" pitchFamily="34" charset="0"/>
-                <a:ea typeface="맑은 고딕" pitchFamily="34" charset="-122"/>
-                <a:cs typeface="맑은 고딕" pitchFamily="34" charset="-120"/>
-              </a:rPr>
-              <a:t>↑ 32%p</a:t>
-            </a:r>
-            <a:endParaRPr lang="en-US" sz="1600" dirty="0"/>
-          </a:p>
-        </p:txBody>
-      </p:sp>
-      <p:sp>
-        <p:nvSpPr>
-          <p:cNvPr id="40" name="Text 33"/>
           <p:cNvSpPr/>
           <p:nvPr/>
         </p:nvSpPr>
@@ -19187,7 +19457,7 @@
                 <a:ea typeface="맑은 고딕" pitchFamily="34" charset="-122"/>
                 <a:cs typeface="맑은 고딕" pitchFamily="34" charset="-120"/>
               </a:rPr>
-              <a:t>* 내일사장 인증 서비스 이용 건 기준</a:t>
+              <a:t>* 내일사장 수행 브랜드 광고 집행 기준</a:t>
             </a:r>
             <a:endParaRPr lang="en-US" sz="850" dirty="0"/>
           </a:p>
@@ -19195,7 +19465,7 @@
       </p:sp>
       <p:sp>
         <p:nvSpPr>
-          <p:cNvPr id="41" name="Text 34"/>
+          <p:cNvPr id="40" name="Text 33"/>
           <p:cNvSpPr/>
           <p:nvPr/>
         </p:nvSpPr>
@@ -19231,7 +19501,7 @@
                 <a:ea typeface="맑은 고딕" pitchFamily="34" charset="-122"/>
                 <a:cs typeface="맑은 고딕" pitchFamily="34" charset="-120"/>
               </a:rPr>
-              <a:t>양도양수 성공비율</a:t>
+              <a:t>더진국 — '상황' 소구 광고</a:t>
             </a:r>
             <a:endParaRPr lang="en-US" sz="1100" dirty="0"/>
           </a:p>
@@ -19239,120 +19509,62 @@
       </p:sp>
       <p:sp>
         <p:nvSpPr>
+          <p:cNvPr id="41" name="Text 34"/>
+          <p:cNvSpPr/>
+          <p:nvPr/>
+        </p:nvSpPr>
+        <p:spPr>
+          <a:xfrm>
+            <a:off x="3454603" y="5724144"/>
+            <a:ext cx="4023360" cy="365760"/>
+          </a:xfrm>
+          <a:prstGeom prst="rect">
+            <a:avLst/>
+          </a:prstGeom>
+          <a:noFill/>
+          <a:ln>
+            <a:noFill/>
+          </a:ln>
+        </p:spPr>
+        <p:txBody>
+          <a:bodyPr wrap="square" lIns="0" tIns="0" rIns="0" bIns="0" rtlCol="0" anchor="ctr"/>
+          <a:lstStyle/>
+          <a:p>
+            <a:pPr indent="0" marL="0">
+              <a:buNone/>
+            </a:pPr>
+            <a:r>
+              <a:rPr lang="en-US" sz="1300" dirty="0">
+                <a:solidFill>
+                  <a:srgbClr val="5C687F"/>
+                </a:solidFill>
+                <a:latin typeface="맑은 고딕" pitchFamily="34" charset="0"/>
+                <a:ea typeface="맑은 고딕" pitchFamily="34" charset="-122"/>
+                <a:cs typeface="맑은 고딕" pitchFamily="34" charset="-120"/>
+              </a:rPr>
+              <a:t>월 모객   </a:t>
+            </a:r>
+            <a:pPr indent="0" marL="0">
+              <a:buNone/>
+            </a:pPr>
+            <a:r>
+              <a:rPr lang="en-US" sz="2400" b="1" dirty="0">
+                <a:solidFill>
+                  <a:srgbClr val="1E3457"/>
+                </a:solidFill>
+                <a:latin typeface="맑은 고딕" pitchFamily="34" charset="0"/>
+                <a:ea typeface="맑은 고딕" pitchFamily="34" charset="-122"/>
+                <a:cs typeface="맑은 고딕" pitchFamily="34" charset="-120"/>
+              </a:rPr>
+              <a:t>700% 증가</a:t>
+            </a:r>
+            <a:endParaRPr lang="en-US" sz="1300" dirty="0"/>
+          </a:p>
+        </p:txBody>
+      </p:sp>
+      <p:sp>
+        <p:nvSpPr>
           <p:cNvPr id="42" name="Text 35"/>
-          <p:cNvSpPr/>
-          <p:nvPr/>
-        </p:nvSpPr>
-        <p:spPr>
-          <a:xfrm>
-            <a:off x="3454603" y="5724144"/>
-            <a:ext cx="2560320" cy="365760"/>
-          </a:xfrm>
-          <a:prstGeom prst="rect">
-            <a:avLst/>
-          </a:prstGeom>
-          <a:noFill/>
-          <a:ln>
-            <a:noFill/>
-          </a:ln>
-        </p:spPr>
-        <p:txBody>
-          <a:bodyPr wrap="square" lIns="0" tIns="0" rIns="0" bIns="0" rtlCol="0" anchor="ctr"/>
-          <a:lstStyle/>
-          <a:p>
-            <a:pPr indent="0" marL="0">
-              <a:buNone/>
-            </a:pPr>
-            <a:r>
-              <a:rPr lang="en-US" sz="1300" dirty="0">
-                <a:solidFill>
-                  <a:srgbClr val="5C687F"/>
-                </a:solidFill>
-                <a:latin typeface="맑은 고딕" pitchFamily="34" charset="0"/>
-                <a:ea typeface="맑은 고딕" pitchFamily="34" charset="-122"/>
-                <a:cs typeface="맑은 고딕" pitchFamily="34" charset="-120"/>
-              </a:rPr>
-              <a:t>47%</a:t>
-            </a:r>
-            <a:pPr indent="0" marL="0">
-              <a:buNone/>
-            </a:pPr>
-            <a:r>
-              <a:rPr lang="en-US" sz="1100" dirty="0">
-                <a:solidFill>
-                  <a:srgbClr val="5C687F"/>
-                </a:solidFill>
-                <a:latin typeface="맑은 고딕" pitchFamily="34" charset="0"/>
-                <a:ea typeface="맑은 고딕" pitchFamily="34" charset="-122"/>
-                <a:cs typeface="맑은 고딕" pitchFamily="34" charset="-120"/>
-              </a:rPr>
-              <a:t>   →   </a:t>
-            </a:r>
-            <a:pPr indent="0" marL="0">
-              <a:buNone/>
-            </a:pPr>
-            <a:r>
-              <a:rPr lang="en-US" sz="2400" b="1" dirty="0">
-                <a:solidFill>
-                  <a:srgbClr val="1E3457"/>
-                </a:solidFill>
-                <a:latin typeface="맑은 고딕" pitchFamily="34" charset="0"/>
-                <a:ea typeface="맑은 고딕" pitchFamily="34" charset="-122"/>
-                <a:cs typeface="맑은 고딕" pitchFamily="34" charset="-120"/>
-              </a:rPr>
-              <a:t>80%</a:t>
-            </a:r>
-            <a:endParaRPr lang="en-US" sz="1300" dirty="0"/>
-          </a:p>
-        </p:txBody>
-      </p:sp>
-      <p:sp>
-        <p:nvSpPr>
-          <p:cNvPr id="43" name="Text 36"/>
-          <p:cNvSpPr/>
-          <p:nvPr/>
-        </p:nvSpPr>
-        <p:spPr>
-          <a:xfrm>
-            <a:off x="6223406" y="5742432"/>
-            <a:ext cx="1463040" cy="310896"/>
-          </a:xfrm>
-          <a:prstGeom prst="rect">
-            <a:avLst/>
-          </a:prstGeom>
-          <a:noFill/>
-          <a:ln>
-            <a:noFill/>
-          </a:ln>
-        </p:spPr>
-        <p:txBody>
-          <a:bodyPr wrap="square" lIns="0" tIns="0" rIns="0" bIns="0" rtlCol="0" anchor="ctr"/>
-          <a:lstStyle/>
-          <a:p>
-            <a:pPr algn="l" indent="0" marL="0">
-              <a:lnSpc>
-                <a:spcPts val="2144"/>
-              </a:lnSpc>
-              <a:buNone/>
-            </a:pPr>
-            <a:r>
-              <a:rPr lang="en-US" sz="1600" b="1" dirty="0">
-                <a:solidFill>
-                  <a:srgbClr val="2868F0"/>
-                </a:solidFill>
-                <a:latin typeface="맑은 고딕" pitchFamily="34" charset="0"/>
-                <a:ea typeface="맑은 고딕" pitchFamily="34" charset="-122"/>
-                <a:cs typeface="맑은 고딕" pitchFamily="34" charset="-120"/>
-              </a:rPr>
-              <a:t>↑ 33%p</a:t>
-            </a:r>
-            <a:endParaRPr lang="en-US" sz="1600" dirty="0"/>
-          </a:p>
-        </p:txBody>
-      </p:sp>
-      <p:sp>
-        <p:nvSpPr>
-          <p:cNvPr id="44" name="Text 37"/>
           <p:cNvSpPr/>
           <p:nvPr/>
         </p:nvSpPr>
@@ -19388,7 +19600,7 @@
                 <a:ea typeface="맑은 고딕" pitchFamily="34" charset="-122"/>
                 <a:cs typeface="맑은 고딕" pitchFamily="34" charset="-120"/>
               </a:rPr>
-              <a:t>* 내일사장 인증 서비스 이용 건 기준</a:t>
+              <a:t>* 내일사장 수행 브랜드 광고 집행 기준</a:t>
             </a:r>
             <a:endParaRPr lang="en-US" sz="850" dirty="0"/>
           </a:p>
@@ -20114,7 +20326,7 @@
                 <a:ea typeface="맑은 고딕" pitchFamily="34" charset="-122"/>
                 <a:cs typeface="맑은 고딕" pitchFamily="34" charset="-120"/>
               </a:rPr>
-              <a:t>소재지</a:t>
+              <a:t>서비스</a:t>
             </a:r>
             <a:endParaRPr lang="en-US" sz="1050" dirty="0"/>
           </a:p>
@@ -20158,7 +20370,7 @@
                 <a:ea typeface="맑은 고딕" pitchFamily="34" charset="-122"/>
                 <a:cs typeface="맑은 고딕" pitchFamily="34" charset="-120"/>
               </a:rPr>
-              <a:t>경기도 하남시 조정대로 45 미사센텀비즈 922호</a:t>
+              <a:t>매장 양도양수 직거래 플랫폼 (앱 · 웹) · ERP</a:t>
             </a:r>
             <a:endParaRPr lang="en-US" sz="1050" dirty="0"/>
           </a:p>
@@ -20397,7 +20609,7 @@
                 <a:ea typeface="맑은 고딕" pitchFamily="34" charset="-122"/>
                 <a:cs typeface="맑은 고딕" pitchFamily="34" charset="-120"/>
               </a:rPr>
-              <a:t>관계사</a:t>
+              <a:t>투자사</a:t>
             </a:r>
             <a:endParaRPr lang="en-US" sz="1050" dirty="0"/>
           </a:p>
@@ -20441,7 +20653,7 @@
                 <a:ea typeface="맑은 고딕" pitchFamily="34" charset="-122"/>
                 <a:cs typeface="맑은 고딕" pitchFamily="34" charset="-120"/>
               </a:rPr>
-              <a:t>씨엔티테크 (CNT TECH)</a:t>
+              <a:t>씨엔티테크 — 스테이션케이 제1호 투자조합</a:t>
             </a:r>
             <a:endParaRPr lang="en-US" sz="1050" dirty="0"/>
           </a:p>
@@ -20661,7 +20873,7 @@
                 <a:ea typeface="맑은 고딕" pitchFamily="34" charset="-122"/>
                 <a:cs typeface="맑은 고딕" pitchFamily="34" charset="-120"/>
               </a:rPr>
-              <a:t>오픈 이노베이션</a:t>
+              <a:t>업무협약</a:t>
             </a:r>
             <a:endParaRPr lang="en-US" sz="1050" dirty="0"/>
           </a:p>
@@ -20705,7 +20917,7 @@
                 <a:ea typeface="맑은 고딕" pitchFamily="34" charset="-122"/>
                 <a:cs typeface="맑은 고딕" pitchFamily="34" charset="-120"/>
               </a:rPr>
-              <a:t>다날 · SPC 섹타나인 · 토스</a:t>
+              <a:t>SPC · 삼성웰스토리 · 캐시노트 · 다날</a:t>
             </a:r>
             <a:endParaRPr lang="en-US" sz="1050" dirty="0"/>
           </a:p>
@@ -20871,7 +21083,7 @@
         <p:spPr>
           <a:xfrm>
             <a:off x="5998464" y="2798064"/>
-            <a:ext cx="20117" cy="2766060"/>
+            <a:ext cx="20117" cy="2962656"/>
           </a:xfrm>
           <a:prstGeom prst="rect">
             <a:avLst/>
@@ -20914,7 +21126,7 @@
         </p:nvSpPr>
         <p:spPr>
           <a:xfrm>
-            <a:off x="5934456" y="3200400"/>
+            <a:off x="5934456" y="3593592"/>
             <a:ext cx="146304" cy="146304"/>
           </a:xfrm>
           <a:prstGeom prst="ellipse">
@@ -20936,7 +21148,7 @@
         </p:nvSpPr>
         <p:spPr>
           <a:xfrm>
-            <a:off x="5934456" y="4174236"/>
+            <a:off x="5934456" y="4567428"/>
             <a:ext cx="146304" cy="146304"/>
           </a:xfrm>
           <a:prstGeom prst="ellipse">
@@ -20958,7 +21170,7 @@
         </p:nvSpPr>
         <p:spPr>
           <a:xfrm>
-            <a:off x="5934456" y="5344668"/>
+            <a:off x="5934456" y="5541264"/>
             <a:ext cx="146304" cy="146304"/>
           </a:xfrm>
           <a:prstGeom prst="ellipse">
@@ -21034,7 +21246,7 @@
                 <a:ea typeface="맑은 고딕" pitchFamily="34" charset="-122"/>
                 <a:cs typeface="맑은 고딕" pitchFamily="34" charset="-120"/>
               </a:rPr>
-              <a:t>2020년 ~</a:t>
+              <a:t>2022년</a:t>
             </a:r>
             <a:endParaRPr lang="en-US" sz="900" dirty="0"/>
           </a:p>
@@ -21078,7 +21290,7 @@
                 <a:ea typeface="맑은 고딕" pitchFamily="34" charset="-122"/>
                 <a:cs typeface="맑은 고딕" pitchFamily="34" charset="-120"/>
               </a:rPr>
-              <a:t>FC 자문사 설립 및 운영</a:t>
+              <a:t>설립 준비</a:t>
             </a:r>
             <a:endParaRPr lang="en-US" sz="1200" dirty="0"/>
           </a:p>
@@ -21086,13 +21298,101 @@
       </p:sp>
       <p:sp>
         <p:nvSpPr>
-          <p:cNvPr id="53" name="Shape 50"/>
-          <p:cNvSpPr/>
-          <p:nvPr/>
-        </p:nvSpPr>
-        <p:spPr>
-          <a:xfrm>
-            <a:off x="6227064" y="3150108"/>
+          <p:cNvPr id="53" name="Text 50"/>
+          <p:cNvSpPr/>
+          <p:nvPr/>
+        </p:nvSpPr>
+        <p:spPr>
+          <a:xfrm>
+            <a:off x="6318504" y="3035808"/>
+            <a:ext cx="5187391" cy="196596"/>
+          </a:xfrm>
+          <a:prstGeom prst="rect">
+            <a:avLst/>
+          </a:prstGeom>
+          <a:noFill/>
+          <a:ln>
+            <a:noFill/>
+          </a:ln>
+        </p:spPr>
+        <p:txBody>
+          <a:bodyPr wrap="square" lIns="0" tIns="0" rIns="0" bIns="0" rtlCol="0" anchor="ctr"/>
+          <a:lstStyle/>
+          <a:p>
+            <a:pPr algn="l" indent="0" marL="0">
+              <a:lnSpc>
+                <a:spcPts val="1430"/>
+              </a:lnSpc>
+              <a:buNone/>
+            </a:pPr>
+            <a:r>
+              <a:rPr lang="en-US" sz="950" dirty="0">
+                <a:solidFill>
+                  <a:srgbClr val="1E3457"/>
+                </a:solidFill>
+                <a:latin typeface="맑은 고딕" pitchFamily="34" charset="0"/>
+                <a:ea typeface="맑은 고딕" pitchFamily="34" charset="-122"/>
+                <a:cs typeface="맑은 고딕" pitchFamily="34" charset="-120"/>
+              </a:rPr>
+              <a:t>· 앱 MVP 테스트 · 정식버전 출시 준비</a:t>
+            </a:r>
+            <a:endParaRPr lang="en-US" sz="950" dirty="0"/>
+          </a:p>
+        </p:txBody>
+      </p:sp>
+      <p:sp>
+        <p:nvSpPr>
+          <p:cNvPr id="54" name="Text 51"/>
+          <p:cNvSpPr/>
+          <p:nvPr/>
+        </p:nvSpPr>
+        <p:spPr>
+          <a:xfrm>
+            <a:off x="6318504" y="3232404"/>
+            <a:ext cx="5187391" cy="196596"/>
+          </a:xfrm>
+          <a:prstGeom prst="rect">
+            <a:avLst/>
+          </a:prstGeom>
+          <a:noFill/>
+          <a:ln>
+            <a:noFill/>
+          </a:ln>
+        </p:spPr>
+        <p:txBody>
+          <a:bodyPr wrap="square" lIns="0" tIns="0" rIns="0" bIns="0" rtlCol="0" anchor="ctr"/>
+          <a:lstStyle/>
+          <a:p>
+            <a:pPr algn="l" indent="0" marL="0">
+              <a:lnSpc>
+                <a:spcPts val="1430"/>
+              </a:lnSpc>
+              <a:buNone/>
+            </a:pPr>
+            <a:r>
+              <a:rPr lang="en-US" sz="950" dirty="0">
+                <a:solidFill>
+                  <a:srgbClr val="1E3457"/>
+                </a:solidFill>
+                <a:latin typeface="맑은 고딕" pitchFamily="34" charset="0"/>
+                <a:ea typeface="맑은 고딕" pitchFamily="34" charset="-122"/>
+                <a:cs typeface="맑은 고딕" pitchFamily="34" charset="-120"/>
+              </a:rPr>
+              <a:t>· 매장등록 200건 · 인증매물 1,000건</a:t>
+            </a:r>
+            <a:endParaRPr lang="en-US" sz="950" dirty="0"/>
+          </a:p>
+        </p:txBody>
+      </p:sp>
+      <p:sp>
+        <p:nvSpPr>
+          <p:cNvPr id="55" name="Shape 52"/>
+          <p:cNvSpPr/>
+          <p:nvPr/>
+        </p:nvSpPr>
+        <p:spPr>
+          <a:xfrm>
+            <a:off x="6227064" y="3543300"/>
             <a:ext cx="950976" cy="246888"/>
           </a:xfrm>
           <a:prstGeom prst="roundRect">
@@ -21110,13 +21410,13 @@
       </p:sp>
       <p:sp>
         <p:nvSpPr>
-          <p:cNvPr id="54" name="Text 51"/>
-          <p:cNvSpPr/>
-          <p:nvPr/>
-        </p:nvSpPr>
-        <p:spPr>
-          <a:xfrm>
-            <a:off x="6391656" y="3150108"/>
+          <p:cNvPr id="56" name="Text 53"/>
+          <p:cNvSpPr/>
+          <p:nvPr/>
+        </p:nvSpPr>
+        <p:spPr>
+          <a:xfrm>
+            <a:off x="6391656" y="3543300"/>
             <a:ext cx="621792" cy="246888"/>
           </a:xfrm>
           <a:prstGeom prst="rect">
@@ -21154,13 +21454,13 @@
       </p:sp>
       <p:sp>
         <p:nvSpPr>
-          <p:cNvPr id="55" name="Text 52"/>
-          <p:cNvSpPr/>
-          <p:nvPr/>
-        </p:nvSpPr>
-        <p:spPr>
-          <a:xfrm>
-            <a:off x="7324344" y="3127248"/>
+          <p:cNvPr id="57" name="Text 54"/>
+          <p:cNvSpPr/>
+          <p:nvPr/>
+        </p:nvSpPr>
+        <p:spPr>
+          <a:xfrm>
+            <a:off x="7324344" y="3520440"/>
             <a:ext cx="4181551" cy="292608"/>
           </a:xfrm>
           <a:prstGeom prst="rect">
@@ -21190,97 +21490,9 @@
                 <a:ea typeface="맑은 고딕" pitchFamily="34" charset="-122"/>
                 <a:cs typeface="맑은 고딕" pitchFamily="34" charset="-120"/>
               </a:rPr>
-              <a:t>플랫폼 개발</a:t>
+              <a:t>회사 설립</a:t>
             </a:r>
             <a:endParaRPr lang="en-US" sz="1200" dirty="0"/>
-          </a:p>
-        </p:txBody>
-      </p:sp>
-      <p:sp>
-        <p:nvSpPr>
-          <p:cNvPr id="56" name="Text 53"/>
-          <p:cNvSpPr/>
-          <p:nvPr/>
-        </p:nvSpPr>
-        <p:spPr>
-          <a:xfrm>
-            <a:off x="6318504" y="3419856"/>
-            <a:ext cx="5187391" cy="196596"/>
-          </a:xfrm>
-          <a:prstGeom prst="rect">
-            <a:avLst/>
-          </a:prstGeom>
-          <a:noFill/>
-          <a:ln>
-            <a:noFill/>
-          </a:ln>
-        </p:spPr>
-        <p:txBody>
-          <a:bodyPr wrap="square" lIns="0" tIns="0" rIns="0" bIns="0" rtlCol="0" anchor="ctr"/>
-          <a:lstStyle/>
-          <a:p>
-            <a:pPr algn="l" indent="0" marL="0">
-              <a:lnSpc>
-                <a:spcPts val="1430"/>
-              </a:lnSpc>
-              <a:buNone/>
-            </a:pPr>
-            <a:r>
-              <a:rPr lang="en-US" sz="950" dirty="0">
-                <a:solidFill>
-                  <a:srgbClr val="1E3457"/>
-                </a:solidFill>
-                <a:latin typeface="맑은 고딕" pitchFamily="34" charset="0"/>
-                <a:ea typeface="맑은 고딕" pitchFamily="34" charset="-122"/>
-                <a:cs typeface="맑은 고딕" pitchFamily="34" charset="-120"/>
-              </a:rPr>
-              <a:t>· 내일사장 1.0 버전 출시 · 웹 버전 오픈</a:t>
-            </a:r>
-            <a:endParaRPr lang="en-US" sz="950" dirty="0"/>
-          </a:p>
-        </p:txBody>
-      </p:sp>
-      <p:sp>
-        <p:nvSpPr>
-          <p:cNvPr id="57" name="Text 54"/>
-          <p:cNvSpPr/>
-          <p:nvPr/>
-        </p:nvSpPr>
-        <p:spPr>
-          <a:xfrm>
-            <a:off x="6318504" y="3616452"/>
-            <a:ext cx="5187391" cy="196596"/>
-          </a:xfrm>
-          <a:prstGeom prst="rect">
-            <a:avLst/>
-          </a:prstGeom>
-          <a:noFill/>
-          <a:ln>
-            <a:noFill/>
-          </a:ln>
-        </p:spPr>
-        <p:txBody>
-          <a:bodyPr wrap="square" lIns="0" tIns="0" rIns="0" bIns="0" rtlCol="0" anchor="ctr"/>
-          <a:lstStyle/>
-          <a:p>
-            <a:pPr algn="l" indent="0" marL="0">
-              <a:lnSpc>
-                <a:spcPts val="1430"/>
-              </a:lnSpc>
-              <a:buNone/>
-            </a:pPr>
-            <a:r>
-              <a:rPr lang="en-US" sz="950" dirty="0">
-                <a:solidFill>
-                  <a:srgbClr val="1E3457"/>
-                </a:solidFill>
-                <a:latin typeface="맑은 고딕" pitchFamily="34" charset="0"/>
-                <a:ea typeface="맑은 고딕" pitchFamily="34" charset="-122"/>
-                <a:cs typeface="맑은 고딕" pitchFamily="34" charset="-120"/>
-              </a:rPr>
-              <a:t>· 벤처기업 인증 · 기업부설연구소 설립</a:t>
-            </a:r>
-            <a:endParaRPr lang="en-US" sz="950" dirty="0"/>
           </a:p>
         </p:txBody>
       </p:sp>
@@ -21322,6 +21534,50 @@
                 <a:ea typeface="맑은 고딕" pitchFamily="34" charset="-122"/>
                 <a:cs typeface="맑은 고딕" pitchFamily="34" charset="-120"/>
               </a:rPr>
+              <a:t>· 벤처기업 인증 · 기업부설연구소 설립</a:t>
+            </a:r>
+            <a:endParaRPr lang="en-US" sz="950" dirty="0"/>
+          </a:p>
+        </p:txBody>
+      </p:sp>
+      <p:sp>
+        <p:nvSpPr>
+          <p:cNvPr id="59" name="Text 56"/>
+          <p:cNvSpPr/>
+          <p:nvPr/>
+        </p:nvSpPr>
+        <p:spPr>
+          <a:xfrm>
+            <a:off x="6318504" y="4009644"/>
+            <a:ext cx="5187391" cy="196596"/>
+          </a:xfrm>
+          <a:prstGeom prst="rect">
+            <a:avLst/>
+          </a:prstGeom>
+          <a:noFill/>
+          <a:ln>
+            <a:noFill/>
+          </a:ln>
+        </p:spPr>
+        <p:txBody>
+          <a:bodyPr wrap="square" lIns="0" tIns="0" rIns="0" bIns="0" rtlCol="0" anchor="ctr"/>
+          <a:lstStyle/>
+          <a:p>
+            <a:pPr algn="l" indent="0" marL="0">
+              <a:lnSpc>
+                <a:spcPts val="1430"/>
+              </a:lnSpc>
+              <a:buNone/>
+            </a:pPr>
+            <a:r>
+              <a:rPr lang="en-US" sz="950" dirty="0">
+                <a:solidFill>
+                  <a:srgbClr val="1E3457"/>
+                </a:solidFill>
+                <a:latin typeface="맑은 고딕" pitchFamily="34" charset="0"/>
+                <a:ea typeface="맑은 고딕" pitchFamily="34" charset="-122"/>
+                <a:cs typeface="맑은 고딕" pitchFamily="34" charset="-120"/>
+              </a:rPr>
               <a:t>· 매물인증 기반 부동산 중개방법 특허출원 3건</a:t>
             </a:r>
             <a:endParaRPr lang="en-US" sz="950" dirty="0"/>
@@ -21330,13 +21586,57 @@
       </p:sp>
       <p:sp>
         <p:nvSpPr>
-          <p:cNvPr id="59" name="Shape 56"/>
-          <p:cNvSpPr/>
-          <p:nvPr/>
-        </p:nvSpPr>
-        <p:spPr>
-          <a:xfrm>
-            <a:off x="6227064" y="4123944"/>
+          <p:cNvPr id="60" name="Text 57"/>
+          <p:cNvSpPr/>
+          <p:nvPr/>
+        </p:nvSpPr>
+        <p:spPr>
+          <a:xfrm>
+            <a:off x="6318504" y="4206240"/>
+            <a:ext cx="5187391" cy="196596"/>
+          </a:xfrm>
+          <a:prstGeom prst="rect">
+            <a:avLst/>
+          </a:prstGeom>
+          <a:noFill/>
+          <a:ln>
+            <a:noFill/>
+          </a:ln>
+        </p:spPr>
+        <p:txBody>
+          <a:bodyPr wrap="square" lIns="0" tIns="0" rIns="0" bIns="0" rtlCol="0" anchor="ctr"/>
+          <a:lstStyle/>
+          <a:p>
+            <a:pPr algn="l" indent="0" marL="0">
+              <a:lnSpc>
+                <a:spcPts val="1430"/>
+              </a:lnSpc>
+              <a:buNone/>
+            </a:pPr>
+            <a:r>
+              <a:rPr lang="en-US" sz="950" dirty="0">
+                <a:solidFill>
+                  <a:srgbClr val="1E3457"/>
+                </a:solidFill>
+                <a:latin typeface="맑은 고딕" pitchFamily="34" charset="0"/>
+                <a:ea typeface="맑은 고딕" pitchFamily="34" charset="-122"/>
+                <a:cs typeface="맑은 고딕" pitchFamily="34" charset="-120"/>
+              </a:rPr>
+              <a:t>· 앱 다운로드 3만 돌파</a:t>
+            </a:r>
+            <a:endParaRPr lang="en-US" sz="950" dirty="0"/>
+          </a:p>
+        </p:txBody>
+      </p:sp>
+      <p:sp>
+        <p:nvSpPr>
+          <p:cNvPr id="61" name="Shape 58"/>
+          <p:cNvSpPr/>
+          <p:nvPr/>
+        </p:nvSpPr>
+        <p:spPr>
+          <a:xfrm>
+            <a:off x="6227064" y="4517136"/>
             <a:ext cx="950976" cy="246888"/>
           </a:xfrm>
           <a:prstGeom prst="roundRect">
@@ -21354,13 +21654,13 @@
       </p:sp>
       <p:sp>
         <p:nvSpPr>
-          <p:cNvPr id="60" name="Text 57"/>
-          <p:cNvSpPr/>
-          <p:nvPr/>
-        </p:nvSpPr>
-        <p:spPr>
-          <a:xfrm>
-            <a:off x="6391656" y="4123944"/>
+          <p:cNvPr id="62" name="Text 59"/>
+          <p:cNvSpPr/>
+          <p:nvPr/>
+        </p:nvSpPr>
+        <p:spPr>
+          <a:xfrm>
+            <a:off x="6391656" y="4517136"/>
             <a:ext cx="621792" cy="246888"/>
           </a:xfrm>
           <a:prstGeom prst="rect">
@@ -21398,13 +21698,13 @@
       </p:sp>
       <p:sp>
         <p:nvSpPr>
-          <p:cNvPr id="61" name="Text 58"/>
-          <p:cNvSpPr/>
-          <p:nvPr/>
-        </p:nvSpPr>
-        <p:spPr>
-          <a:xfrm>
-            <a:off x="7324344" y="4101084"/>
+          <p:cNvPr id="63" name="Text 60"/>
+          <p:cNvSpPr/>
+          <p:nvPr/>
+        </p:nvSpPr>
+        <p:spPr>
+          <a:xfrm>
+            <a:off x="7324344" y="4494276"/>
             <a:ext cx="4181551" cy="292608"/>
           </a:xfrm>
           <a:prstGeom prst="rect">
@@ -21434,97 +21734,9 @@
                 <a:ea typeface="맑은 고딕" pitchFamily="34" charset="-122"/>
                 <a:cs typeface="맑은 고딕" pitchFamily="34" charset="-120"/>
               </a:rPr>
-              <a:t>BM모델 구축</a:t>
+              <a:t>BM 다각화</a:t>
             </a:r>
             <a:endParaRPr lang="en-US" sz="1200" dirty="0"/>
-          </a:p>
-        </p:txBody>
-      </p:sp>
-      <p:sp>
-        <p:nvSpPr>
-          <p:cNvPr id="62" name="Text 59"/>
-          <p:cNvSpPr/>
-          <p:nvPr/>
-        </p:nvSpPr>
-        <p:spPr>
-          <a:xfrm>
-            <a:off x="6318504" y="4393692"/>
-            <a:ext cx="5187391" cy="196596"/>
-          </a:xfrm>
-          <a:prstGeom prst="rect">
-            <a:avLst/>
-          </a:prstGeom>
-          <a:noFill/>
-          <a:ln>
-            <a:noFill/>
-          </a:ln>
-        </p:spPr>
-        <p:txBody>
-          <a:bodyPr wrap="square" lIns="0" tIns="0" rIns="0" bIns="0" rtlCol="0" anchor="ctr"/>
-          <a:lstStyle/>
-          <a:p>
-            <a:pPr algn="l" indent="0" marL="0">
-              <a:lnSpc>
-                <a:spcPts val="1430"/>
-              </a:lnSpc>
-              <a:buNone/>
-            </a:pPr>
-            <a:r>
-              <a:rPr lang="en-US" sz="950" dirty="0">
-                <a:solidFill>
-                  <a:srgbClr val="1E3457"/>
-                </a:solidFill>
-                <a:latin typeface="맑은 고딕" pitchFamily="34" charset="0"/>
-                <a:ea typeface="맑은 고딕" pitchFamily="34" charset="-122"/>
-                <a:cs typeface="맑은 고딕" pitchFamily="34" charset="-120"/>
-              </a:rPr>
-              <a:t>· 서브웨이 등 주요 프랜차이즈 약 20곳 브랜드인증관 입점</a:t>
-            </a:r>
-            <a:endParaRPr lang="en-US" sz="950" dirty="0"/>
-          </a:p>
-        </p:txBody>
-      </p:sp>
-      <p:sp>
-        <p:nvSpPr>
-          <p:cNvPr id="63" name="Text 60"/>
-          <p:cNvSpPr/>
-          <p:nvPr/>
-        </p:nvSpPr>
-        <p:spPr>
-          <a:xfrm>
-            <a:off x="6318504" y="4590288"/>
-            <a:ext cx="5187391" cy="196596"/>
-          </a:xfrm>
-          <a:prstGeom prst="rect">
-            <a:avLst/>
-          </a:prstGeom>
-          <a:noFill/>
-          <a:ln>
-            <a:noFill/>
-          </a:ln>
-        </p:spPr>
-        <p:txBody>
-          <a:bodyPr wrap="square" lIns="0" tIns="0" rIns="0" bIns="0" rtlCol="0" anchor="ctr"/>
-          <a:lstStyle/>
-          <a:p>
-            <a:pPr algn="l" indent="0" marL="0">
-              <a:lnSpc>
-                <a:spcPts val="1430"/>
-              </a:lnSpc>
-              <a:buNone/>
-            </a:pPr>
-            <a:r>
-              <a:rPr lang="en-US" sz="950" dirty="0">
-                <a:solidFill>
-                  <a:srgbClr val="1E3457"/>
-                </a:solidFill>
-                <a:latin typeface="맑은 고딕" pitchFamily="34" charset="0"/>
-                <a:ea typeface="맑은 고딕" pitchFamily="34" charset="-122"/>
-                <a:cs typeface="맑은 고딕" pitchFamily="34" charset="-120"/>
-              </a:rPr>
-              <a:t>· 한국프랜차이즈산업협회 공동사업단 설립</a:t>
-            </a:r>
-            <a:endParaRPr lang="en-US" sz="950" dirty="0"/>
           </a:p>
         </p:txBody>
       </p:sp>
@@ -21566,7 +21778,7 @@
                 <a:ea typeface="맑은 고딕" pitchFamily="34" charset="-122"/>
                 <a:cs typeface="맑은 고딕" pitchFamily="34" charset="-120"/>
               </a:rPr>
-              <a:t>· SPC · 삼성웰스토리 · 다날 업무협약 체결</a:t>
+              <a:t>· 초기창업패키지 · R&amp;D 디딤돌사업 선정</a:t>
             </a:r>
             <a:endParaRPr lang="en-US" sz="950" dirty="0"/>
           </a:p>
@@ -21610,7 +21822,7 @@
                 <a:ea typeface="맑은 고딕" pitchFamily="34" charset="-122"/>
                 <a:cs typeface="맑은 고딕" pitchFamily="34" charset="-120"/>
               </a:rPr>
-              <a:t>· 초기창업패키지 · R&amp;D 디딤돌사업 선정</a:t>
+              <a:t>· 한국프랜차이즈산업협회 공동사업단 설립</a:t>
             </a:r>
             <a:endParaRPr lang="en-US" sz="950" dirty="0"/>
           </a:p>
@@ -21618,13 +21830,57 @@
       </p:sp>
       <p:sp>
         <p:nvSpPr>
-          <p:cNvPr id="66" name="Shape 63"/>
-          <p:cNvSpPr/>
-          <p:nvPr/>
-        </p:nvSpPr>
-        <p:spPr>
-          <a:xfrm>
-            <a:off x="6227064" y="5294376"/>
+          <p:cNvPr id="66" name="Text 63"/>
+          <p:cNvSpPr/>
+          <p:nvPr/>
+        </p:nvSpPr>
+        <p:spPr>
+          <a:xfrm>
+            <a:off x="6318504" y="5180076"/>
+            <a:ext cx="5187391" cy="196596"/>
+          </a:xfrm>
+          <a:prstGeom prst="rect">
+            <a:avLst/>
+          </a:prstGeom>
+          <a:noFill/>
+          <a:ln>
+            <a:noFill/>
+          </a:ln>
+        </p:spPr>
+        <p:txBody>
+          <a:bodyPr wrap="square" lIns="0" tIns="0" rIns="0" bIns="0" rtlCol="0" anchor="ctr"/>
+          <a:lstStyle/>
+          <a:p>
+            <a:pPr algn="l" indent="0" marL="0">
+              <a:lnSpc>
+                <a:spcPts val="1430"/>
+              </a:lnSpc>
+              <a:buNone/>
+            </a:pPr>
+            <a:r>
+              <a:rPr lang="en-US" sz="950" dirty="0">
+                <a:solidFill>
+                  <a:srgbClr val="1E3457"/>
+                </a:solidFill>
+                <a:latin typeface="맑은 고딕" pitchFamily="34" charset="0"/>
+                <a:ea typeface="맑은 고딕" pitchFamily="34" charset="-122"/>
+                <a:cs typeface="맑은 고딕" pitchFamily="34" charset="-120"/>
+              </a:rPr>
+              <a:t>· SPC · 삼성웰스토리 · 캐시노트 · 다날 업무협약 체결</a:t>
+            </a:r>
+            <a:endParaRPr lang="en-US" sz="950" dirty="0"/>
+          </a:p>
+        </p:txBody>
+      </p:sp>
+      <p:sp>
+        <p:nvSpPr>
+          <p:cNvPr id="67" name="Shape 64"/>
+          <p:cNvSpPr/>
+          <p:nvPr/>
+        </p:nvSpPr>
+        <p:spPr>
+          <a:xfrm>
+            <a:off x="6227064" y="5490972"/>
             <a:ext cx="950976" cy="246888"/>
           </a:xfrm>
           <a:prstGeom prst="roundRect">
@@ -21642,13 +21898,13 @@
       </p:sp>
       <p:sp>
         <p:nvSpPr>
-          <p:cNvPr id="67" name="Text 64"/>
-          <p:cNvSpPr/>
-          <p:nvPr/>
-        </p:nvSpPr>
-        <p:spPr>
-          <a:xfrm>
-            <a:off x="6391656" y="5294376"/>
+          <p:cNvPr id="68" name="Text 65"/>
+          <p:cNvSpPr/>
+          <p:nvPr/>
+        </p:nvSpPr>
+        <p:spPr>
+          <a:xfrm>
+            <a:off x="6391656" y="5490972"/>
             <a:ext cx="621792" cy="246888"/>
           </a:xfrm>
           <a:prstGeom prst="rect">
@@ -21686,13 +21942,13 @@
       </p:sp>
       <p:sp>
         <p:nvSpPr>
-          <p:cNvPr id="68" name="Text 65"/>
-          <p:cNvSpPr/>
-          <p:nvPr/>
-        </p:nvSpPr>
-        <p:spPr>
-          <a:xfrm>
-            <a:off x="7324344" y="5271516"/>
+          <p:cNvPr id="69" name="Text 66"/>
+          <p:cNvSpPr/>
+          <p:nvPr/>
+        </p:nvSpPr>
+        <p:spPr>
+          <a:xfrm>
+            <a:off x="7324344" y="5468112"/>
             <a:ext cx="4181551" cy="292608"/>
           </a:xfrm>
           <a:prstGeom prst="rect">
@@ -21722,53 +21978,9 @@
                 <a:ea typeface="맑은 고딕" pitchFamily="34" charset="-122"/>
                 <a:cs typeface="맑은 고딕" pitchFamily="34" charset="-120"/>
               </a:rPr>
-              <a:t>BM모델 고도화</a:t>
+              <a:t>투자 유치</a:t>
             </a:r>
             <a:endParaRPr lang="en-US" sz="1200" dirty="0"/>
-          </a:p>
-        </p:txBody>
-      </p:sp>
-      <p:sp>
-        <p:nvSpPr>
-          <p:cNvPr id="69" name="Text 66"/>
-          <p:cNvSpPr/>
-          <p:nvPr/>
-        </p:nvSpPr>
-        <p:spPr>
-          <a:xfrm>
-            <a:off x="6318504" y="5564124"/>
-            <a:ext cx="5187391" cy="196596"/>
-          </a:xfrm>
-          <a:prstGeom prst="rect">
-            <a:avLst/>
-          </a:prstGeom>
-          <a:noFill/>
-          <a:ln>
-            <a:noFill/>
-          </a:ln>
-        </p:spPr>
-        <p:txBody>
-          <a:bodyPr wrap="square" lIns="0" tIns="0" rIns="0" bIns="0" rtlCol="0" anchor="ctr"/>
-          <a:lstStyle/>
-          <a:p>
-            <a:pPr algn="l" indent="0" marL="0">
-              <a:lnSpc>
-                <a:spcPts val="1430"/>
-              </a:lnSpc>
-              <a:buNone/>
-            </a:pPr>
-            <a:r>
-              <a:rPr lang="en-US" sz="950" dirty="0">
-                <a:solidFill>
-                  <a:srgbClr val="1E3457"/>
-                </a:solidFill>
-                <a:latin typeface="맑은 고딕" pitchFamily="34" charset="0"/>
-                <a:ea typeface="맑은 고딕" pitchFamily="34" charset="-122"/>
-                <a:cs typeface="맑은 고딕" pitchFamily="34" charset="-120"/>
-              </a:rPr>
-              <a:t>· 구글 우수 스타트업 선정 (Google 창구)</a:t>
-            </a:r>
-            <a:endParaRPr lang="en-US" sz="950" dirty="0"/>
           </a:p>
         </p:txBody>
       </p:sp>
@@ -21810,7 +22022,7 @@
                 <a:ea typeface="맑은 고딕" pitchFamily="34" charset="-122"/>
                 <a:cs typeface="맑은 고딕" pitchFamily="34" charset="-120"/>
               </a:rPr>
-              <a:t>· TIPS 선정 (중소벤처기업부)</a:t>
+              <a:t>· 구글 창구 프로그램 선정</a:t>
             </a:r>
             <a:endParaRPr lang="en-US" sz="950" dirty="0"/>
           </a:p>
@@ -21854,7 +22066,7 @@
                 <a:ea typeface="맑은 고딕" pitchFamily="34" charset="-122"/>
                 <a:cs typeface="맑은 고딕" pitchFamily="34" charset="-120"/>
               </a:rPr>
-              <a:t>· 디지털 이노베이션 IT플랫폼부문 대상 (과기정통부)</a:t>
+              <a:t>· Seed 투자유치 (씨엔티테크—스테이션케이 제1호 투자조합)</a:t>
             </a:r>
             <a:endParaRPr lang="en-US" sz="950" dirty="0"/>
           </a:p>
@@ -22064,7 +22276,7 @@
                 <a:ea typeface="맑은 고딕" pitchFamily="34" charset="-122"/>
                 <a:cs typeface="맑은 고딕" pitchFamily="34" charset="-120"/>
               </a:rPr>
-              <a:t>세종대학교 겸임교수</a:t>
+              <a:t>가맹 개설 · 영업</a:t>
             </a:r>
             <a:pPr algn="l" indent="0" marL="0">
               <a:lnSpc>
@@ -22081,7 +22293,7 @@
                 <a:ea typeface="맑은 고딕" pitchFamily="34" charset="-122"/>
                 <a:cs typeface="맑은 고딕" pitchFamily="34" charset="-120"/>
               </a:rPr>
-              <a:t>들이 만든</a:t>
+              <a:t>을 본사에서</a:t>
             </a:r>
             <a:endParaRPr lang="en-US" sz="2500" dirty="0"/>
           </a:p>
@@ -22101,7 +22313,7 @@
                 <a:ea typeface="맑은 고딕" pitchFamily="34" charset="-122"/>
                 <a:cs typeface="맑은 고딕" pitchFamily="34" charset="-120"/>
               </a:rPr>
-              <a:t>프랜차이즈 창업 지원 플랫폼</a:t>
+              <a:t>직접 해 본 사람들</a:t>
             </a:r>
             <a:endParaRPr lang="en-US" sz="2500" dirty="0"/>
           </a:p>
@@ -22577,7 +22789,7 @@
                 <a:ea typeface="맑은 고딕" pitchFamily="34" charset="-122"/>
                 <a:cs typeface="맑은 고딕" pitchFamily="34" charset="-120"/>
               </a:rPr>
-              <a:t>대형 프랜차이즈 재직 11년  +  외식 시스템 구축 7년</a:t>
+              <a:t>"가맹을 팔아본 적 있느냐" — 이 질문에 대한 답이 팀 자체입니다</a:t>
             </a:r>
             <a:endParaRPr lang="en-US" sz="980" dirty="0"/>
           </a:p>
@@ -23015,7 +23227,7 @@
         <p:spPr>
           <a:xfrm>
             <a:off x="685800" y="4626864"/>
-            <a:ext cx="3460394" cy="256032"/>
+            <a:ext cx="2554148" cy="256032"/>
           </a:xfrm>
           <a:prstGeom prst="rect">
             <a:avLst/>
@@ -23036,7 +23248,7 @@
               <a:buNone/>
             </a:pPr>
             <a:r>
-              <a:rPr lang="en-US" sz="1250" b="1" dirty="0">
+              <a:rPr lang="en-US" sz="1200" b="1" dirty="0">
                 <a:solidFill>
                   <a:srgbClr val="2868F0"/>
                 </a:solidFill>
@@ -23044,7 +23256,7 @@
                 <a:ea typeface="맑은 고딕" pitchFamily="34" charset="-122"/>
                 <a:cs typeface="맑은 고딕" pitchFamily="34" charset="-120"/>
               </a:rPr>
-              <a:t>천영식  </a:t>
+              <a:t>김우곤  </a:t>
             </a:r>
             <a:pPr algn="l" indent="0" marL="0">
               <a:lnSpc>
@@ -23053,7 +23265,7 @@
               <a:buNone/>
             </a:pPr>
             <a:r>
-              <a:rPr lang="en-US" sz="1250" b="1" dirty="0">
+              <a:rPr lang="en-US" sz="1200" b="1" dirty="0">
                 <a:solidFill>
                   <a:srgbClr val="1E3457"/>
                 </a:solidFill>
@@ -23061,9 +23273,9 @@
                 <a:ea typeface="맑은 고딕" pitchFamily="34" charset="-122"/>
                 <a:cs typeface="맑은 고딕" pitchFamily="34" charset="-120"/>
               </a:rPr>
-              <a:t>CMO</a:t>
-            </a:r>
-            <a:endParaRPr lang="en-US" sz="1250" dirty="0"/>
+              <a:t>COO</a:t>
+            </a:r>
+            <a:endParaRPr lang="en-US" sz="1200" dirty="0"/>
           </a:p>
         </p:txBody>
       </p:sp>
@@ -23076,7 +23288,7 @@
         <p:spPr>
           <a:xfrm>
             <a:off x="685800" y="4901184"/>
-            <a:ext cx="3460394" cy="219456"/>
+            <a:ext cx="2554148" cy="219456"/>
           </a:xfrm>
           <a:prstGeom prst="rect">
             <a:avLst/>
@@ -23097,7 +23309,7 @@
               <a:buNone/>
             </a:pPr>
             <a:r>
-              <a:rPr lang="en-US" sz="930" dirty="0">
+              <a:rPr lang="en-US" sz="900" dirty="0">
                 <a:solidFill>
                   <a:srgbClr val="5C687F"/>
                 </a:solidFill>
@@ -23105,9 +23317,9 @@
                 <a:ea typeface="맑은 고딕" pitchFamily="34" charset="-122"/>
                 <a:cs typeface="맑은 고딕" pitchFamily="34" charset="-120"/>
               </a:rPr>
-              <a:t>프랜차이즈 경영학 석사 · 창업마케팅 저서 다수</a:t>
-            </a:r>
-            <a:endParaRPr lang="en-US" sz="930" dirty="0"/>
+              <a:t>유통학 박사 · 세종대 유통학과 겸임교수</a:t>
+            </a:r>
+            <a:endParaRPr lang="en-US" sz="900" dirty="0"/>
           </a:p>
         </p:txBody>
       </p:sp>
@@ -23120,7 +23332,7 @@
         <p:spPr>
           <a:xfrm>
             <a:off x="685800" y="5175504"/>
-            <a:ext cx="3460394" cy="214884"/>
+            <a:ext cx="2554148" cy="214884"/>
           </a:xfrm>
           <a:prstGeom prst="rect">
             <a:avLst/>
@@ -23141,7 +23353,7 @@
               <a:buNone/>
             </a:pPr>
             <a:r>
-              <a:rPr lang="en-US" sz="930" dirty="0">
+              <a:rPr lang="en-US" sz="900" dirty="0">
                 <a:solidFill>
                   <a:srgbClr val="1E3457"/>
                 </a:solidFill>
@@ -23149,9 +23361,9 @@
                 <a:ea typeface="맑은 고딕" pitchFamily="34" charset="-122"/>
                 <a:cs typeface="맑은 고딕" pitchFamily="34" charset="-120"/>
               </a:rPr>
-              <a:t>현] 경기창조센터 마케팅 전임교수</a:t>
-            </a:r>
-            <a:endParaRPr lang="en-US" sz="930" dirty="0"/>
+              <a:t>전] McDonald's · Subway International B.V</a:t>
+            </a:r>
+            <a:endParaRPr lang="en-US" sz="900" dirty="0"/>
           </a:p>
         </p:txBody>
       </p:sp>
@@ -23164,7 +23376,7 @@
         <p:spPr>
           <a:xfrm>
             <a:off x="685800" y="5390388"/>
-            <a:ext cx="3460394" cy="214884"/>
+            <a:ext cx="2554148" cy="214884"/>
           </a:xfrm>
           <a:prstGeom prst="rect">
             <a:avLst/>
@@ -23185,7 +23397,7 @@
               <a:buNone/>
             </a:pPr>
             <a:r>
-              <a:rPr lang="en-US" sz="930" dirty="0">
+              <a:rPr lang="en-US" sz="900" dirty="0">
                 <a:solidFill>
                   <a:srgbClr val="1E3457"/>
                 </a:solidFill>
@@ -23193,9 +23405,9 @@
                 <a:ea typeface="맑은 고딕" pitchFamily="34" charset="-122"/>
                 <a:cs typeface="맑은 고딕" pitchFamily="34" charset="-120"/>
               </a:rPr>
-              <a:t>전] 한촌 · 육수당 마케팅 본부장</a:t>
-            </a:r>
-            <a:endParaRPr lang="en-US" sz="930" dirty="0"/>
+              <a:t>전] Delivery Hero Korea · CJ푸드빌</a:t>
+            </a:r>
+            <a:endParaRPr lang="en-US" sz="900" dirty="0"/>
           </a:p>
         </p:txBody>
       </p:sp>
@@ -23208,7 +23420,7 @@
         <p:spPr>
           <a:xfrm>
             <a:off x="685800" y="5605272"/>
-            <a:ext cx="3460394" cy="214884"/>
+            <a:ext cx="2554148" cy="214884"/>
           </a:xfrm>
           <a:prstGeom prst="rect">
             <a:avLst/>
@@ -23229,7 +23441,7 @@
               <a:buNone/>
             </a:pPr>
             <a:r>
-              <a:rPr lang="en-US" sz="930" dirty="0">
+              <a:rPr lang="en-US" sz="900" dirty="0">
                 <a:solidFill>
                   <a:srgbClr val="1E3457"/>
                 </a:solidFill>
@@ -23237,66 +23449,22 @@
                 <a:ea typeface="맑은 고딕" pitchFamily="34" charset="-122"/>
                 <a:cs typeface="맑은 고딕" pitchFamily="34" charset="-120"/>
               </a:rPr>
-              <a:t>전] 죠스떡볶이 · 바르다김선생 마케팅 팀장</a:t>
-            </a:r>
-            <a:endParaRPr lang="en-US" sz="930" dirty="0"/>
-          </a:p>
-        </p:txBody>
-      </p:sp>
-      <p:sp>
-        <p:nvSpPr>
-          <p:cNvPr id="37" name="Text 34"/>
-          <p:cNvSpPr/>
-          <p:nvPr/>
-        </p:nvSpPr>
-        <p:spPr>
-          <a:xfrm>
-            <a:off x="685800" y="5820156"/>
-            <a:ext cx="3460394" cy="214884"/>
-          </a:xfrm>
-          <a:prstGeom prst="rect">
-            <a:avLst/>
-          </a:prstGeom>
-          <a:noFill/>
-          <a:ln>
-            <a:noFill/>
-          </a:ln>
-        </p:spPr>
-        <p:txBody>
-          <a:bodyPr wrap="square" lIns="0" tIns="0" rIns="0" bIns="0" rtlCol="0" anchor="ctr"/>
-          <a:lstStyle/>
-          <a:p>
-            <a:pPr algn="l" indent="0" marL="0">
-              <a:lnSpc>
-                <a:spcPts val="1430"/>
-              </a:lnSpc>
-              <a:buNone/>
-            </a:pPr>
-            <a:r>
-              <a:rPr lang="en-US" sz="930" dirty="0">
-                <a:solidFill>
-                  <a:srgbClr val="1E3457"/>
-                </a:solidFill>
-                <a:latin typeface="맑은 고딕" pitchFamily="34" charset="0"/>
-                <a:ea typeface="맑은 고딕" pitchFamily="34" charset="-122"/>
-                <a:cs typeface="맑은 고딕" pitchFamily="34" charset="-120"/>
-              </a:rPr>
-              <a:t>전] 창업마케팅 와이즈컴퍼니 대표</a:t>
-            </a:r>
-            <a:endParaRPr lang="en-US" sz="930" dirty="0"/>
-          </a:p>
-        </p:txBody>
-      </p:sp>
-      <p:sp>
-        <p:nvSpPr>
-          <p:cNvPr id="38" name="Shape 35"/>
-          <p:cNvSpPr/>
-          <p:nvPr/>
-        </p:nvSpPr>
-        <p:spPr>
-          <a:xfrm>
-            <a:off x="4255922" y="4645152"/>
-            <a:ext cx="7315" cy="1225296"/>
+              <a:t>전] SPC 등 외식 프랜차이즈 15년</a:t>
+            </a:r>
+            <a:endParaRPr lang="en-US" sz="900" dirty="0"/>
+          </a:p>
+        </p:txBody>
+      </p:sp>
+      <p:sp>
+        <p:nvSpPr>
+          <p:cNvPr id="37" name="Shape 34"/>
+          <p:cNvSpPr/>
+          <p:nvPr/>
+        </p:nvSpPr>
+        <p:spPr>
+          <a:xfrm>
+            <a:off x="3340532" y="4645152"/>
+            <a:ext cx="7315" cy="1426464"/>
           </a:xfrm>
           <a:prstGeom prst="rect">
             <a:avLst/>
@@ -23311,52 +23479,140 @@
       </p:sp>
       <p:sp>
         <p:nvSpPr>
+          <p:cNvPr id="38" name="Text 35"/>
+          <p:cNvSpPr/>
+          <p:nvPr/>
+        </p:nvSpPr>
+        <p:spPr>
+          <a:xfrm>
+            <a:off x="3441116" y="4626864"/>
+            <a:ext cx="2554148" cy="256032"/>
+          </a:xfrm>
+          <a:prstGeom prst="rect">
+            <a:avLst/>
+          </a:prstGeom>
+          <a:noFill/>
+          <a:ln>
+            <a:noFill/>
+          </a:ln>
+        </p:spPr>
+        <p:txBody>
+          <a:bodyPr wrap="square" lIns="0" tIns="0" rIns="0" bIns="0" rtlCol="0" anchor="ctr"/>
+          <a:lstStyle/>
+          <a:p>
+            <a:pPr algn="l" indent="0" marL="0">
+              <a:lnSpc>
+                <a:spcPts val="1900"/>
+              </a:lnSpc>
+              <a:buNone/>
+            </a:pPr>
+            <a:r>
+              <a:rPr lang="en-US" sz="1200" b="1" dirty="0">
+                <a:solidFill>
+                  <a:srgbClr val="2868F0"/>
+                </a:solidFill>
+                <a:latin typeface="맑은 고딕" pitchFamily="34" charset="0"/>
+                <a:ea typeface="맑은 고딕" pitchFamily="34" charset="-122"/>
+                <a:cs typeface="맑은 고딕" pitchFamily="34" charset="-120"/>
+              </a:rPr>
+              <a:t>천영식  </a:t>
+            </a:r>
+            <a:pPr algn="l" indent="0" marL="0">
+              <a:lnSpc>
+                <a:spcPts val="1900"/>
+              </a:lnSpc>
+              <a:buNone/>
+            </a:pPr>
+            <a:r>
+              <a:rPr lang="en-US" sz="1200" b="1" dirty="0">
+                <a:solidFill>
+                  <a:srgbClr val="1E3457"/>
+                </a:solidFill>
+                <a:latin typeface="맑은 고딕" pitchFamily="34" charset="0"/>
+                <a:ea typeface="맑은 고딕" pitchFamily="34" charset="-122"/>
+                <a:cs typeface="맑은 고딕" pitchFamily="34" charset="-120"/>
+              </a:rPr>
+              <a:t>CMO</a:t>
+            </a:r>
+            <a:endParaRPr lang="en-US" sz="1200" dirty="0"/>
+          </a:p>
+        </p:txBody>
+      </p:sp>
+      <p:sp>
+        <p:nvSpPr>
           <p:cNvPr id="39" name="Text 36"/>
           <p:cNvSpPr/>
           <p:nvPr/>
         </p:nvSpPr>
         <p:spPr>
           <a:xfrm>
-            <a:off x="4365650" y="4626864"/>
-            <a:ext cx="3460394" cy="256032"/>
-          </a:xfrm>
-          <a:prstGeom prst="rect">
-            <a:avLst/>
-          </a:prstGeom>
-          <a:noFill/>
-          <a:ln>
-            <a:noFill/>
-          </a:ln>
-        </p:spPr>
-        <p:txBody>
-          <a:bodyPr wrap="square" lIns="0" tIns="0" rIns="0" bIns="0" rtlCol="0" anchor="ctr"/>
-          <a:lstStyle/>
-          <a:p>
-            <a:pPr algn="l" indent="0" marL="0">
-              <a:lnSpc>
-                <a:spcPts val="1900"/>
-              </a:lnSpc>
-              <a:buNone/>
-            </a:pPr>
-            <a:r>
-              <a:rPr lang="en-US" sz="1250" b="1" dirty="0">
-                <a:solidFill>
-                  <a:srgbClr val="2868F0"/>
-                </a:solidFill>
-                <a:latin typeface="맑은 고딕" pitchFamily="34" charset="0"/>
-                <a:ea typeface="맑은 고딕" pitchFamily="34" charset="-122"/>
-                <a:cs typeface="맑은 고딕" pitchFamily="34" charset="-120"/>
-              </a:rPr>
-              <a:t>김우곤  </a:t>
-            </a:r>
-            <a:pPr algn="l" indent="0" marL="0">
-              <a:lnSpc>
-                <a:spcPts val="1900"/>
-              </a:lnSpc>
-              <a:buNone/>
-            </a:pPr>
-            <a:r>
-              <a:rPr lang="en-US" sz="1250" b="1" dirty="0">
+            <a:off x="3441116" y="4901184"/>
+            <a:ext cx="2554148" cy="219456"/>
+          </a:xfrm>
+          <a:prstGeom prst="rect">
+            <a:avLst/>
+          </a:prstGeom>
+          <a:noFill/>
+          <a:ln>
+            <a:noFill/>
+          </a:ln>
+        </p:spPr>
+        <p:txBody>
+          <a:bodyPr wrap="square" lIns="0" tIns="0" rIns="0" bIns="0" rtlCol="0" anchor="ctr"/>
+          <a:lstStyle/>
+          <a:p>
+            <a:pPr algn="l" indent="0" marL="0">
+              <a:lnSpc>
+                <a:spcPts val="1430"/>
+              </a:lnSpc>
+              <a:buNone/>
+            </a:pPr>
+            <a:r>
+              <a:rPr lang="en-US" sz="900" dirty="0">
+                <a:solidFill>
+                  <a:srgbClr val="5C687F"/>
+                </a:solidFill>
+                <a:latin typeface="맑은 고딕" pitchFamily="34" charset="0"/>
+                <a:ea typeface="맑은 고딕" pitchFamily="34" charset="-122"/>
+                <a:cs typeface="맑은 고딕" pitchFamily="34" charset="-120"/>
+              </a:rPr>
+              <a:t>프랜차이즈 경영학 석사</a:t>
+            </a:r>
+            <a:endParaRPr lang="en-US" sz="900" dirty="0"/>
+          </a:p>
+        </p:txBody>
+      </p:sp>
+      <p:sp>
+        <p:nvSpPr>
+          <p:cNvPr id="40" name="Text 37"/>
+          <p:cNvSpPr/>
+          <p:nvPr/>
+        </p:nvSpPr>
+        <p:spPr>
+          <a:xfrm>
+            <a:off x="3441116" y="5175504"/>
+            <a:ext cx="2554148" cy="214884"/>
+          </a:xfrm>
+          <a:prstGeom prst="rect">
+            <a:avLst/>
+          </a:prstGeom>
+          <a:noFill/>
+          <a:ln>
+            <a:noFill/>
+          </a:ln>
+        </p:spPr>
+        <p:txBody>
+          <a:bodyPr wrap="square" lIns="0" tIns="0" rIns="0" bIns="0" rtlCol="0" anchor="ctr"/>
+          <a:lstStyle/>
+          <a:p>
+            <a:pPr algn="l" indent="0" marL="0">
+              <a:lnSpc>
+                <a:spcPts val="1430"/>
+              </a:lnSpc>
+              <a:buNone/>
+            </a:pPr>
+            <a:r>
+              <a:rPr lang="en-US" sz="900" dirty="0">
                 <a:solidFill>
                   <a:srgbClr val="1E3457"/>
                 </a:solidFill>
@@ -23364,22 +23620,22 @@
                 <a:ea typeface="맑은 고딕" pitchFamily="34" charset="-122"/>
                 <a:cs typeface="맑은 고딕" pitchFamily="34" charset="-120"/>
               </a:rPr>
-              <a:t>COO</a:t>
-            </a:r>
-            <a:endParaRPr lang="en-US" sz="1250" dirty="0"/>
-          </a:p>
-        </p:txBody>
-      </p:sp>
-      <p:sp>
-        <p:nvSpPr>
-          <p:cNvPr id="40" name="Text 37"/>
-          <p:cNvSpPr/>
-          <p:nvPr/>
-        </p:nvSpPr>
-        <p:spPr>
-          <a:xfrm>
-            <a:off x="4365650" y="4901184"/>
-            <a:ext cx="3460394" cy="219456"/>
+              <a:t>현] 경기창조센터 마케팅 전담강사</a:t>
+            </a:r>
+            <a:endParaRPr lang="en-US" sz="900" dirty="0"/>
+          </a:p>
+        </p:txBody>
+      </p:sp>
+      <p:sp>
+        <p:nvSpPr>
+          <p:cNvPr id="41" name="Text 38"/>
+          <p:cNvSpPr/>
+          <p:nvPr/>
+        </p:nvSpPr>
+        <p:spPr>
+          <a:xfrm>
+            <a:off x="3441116" y="5390388"/>
+            <a:ext cx="2554148" cy="214884"/>
           </a:xfrm>
           <a:prstGeom prst="rect">
             <a:avLst/>
@@ -23400,30 +23656,30 @@
               <a:buNone/>
             </a:pPr>
             <a:r>
-              <a:rPr lang="en-US" sz="930" dirty="0">
-                <a:solidFill>
-                  <a:srgbClr val="5C687F"/>
-                </a:solidFill>
-                <a:latin typeface="맑은 고딕" pitchFamily="34" charset="0"/>
-                <a:ea typeface="맑은 고딕" pitchFamily="34" charset="-122"/>
-                <a:cs typeface="맑은 고딕" pitchFamily="34" charset="-120"/>
-              </a:rPr>
-              <a:t>유통학 박사 · 세종대학교 유통학과 겸임교수</a:t>
-            </a:r>
-            <a:endParaRPr lang="en-US" sz="930" dirty="0"/>
-          </a:p>
-        </p:txBody>
-      </p:sp>
-      <p:sp>
-        <p:nvSpPr>
-          <p:cNvPr id="41" name="Text 38"/>
-          <p:cNvSpPr/>
-          <p:nvPr/>
-        </p:nvSpPr>
-        <p:spPr>
-          <a:xfrm>
-            <a:off x="4365650" y="5175504"/>
-            <a:ext cx="3460394" cy="214884"/>
+              <a:rPr lang="en-US" sz="900" dirty="0">
+                <a:solidFill>
+                  <a:srgbClr val="1E3457"/>
+                </a:solidFill>
+                <a:latin typeface="맑은 고딕" pitchFamily="34" charset="0"/>
+                <a:ea typeface="맑은 고딕" pitchFamily="34" charset="-122"/>
+                <a:cs typeface="맑은 고딕" pitchFamily="34" charset="-120"/>
+              </a:rPr>
+              <a:t>전] 한촌 · 육수당 마케팅본부장</a:t>
+            </a:r>
+            <a:endParaRPr lang="en-US" sz="900" dirty="0"/>
+          </a:p>
+        </p:txBody>
+      </p:sp>
+      <p:sp>
+        <p:nvSpPr>
+          <p:cNvPr id="42" name="Text 39"/>
+          <p:cNvSpPr/>
+          <p:nvPr/>
+        </p:nvSpPr>
+        <p:spPr>
+          <a:xfrm>
+            <a:off x="3441116" y="5605272"/>
+            <a:ext cx="2554148" cy="214884"/>
           </a:xfrm>
           <a:prstGeom prst="rect">
             <a:avLst/>
@@ -23444,7 +23700,7 @@
               <a:buNone/>
             </a:pPr>
             <a:r>
-              <a:rPr lang="en-US" sz="930" dirty="0">
+              <a:rPr lang="en-US" sz="900" dirty="0">
                 <a:solidFill>
                   <a:srgbClr val="1E3457"/>
                 </a:solidFill>
@@ -23452,110 +23708,22 @@
                 <a:ea typeface="맑은 고딕" pitchFamily="34" charset="-122"/>
                 <a:cs typeface="맑은 고딕" pitchFamily="34" charset="-120"/>
               </a:rPr>
-              <a:t>전] McDonald's · Subway International B.V</a:t>
-            </a:r>
-            <a:endParaRPr lang="en-US" sz="930" dirty="0"/>
-          </a:p>
-        </p:txBody>
-      </p:sp>
-      <p:sp>
-        <p:nvSpPr>
-          <p:cNvPr id="42" name="Text 39"/>
-          <p:cNvSpPr/>
-          <p:nvPr/>
-        </p:nvSpPr>
-        <p:spPr>
-          <a:xfrm>
-            <a:off x="4365650" y="5390388"/>
-            <a:ext cx="3460394" cy="214884"/>
-          </a:xfrm>
-          <a:prstGeom prst="rect">
-            <a:avLst/>
-          </a:prstGeom>
-          <a:noFill/>
-          <a:ln>
-            <a:noFill/>
-          </a:ln>
-        </p:spPr>
-        <p:txBody>
-          <a:bodyPr wrap="square" lIns="0" tIns="0" rIns="0" bIns="0" rtlCol="0" anchor="ctr"/>
-          <a:lstStyle/>
-          <a:p>
-            <a:pPr algn="l" indent="0" marL="0">
-              <a:lnSpc>
-                <a:spcPts val="1430"/>
-              </a:lnSpc>
-              <a:buNone/>
-            </a:pPr>
-            <a:r>
-              <a:rPr lang="en-US" sz="930" dirty="0">
-                <a:solidFill>
-                  <a:srgbClr val="1E3457"/>
-                </a:solidFill>
-                <a:latin typeface="맑은 고딕" pitchFamily="34" charset="0"/>
-                <a:ea typeface="맑은 고딕" pitchFamily="34" charset="-122"/>
-                <a:cs typeface="맑은 고딕" pitchFamily="34" charset="-120"/>
-              </a:rPr>
-              <a:t>전] Delivery Hero Korea · 투썸플레이스 · 폴바셋</a:t>
-            </a:r>
-            <a:endParaRPr lang="en-US" sz="930" dirty="0"/>
-          </a:p>
-        </p:txBody>
-      </p:sp>
-      <p:sp>
-        <p:nvSpPr>
-          <p:cNvPr id="43" name="Text 40"/>
-          <p:cNvSpPr/>
-          <p:nvPr/>
-        </p:nvSpPr>
-        <p:spPr>
-          <a:xfrm>
-            <a:off x="4365650" y="5605272"/>
-            <a:ext cx="3460394" cy="214884"/>
-          </a:xfrm>
-          <a:prstGeom prst="rect">
-            <a:avLst/>
-          </a:prstGeom>
-          <a:noFill/>
-          <a:ln>
-            <a:noFill/>
-          </a:ln>
-        </p:spPr>
-        <p:txBody>
-          <a:bodyPr wrap="square" lIns="0" tIns="0" rIns="0" bIns="0" rtlCol="0" anchor="ctr"/>
-          <a:lstStyle/>
-          <a:p>
-            <a:pPr algn="l" indent="0" marL="0">
-              <a:lnSpc>
-                <a:spcPts val="1430"/>
-              </a:lnSpc>
-              <a:buNone/>
-            </a:pPr>
-            <a:r>
-              <a:rPr lang="en-US" sz="930" dirty="0">
-                <a:solidFill>
-                  <a:srgbClr val="1E3457"/>
-                </a:solidFill>
-                <a:latin typeface="맑은 고딕" pitchFamily="34" charset="0"/>
-                <a:ea typeface="맑은 고딕" pitchFamily="34" charset="-122"/>
-                <a:cs typeface="맑은 고딕" pitchFamily="34" charset="-120"/>
-              </a:rPr>
-              <a:t>전] SPC 등 외식 프랜차이즈 15년</a:t>
-            </a:r>
-            <a:endParaRPr lang="en-US" sz="930" dirty="0"/>
-          </a:p>
-        </p:txBody>
-      </p:sp>
-      <p:sp>
-        <p:nvSpPr>
-          <p:cNvPr id="44" name="Shape 41"/>
-          <p:cNvSpPr/>
-          <p:nvPr/>
-        </p:nvSpPr>
-        <p:spPr>
-          <a:xfrm>
-            <a:off x="7935773" y="4645152"/>
-            <a:ext cx="7315" cy="1225296"/>
+              <a:t>전] 죠스떡볶이 · 바르다김선생 마케팅팀장</a:t>
+            </a:r>
+            <a:endParaRPr lang="en-US" sz="900" dirty="0"/>
+          </a:p>
+        </p:txBody>
+      </p:sp>
+      <p:sp>
+        <p:nvSpPr>
+          <p:cNvPr id="43" name="Shape 40"/>
+          <p:cNvSpPr/>
+          <p:nvPr/>
+        </p:nvSpPr>
+        <p:spPr>
+          <a:xfrm>
+            <a:off x="6095848" y="4645152"/>
+            <a:ext cx="7315" cy="1426464"/>
           </a:xfrm>
           <a:prstGeom prst="rect">
             <a:avLst/>
@@ -23570,14 +23738,317 @@
       </p:sp>
       <p:sp>
         <p:nvSpPr>
+          <p:cNvPr id="44" name="Text 41"/>
+          <p:cNvSpPr/>
+          <p:nvPr/>
+        </p:nvSpPr>
+        <p:spPr>
+          <a:xfrm>
+            <a:off x="6196432" y="4626864"/>
+            <a:ext cx="2554148" cy="256032"/>
+          </a:xfrm>
+          <a:prstGeom prst="rect">
+            <a:avLst/>
+          </a:prstGeom>
+          <a:noFill/>
+          <a:ln>
+            <a:noFill/>
+          </a:ln>
+        </p:spPr>
+        <p:txBody>
+          <a:bodyPr wrap="square" lIns="0" tIns="0" rIns="0" bIns="0" rtlCol="0" anchor="ctr"/>
+          <a:lstStyle/>
+          <a:p>
+            <a:pPr algn="l" indent="0" marL="0">
+              <a:lnSpc>
+                <a:spcPts val="1900"/>
+              </a:lnSpc>
+              <a:buNone/>
+            </a:pPr>
+            <a:r>
+              <a:rPr lang="en-US" sz="1200" b="1" dirty="0">
+                <a:solidFill>
+                  <a:srgbClr val="2868F0"/>
+                </a:solidFill>
+                <a:latin typeface="맑은 고딕" pitchFamily="34" charset="0"/>
+                <a:ea typeface="맑은 고딕" pitchFamily="34" charset="-122"/>
+                <a:cs typeface="맑은 고딕" pitchFamily="34" charset="-120"/>
+              </a:rPr>
+              <a:t>엄태관  </a:t>
+            </a:r>
+            <a:pPr algn="l" indent="0" marL="0">
+              <a:lnSpc>
+                <a:spcPts val="1900"/>
+              </a:lnSpc>
+              <a:buNone/>
+            </a:pPr>
+            <a:r>
+              <a:rPr lang="en-US" sz="1200" b="1" dirty="0">
+                <a:solidFill>
+                  <a:srgbClr val="1E3457"/>
+                </a:solidFill>
+                <a:latin typeface="맑은 고딕" pitchFamily="34" charset="0"/>
+                <a:ea typeface="맑은 고딕" pitchFamily="34" charset="-122"/>
+                <a:cs typeface="맑은 고딕" pitchFamily="34" charset="-120"/>
+              </a:rPr>
+              <a:t>팀장</a:t>
+            </a:r>
+            <a:endParaRPr lang="en-US" sz="1200" dirty="0"/>
+          </a:p>
+        </p:txBody>
+      </p:sp>
+      <p:sp>
+        <p:nvSpPr>
           <p:cNvPr id="45" name="Text 42"/>
           <p:cNvSpPr/>
           <p:nvPr/>
         </p:nvSpPr>
         <p:spPr>
           <a:xfrm>
-            <a:off x="8045501" y="4626864"/>
-            <a:ext cx="3460394" cy="256032"/>
+            <a:off x="6196432" y="4901184"/>
+            <a:ext cx="2554148" cy="219456"/>
+          </a:xfrm>
+          <a:prstGeom prst="rect">
+            <a:avLst/>
+          </a:prstGeom>
+          <a:noFill/>
+          <a:ln>
+            <a:noFill/>
+          </a:ln>
+        </p:spPr>
+        <p:txBody>
+          <a:bodyPr wrap="square" lIns="0" tIns="0" rIns="0" bIns="0" rtlCol="0" anchor="ctr"/>
+          <a:lstStyle/>
+          <a:p>
+            <a:pPr algn="l" indent="0" marL="0">
+              <a:lnSpc>
+                <a:spcPts val="1430"/>
+              </a:lnSpc>
+              <a:buNone/>
+            </a:pPr>
+            <a:r>
+              <a:rPr lang="en-US" sz="900" dirty="0">
+                <a:solidFill>
+                  <a:srgbClr val="5C687F"/>
+                </a:solidFill>
+                <a:latin typeface="맑은 고딕" pitchFamily="34" charset="0"/>
+                <a:ea typeface="맑은 고딕" pitchFamily="34" charset="-122"/>
+                <a:cs typeface="맑은 고딕" pitchFamily="34" charset="-120"/>
+              </a:rPr>
+              <a:t>프랜차이즈 경영학 석사</a:t>
+            </a:r>
+            <a:endParaRPr lang="en-US" sz="900" dirty="0"/>
+          </a:p>
+        </p:txBody>
+      </p:sp>
+      <p:sp>
+        <p:nvSpPr>
+          <p:cNvPr id="46" name="Text 43"/>
+          <p:cNvSpPr/>
+          <p:nvPr/>
+        </p:nvSpPr>
+        <p:spPr>
+          <a:xfrm>
+            <a:off x="6196432" y="5175504"/>
+            <a:ext cx="2554148" cy="214884"/>
+          </a:xfrm>
+          <a:prstGeom prst="rect">
+            <a:avLst/>
+          </a:prstGeom>
+          <a:noFill/>
+          <a:ln>
+            <a:noFill/>
+          </a:ln>
+        </p:spPr>
+        <p:txBody>
+          <a:bodyPr wrap="square" lIns="0" tIns="0" rIns="0" bIns="0" rtlCol="0" anchor="ctr"/>
+          <a:lstStyle/>
+          <a:p>
+            <a:pPr algn="l" indent="0" marL="0">
+              <a:lnSpc>
+                <a:spcPts val="1430"/>
+              </a:lnSpc>
+              <a:buNone/>
+            </a:pPr>
+            <a:r>
+              <a:rPr lang="en-US" sz="900" dirty="0">
+                <a:solidFill>
+                  <a:srgbClr val="1E3457"/>
+                </a:solidFill>
+                <a:latin typeface="맑은 고딕" pitchFamily="34" charset="0"/>
+                <a:ea typeface="맑은 고딕" pitchFamily="34" charset="-122"/>
+                <a:cs typeface="맑은 고딕" pitchFamily="34" charset="-120"/>
+              </a:rPr>
+              <a:t>현] 학점은행 기관운영교수</a:t>
+            </a:r>
+            <a:endParaRPr lang="en-US" sz="900" dirty="0"/>
+          </a:p>
+        </p:txBody>
+      </p:sp>
+      <p:sp>
+        <p:nvSpPr>
+          <p:cNvPr id="47" name="Text 44"/>
+          <p:cNvSpPr/>
+          <p:nvPr/>
+        </p:nvSpPr>
+        <p:spPr>
+          <a:xfrm>
+            <a:off x="6196432" y="5390388"/>
+            <a:ext cx="2554148" cy="214884"/>
+          </a:xfrm>
+          <a:prstGeom prst="rect">
+            <a:avLst/>
+          </a:prstGeom>
+          <a:noFill/>
+          <a:ln>
+            <a:noFill/>
+          </a:ln>
+        </p:spPr>
+        <p:txBody>
+          <a:bodyPr wrap="square" lIns="0" tIns="0" rIns="0" bIns="0" rtlCol="0" anchor="ctr"/>
+          <a:lstStyle/>
+          <a:p>
+            <a:pPr algn="l" indent="0" marL="0">
+              <a:lnSpc>
+                <a:spcPts val="1430"/>
+              </a:lnSpc>
+              <a:buNone/>
+            </a:pPr>
+            <a:r>
+              <a:rPr lang="en-US" sz="900" dirty="0">
+                <a:solidFill>
+                  <a:srgbClr val="1E3457"/>
+                </a:solidFill>
+                <a:latin typeface="맑은 고딕" pitchFamily="34" charset="0"/>
+                <a:ea typeface="맑은 고딕" pitchFamily="34" charset="-122"/>
+                <a:cs typeface="맑은 고딕" pitchFamily="34" charset="-120"/>
+              </a:rPr>
+              <a:t>전] 아딸 가맹사업본부</a:t>
+            </a:r>
+            <a:endParaRPr lang="en-US" sz="900" dirty="0"/>
+          </a:p>
+        </p:txBody>
+      </p:sp>
+      <p:sp>
+        <p:nvSpPr>
+          <p:cNvPr id="48" name="Text 45"/>
+          <p:cNvSpPr/>
+          <p:nvPr/>
+        </p:nvSpPr>
+        <p:spPr>
+          <a:xfrm>
+            <a:off x="6196432" y="5605272"/>
+            <a:ext cx="2554148" cy="214884"/>
+          </a:xfrm>
+          <a:prstGeom prst="rect">
+            <a:avLst/>
+          </a:prstGeom>
+          <a:noFill/>
+          <a:ln>
+            <a:noFill/>
+          </a:ln>
+        </p:spPr>
+        <p:txBody>
+          <a:bodyPr wrap="square" lIns="0" tIns="0" rIns="0" bIns="0" rtlCol="0" anchor="ctr"/>
+          <a:lstStyle/>
+          <a:p>
+            <a:pPr algn="l" indent="0" marL="0">
+              <a:lnSpc>
+                <a:spcPts val="1430"/>
+              </a:lnSpc>
+              <a:buNone/>
+            </a:pPr>
+            <a:r>
+              <a:rPr lang="en-US" sz="900" dirty="0">
+                <a:solidFill>
+                  <a:srgbClr val="1E3457"/>
+                </a:solidFill>
+                <a:latin typeface="맑은 고딕" pitchFamily="34" charset="0"/>
+                <a:ea typeface="맑은 고딕" pitchFamily="34" charset="-122"/>
+                <a:cs typeface="맑은 고딕" pitchFamily="34" charset="-120"/>
+              </a:rPr>
+              <a:t>전] 셀렉토커피 영업팀장</a:t>
+            </a:r>
+            <a:endParaRPr lang="en-US" sz="900" dirty="0"/>
+          </a:p>
+        </p:txBody>
+      </p:sp>
+      <p:sp>
+        <p:nvSpPr>
+          <p:cNvPr id="49" name="Text 46"/>
+          <p:cNvSpPr/>
+          <p:nvPr/>
+        </p:nvSpPr>
+        <p:spPr>
+          <a:xfrm>
+            <a:off x="6196432" y="5820156"/>
+            <a:ext cx="2554148" cy="214884"/>
+          </a:xfrm>
+          <a:prstGeom prst="rect">
+            <a:avLst/>
+          </a:prstGeom>
+          <a:noFill/>
+          <a:ln>
+            <a:noFill/>
+          </a:ln>
+        </p:spPr>
+        <p:txBody>
+          <a:bodyPr wrap="square" lIns="0" tIns="0" rIns="0" bIns="0" rtlCol="0" anchor="ctr"/>
+          <a:lstStyle/>
+          <a:p>
+            <a:pPr algn="l" indent="0" marL="0">
+              <a:lnSpc>
+                <a:spcPts val="1430"/>
+              </a:lnSpc>
+              <a:buNone/>
+            </a:pPr>
+            <a:r>
+              <a:rPr lang="en-US" sz="900" dirty="0">
+                <a:solidFill>
+                  <a:srgbClr val="1E3457"/>
+                </a:solidFill>
+                <a:latin typeface="맑은 고딕" pitchFamily="34" charset="0"/>
+                <a:ea typeface="맑은 고딕" pitchFamily="34" charset="-122"/>
+                <a:cs typeface="맑은 고딕" pitchFamily="34" charset="-120"/>
+              </a:rPr>
+              <a:t>전] 이삭토스트 영업파트장</a:t>
+            </a:r>
+            <a:endParaRPr lang="en-US" sz="900" dirty="0"/>
+          </a:p>
+        </p:txBody>
+      </p:sp>
+      <p:sp>
+        <p:nvSpPr>
+          <p:cNvPr id="50" name="Shape 47"/>
+          <p:cNvSpPr/>
+          <p:nvPr/>
+        </p:nvSpPr>
+        <p:spPr>
+          <a:xfrm>
+            <a:off x="8851163" y="4645152"/>
+            <a:ext cx="7315" cy="1426464"/>
+          </a:xfrm>
+          <a:prstGeom prst="rect">
+            <a:avLst/>
+          </a:prstGeom>
+          <a:solidFill>
+            <a:srgbClr val="DFE3EA"/>
+          </a:solidFill>
+          <a:ln>
+            <a:noFill/>
+          </a:ln>
+        </p:spPr>
+      </p:sp>
+      <p:sp>
+        <p:nvSpPr>
+          <p:cNvPr id="51" name="Text 48"/>
+          <p:cNvSpPr/>
+          <p:nvPr/>
+        </p:nvSpPr>
+        <p:spPr>
+          <a:xfrm>
+            <a:off x="8951747" y="4626864"/>
+            <a:ext cx="2554148" cy="256032"/>
           </a:xfrm>
           <a:prstGeom prst="rect">
             <a:avLst/>
@@ -23598,7 +24069,7 @@
               <a:buNone/>
             </a:pPr>
             <a:r>
-              <a:rPr lang="en-US" sz="1250" b="1" dirty="0">
+              <a:rPr lang="en-US" sz="1200" b="1" dirty="0">
                 <a:solidFill>
                   <a:srgbClr val="2868F0"/>
                 </a:solidFill>
@@ -23606,7 +24077,7 @@
                 <a:ea typeface="맑은 고딕" pitchFamily="34" charset="-122"/>
                 <a:cs typeface="맑은 고딕" pitchFamily="34" charset="-120"/>
               </a:rPr>
-              <a:t>김준영  </a:t>
+              <a:t>김호병  </a:t>
             </a:r>
             <a:pPr algn="l" indent="0" marL="0">
               <a:lnSpc>
@@ -23615,7 +24086,7 @@
               <a:buNone/>
             </a:pPr>
             <a:r>
-              <a:rPr lang="en-US" sz="1250" b="1" dirty="0">
+              <a:rPr lang="en-US" sz="1200" b="1" dirty="0">
                 <a:solidFill>
                   <a:srgbClr val="1E3457"/>
                 </a:solidFill>
@@ -23623,22 +24094,22 @@
                 <a:ea typeface="맑은 고딕" pitchFamily="34" charset="-122"/>
                 <a:cs typeface="맑은 고딕" pitchFamily="34" charset="-120"/>
               </a:rPr>
-              <a:t>CSO</a:t>
-            </a:r>
-            <a:endParaRPr lang="en-US" sz="1250" dirty="0"/>
-          </a:p>
-        </p:txBody>
-      </p:sp>
-      <p:sp>
-        <p:nvSpPr>
-          <p:cNvPr id="46" name="Text 43"/>
-          <p:cNvSpPr/>
-          <p:nvPr/>
-        </p:nvSpPr>
-        <p:spPr>
-          <a:xfrm>
-            <a:off x="8045501" y="4901184"/>
-            <a:ext cx="3460394" cy="219456"/>
+              <a:t>팀장</a:t>
+            </a:r>
+            <a:endParaRPr lang="en-US" sz="1200" dirty="0"/>
+          </a:p>
+        </p:txBody>
+      </p:sp>
+      <p:sp>
+        <p:nvSpPr>
+          <p:cNvPr id="52" name="Text 49"/>
+          <p:cNvSpPr/>
+          <p:nvPr/>
+        </p:nvSpPr>
+        <p:spPr>
+          <a:xfrm>
+            <a:off x="8951747" y="4901184"/>
+            <a:ext cx="2554148" cy="219456"/>
           </a:xfrm>
           <a:prstGeom prst="rect">
             <a:avLst/>
@@ -23659,7 +24130,7 @@
               <a:buNone/>
             </a:pPr>
             <a:r>
-              <a:rPr lang="en-US" sz="930" dirty="0">
+              <a:rPr lang="en-US" sz="900" dirty="0">
                 <a:solidFill>
                   <a:srgbClr val="5C687F"/>
                 </a:solidFill>
@@ -23667,22 +24138,22 @@
                 <a:ea typeface="맑은 고딕" pitchFamily="34" charset="-122"/>
                 <a:cs typeface="맑은 고딕" pitchFamily="34" charset="-120"/>
               </a:rPr>
-              <a:t>호텔관광경영학 박사 · 세종대학교 유통학과 겸임교수</a:t>
-            </a:r>
-            <a:endParaRPr lang="en-US" sz="930" dirty="0"/>
-          </a:p>
-        </p:txBody>
-      </p:sp>
-      <p:sp>
-        <p:nvSpPr>
-          <p:cNvPr id="47" name="Text 44"/>
-          <p:cNvSpPr/>
-          <p:nvPr/>
-        </p:nvSpPr>
-        <p:spPr>
-          <a:xfrm>
-            <a:off x="8045501" y="5175504"/>
-            <a:ext cx="3460394" cy="214884"/>
+              <a:t>공인중개사</a:t>
+            </a:r>
+            <a:endParaRPr lang="en-US" sz="900" dirty="0"/>
+          </a:p>
+        </p:txBody>
+      </p:sp>
+      <p:sp>
+        <p:nvSpPr>
+          <p:cNvPr id="53" name="Text 50"/>
+          <p:cNvSpPr/>
+          <p:nvPr/>
+        </p:nvSpPr>
+        <p:spPr>
+          <a:xfrm>
+            <a:off x="8951747" y="5175504"/>
+            <a:ext cx="2554148" cy="214884"/>
           </a:xfrm>
           <a:prstGeom prst="rect">
             <a:avLst/>
@@ -23703,7 +24174,7 @@
               <a:buNone/>
             </a:pPr>
             <a:r>
-              <a:rPr lang="en-US" sz="930" dirty="0">
+              <a:rPr lang="en-US" sz="900" dirty="0">
                 <a:solidFill>
                   <a:srgbClr val="1E3457"/>
                 </a:solidFill>
@@ -23711,22 +24182,22 @@
                 <a:ea typeface="맑은 고딕" pitchFamily="34" charset="-122"/>
                 <a:cs typeface="맑은 고딕" pitchFamily="34" charset="-120"/>
               </a:rPr>
-              <a:t>현] 한국외식협회 전문위원</a:t>
-            </a:r>
-            <a:endParaRPr lang="en-US" sz="930" dirty="0"/>
-          </a:p>
-        </p:txBody>
-      </p:sp>
-      <p:sp>
-        <p:nvSpPr>
-          <p:cNvPr id="48" name="Text 45"/>
-          <p:cNvSpPr/>
-          <p:nvPr/>
-        </p:nvSpPr>
-        <p:spPr>
-          <a:xfrm>
-            <a:off x="8045501" y="5390388"/>
-            <a:ext cx="3460394" cy="214884"/>
+              <a:t>브랜드 개설 및 영업 담당</a:t>
+            </a:r>
+            <a:endParaRPr lang="en-US" sz="900" dirty="0"/>
+          </a:p>
+        </p:txBody>
+      </p:sp>
+      <p:sp>
+        <p:nvSpPr>
+          <p:cNvPr id="54" name="Text 51"/>
+          <p:cNvSpPr/>
+          <p:nvPr/>
+        </p:nvSpPr>
+        <p:spPr>
+          <a:xfrm>
+            <a:off x="8951747" y="5390388"/>
+            <a:ext cx="2554148" cy="214884"/>
           </a:xfrm>
           <a:prstGeom prst="rect">
             <a:avLst/>
@@ -23747,7 +24218,7 @@
               <a:buNone/>
             </a:pPr>
             <a:r>
-              <a:rPr lang="en-US" sz="930" dirty="0">
+              <a:rPr lang="en-US" sz="900" dirty="0">
                 <a:solidFill>
                   <a:srgbClr val="1E3457"/>
                 </a:solidFill>
@@ -23755,97 +24226,9 @@
                 <a:ea typeface="맑은 고딕" pitchFamily="34" charset="-122"/>
                 <a:cs typeface="맑은 고딕" pitchFamily="34" charset="-120"/>
               </a:rPr>
-              <a:t>전] 제너시스그룹 BBQ OSM팀 실무 관리자</a:t>
-            </a:r>
-            <a:endParaRPr lang="en-US" sz="930" dirty="0"/>
-          </a:p>
-        </p:txBody>
-      </p:sp>
-      <p:sp>
-        <p:nvSpPr>
-          <p:cNvPr id="49" name="Text 46"/>
-          <p:cNvSpPr/>
-          <p:nvPr/>
-        </p:nvSpPr>
-        <p:spPr>
-          <a:xfrm>
-            <a:off x="8045501" y="5605272"/>
-            <a:ext cx="3460394" cy="214884"/>
-          </a:xfrm>
-          <a:prstGeom prst="rect">
-            <a:avLst/>
-          </a:prstGeom>
-          <a:noFill/>
-          <a:ln>
-            <a:noFill/>
-          </a:ln>
-        </p:spPr>
-        <p:txBody>
-          <a:bodyPr wrap="square" lIns="0" tIns="0" rIns="0" bIns="0" rtlCol="0" anchor="ctr"/>
-          <a:lstStyle/>
-          <a:p>
-            <a:pPr algn="l" indent="0" marL="0">
-              <a:lnSpc>
-                <a:spcPts val="1430"/>
-              </a:lnSpc>
-              <a:buNone/>
-            </a:pPr>
-            <a:r>
-              <a:rPr lang="en-US" sz="930" dirty="0">
-                <a:solidFill>
-                  <a:srgbClr val="1E3457"/>
-                </a:solidFill>
-                <a:latin typeface="맑은 고딕" pitchFamily="34" charset="0"/>
-                <a:ea typeface="맑은 고딕" pitchFamily="34" charset="-122"/>
-                <a:cs typeface="맑은 고딕" pitchFamily="34" charset="-120"/>
-              </a:rPr>
-              <a:t>전] 한국프랜차이즈학회 간사</a:t>
-            </a:r>
-            <a:endParaRPr lang="en-US" sz="930" dirty="0"/>
-          </a:p>
-        </p:txBody>
-      </p:sp>
-      <p:sp>
-        <p:nvSpPr>
-          <p:cNvPr id="50" name="Text 47"/>
-          <p:cNvSpPr/>
-          <p:nvPr/>
-        </p:nvSpPr>
-        <p:spPr>
-          <a:xfrm>
-            <a:off x="8045501" y="5820156"/>
-            <a:ext cx="3460394" cy="214884"/>
-          </a:xfrm>
-          <a:prstGeom prst="rect">
-            <a:avLst/>
-          </a:prstGeom>
-          <a:noFill/>
-          <a:ln>
-            <a:noFill/>
-          </a:ln>
-        </p:spPr>
-        <p:txBody>
-          <a:bodyPr wrap="square" lIns="0" tIns="0" rIns="0" bIns="0" rtlCol="0" anchor="ctr"/>
-          <a:lstStyle/>
-          <a:p>
-            <a:pPr algn="l" indent="0" marL="0">
-              <a:lnSpc>
-                <a:spcPts val="1430"/>
-              </a:lnSpc>
-              <a:buNone/>
-            </a:pPr>
-            <a:r>
-              <a:rPr lang="en-US" sz="930" dirty="0">
-                <a:solidFill>
-                  <a:srgbClr val="1E3457"/>
-                </a:solidFill>
-                <a:latin typeface="맑은 고딕" pitchFamily="34" charset="0"/>
-                <a:ea typeface="맑은 고딕" pitchFamily="34" charset="-122"/>
-                <a:cs typeface="맑은 고딕" pitchFamily="34" charset="-120"/>
-              </a:rPr>
-              <a:t>전] 알파랩 2.0 수석연구원</a:t>
-            </a:r>
-            <a:endParaRPr lang="en-US" sz="930" dirty="0"/>
+              <a:t>전] 창업컨설팅 5년 이상</a:t>
+            </a:r>
+            <a:endParaRPr lang="en-US" sz="900" dirty="0"/>
           </a:p>
         </p:txBody>
       </p:sp>
@@ -26005,7 +26388,7 @@
                 <a:ea typeface="맑은 고딕" pitchFamily="34" charset="-122"/>
                 <a:cs typeface="맑은 고딕" pitchFamily="34" charset="-120"/>
               </a:rPr>
-              <a:t>33떡볶이 강동역점 — 임대차 · 가맹 예약 완료 · 주간 실매출 2,150 / 1,500만원 2주 실측</a:t>
+              <a:t>33떡볶이 강동역점 — 임대차 · 가맹 예약 완료 · 주간 실매출 2,150만원 / 1,500만원</a:t>
             </a:r>
             <a:endParaRPr lang="en-US" sz="1200" dirty="0"/>
           </a:p>
@@ -26446,7 +26829,7 @@
             </a:avLst>
           </a:prstGeom>
           <a:solidFill>
-            <a:srgbClr val="E7EFFA"/>
+            <a:srgbClr val="F4F7FD"/>
           </a:solidFill>
           <a:ln>
             <a:noFill/>
@@ -26648,7 +27031,7 @@
             </a:avLst>
           </a:prstGeom>
           <a:solidFill>
-            <a:srgbClr val="E7EFFA"/>
+            <a:srgbClr val="F4F7FD"/>
           </a:solidFill>
           <a:ln>
             <a:noFill/>
@@ -26874,7 +27257,7 @@
             </a:avLst>
           </a:prstGeom>
           <a:solidFill>
-            <a:srgbClr val="E7EFFA"/>
+            <a:srgbClr val="F4F7FD"/>
           </a:solidFill>
           <a:ln>
             <a:noFill/>
@@ -28415,7 +28798,7 @@
                 <a:ea typeface="맑은 고딕" pitchFamily="34" charset="-122"/>
                 <a:cs typeface="맑은 고딕" pitchFamily="34" charset="-120"/>
               </a:rPr>
-              <a:t>결정 지연 구간별 </a:t>
+              <a:t>결정 단계마다 </a:t>
             </a:r>
             <a:pPr algn="l" indent="0" marL="0">
               <a:lnSpc>
@@ -28493,7 +28876,7 @@
                 <a:ea typeface="맑은 고딕" pitchFamily="34" charset="-122"/>
                 <a:cs typeface="맑은 고딕" pitchFamily="34" charset="-120"/>
               </a:rPr>
-              <a:t>홈택스 신고자료 연동 · 검증 리포트 · 상권 분석 · 정보공개서 D-day까지 이미 운영 중인 화면</a:t>
+              <a:t>상담 단계마다 근거 문서가 남습니다 — 홈택스 연동 · 검증 리포트 · 상권 분석 · 정보공개서 D-day</a:t>
             </a:r>
             <a:endParaRPr lang="en-US" sz="1300" dirty="0"/>
           </a:p>
@@ -28583,7 +28966,7 @@
         </p:blipFill>
         <p:spPr>
           <a:xfrm>
-            <a:off x="777240" y="3952629"/>
+            <a:off x="777240" y="3559141"/>
             <a:ext cx="2343836" cy="1389296"/>
           </a:xfrm>
           <a:prstGeom prst="rect">
@@ -28809,7 +29192,7 @@
         </p:blipFill>
         <p:spPr>
           <a:xfrm>
-            <a:off x="3541700" y="3341638"/>
+            <a:off x="3541700" y="3253645"/>
             <a:ext cx="2343836" cy="2000287"/>
           </a:xfrm>
           <a:prstGeom prst="rect">
@@ -29035,7 +29418,7 @@
         </p:blipFill>
         <p:spPr>
           <a:xfrm>
-            <a:off x="6306160" y="3859793"/>
+            <a:off x="6306160" y="3512723"/>
             <a:ext cx="2343836" cy="1482131"/>
           </a:xfrm>
           <a:prstGeom prst="rect">
@@ -29261,7 +29644,7 @@
         </p:blipFill>
         <p:spPr>
           <a:xfrm>
-            <a:off x="9070619" y="3721921"/>
+            <a:off x="9070619" y="3443787"/>
             <a:ext cx="2343836" cy="1620004"/>
           </a:xfrm>
           <a:prstGeom prst="rect">
@@ -30344,8 +30727,8 @@
         </p:nvSpPr>
         <p:spPr>
           <a:xfrm>
-            <a:off x="685800" y="3442063"/>
-            <a:ext cx="10820095" cy="296527"/>
+            <a:off x="685800" y="3434225"/>
+            <a:ext cx="10820095" cy="288689"/>
           </a:xfrm>
           <a:prstGeom prst="rect">
             <a:avLst/>
@@ -30366,8 +30749,8 @@
         </p:nvSpPr>
         <p:spPr>
           <a:xfrm>
-            <a:off x="685800" y="4035117"/>
-            <a:ext cx="10820095" cy="296527"/>
+            <a:off x="685800" y="4011603"/>
+            <a:ext cx="10820095" cy="288689"/>
           </a:xfrm>
           <a:prstGeom prst="rect">
             <a:avLst/>
@@ -30388,8 +30771,8 @@
         </p:nvSpPr>
         <p:spPr>
           <a:xfrm>
-            <a:off x="685800" y="4628170"/>
-            <a:ext cx="10820095" cy="296527"/>
+            <a:off x="685800" y="4588982"/>
+            <a:ext cx="10820095" cy="288689"/>
           </a:xfrm>
           <a:prstGeom prst="rect">
             <a:avLst/>
@@ -30587,7 +30970,7 @@
         <p:spPr>
           <a:xfrm>
             <a:off x="685800" y="3191256"/>
-            <a:ext cx="2322576" cy="205087"/>
+            <a:ext cx="2322576" cy="197249"/>
           </a:xfrm>
           <a:prstGeom prst="rect">
             <a:avLst/>
@@ -30631,7 +31014,7 @@
         <p:spPr>
           <a:xfrm>
             <a:off x="3154680" y="3191256"/>
-            <a:ext cx="5157216" cy="205087"/>
+            <a:ext cx="5157216" cy="197249"/>
           </a:xfrm>
           <a:prstGeom prst="rect">
             <a:avLst/>
@@ -30675,7 +31058,7 @@
         <p:spPr>
           <a:xfrm>
             <a:off x="8458200" y="3191256"/>
-            <a:ext cx="2901391" cy="205087"/>
+            <a:ext cx="2901391" cy="197249"/>
           </a:xfrm>
           <a:prstGeom prst="rect">
             <a:avLst/>
@@ -30718,7 +31101,7 @@
         </p:nvSpPr>
         <p:spPr>
           <a:xfrm>
-            <a:off x="685800" y="3442063"/>
+            <a:off x="685800" y="3434225"/>
             <a:ext cx="10820095" cy="7315"/>
           </a:xfrm>
           <a:prstGeom prst="rect">
@@ -30740,8 +31123,8 @@
         </p:nvSpPr>
         <p:spPr>
           <a:xfrm>
-            <a:off x="685800" y="3487783"/>
-            <a:ext cx="2322576" cy="205087"/>
+            <a:off x="685800" y="3479945"/>
+            <a:ext cx="2322576" cy="197249"/>
           </a:xfrm>
           <a:prstGeom prst="rect">
             <a:avLst/>
@@ -30784,8 +31167,8 @@
         </p:nvSpPr>
         <p:spPr>
           <a:xfrm>
-            <a:off x="3154680" y="3487783"/>
-            <a:ext cx="5157216" cy="205087"/>
+            <a:off x="3154680" y="3479945"/>
+            <a:ext cx="5157216" cy="197249"/>
           </a:xfrm>
           <a:prstGeom prst="rect">
             <a:avLst/>
@@ -30828,8 +31211,8 @@
         </p:nvSpPr>
         <p:spPr>
           <a:xfrm>
-            <a:off x="8458200" y="3487783"/>
-            <a:ext cx="2901391" cy="205087"/>
+            <a:off x="8458200" y="3479945"/>
+            <a:ext cx="2901391" cy="197249"/>
           </a:xfrm>
           <a:prstGeom prst="rect">
             <a:avLst/>
@@ -30872,7 +31255,7 @@
         </p:nvSpPr>
         <p:spPr>
           <a:xfrm>
-            <a:off x="685800" y="3738590"/>
+            <a:off x="685800" y="3722914"/>
             <a:ext cx="10820095" cy="7315"/>
           </a:xfrm>
           <a:prstGeom prst="rect">
@@ -30894,8 +31277,8 @@
         </p:nvSpPr>
         <p:spPr>
           <a:xfrm>
-            <a:off x="685800" y="3784310"/>
-            <a:ext cx="2322576" cy="205087"/>
+            <a:off x="685800" y="3768634"/>
+            <a:ext cx="2322576" cy="197249"/>
           </a:xfrm>
           <a:prstGeom prst="rect">
             <a:avLst/>
@@ -30938,8 +31321,8 @@
         </p:nvSpPr>
         <p:spPr>
           <a:xfrm>
-            <a:off x="3154680" y="3784310"/>
-            <a:ext cx="5157216" cy="205087"/>
+            <a:off x="3154680" y="3768634"/>
+            <a:ext cx="5157216" cy="197249"/>
           </a:xfrm>
           <a:prstGeom prst="rect">
             <a:avLst/>
@@ -30982,8 +31365,8 @@
         </p:nvSpPr>
         <p:spPr>
           <a:xfrm>
-            <a:off x="8458200" y="3784310"/>
-            <a:ext cx="2901391" cy="205087"/>
+            <a:off x="8458200" y="3768634"/>
+            <a:ext cx="2901391" cy="197249"/>
           </a:xfrm>
           <a:prstGeom prst="rect">
             <a:avLst/>
@@ -31026,7 +31409,7 @@
         </p:nvSpPr>
         <p:spPr>
           <a:xfrm>
-            <a:off x="685800" y="4035117"/>
+            <a:off x="685800" y="4011603"/>
             <a:ext cx="10820095" cy="7315"/>
           </a:xfrm>
           <a:prstGeom prst="rect">
@@ -31048,8 +31431,8 @@
         </p:nvSpPr>
         <p:spPr>
           <a:xfrm>
-            <a:off x="685800" y="4080837"/>
-            <a:ext cx="2322576" cy="205087"/>
+            <a:off x="685800" y="4057323"/>
+            <a:ext cx="2322576" cy="197249"/>
           </a:xfrm>
           <a:prstGeom prst="rect">
             <a:avLst/>
@@ -31092,8 +31475,8 @@
         </p:nvSpPr>
         <p:spPr>
           <a:xfrm>
-            <a:off x="3154680" y="4080837"/>
-            <a:ext cx="5157216" cy="205087"/>
+            <a:off x="3154680" y="4057323"/>
+            <a:ext cx="5157216" cy="197249"/>
           </a:xfrm>
           <a:prstGeom prst="rect">
             <a:avLst/>
@@ -31122,7 +31505,7 @@
                 <a:ea typeface="맑은 고딕" pitchFamily="34" charset="-122"/>
                 <a:cs typeface="맑은 고딕" pitchFamily="34" charset="-120"/>
               </a:rPr>
-              <a:t>실측 · 견적까지 끝낸 브리핑 상태</a:t>
+              <a:t>실측 · 견적 · 기존 매장 거리 충돌 확인까지 끝낸 브리핑</a:t>
             </a:r>
             <a:endParaRPr lang="en-US" sz="1050" dirty="0"/>
           </a:p>
@@ -31136,8 +31519,8 @@
         </p:nvSpPr>
         <p:spPr>
           <a:xfrm>
-            <a:off x="8458200" y="4080837"/>
-            <a:ext cx="2901391" cy="205087"/>
+            <a:off x="8458200" y="4057323"/>
+            <a:ext cx="2901391" cy="197249"/>
           </a:xfrm>
           <a:prstGeom prst="rect">
             <a:avLst/>
@@ -31166,7 +31549,7 @@
                 <a:ea typeface="맑은 고딕" pitchFamily="34" charset="-122"/>
                 <a:cs typeface="맑은 고딕" pitchFamily="34" charset="-120"/>
               </a:rPr>
-              <a:t>개설 승인</a:t>
+              <a:t>개설 승인 · 영업지역 확인</a:t>
             </a:r>
             <a:endParaRPr lang="en-US" sz="1050" dirty="0"/>
           </a:p>
@@ -31180,7 +31563,7 @@
         </p:nvSpPr>
         <p:spPr>
           <a:xfrm>
-            <a:off x="685800" y="4331643"/>
+            <a:off x="685800" y="4300293"/>
             <a:ext cx="10820095" cy="7315"/>
           </a:xfrm>
           <a:prstGeom prst="rect">
@@ -31202,8 +31585,8 @@
         </p:nvSpPr>
         <p:spPr>
           <a:xfrm>
-            <a:off x="685800" y="4377363"/>
-            <a:ext cx="2322576" cy="205087"/>
+            <a:off x="685800" y="4346013"/>
+            <a:ext cx="2322576" cy="197249"/>
           </a:xfrm>
           <a:prstGeom prst="rect">
             <a:avLst/>
@@ -31246,8 +31629,8 @@
         </p:nvSpPr>
         <p:spPr>
           <a:xfrm>
-            <a:off x="3154680" y="4377363"/>
-            <a:ext cx="5157216" cy="205087"/>
+            <a:off x="3154680" y="4346013"/>
+            <a:ext cx="5157216" cy="197249"/>
           </a:xfrm>
           <a:prstGeom prst="rect">
             <a:avLst/>
@@ -31290,8 +31673,8 @@
         </p:nvSpPr>
         <p:spPr>
           <a:xfrm>
-            <a:off x="8458200" y="4377363"/>
-            <a:ext cx="2901391" cy="205087"/>
+            <a:off x="8458200" y="4346013"/>
+            <a:ext cx="2901391" cy="197249"/>
           </a:xfrm>
           <a:prstGeom prst="rect">
             <a:avLst/>
@@ -31334,7 +31717,7 @@
         </p:nvSpPr>
         <p:spPr>
           <a:xfrm>
-            <a:off x="685800" y="4628170"/>
+            <a:off x="685800" y="4588982"/>
             <a:ext cx="10820095" cy="7315"/>
           </a:xfrm>
           <a:prstGeom prst="rect">
@@ -31356,8 +31739,8 @@
         </p:nvSpPr>
         <p:spPr>
           <a:xfrm>
-            <a:off x="685800" y="4673890"/>
-            <a:ext cx="2322576" cy="205087"/>
+            <a:off x="685800" y="4634702"/>
+            <a:ext cx="2322576" cy="197249"/>
           </a:xfrm>
           <a:prstGeom prst="rect">
             <a:avLst/>
@@ -31400,8 +31783,8 @@
         </p:nvSpPr>
         <p:spPr>
           <a:xfrm>
-            <a:off x="3154680" y="4673890"/>
-            <a:ext cx="5157216" cy="205087"/>
+            <a:off x="3154680" y="4634702"/>
+            <a:ext cx="5157216" cy="197249"/>
           </a:xfrm>
           <a:prstGeom prst="rect">
             <a:avLst/>
@@ -31444,8 +31827,8 @@
         </p:nvSpPr>
         <p:spPr>
           <a:xfrm>
-            <a:off x="8458200" y="4673890"/>
-            <a:ext cx="2901391" cy="205087"/>
+            <a:off x="8458200" y="4634702"/>
+            <a:ext cx="2901391" cy="197249"/>
           </a:xfrm>
           <a:prstGeom prst="rect">
             <a:avLst/>
@@ -31488,7 +31871,7 @@
         </p:nvSpPr>
         <p:spPr>
           <a:xfrm>
-            <a:off x="685800" y="4924697"/>
+            <a:off x="685800" y="4877671"/>
             <a:ext cx="10820095" cy="7315"/>
           </a:xfrm>
           <a:prstGeom prst="rect">
@@ -31510,8 +31893,8 @@
         </p:nvSpPr>
         <p:spPr>
           <a:xfrm>
-            <a:off x="685800" y="4970417"/>
-            <a:ext cx="2322576" cy="205087"/>
+            <a:off x="685800" y="4923391"/>
+            <a:ext cx="2322576" cy="197249"/>
           </a:xfrm>
           <a:prstGeom prst="rect">
             <a:avLst/>
@@ -31554,8 +31937,8 @@
         </p:nvSpPr>
         <p:spPr>
           <a:xfrm>
-            <a:off x="3154680" y="4970417"/>
-            <a:ext cx="5157216" cy="205087"/>
+            <a:off x="3154680" y="4923391"/>
+            <a:ext cx="5157216" cy="197249"/>
           </a:xfrm>
           <a:prstGeom prst="rect">
             <a:avLst/>
@@ -31598,8 +31981,8 @@
         </p:nvSpPr>
         <p:spPr>
           <a:xfrm>
-            <a:off x="8458200" y="4970417"/>
-            <a:ext cx="2901391" cy="205087"/>
+            <a:off x="8458200" y="4923391"/>
+            <a:ext cx="2901391" cy="197249"/>
           </a:xfrm>
           <a:prstGeom prst="rect">
             <a:avLst/>
@@ -31642,7 +32025,7 @@
         </p:nvSpPr>
         <p:spPr>
           <a:xfrm>
-            <a:off x="685800" y="5221224"/>
+            <a:off x="685800" y="5166360"/>
             <a:ext cx="10820095" cy="7315"/>
           </a:xfrm>
           <a:prstGeom prst="rect">
@@ -31664,7 +32047,7 @@
         </p:nvSpPr>
         <p:spPr>
           <a:xfrm>
-            <a:off x="685800" y="5408676"/>
+            <a:off x="685800" y="5353812"/>
             <a:ext cx="192024" cy="192024"/>
           </a:xfrm>
           <a:prstGeom prst="ellipse">
@@ -31686,7 +32069,7 @@
         </p:nvSpPr>
         <p:spPr>
           <a:xfrm>
-            <a:off x="685800" y="5408676"/>
+            <a:off x="685800" y="5353812"/>
             <a:ext cx="192024" cy="192024"/>
           </a:xfrm>
           <a:prstGeom prst="rect">
@@ -31727,7 +32110,7 @@
         </p:nvSpPr>
         <p:spPr>
           <a:xfrm>
-            <a:off x="1005840" y="5349240"/>
+            <a:off x="1005840" y="5294376"/>
             <a:ext cx="10445191" cy="310896"/>
           </a:xfrm>
           <a:prstGeom prst="rect">
@@ -31771,7 +32154,7 @@
         </p:nvSpPr>
         <p:spPr>
           <a:xfrm>
-            <a:off x="685800" y="5649163"/>
+            <a:off x="685800" y="5594299"/>
             <a:ext cx="10820095" cy="7315"/>
           </a:xfrm>
           <a:prstGeom prst="rect">
@@ -31793,12 +32176,12 @@
         </p:nvSpPr>
         <p:spPr>
           <a:xfrm>
-            <a:off x="685800" y="5733288"/>
-            <a:ext cx="5272888" cy="438912"/>
+            <a:off x="685800" y="5660136"/>
+            <a:ext cx="5272888" cy="512064"/>
           </a:xfrm>
           <a:prstGeom prst="roundRect">
             <a:avLst>
-              <a:gd name="adj" fmla="val 12500"/>
+              <a:gd name="adj" fmla="val 10714"/>
             </a:avLst>
           </a:prstGeom>
           <a:solidFill>
@@ -31817,7 +32200,7 @@
         </p:nvSpPr>
         <p:spPr>
           <a:xfrm>
-            <a:off x="850392" y="5751576"/>
+            <a:off x="850392" y="5733288"/>
             <a:ext cx="841248" cy="219456"/>
           </a:xfrm>
           <a:prstGeom prst="rect">
@@ -31861,7 +32244,7 @@
         </p:nvSpPr>
         <p:spPr>
           <a:xfrm>
-            <a:off x="1728216" y="5742432"/>
+            <a:off x="1728216" y="5724144"/>
             <a:ext cx="4065880" cy="237744"/>
           </a:xfrm>
           <a:prstGeom prst="rect">
@@ -31905,7 +32288,7 @@
         </p:nvSpPr>
         <p:spPr>
           <a:xfrm>
-            <a:off x="850392" y="5980176"/>
+            <a:off x="850392" y="5934456"/>
             <a:ext cx="4943704" cy="192024"/>
           </a:xfrm>
           <a:prstGeom prst="rect">
@@ -31949,12 +32332,12 @@
         </p:nvSpPr>
         <p:spPr>
           <a:xfrm>
-            <a:off x="6233008" y="5733288"/>
-            <a:ext cx="5272888" cy="438912"/>
+            <a:off x="6233008" y="5660136"/>
+            <a:ext cx="5272888" cy="512064"/>
           </a:xfrm>
           <a:prstGeom prst="roundRect">
             <a:avLst>
-              <a:gd name="adj" fmla="val 12500"/>
+              <a:gd name="adj" fmla="val 10714"/>
             </a:avLst>
           </a:prstGeom>
           <a:solidFill>
@@ -31973,7 +32356,7 @@
         </p:nvSpPr>
         <p:spPr>
           <a:xfrm>
-            <a:off x="6397600" y="5751576"/>
+            <a:off x="6397600" y="5733288"/>
             <a:ext cx="841248" cy="219456"/>
           </a:xfrm>
           <a:prstGeom prst="rect">
@@ -32017,7 +32400,7 @@
         </p:nvSpPr>
         <p:spPr>
           <a:xfrm>
-            <a:off x="7275424" y="5742432"/>
+            <a:off x="7275424" y="5724144"/>
             <a:ext cx="4065880" cy="237744"/>
           </a:xfrm>
           <a:prstGeom prst="rect">
@@ -32061,7 +32444,7 @@
         </p:nvSpPr>
         <p:spPr>
           <a:xfrm>
-            <a:off x="6397600" y="5980176"/>
+            <a:off x="6397600" y="5934456"/>
             <a:ext cx="4943704" cy="192024"/>
           </a:xfrm>
           <a:prstGeom prst="rect">

--- a/runnerpub-proposal/runnerpub_proposal_naeilsajang.pptx
+++ b/runnerpub-proposal/runnerpub_proposal_naeilsajang.pptx
@@ -2682,7 +2682,7 @@
                 <a:ea typeface="맑은 고딕" pitchFamily="34" charset="-122"/>
                 <a:cs typeface="맑은 고딕" pitchFamily="34" charset="-120"/>
               </a:rPr>
-              <a:t>가맹 개설 대상 매장 구성 — 홀덤 테이블 · 바 · 라운지</a:t>
+              <a:t>가맹 개설 대상 매장 구성 · 홀덤 테이블 · 바 · 라운지</a:t>
             </a:r>
             <a:endParaRPr lang="en-US" sz="900" dirty="0"/>
           </a:p>
@@ -5411,7 +5411,7 @@
                 <a:ea typeface="맑은 고딕" pitchFamily="34" charset="-122"/>
                 <a:cs typeface="맑은 고딕" pitchFamily="34" charset="-120"/>
               </a:rPr>
-              <a:t>※ 직영 채용 — 계약 성사 여부와 무관하게 급여 · 4대보험 매월 발생    ※ 일반 대행 — 착수금 유무 및 반환 조건은 대행사별 계약에 따름</a:t>
+              <a:t>※ 직영 채용 : 계약 성사 여부와 무관하게 급여 · 4대보험 매월 발생    ※ 일반 대행 : 착수금 유무 및 반환 조건은 대행사별 계약에 따름</a:t>
             </a:r>
             <a:endParaRPr lang="en-US" sz="850" dirty="0"/>
           </a:p>
@@ -7049,7 +7049,7 @@
         </p:nvSpPr>
         <p:spPr>
           <a:xfrm>
-            <a:off x="6775704" y="2798064"/>
+            <a:off x="6775704" y="2761488"/>
             <a:ext cx="4730191" cy="640080"/>
           </a:xfrm>
           <a:prstGeom prst="roundRect">
@@ -7073,7 +7073,7 @@
         </p:nvSpPr>
         <p:spPr>
           <a:xfrm>
-            <a:off x="6940296" y="2834640"/>
+            <a:off x="6940296" y="2798064"/>
             <a:ext cx="4401007" cy="201168"/>
           </a:xfrm>
           <a:prstGeom prst="rect">
@@ -7117,7 +7117,7 @@
         </p:nvSpPr>
         <p:spPr>
           <a:xfrm>
-            <a:off x="6940296" y="3035808"/>
+            <a:off x="6940296" y="2999232"/>
             <a:ext cx="4401007" cy="384048"/>
           </a:xfrm>
           <a:prstGeom prst="rect">
@@ -7181,7 +7181,7 @@
         </p:nvSpPr>
         <p:spPr>
           <a:xfrm>
-            <a:off x="6775704" y="3493008"/>
+            <a:off x="6775704" y="3438144"/>
             <a:ext cx="4730191" cy="640080"/>
           </a:xfrm>
           <a:prstGeom prst="roundRect">
@@ -7205,7 +7205,7 @@
         </p:nvSpPr>
         <p:spPr>
           <a:xfrm>
-            <a:off x="6940296" y="3529584"/>
+            <a:off x="6940296" y="3474720"/>
             <a:ext cx="4401007" cy="201168"/>
           </a:xfrm>
           <a:prstGeom prst="rect">
@@ -7249,7 +7249,7 @@
         </p:nvSpPr>
         <p:spPr>
           <a:xfrm>
-            <a:off x="6940296" y="3730752"/>
+            <a:off x="6940296" y="3675888"/>
             <a:ext cx="4401007" cy="384048"/>
           </a:xfrm>
           <a:prstGeom prst="rect">
@@ -7293,7 +7293,7 @@
         </p:nvSpPr>
         <p:spPr>
           <a:xfrm>
-            <a:off x="6775704" y="4206240"/>
+            <a:off x="6775704" y="4133088"/>
             <a:ext cx="4730191" cy="201168"/>
           </a:xfrm>
           <a:prstGeom prst="rect">
@@ -7337,7 +7337,7 @@
         </p:nvSpPr>
         <p:spPr>
           <a:xfrm>
-            <a:off x="6775704" y="4448556"/>
+            <a:off x="6775704" y="4393692"/>
             <a:ext cx="192024" cy="192024"/>
           </a:xfrm>
           <a:prstGeom prst="ellipse">
@@ -7359,7 +7359,7 @@
         </p:nvSpPr>
         <p:spPr>
           <a:xfrm>
-            <a:off x="6775704" y="4448556"/>
+            <a:off x="6775704" y="4393692"/>
             <a:ext cx="192024" cy="192024"/>
           </a:xfrm>
           <a:prstGeom prst="rect">
@@ -7400,7 +7400,7 @@
         </p:nvSpPr>
         <p:spPr>
           <a:xfrm>
-            <a:off x="7095744" y="4389120"/>
+            <a:off x="7095744" y="4334256"/>
             <a:ext cx="4355287" cy="310896"/>
           </a:xfrm>
           <a:prstGeom prst="rect">
@@ -7430,7 +7430,7 @@
                 <a:ea typeface="맑은 고딕" pitchFamily="34" charset="-122"/>
                 <a:cs typeface="맑은 고딕" pitchFamily="34" charset="-120"/>
               </a:rPr>
-              <a:t>LSM 광고 집행 기준 · 내일사장 수취 구간</a:t>
+              <a:t>오픈 매장 LSM 광고를 누가 집행하는가</a:t>
             </a:r>
             <a:endParaRPr lang="en-US" sz="1250" dirty="0"/>
           </a:p>
@@ -7444,7 +7444,7 @@
         </p:nvSpPr>
         <p:spPr>
           <a:xfrm>
-            <a:off x="6775704" y="4689043"/>
+            <a:off x="6775704" y="4634179"/>
             <a:ext cx="4730191" cy="7315"/>
           </a:xfrm>
           <a:prstGeom prst="rect">
@@ -7460,18 +7460,281 @@
       </p:sp>
       <p:sp>
         <p:nvSpPr>
-          <p:cNvPr id="54" name="Shape 51"/>
-          <p:cNvSpPr/>
-          <p:nvPr/>
-        </p:nvSpPr>
-        <p:spPr>
-          <a:xfrm>
-            <a:off x="6775704" y="4791456"/>
-            <a:ext cx="4730191" cy="438912"/>
+          <p:cNvPr id="54" name="Text 51"/>
+          <p:cNvSpPr/>
+          <p:nvPr/>
+        </p:nvSpPr>
+        <p:spPr>
+          <a:xfrm>
+            <a:off x="6775704" y="4700016"/>
+            <a:ext cx="4730191" cy="219456"/>
+          </a:xfrm>
+          <a:prstGeom prst="rect">
+            <a:avLst/>
+          </a:prstGeom>
+          <a:noFill/>
+          <a:ln>
+            <a:noFill/>
+          </a:ln>
+        </p:spPr>
+        <p:txBody>
+          <a:bodyPr wrap="square" lIns="0" tIns="0" rIns="0" bIns="0" rtlCol="0" anchor="ctr"/>
+          <a:lstStyle/>
+          <a:p>
+            <a:pPr algn="l" indent="0" marL="0">
+              <a:lnSpc>
+                <a:spcPts val="1200"/>
+              </a:lnSpc>
+              <a:buNone/>
+            </a:pPr>
+            <a:r>
+              <a:rPr lang="en-US" sz="900" dirty="0">
+                <a:solidFill>
+                  <a:srgbClr val="5C687F"/>
+                </a:solidFill>
+                <a:latin typeface="맑은 고딕" pitchFamily="34" charset="0"/>
+                <a:ea typeface="맑은 고딕" pitchFamily="34" charset="-122"/>
+                <a:cs typeface="맑은 고딕" pitchFamily="34" charset="-120"/>
+              </a:rPr>
+              <a:t>기준 금액 = 내일사장 실수취 성공보수. 할인이 적용되면 이 금액이 줄어듭니다.</a:t>
+            </a:r>
+            <a:endParaRPr lang="en-US" sz="900" dirty="0"/>
+          </a:p>
+        </p:txBody>
+      </p:sp>
+      <p:sp>
+        <p:nvSpPr>
+          <p:cNvPr id="55" name="Shape 52"/>
+          <p:cNvSpPr/>
+          <p:nvPr/>
+        </p:nvSpPr>
+        <p:spPr>
+          <a:xfrm>
+            <a:off x="6775704" y="4974336"/>
+            <a:ext cx="4730191" cy="384048"/>
           </a:xfrm>
           <a:prstGeom prst="roundRect">
             <a:avLst>
-              <a:gd name="adj" fmla="val 12500"/>
+              <a:gd name="adj" fmla="val 14286"/>
+            </a:avLst>
+          </a:prstGeom>
+          <a:solidFill>
+            <a:srgbClr val="E7EFFA"/>
+          </a:solidFill>
+          <a:ln>
+            <a:noFill/>
+          </a:ln>
+        </p:spPr>
+      </p:sp>
+      <p:sp>
+        <p:nvSpPr>
+          <p:cNvPr id="56" name="Shape 53"/>
+          <p:cNvSpPr/>
+          <p:nvPr/>
+        </p:nvSpPr>
+        <p:spPr>
+          <a:xfrm>
+            <a:off x="6922008" y="5047488"/>
+            <a:ext cx="237744" cy="237744"/>
+          </a:xfrm>
+          <a:prstGeom prst="ellipse">
+            <a:avLst/>
+          </a:prstGeom>
+          <a:solidFill>
+            <a:srgbClr val="2868F0"/>
+          </a:solidFill>
+          <a:ln>
+            <a:noFill/>
+          </a:ln>
+        </p:spPr>
+      </p:sp>
+      <p:sp>
+        <p:nvSpPr>
+          <p:cNvPr id="57" name="Text 54"/>
+          <p:cNvSpPr/>
+          <p:nvPr/>
+        </p:nvSpPr>
+        <p:spPr>
+          <a:xfrm>
+            <a:off x="6922008" y="5047488"/>
+            <a:ext cx="237744" cy="237744"/>
+          </a:xfrm>
+          <a:prstGeom prst="rect">
+            <a:avLst/>
+          </a:prstGeom>
+          <a:noFill/>
+          <a:ln>
+            <a:noFill/>
+          </a:ln>
+        </p:spPr>
+        <p:txBody>
+          <a:bodyPr wrap="square" lIns="0" tIns="0" rIns="0" bIns="0" rtlCol="0" anchor="ctr"/>
+          <a:lstStyle/>
+          <a:p>
+            <a:pPr algn="ctr" indent="0" marL="0">
+              <a:buNone/>
+            </a:pPr>
+            <a:r>
+              <a:rPr lang="en-US" sz="1040" b="1" dirty="0">
+                <a:solidFill>
+                  <a:srgbClr val="FFFFFF"/>
+                </a:solidFill>
+                <a:latin typeface="맑은 고딕" pitchFamily="34" charset="0"/>
+                <a:ea typeface="맑은 고딕" pitchFamily="34" charset="-122"/>
+                <a:cs typeface="맑은 고딕" pitchFamily="34" charset="-120"/>
+              </a:rPr>
+              <a:t>1</a:t>
+            </a:r>
+            <a:endParaRPr lang="en-US" sz="1040" dirty="0"/>
+          </a:p>
+        </p:txBody>
+      </p:sp>
+      <p:sp>
+        <p:nvSpPr>
+          <p:cNvPr id="58" name="Text 55"/>
+          <p:cNvSpPr/>
+          <p:nvPr/>
+        </p:nvSpPr>
+        <p:spPr>
+          <a:xfrm>
+            <a:off x="7269480" y="4974336"/>
+            <a:ext cx="2334463" cy="384048"/>
+          </a:xfrm>
+          <a:prstGeom prst="rect">
+            <a:avLst/>
+          </a:prstGeom>
+          <a:noFill/>
+          <a:ln>
+            <a:noFill/>
+          </a:ln>
+        </p:spPr>
+        <p:txBody>
+          <a:bodyPr wrap="square" lIns="0" tIns="0" rIns="0" bIns="0" rtlCol="0" anchor="ctr"/>
+          <a:lstStyle/>
+          <a:p>
+            <a:pPr algn="l" indent="0" marL="0">
+              <a:lnSpc>
+                <a:spcPts val="1540"/>
+              </a:lnSpc>
+              <a:buNone/>
+            </a:pPr>
+            <a:r>
+              <a:rPr lang="en-US" sz="1000" b="1" dirty="0">
+                <a:solidFill>
+                  <a:srgbClr val="1E3457"/>
+                </a:solidFill>
+                <a:latin typeface="맑은 고딕" pitchFamily="34" charset="0"/>
+                <a:ea typeface="맑은 고딕" pitchFamily="34" charset="-122"/>
+                <a:cs typeface="맑은 고딕" pitchFamily="34" charset="-120"/>
+              </a:rPr>
+              <a:t>실수취 1,000만원 (할인 없음)</a:t>
+            </a:r>
+            <a:endParaRPr lang="en-US" sz="1000" dirty="0"/>
+          </a:p>
+        </p:txBody>
+      </p:sp>
+      <p:sp>
+        <p:nvSpPr>
+          <p:cNvPr id="59" name="Text 56"/>
+          <p:cNvSpPr/>
+          <p:nvPr/>
+        </p:nvSpPr>
+        <p:spPr>
+          <a:xfrm>
+            <a:off x="9658807" y="4974336"/>
+            <a:ext cx="1078992" cy="384048"/>
+          </a:xfrm>
+          <a:prstGeom prst="rect">
+            <a:avLst/>
+          </a:prstGeom>
+          <a:noFill/>
+          <a:ln>
+            <a:noFill/>
+          </a:ln>
+        </p:spPr>
+        <p:txBody>
+          <a:bodyPr wrap="square" lIns="0" tIns="0" rIns="0" bIns="0" rtlCol="0" anchor="ctr"/>
+          <a:lstStyle/>
+          <a:p>
+            <a:pPr algn="l" indent="0" marL="0">
+              <a:lnSpc>
+                <a:spcPts val="1430"/>
+              </a:lnSpc>
+              <a:buNone/>
+            </a:pPr>
+            <a:r>
+              <a:rPr lang="en-US" sz="930" dirty="0">
+                <a:solidFill>
+                  <a:srgbClr val="1E3457"/>
+                </a:solidFill>
+                <a:latin typeface="맑은 고딕" pitchFamily="34" charset="0"/>
+                <a:ea typeface="맑은 고딕" pitchFamily="34" charset="-122"/>
+                <a:cs typeface="맑은 고딕" pitchFamily="34" charset="-120"/>
+              </a:rPr>
+              <a:t>내일사장 200만원</a:t>
+            </a:r>
+            <a:endParaRPr lang="en-US" sz="930" dirty="0"/>
+          </a:p>
+        </p:txBody>
+      </p:sp>
+      <p:sp>
+        <p:nvSpPr>
+          <p:cNvPr id="60" name="Text 57"/>
+          <p:cNvSpPr/>
+          <p:nvPr/>
+        </p:nvSpPr>
+        <p:spPr>
+          <a:xfrm>
+            <a:off x="10774375" y="4974336"/>
+            <a:ext cx="585216" cy="384048"/>
+          </a:xfrm>
+          <a:prstGeom prst="rect">
+            <a:avLst/>
+          </a:prstGeom>
+          <a:noFill/>
+          <a:ln>
+            <a:noFill/>
+          </a:ln>
+        </p:spPr>
+        <p:txBody>
+          <a:bodyPr wrap="square" lIns="0" tIns="0" rIns="0" bIns="0" rtlCol="0" anchor="ctr"/>
+          <a:lstStyle/>
+          <a:p>
+            <a:pPr algn="r" indent="0" marL="0">
+              <a:lnSpc>
+                <a:spcPts val="1200"/>
+              </a:lnSpc>
+              <a:buNone/>
+            </a:pPr>
+            <a:r>
+              <a:rPr lang="en-US" sz="850" dirty="0">
+                <a:solidFill>
+                  <a:srgbClr val="5C687F"/>
+                </a:solidFill>
+                <a:latin typeface="맑은 고딕" pitchFamily="34" charset="0"/>
+                <a:ea typeface="맑은 고딕" pitchFamily="34" charset="-122"/>
+                <a:cs typeface="맑은 고딕" pitchFamily="34" charset="-120"/>
+              </a:rPr>
+              <a:t>본사 0원</a:t>
+            </a:r>
+            <a:endParaRPr lang="en-US" sz="850" dirty="0"/>
+          </a:p>
+        </p:txBody>
+      </p:sp>
+      <p:sp>
+        <p:nvSpPr>
+          <p:cNvPr id="61" name="Shape 58"/>
+          <p:cNvSpPr/>
+          <p:nvPr/>
+        </p:nvSpPr>
+        <p:spPr>
+          <a:xfrm>
+            <a:off x="6775704" y="5376672"/>
+            <a:ext cx="4730191" cy="384048"/>
+          </a:xfrm>
+          <a:prstGeom prst="roundRect">
+            <a:avLst>
+              <a:gd name="adj" fmla="val 14286"/>
             </a:avLst>
           </a:prstGeom>
           <a:solidFill>
@@ -7484,13 +7747,13 @@
       </p:sp>
       <p:sp>
         <p:nvSpPr>
-          <p:cNvPr id="55" name="Shape 52"/>
-          <p:cNvSpPr/>
-          <p:nvPr/>
-        </p:nvSpPr>
-        <p:spPr>
-          <a:xfrm>
-            <a:off x="6922008" y="4892040"/>
+          <p:cNvPr id="62" name="Shape 59"/>
+          <p:cNvSpPr/>
+          <p:nvPr/>
+        </p:nvSpPr>
+        <p:spPr>
+          <a:xfrm>
+            <a:off x="6922008" y="5449824"/>
             <a:ext cx="237744" cy="237744"/>
           </a:xfrm>
           <a:prstGeom prst="ellipse">
@@ -7506,13 +7769,13 @@
       </p:sp>
       <p:sp>
         <p:nvSpPr>
-          <p:cNvPr id="56" name="Text 53"/>
-          <p:cNvSpPr/>
-          <p:nvPr/>
-        </p:nvSpPr>
-        <p:spPr>
-          <a:xfrm>
-            <a:off x="6922008" y="4892040"/>
+          <p:cNvPr id="63" name="Text 60"/>
+          <p:cNvSpPr/>
+          <p:nvPr/>
+        </p:nvSpPr>
+        <p:spPr>
+          <a:xfrm>
+            <a:off x="6922008" y="5449824"/>
             <a:ext cx="237744" cy="237744"/>
           </a:xfrm>
           <a:prstGeom prst="rect">
@@ -7539,7 +7802,7 @@
                 <a:ea typeface="맑은 고딕" pitchFamily="34" charset="-122"/>
                 <a:cs typeface="맑은 고딕" pitchFamily="34" charset="-120"/>
               </a:rPr>
-              <a:t>1</a:t>
+              <a:t>2</a:t>
             </a:r>
             <a:endParaRPr lang="en-US" sz="1040" dirty="0"/>
           </a:p>
@@ -7547,14 +7810,14 @@
       </p:sp>
       <p:sp>
         <p:nvSpPr>
-          <p:cNvPr id="57" name="Text 54"/>
-          <p:cNvSpPr/>
-          <p:nvPr/>
-        </p:nvSpPr>
-        <p:spPr>
-          <a:xfrm>
-            <a:off x="7269480" y="4809744"/>
-            <a:ext cx="4071823" cy="219456"/>
+          <p:cNvPr id="64" name="Text 61"/>
+          <p:cNvSpPr/>
+          <p:nvPr/>
+        </p:nvSpPr>
+        <p:spPr>
+          <a:xfrm>
+            <a:off x="7269480" y="5376672"/>
+            <a:ext cx="2334463" cy="384048"/>
           </a:xfrm>
           <a:prstGeom prst="rect">
             <a:avLst/>
@@ -7583,7 +7846,7 @@
                 <a:ea typeface="맑은 고딕" pitchFamily="34" charset="-122"/>
                 <a:cs typeface="맑은 고딕" pitchFamily="34" charset="-120"/>
               </a:rPr>
-              <a:t>800만원 이하</a:t>
+              <a:t>실수취 800만원 초과 ~ 1,000만원 미만</a:t>
             </a:r>
             <a:endParaRPr lang="en-US" sz="1000" dirty="0"/>
           </a:p>
@@ -7591,14 +7854,14 @@
       </p:sp>
       <p:sp>
         <p:nvSpPr>
-          <p:cNvPr id="58" name="Text 55"/>
-          <p:cNvSpPr/>
-          <p:nvPr/>
-        </p:nvSpPr>
-        <p:spPr>
-          <a:xfrm>
-            <a:off x="7269480" y="5010912"/>
-            <a:ext cx="4071823" cy="201168"/>
+          <p:cNvPr id="65" name="Text 62"/>
+          <p:cNvSpPr/>
+          <p:nvPr/>
+        </p:nvSpPr>
+        <p:spPr>
+          <a:xfrm>
+            <a:off x="9658807" y="5376672"/>
+            <a:ext cx="1078992" cy="384048"/>
           </a:xfrm>
           <a:prstGeom prst="rect">
             <a:avLst/>
@@ -7621,32 +7884,76 @@
             <a:r>
               <a:rPr lang="en-US" sz="930" dirty="0">
                 <a:solidFill>
+                  <a:srgbClr val="1E3457"/>
+                </a:solidFill>
+                <a:latin typeface="맑은 고딕" pitchFamily="34" charset="0"/>
+                <a:ea typeface="맑은 고딕" pitchFamily="34" charset="-122"/>
+                <a:cs typeface="맑은 고딕" pitchFamily="34" charset="-120"/>
+              </a:rPr>
+              <a:t>양사 협의</a:t>
+            </a:r>
+            <a:endParaRPr lang="en-US" sz="930" dirty="0"/>
+          </a:p>
+        </p:txBody>
+      </p:sp>
+      <p:sp>
+        <p:nvSpPr>
+          <p:cNvPr id="66" name="Text 63"/>
+          <p:cNvSpPr/>
+          <p:nvPr/>
+        </p:nvSpPr>
+        <p:spPr>
+          <a:xfrm>
+            <a:off x="10774375" y="5376672"/>
+            <a:ext cx="585216" cy="384048"/>
+          </a:xfrm>
+          <a:prstGeom prst="rect">
+            <a:avLst/>
+          </a:prstGeom>
+          <a:noFill/>
+          <a:ln>
+            <a:noFill/>
+          </a:ln>
+        </p:spPr>
+        <p:txBody>
+          <a:bodyPr wrap="square" lIns="0" tIns="0" rIns="0" bIns="0" rtlCol="0" anchor="ctr"/>
+          <a:lstStyle/>
+          <a:p>
+            <a:pPr algn="r" indent="0" marL="0">
+              <a:lnSpc>
+                <a:spcPts val="1200"/>
+              </a:lnSpc>
+              <a:buNone/>
+            </a:pPr>
+            <a:r>
+              <a:rPr lang="en-US" sz="850" dirty="0">
+                <a:solidFill>
                   <a:srgbClr val="5C687F"/>
                 </a:solidFill>
                 <a:latin typeface="맑은 고딕" pitchFamily="34" charset="0"/>
                 <a:ea typeface="맑은 고딕" pitchFamily="34" charset="-122"/>
                 <a:cs typeface="맑은 고딕" pitchFamily="34" charset="-120"/>
               </a:rPr>
-              <a:t>본사 집행</a:t>
-            </a:r>
-            <a:endParaRPr lang="en-US" sz="930" dirty="0"/>
-          </a:p>
-        </p:txBody>
-      </p:sp>
-      <p:sp>
-        <p:nvSpPr>
-          <p:cNvPr id="59" name="Shape 56"/>
-          <p:cNvSpPr/>
-          <p:nvPr/>
-        </p:nvSpPr>
-        <p:spPr>
-          <a:xfrm>
-            <a:off x="6775704" y="5248656"/>
-            <a:ext cx="4730191" cy="438912"/>
+              <a:t>협의</a:t>
+            </a:r>
+            <a:endParaRPr lang="en-US" sz="850" dirty="0"/>
+          </a:p>
+        </p:txBody>
+      </p:sp>
+      <p:sp>
+        <p:nvSpPr>
+          <p:cNvPr id="67" name="Shape 64"/>
+          <p:cNvSpPr/>
+          <p:nvPr/>
+        </p:nvSpPr>
+        <p:spPr>
+          <a:xfrm>
+            <a:off x="6775704" y="5779008"/>
+            <a:ext cx="4730191" cy="384048"/>
           </a:xfrm>
           <a:prstGeom prst="roundRect">
             <a:avLst>
-              <a:gd name="adj" fmla="val 12500"/>
+              <a:gd name="adj" fmla="val 14286"/>
             </a:avLst>
           </a:prstGeom>
           <a:solidFill>
@@ -7659,13 +7966,13 @@
       </p:sp>
       <p:sp>
         <p:nvSpPr>
-          <p:cNvPr id="60" name="Shape 57"/>
-          <p:cNvSpPr/>
-          <p:nvPr/>
-        </p:nvSpPr>
-        <p:spPr>
-          <a:xfrm>
-            <a:off x="6922008" y="5349240"/>
+          <p:cNvPr id="68" name="Shape 65"/>
+          <p:cNvSpPr/>
+          <p:nvPr/>
+        </p:nvSpPr>
+        <p:spPr>
+          <a:xfrm>
+            <a:off x="6922008" y="5852160"/>
             <a:ext cx="237744" cy="237744"/>
           </a:xfrm>
           <a:prstGeom prst="ellipse">
@@ -7681,13 +7988,13 @@
       </p:sp>
       <p:sp>
         <p:nvSpPr>
-          <p:cNvPr id="61" name="Text 58"/>
-          <p:cNvSpPr/>
-          <p:nvPr/>
-        </p:nvSpPr>
-        <p:spPr>
-          <a:xfrm>
-            <a:off x="6922008" y="5349240"/>
+          <p:cNvPr id="69" name="Text 66"/>
+          <p:cNvSpPr/>
+          <p:nvPr/>
+        </p:nvSpPr>
+        <p:spPr>
+          <a:xfrm>
+            <a:off x="6922008" y="5852160"/>
             <a:ext cx="237744" cy="237744"/>
           </a:xfrm>
           <a:prstGeom prst="rect">
@@ -7714,7 +8021,7 @@
                 <a:ea typeface="맑은 고딕" pitchFamily="34" charset="-122"/>
                 <a:cs typeface="맑은 고딕" pitchFamily="34" charset="-120"/>
               </a:rPr>
-              <a:t>2</a:t>
+              <a:t>3</a:t>
             </a:r>
             <a:endParaRPr lang="en-US" sz="1040" dirty="0"/>
           </a:p>
@@ -7722,14 +8029,14 @@
       </p:sp>
       <p:sp>
         <p:nvSpPr>
-          <p:cNvPr id="62" name="Text 59"/>
-          <p:cNvSpPr/>
-          <p:nvPr/>
-        </p:nvSpPr>
-        <p:spPr>
-          <a:xfrm>
-            <a:off x="7269480" y="5266944"/>
-            <a:ext cx="4071823" cy="219456"/>
+          <p:cNvPr id="70" name="Text 67"/>
+          <p:cNvSpPr/>
+          <p:nvPr/>
+        </p:nvSpPr>
+        <p:spPr>
+          <a:xfrm>
+            <a:off x="7269480" y="5779008"/>
+            <a:ext cx="2334463" cy="384048"/>
           </a:xfrm>
           <a:prstGeom prst="rect">
             <a:avLst/>
@@ -7758,7 +8065,7 @@
                 <a:ea typeface="맑은 고딕" pitchFamily="34" charset="-122"/>
                 <a:cs typeface="맑은 고딕" pitchFamily="34" charset="-120"/>
               </a:rPr>
-              <a:t>800만원 초과 ~ 1,000만원 미만</a:t>
+              <a:t>실수취 800만원 이하</a:t>
             </a:r>
             <a:endParaRPr lang="en-US" sz="1000" dirty="0"/>
           </a:p>
@@ -7766,14 +8073,14 @@
       </p:sp>
       <p:sp>
         <p:nvSpPr>
-          <p:cNvPr id="63" name="Text 60"/>
-          <p:cNvSpPr/>
-          <p:nvPr/>
-        </p:nvSpPr>
-        <p:spPr>
-          <a:xfrm>
-            <a:off x="7269480" y="5468112"/>
-            <a:ext cx="4071823" cy="201168"/>
+          <p:cNvPr id="71" name="Text 68"/>
+          <p:cNvSpPr/>
+          <p:nvPr/>
+        </p:nvSpPr>
+        <p:spPr>
+          <a:xfrm>
+            <a:off x="9658807" y="5779008"/>
+            <a:ext cx="1078992" cy="384048"/>
           </a:xfrm>
           <a:prstGeom prst="rect">
             <a:avLst/>
@@ -7796,190 +8103,59 @@
             <a:r>
               <a:rPr lang="en-US" sz="930" dirty="0">
                 <a:solidFill>
+                  <a:srgbClr val="1E3457"/>
+                </a:solidFill>
+                <a:latin typeface="맑은 고딕" pitchFamily="34" charset="0"/>
+                <a:ea typeface="맑은 고딕" pitchFamily="34" charset="-122"/>
+                <a:cs typeface="맑은 고딕" pitchFamily="34" charset="-120"/>
+              </a:rPr>
+              <a:t>본사 집행</a:t>
+            </a:r>
+            <a:endParaRPr lang="en-US" sz="930" dirty="0"/>
+          </a:p>
+        </p:txBody>
+      </p:sp>
+      <p:sp>
+        <p:nvSpPr>
+          <p:cNvPr id="72" name="Text 69"/>
+          <p:cNvSpPr/>
+          <p:nvPr/>
+        </p:nvSpPr>
+        <p:spPr>
+          <a:xfrm>
+            <a:off x="10774375" y="5779008"/>
+            <a:ext cx="585216" cy="384048"/>
+          </a:xfrm>
+          <a:prstGeom prst="rect">
+            <a:avLst/>
+          </a:prstGeom>
+          <a:noFill/>
+          <a:ln>
+            <a:noFill/>
+          </a:ln>
+        </p:spPr>
+        <p:txBody>
+          <a:bodyPr wrap="square" lIns="0" tIns="0" rIns="0" bIns="0" rtlCol="0" anchor="ctr"/>
+          <a:lstStyle/>
+          <a:p>
+            <a:pPr algn="r" indent="0" marL="0">
+              <a:lnSpc>
+                <a:spcPts val="1200"/>
+              </a:lnSpc>
+              <a:buNone/>
+            </a:pPr>
+            <a:r>
+              <a:rPr lang="en-US" sz="850" dirty="0">
+                <a:solidFill>
                   <a:srgbClr val="5C687F"/>
                 </a:solidFill>
                 <a:latin typeface="맑은 고딕" pitchFamily="34" charset="0"/>
                 <a:ea typeface="맑은 고딕" pitchFamily="34" charset="-122"/>
                 <a:cs typeface="맑은 고딕" pitchFamily="34" charset="-120"/>
               </a:rPr>
-              <a:t>양사 협의</a:t>
-            </a:r>
-            <a:endParaRPr lang="en-US" sz="930" dirty="0"/>
-          </a:p>
-        </p:txBody>
-      </p:sp>
-      <p:sp>
-        <p:nvSpPr>
-          <p:cNvPr id="64" name="Shape 61"/>
-          <p:cNvSpPr/>
-          <p:nvPr/>
-        </p:nvSpPr>
-        <p:spPr>
-          <a:xfrm>
-            <a:off x="6775704" y="5705856"/>
-            <a:ext cx="4730191" cy="438912"/>
-          </a:xfrm>
-          <a:prstGeom prst="roundRect">
-            <a:avLst>
-              <a:gd name="adj" fmla="val 12500"/>
-            </a:avLst>
-          </a:prstGeom>
-          <a:solidFill>
-            <a:srgbClr val="E7EFFA"/>
-          </a:solidFill>
-          <a:ln>
-            <a:noFill/>
-          </a:ln>
-        </p:spPr>
-      </p:sp>
-      <p:sp>
-        <p:nvSpPr>
-          <p:cNvPr id="65" name="Shape 62"/>
-          <p:cNvSpPr/>
-          <p:nvPr/>
-        </p:nvSpPr>
-        <p:spPr>
-          <a:xfrm>
-            <a:off x="6922008" y="5806440"/>
-            <a:ext cx="237744" cy="237744"/>
-          </a:xfrm>
-          <a:prstGeom prst="ellipse">
-            <a:avLst/>
-          </a:prstGeom>
-          <a:solidFill>
-            <a:srgbClr val="2868F0"/>
-          </a:solidFill>
-          <a:ln>
-            <a:noFill/>
-          </a:ln>
-        </p:spPr>
-      </p:sp>
-      <p:sp>
-        <p:nvSpPr>
-          <p:cNvPr id="66" name="Text 63"/>
-          <p:cNvSpPr/>
-          <p:nvPr/>
-        </p:nvSpPr>
-        <p:spPr>
-          <a:xfrm>
-            <a:off x="6922008" y="5806440"/>
-            <a:ext cx="237744" cy="237744"/>
-          </a:xfrm>
-          <a:prstGeom prst="rect">
-            <a:avLst/>
-          </a:prstGeom>
-          <a:noFill/>
-          <a:ln>
-            <a:noFill/>
-          </a:ln>
-        </p:spPr>
-        <p:txBody>
-          <a:bodyPr wrap="square" lIns="0" tIns="0" rIns="0" bIns="0" rtlCol="0" anchor="ctr"/>
-          <a:lstStyle/>
-          <a:p>
-            <a:pPr algn="ctr" indent="0" marL="0">
-              <a:buNone/>
-            </a:pPr>
-            <a:r>
-              <a:rPr lang="en-US" sz="1040" b="1" dirty="0">
-                <a:solidFill>
-                  <a:srgbClr val="FFFFFF"/>
-                </a:solidFill>
-                <a:latin typeface="맑은 고딕" pitchFamily="34" charset="0"/>
-                <a:ea typeface="맑은 고딕" pitchFamily="34" charset="-122"/>
-                <a:cs typeface="맑은 고딕" pitchFamily="34" charset="-120"/>
-              </a:rPr>
-              <a:t>3</a:t>
-            </a:r>
-            <a:endParaRPr lang="en-US" sz="1040" dirty="0"/>
-          </a:p>
-        </p:txBody>
-      </p:sp>
-      <p:sp>
-        <p:nvSpPr>
-          <p:cNvPr id="67" name="Text 64"/>
-          <p:cNvSpPr/>
-          <p:nvPr/>
-        </p:nvSpPr>
-        <p:spPr>
-          <a:xfrm>
-            <a:off x="7269480" y="5724144"/>
-            <a:ext cx="4071823" cy="219456"/>
-          </a:xfrm>
-          <a:prstGeom prst="rect">
-            <a:avLst/>
-          </a:prstGeom>
-          <a:noFill/>
-          <a:ln>
-            <a:noFill/>
-          </a:ln>
-        </p:spPr>
-        <p:txBody>
-          <a:bodyPr wrap="square" lIns="0" tIns="0" rIns="0" bIns="0" rtlCol="0" anchor="ctr"/>
-          <a:lstStyle/>
-          <a:p>
-            <a:pPr algn="l" indent="0" marL="0">
-              <a:lnSpc>
-                <a:spcPts val="1540"/>
-              </a:lnSpc>
-              <a:buNone/>
-            </a:pPr>
-            <a:r>
-              <a:rPr lang="en-US" sz="1000" b="1" dirty="0">
-                <a:solidFill>
-                  <a:srgbClr val="1E3457"/>
-                </a:solidFill>
-                <a:latin typeface="맑은 고딕" pitchFamily="34" charset="0"/>
-                <a:ea typeface="맑은 고딕" pitchFamily="34" charset="-122"/>
-                <a:cs typeface="맑은 고딕" pitchFamily="34" charset="-120"/>
-              </a:rPr>
-              <a:t>1,000만원 전액 수취</a:t>
-            </a:r>
-            <a:endParaRPr lang="en-US" sz="1000" dirty="0"/>
-          </a:p>
-        </p:txBody>
-      </p:sp>
-      <p:sp>
-        <p:nvSpPr>
-          <p:cNvPr id="68" name="Text 65"/>
-          <p:cNvSpPr/>
-          <p:nvPr/>
-        </p:nvSpPr>
-        <p:spPr>
-          <a:xfrm>
-            <a:off x="7269480" y="5925312"/>
-            <a:ext cx="4071823" cy="201168"/>
-          </a:xfrm>
-          <a:prstGeom prst="rect">
-            <a:avLst/>
-          </a:prstGeom>
-          <a:noFill/>
-          <a:ln>
-            <a:noFill/>
-          </a:ln>
-        </p:spPr>
-        <p:txBody>
-          <a:bodyPr wrap="square" lIns="0" tIns="0" rIns="0" bIns="0" rtlCol="0" anchor="ctr"/>
-          <a:lstStyle/>
-          <a:p>
-            <a:pPr algn="l" indent="0" marL="0">
-              <a:lnSpc>
-                <a:spcPts val="1430"/>
-              </a:lnSpc>
-              <a:buNone/>
-            </a:pPr>
-            <a:r>
-              <a:rPr lang="en-US" sz="930" dirty="0">
-                <a:solidFill>
-                  <a:srgbClr val="5C687F"/>
-                </a:solidFill>
-                <a:latin typeface="맑은 고딕" pitchFamily="34" charset="0"/>
-                <a:ea typeface="맑은 고딕" pitchFamily="34" charset="-122"/>
-                <a:cs typeface="맑은 고딕" pitchFamily="34" charset="-120"/>
-              </a:rPr>
-              <a:t>내일사장 집행 · 수취액 중 200만원 매장 LSM 광고비</a:t>
-            </a:r>
-            <a:endParaRPr lang="en-US" sz="930" dirty="0"/>
+              <a:t>본사 부담</a:t>
+            </a:r>
+            <a:endParaRPr lang="en-US" sz="850" dirty="0"/>
           </a:p>
         </p:txBody>
       </p:sp>
@@ -8767,7 +8943,7 @@
                 <a:ea typeface="맑은 고딕" pitchFamily="34" charset="-122"/>
                 <a:cs typeface="맑은 고딕" pitchFamily="34" charset="-120"/>
               </a:rPr>
-              <a:t>이후 월 로열티 150만원 전액 본사 순증 — 개설 대가 추가 청구 없음</a:t>
+              <a:t>이후 월 로열티 150만원 전액 본사 순증 · 개설 대가 추가 청구 없음</a:t>
             </a:r>
             <a:endParaRPr lang="en-US" sz="1100" dirty="0"/>
           </a:p>
@@ -8982,7 +9158,7 @@
                 <a:ea typeface="맑은 고딕" pitchFamily="34" charset="-122"/>
                 <a:cs typeface="맑은 고딕" pitchFamily="34" charset="-120"/>
               </a:rPr>
-              <a:t>1개점 누적 본사 순수취 — 막대 100% = 5,900만원</a:t>
+              <a:t>1개점 누적 본사 순수취 (막대 100% = 5,900만원)</a:t>
             </a:r>
             <a:endParaRPr lang="en-US" sz="1250" dirty="0"/>
           </a:p>
@@ -9447,7 +9623,7 @@
                 <a:ea typeface="맑은 고딕" pitchFamily="34" charset="-122"/>
                 <a:cs typeface="맑은 고딕" pitchFamily="34" charset="-120"/>
               </a:rPr>
-              <a:t>출점 규모별 36개월 누적 — 막대 100% = 5억 9,000만원</a:t>
+              <a:t>출점 규모별 36개월 누적 (막대 100% = 5억 9,000만원)</a:t>
             </a:r>
             <a:endParaRPr lang="en-US" sz="1250" dirty="0"/>
           </a:p>
@@ -13005,7 +13181,7 @@
                 <a:ea typeface="맑은 고딕" pitchFamily="34" charset="-122"/>
                 <a:cs typeface="맑은 고딕" pitchFamily="34" charset="-120"/>
               </a:rPr>
-              <a:t>첫 구간 파일럿 — 홀덤 적합군 분류부터 검증</a:t>
+              <a:t>첫 구간 파일럿 : 홀덤 적합군 분류부터 검증</a:t>
             </a:r>
             <a:endParaRPr lang="en-US" sz="1100" dirty="0"/>
           </a:p>
@@ -13219,7 +13395,7 @@
                 <a:ea typeface="맑은 고딕" pitchFamily="34" charset="-122"/>
                 <a:cs typeface="맑은 고딕" pitchFamily="34" charset="-120"/>
               </a:rPr>
-              <a:t>보완 장치 — 파일럿 · 주 단위 리포트 · 본사 승인 자료 전용</a:t>
+              <a:t>보완 장치 : 파일럿 · 주 단위 리포트 · 본사 승인 자료 전용</a:t>
             </a:r>
             <a:endParaRPr lang="en-US" sz="1100" dirty="0"/>
           </a:p>
@@ -13477,7 +13653,7 @@
                 <a:ea typeface="맑은 고딕" pitchFamily="34" charset="-122"/>
                 <a:cs typeface="맑은 고딕" pitchFamily="34" charset="-120"/>
               </a:rPr>
-              <a:t>파일럿 운영 기준 — 본사 결정 사항</a:t>
+              <a:t>파일럿 운영 기준 (본사 결정 사항)</a:t>
             </a:r>
             <a:endParaRPr lang="en-US" sz="1250" dirty="0"/>
           </a:p>
@@ -13807,7 +13983,7 @@
                 <a:ea typeface="맑은 고딕" pitchFamily="34" charset="-122"/>
                 <a:cs typeface="맑은 고딕" pitchFamily="34" charset="-120"/>
               </a:rPr>
-              <a:t>본사 판단으로 즉시 중단 — 사유 제한 없음</a:t>
+              <a:t>본사 판단으로 즉시 중단, 사유 제한 없음</a:t>
             </a:r>
             <a:endParaRPr lang="en-US" sz="1150" dirty="0"/>
           </a:p>
@@ -14357,7 +14533,7 @@
                 <a:ea typeface="맑은 고딕" pitchFamily="34" charset="-122"/>
                 <a:cs typeface="맑은 고딕" pitchFamily="34" charset="-120"/>
               </a:rPr>
-              <a:t>주 단위 리포트 — 활동 지표 및 단계별 파이프라인</a:t>
+              <a:t>주 단위 리포트 · 활동 지표 및 단계별 파이프라인</a:t>
             </a:r>
             <a:endParaRPr lang="en-US" sz="1150" dirty="0"/>
           </a:p>
@@ -17830,7 +18006,7 @@
                 <a:ea typeface="맑은 고딕" pitchFamily="34" charset="-122"/>
                 <a:cs typeface="맑은 고딕" pitchFamily="34" charset="-120"/>
               </a:rPr>
-              <a:t>내일사장이 붙이는 구간 — 접점 확보부터 계약 체결까지</a:t>
+              <a:t>내일사장이 붙이는 구간 : 접점 확보부터 계약 체결까지</a:t>
             </a:r>
             <a:endParaRPr lang="en-US" sz="1050" dirty="0"/>
           </a:p>
@@ -19358,7 +19534,7 @@
                 <a:ea typeface="맑은 고딕" pitchFamily="34" charset="-122"/>
                 <a:cs typeface="맑은 고딕" pitchFamily="34" charset="-120"/>
               </a:rPr>
-              <a:t>호호반점 — '공감' 소구 광고</a:t>
+              <a:t>호호반점 · 공감 소구 광고</a:t>
             </a:r>
             <a:endParaRPr lang="en-US" sz="1100" dirty="0"/>
           </a:p>
@@ -19501,7 +19677,7 @@
                 <a:ea typeface="맑은 고딕" pitchFamily="34" charset="-122"/>
                 <a:cs typeface="맑은 고딕" pitchFamily="34" charset="-120"/>
               </a:rPr>
-              <a:t>더진국 — '상황' 소구 광고</a:t>
+              <a:t>더진국 · 상황 소구 광고</a:t>
             </a:r>
             <a:endParaRPr lang="en-US" sz="1100" dirty="0"/>
           </a:p>
@@ -20653,7 +20829,7 @@
                 <a:ea typeface="맑은 고딕" pitchFamily="34" charset="-122"/>
                 <a:cs typeface="맑은 고딕" pitchFamily="34" charset="-120"/>
               </a:rPr>
-              <a:t>씨엔티테크 — 스테이션케이 제1호 투자조합</a:t>
+              <a:t>씨엔티테크 · 스테이션케이 제1호 투자조합</a:t>
             </a:r>
             <a:endParaRPr lang="en-US" sz="1050" dirty="0"/>
           </a:p>
@@ -22066,7 +22242,7 @@
                 <a:ea typeface="맑은 고딕" pitchFamily="34" charset="-122"/>
                 <a:cs typeface="맑은 고딕" pitchFamily="34" charset="-120"/>
               </a:rPr>
-              <a:t>· Seed 투자유치 (씨엔티테크—스테이션케이 제1호 투자조합)</a:t>
+              <a:t>· Seed 투자유치 (씨엔티테크 · 스테이션케이 제1호 투자조합)</a:t>
             </a:r>
             <a:endParaRPr lang="en-US" sz="950" dirty="0"/>
           </a:p>
@@ -22789,7 +22965,7 @@
                 <a:ea typeface="맑은 고딕" pitchFamily="34" charset="-122"/>
                 <a:cs typeface="맑은 고딕" pitchFamily="34" charset="-120"/>
               </a:rPr>
-              <a:t>"가맹을 팔아본 적 있느냐" — 이 질문에 대한 답이 팀 자체입니다</a:t>
+              <a:t>"가맹을 팔아본 적 있느냐", 이 질문에 대한 답이 팀 자체입니다</a:t>
             </a:r>
             <a:endParaRPr lang="en-US" sz="980" dirty="0"/>
           </a:p>
@@ -23227,7 +23403,7 @@
         <p:spPr>
           <a:xfrm>
             <a:off x="685800" y="4626864"/>
-            <a:ext cx="2554148" cy="256032"/>
+            <a:ext cx="3460394" cy="256032"/>
           </a:xfrm>
           <a:prstGeom prst="rect">
             <a:avLst/>
@@ -23288,7 +23464,7 @@
         <p:spPr>
           <a:xfrm>
             <a:off x="685800" y="4901184"/>
-            <a:ext cx="2554148" cy="219456"/>
+            <a:ext cx="3460394" cy="219456"/>
           </a:xfrm>
           <a:prstGeom prst="rect">
             <a:avLst/>
@@ -23332,7 +23508,7 @@
         <p:spPr>
           <a:xfrm>
             <a:off x="685800" y="5175504"/>
-            <a:ext cx="2554148" cy="214884"/>
+            <a:ext cx="3460394" cy="214884"/>
           </a:xfrm>
           <a:prstGeom prst="rect">
             <a:avLst/>
@@ -23376,7 +23552,7 @@
         <p:spPr>
           <a:xfrm>
             <a:off x="685800" y="5390388"/>
-            <a:ext cx="2554148" cy="214884"/>
+            <a:ext cx="3460394" cy="214884"/>
           </a:xfrm>
           <a:prstGeom prst="rect">
             <a:avLst/>
@@ -23420,7 +23596,7 @@
         <p:spPr>
           <a:xfrm>
             <a:off x="685800" y="5605272"/>
-            <a:ext cx="2554148" cy="214884"/>
+            <a:ext cx="3460394" cy="214884"/>
           </a:xfrm>
           <a:prstGeom prst="rect">
             <a:avLst/>
@@ -23463,7 +23639,7 @@
         </p:nvSpPr>
         <p:spPr>
           <a:xfrm>
-            <a:off x="3340532" y="4645152"/>
+            <a:off x="4255922" y="4645152"/>
             <a:ext cx="7315" cy="1426464"/>
           </a:xfrm>
           <a:prstGeom prst="rect">
@@ -23485,8 +23661,8 @@
         </p:nvSpPr>
         <p:spPr>
           <a:xfrm>
-            <a:off x="3441116" y="4626864"/>
-            <a:ext cx="2554148" cy="256032"/>
+            <a:off x="4365650" y="4626864"/>
+            <a:ext cx="3460394" cy="256032"/>
           </a:xfrm>
           <a:prstGeom prst="rect">
             <a:avLst/>
@@ -23546,8 +23722,8 @@
         </p:nvSpPr>
         <p:spPr>
           <a:xfrm>
-            <a:off x="3441116" y="4901184"/>
-            <a:ext cx="2554148" cy="219456"/>
+            <a:off x="4365650" y="4901184"/>
+            <a:ext cx="3460394" cy="219456"/>
           </a:xfrm>
           <a:prstGeom prst="rect">
             <a:avLst/>
@@ -23590,8 +23766,8 @@
         </p:nvSpPr>
         <p:spPr>
           <a:xfrm>
-            <a:off x="3441116" y="5175504"/>
-            <a:ext cx="2554148" cy="214884"/>
+            <a:off x="4365650" y="5175504"/>
+            <a:ext cx="3460394" cy="214884"/>
           </a:xfrm>
           <a:prstGeom prst="rect">
             <a:avLst/>
@@ -23634,8 +23810,8 @@
         </p:nvSpPr>
         <p:spPr>
           <a:xfrm>
-            <a:off x="3441116" y="5390388"/>
-            <a:ext cx="2554148" cy="214884"/>
+            <a:off x="4365650" y="5390388"/>
+            <a:ext cx="3460394" cy="214884"/>
           </a:xfrm>
           <a:prstGeom prst="rect">
             <a:avLst/>
@@ -23678,8 +23854,8 @@
         </p:nvSpPr>
         <p:spPr>
           <a:xfrm>
-            <a:off x="3441116" y="5605272"/>
-            <a:ext cx="2554148" cy="214884"/>
+            <a:off x="4365650" y="5605272"/>
+            <a:ext cx="3460394" cy="214884"/>
           </a:xfrm>
           <a:prstGeom prst="rect">
             <a:avLst/>
@@ -23722,7 +23898,7 @@
         </p:nvSpPr>
         <p:spPr>
           <a:xfrm>
-            <a:off x="6095848" y="4645152"/>
+            <a:off x="7935773" y="4645152"/>
             <a:ext cx="7315" cy="1426464"/>
           </a:xfrm>
           <a:prstGeom prst="rect">
@@ -23744,8 +23920,8 @@
         </p:nvSpPr>
         <p:spPr>
           <a:xfrm>
-            <a:off x="6196432" y="4626864"/>
-            <a:ext cx="2554148" cy="256032"/>
+            <a:off x="8045501" y="4626864"/>
+            <a:ext cx="3460394" cy="256032"/>
           </a:xfrm>
           <a:prstGeom prst="rect">
             <a:avLst/>
@@ -23805,8 +23981,8 @@
         </p:nvSpPr>
         <p:spPr>
           <a:xfrm>
-            <a:off x="6196432" y="4901184"/>
-            <a:ext cx="2554148" cy="219456"/>
+            <a:off x="8045501" y="4901184"/>
+            <a:ext cx="3460394" cy="219456"/>
           </a:xfrm>
           <a:prstGeom prst="rect">
             <a:avLst/>
@@ -23849,8 +24025,8 @@
         </p:nvSpPr>
         <p:spPr>
           <a:xfrm>
-            <a:off x="6196432" y="5175504"/>
-            <a:ext cx="2554148" cy="214884"/>
+            <a:off x="8045501" y="5175504"/>
+            <a:ext cx="3460394" cy="214884"/>
           </a:xfrm>
           <a:prstGeom prst="rect">
             <a:avLst/>
@@ -23893,8 +24069,8 @@
         </p:nvSpPr>
         <p:spPr>
           <a:xfrm>
-            <a:off x="6196432" y="5390388"/>
-            <a:ext cx="2554148" cy="214884"/>
+            <a:off x="8045501" y="5390388"/>
+            <a:ext cx="3460394" cy="214884"/>
           </a:xfrm>
           <a:prstGeom prst="rect">
             <a:avLst/>
@@ -23937,8 +24113,8 @@
         </p:nvSpPr>
         <p:spPr>
           <a:xfrm>
-            <a:off x="6196432" y="5605272"/>
-            <a:ext cx="2554148" cy="214884"/>
+            <a:off x="8045501" y="5605272"/>
+            <a:ext cx="3460394" cy="214884"/>
           </a:xfrm>
           <a:prstGeom prst="rect">
             <a:avLst/>
@@ -23981,8 +24157,8 @@
         </p:nvSpPr>
         <p:spPr>
           <a:xfrm>
-            <a:off x="6196432" y="5820156"/>
-            <a:ext cx="2554148" cy="214884"/>
+            <a:off x="8045501" y="5820156"/>
+            <a:ext cx="3460394" cy="214884"/>
           </a:xfrm>
           <a:prstGeom prst="rect">
             <a:avLst/>
@@ -24012,221 +24188,6 @@
                 <a:cs typeface="맑은 고딕" pitchFamily="34" charset="-120"/>
               </a:rPr>
               <a:t>전] 이삭토스트 영업파트장</a:t>
-            </a:r>
-            <a:endParaRPr lang="en-US" sz="900" dirty="0"/>
-          </a:p>
-        </p:txBody>
-      </p:sp>
-      <p:sp>
-        <p:nvSpPr>
-          <p:cNvPr id="50" name="Shape 47"/>
-          <p:cNvSpPr/>
-          <p:nvPr/>
-        </p:nvSpPr>
-        <p:spPr>
-          <a:xfrm>
-            <a:off x="8851163" y="4645152"/>
-            <a:ext cx="7315" cy="1426464"/>
-          </a:xfrm>
-          <a:prstGeom prst="rect">
-            <a:avLst/>
-          </a:prstGeom>
-          <a:solidFill>
-            <a:srgbClr val="DFE3EA"/>
-          </a:solidFill>
-          <a:ln>
-            <a:noFill/>
-          </a:ln>
-        </p:spPr>
-      </p:sp>
-      <p:sp>
-        <p:nvSpPr>
-          <p:cNvPr id="51" name="Text 48"/>
-          <p:cNvSpPr/>
-          <p:nvPr/>
-        </p:nvSpPr>
-        <p:spPr>
-          <a:xfrm>
-            <a:off x="8951747" y="4626864"/>
-            <a:ext cx="2554148" cy="256032"/>
-          </a:xfrm>
-          <a:prstGeom prst="rect">
-            <a:avLst/>
-          </a:prstGeom>
-          <a:noFill/>
-          <a:ln>
-            <a:noFill/>
-          </a:ln>
-        </p:spPr>
-        <p:txBody>
-          <a:bodyPr wrap="square" lIns="0" tIns="0" rIns="0" bIns="0" rtlCol="0" anchor="ctr"/>
-          <a:lstStyle/>
-          <a:p>
-            <a:pPr algn="l" indent="0" marL="0">
-              <a:lnSpc>
-                <a:spcPts val="1900"/>
-              </a:lnSpc>
-              <a:buNone/>
-            </a:pPr>
-            <a:r>
-              <a:rPr lang="en-US" sz="1200" b="1" dirty="0">
-                <a:solidFill>
-                  <a:srgbClr val="2868F0"/>
-                </a:solidFill>
-                <a:latin typeface="맑은 고딕" pitchFamily="34" charset="0"/>
-                <a:ea typeface="맑은 고딕" pitchFamily="34" charset="-122"/>
-                <a:cs typeface="맑은 고딕" pitchFamily="34" charset="-120"/>
-              </a:rPr>
-              <a:t>김호병  </a:t>
-            </a:r>
-            <a:pPr algn="l" indent="0" marL="0">
-              <a:lnSpc>
-                <a:spcPts val="1900"/>
-              </a:lnSpc>
-              <a:buNone/>
-            </a:pPr>
-            <a:r>
-              <a:rPr lang="en-US" sz="1200" b="1" dirty="0">
-                <a:solidFill>
-                  <a:srgbClr val="1E3457"/>
-                </a:solidFill>
-                <a:latin typeface="맑은 고딕" pitchFamily="34" charset="0"/>
-                <a:ea typeface="맑은 고딕" pitchFamily="34" charset="-122"/>
-                <a:cs typeface="맑은 고딕" pitchFamily="34" charset="-120"/>
-              </a:rPr>
-              <a:t>팀장</a:t>
-            </a:r>
-            <a:endParaRPr lang="en-US" sz="1200" dirty="0"/>
-          </a:p>
-        </p:txBody>
-      </p:sp>
-      <p:sp>
-        <p:nvSpPr>
-          <p:cNvPr id="52" name="Text 49"/>
-          <p:cNvSpPr/>
-          <p:nvPr/>
-        </p:nvSpPr>
-        <p:spPr>
-          <a:xfrm>
-            <a:off x="8951747" y="4901184"/>
-            <a:ext cx="2554148" cy="219456"/>
-          </a:xfrm>
-          <a:prstGeom prst="rect">
-            <a:avLst/>
-          </a:prstGeom>
-          <a:noFill/>
-          <a:ln>
-            <a:noFill/>
-          </a:ln>
-        </p:spPr>
-        <p:txBody>
-          <a:bodyPr wrap="square" lIns="0" tIns="0" rIns="0" bIns="0" rtlCol="0" anchor="ctr"/>
-          <a:lstStyle/>
-          <a:p>
-            <a:pPr algn="l" indent="0" marL="0">
-              <a:lnSpc>
-                <a:spcPts val="1430"/>
-              </a:lnSpc>
-              <a:buNone/>
-            </a:pPr>
-            <a:r>
-              <a:rPr lang="en-US" sz="900" dirty="0">
-                <a:solidFill>
-                  <a:srgbClr val="5C687F"/>
-                </a:solidFill>
-                <a:latin typeface="맑은 고딕" pitchFamily="34" charset="0"/>
-                <a:ea typeface="맑은 고딕" pitchFamily="34" charset="-122"/>
-                <a:cs typeface="맑은 고딕" pitchFamily="34" charset="-120"/>
-              </a:rPr>
-              <a:t>공인중개사</a:t>
-            </a:r>
-            <a:endParaRPr lang="en-US" sz="900" dirty="0"/>
-          </a:p>
-        </p:txBody>
-      </p:sp>
-      <p:sp>
-        <p:nvSpPr>
-          <p:cNvPr id="53" name="Text 50"/>
-          <p:cNvSpPr/>
-          <p:nvPr/>
-        </p:nvSpPr>
-        <p:spPr>
-          <a:xfrm>
-            <a:off x="8951747" y="5175504"/>
-            <a:ext cx="2554148" cy="214884"/>
-          </a:xfrm>
-          <a:prstGeom prst="rect">
-            <a:avLst/>
-          </a:prstGeom>
-          <a:noFill/>
-          <a:ln>
-            <a:noFill/>
-          </a:ln>
-        </p:spPr>
-        <p:txBody>
-          <a:bodyPr wrap="square" lIns="0" tIns="0" rIns="0" bIns="0" rtlCol="0" anchor="ctr"/>
-          <a:lstStyle/>
-          <a:p>
-            <a:pPr algn="l" indent="0" marL="0">
-              <a:lnSpc>
-                <a:spcPts val="1430"/>
-              </a:lnSpc>
-              <a:buNone/>
-            </a:pPr>
-            <a:r>
-              <a:rPr lang="en-US" sz="900" dirty="0">
-                <a:solidFill>
-                  <a:srgbClr val="1E3457"/>
-                </a:solidFill>
-                <a:latin typeface="맑은 고딕" pitchFamily="34" charset="0"/>
-                <a:ea typeface="맑은 고딕" pitchFamily="34" charset="-122"/>
-                <a:cs typeface="맑은 고딕" pitchFamily="34" charset="-120"/>
-              </a:rPr>
-              <a:t>브랜드 개설 및 영업 담당</a:t>
-            </a:r>
-            <a:endParaRPr lang="en-US" sz="900" dirty="0"/>
-          </a:p>
-        </p:txBody>
-      </p:sp>
-      <p:sp>
-        <p:nvSpPr>
-          <p:cNvPr id="54" name="Text 51"/>
-          <p:cNvSpPr/>
-          <p:nvPr/>
-        </p:nvSpPr>
-        <p:spPr>
-          <a:xfrm>
-            <a:off x="8951747" y="5390388"/>
-            <a:ext cx="2554148" cy="214884"/>
-          </a:xfrm>
-          <a:prstGeom prst="rect">
-            <a:avLst/>
-          </a:prstGeom>
-          <a:noFill/>
-          <a:ln>
-            <a:noFill/>
-          </a:ln>
-        </p:spPr>
-        <p:txBody>
-          <a:bodyPr wrap="square" lIns="0" tIns="0" rIns="0" bIns="0" rtlCol="0" anchor="ctr"/>
-          <a:lstStyle/>
-          <a:p>
-            <a:pPr algn="l" indent="0" marL="0">
-              <a:lnSpc>
-                <a:spcPts val="1430"/>
-              </a:lnSpc>
-              <a:buNone/>
-            </a:pPr>
-            <a:r>
-              <a:rPr lang="en-US" sz="900" dirty="0">
-                <a:solidFill>
-                  <a:srgbClr val="1E3457"/>
-                </a:solidFill>
-                <a:latin typeface="맑은 고딕" pitchFamily="34" charset="0"/>
-                <a:ea typeface="맑은 고딕" pitchFamily="34" charset="-122"/>
-                <a:cs typeface="맑은 고딕" pitchFamily="34" charset="-120"/>
-              </a:rPr>
-              <a:t>전] 창업컨설팅 5년 이상</a:t>
             </a:r>
             <a:endParaRPr lang="en-US" sz="900" dirty="0"/>
           </a:p>
@@ -24430,13 +24391,30 @@
             <a:r>
               <a:rPr lang="en-US" sz="2500" b="1" spc="-80" kern="0" dirty="0">
                 <a:solidFill>
+                  <a:srgbClr val="1E3457"/>
+                </a:solidFill>
+                <a:latin typeface="맑은 고딕" pitchFamily="34" charset="0"/>
+                <a:ea typeface="맑은 고딕" pitchFamily="34" charset="-122"/>
+                <a:cs typeface="맑은 고딕" pitchFamily="34" charset="-120"/>
+              </a:rPr>
+              <a:t>주력은 </a:t>
+            </a:r>
+            <a:pPr algn="l" indent="0" marL="0">
+              <a:lnSpc>
+                <a:spcPts val="3400"/>
+              </a:lnSpc>
+              <a:buNone/>
+            </a:pPr>
+            <a:r>
+              <a:rPr lang="en-US" sz="2500" b="1" spc="-80" kern="0" dirty="0">
+                <a:solidFill>
                   <a:srgbClr val="2868F0"/>
                 </a:solidFill>
                 <a:latin typeface="맑은 고딕" pitchFamily="34" charset="0"/>
                 <a:ea typeface="맑은 고딕" pitchFamily="34" charset="-122"/>
                 <a:cs typeface="맑은 고딕" pitchFamily="34" charset="-120"/>
               </a:rPr>
-              <a:t>가맹영업</a:t>
+              <a:t>가맹영업대행</a:t>
             </a:r>
             <a:pPr algn="l" indent="0" marL="0">
               <a:lnSpc>
@@ -24453,7 +24431,7 @@
                 <a:ea typeface="맑은 고딕" pitchFamily="34" charset="-122"/>
                 <a:cs typeface="맑은 고딕" pitchFamily="34" charset="-120"/>
               </a:rPr>
-              <a:t> 수행 업무 3종</a:t>
+              <a:t>입니다</a:t>
             </a:r>
             <a:endParaRPr lang="en-US" sz="2500" dirty="0"/>
           </a:p>
@@ -24473,7 +24451,7 @@
                 <a:ea typeface="맑은 고딕" pitchFamily="34" charset="-122"/>
                 <a:cs typeface="맑은 고딕" pitchFamily="34" charset="-120"/>
               </a:rPr>
-              <a:t>및 수행 브랜드 현황</a:t>
+              <a:t>투입 업무와 수행 브랜드</a:t>
             </a:r>
             <a:endParaRPr lang="en-US" sz="2500" dirty="0"/>
           </a:p>
@@ -24580,7 +24558,7 @@
                 <a:ea typeface="맑은 고딕" pitchFamily="34" charset="-122"/>
                 <a:cs typeface="맑은 고딕" pitchFamily="34" charset="-120"/>
               </a:rPr>
-              <a:t>러너펍에 투입할 수행 업무 3종</a:t>
+              <a:t>러너펍에 투입할 업무</a:t>
             </a:r>
             <a:endParaRPr lang="en-US" sz="1250" dirty="0"/>
           </a:p>
@@ -24641,7 +24619,7 @@
         <p:spPr>
           <a:xfrm>
             <a:off x="1014984" y="2889504"/>
-            <a:ext cx="3877056" cy="237744"/>
+            <a:ext cx="1043940" cy="237744"/>
           </a:xfrm>
           <a:prstGeom prst="rect">
             <a:avLst/>
@@ -24678,7 +24656,75 @@
       </p:sp>
       <p:sp>
         <p:nvSpPr>
-          <p:cNvPr id="13" name="Text 9"/>
+          <p:cNvPr id="13" name="Shape 9"/>
+          <p:cNvSpPr/>
+          <p:nvPr/>
+        </p:nvSpPr>
+        <p:spPr>
+          <a:xfrm>
+            <a:off x="2058924" y="2898648"/>
+            <a:ext cx="630936" cy="246888"/>
+          </a:xfrm>
+          <a:prstGeom prst="roundRect">
+            <a:avLst>
+              <a:gd name="adj" fmla="val 48148"/>
+            </a:avLst>
+          </a:prstGeom>
+          <a:solidFill>
+            <a:srgbClr val="2868F0"/>
+          </a:solidFill>
+          <a:ln>
+            <a:noFill/>
+          </a:ln>
+        </p:spPr>
+      </p:sp>
+      <p:sp>
+        <p:nvSpPr>
+          <p:cNvPr id="14" name="Text 10"/>
+          <p:cNvSpPr/>
+          <p:nvPr/>
+        </p:nvSpPr>
+        <p:spPr>
+          <a:xfrm>
+            <a:off x="2223516" y="2898648"/>
+            <a:ext cx="301752" cy="246888"/>
+          </a:xfrm>
+          <a:prstGeom prst="rect">
+            <a:avLst/>
+          </a:prstGeom>
+          <a:noFill/>
+          <a:ln>
+            <a:noFill/>
+          </a:ln>
+        </p:spPr>
+        <p:txBody>
+          <a:bodyPr wrap="square" lIns="0" tIns="0" rIns="0" bIns="0" rtlCol="0" anchor="ctr"/>
+          <a:lstStyle/>
+          <a:p>
+            <a:pPr algn="l" indent="0" marL="0">
+              <a:lnSpc>
+                <a:spcPts val="1206"/>
+              </a:lnSpc>
+              <a:buNone/>
+            </a:pPr>
+            <a:r>
+              <a:rPr lang="en-US" sz="900" b="1" spc="80" kern="0" dirty="0">
+                <a:solidFill>
+                  <a:srgbClr val="FFFFFF"/>
+                </a:solidFill>
+                <a:latin typeface="맑은 고딕" pitchFamily="34" charset="0"/>
+                <a:ea typeface="맑은 고딕" pitchFamily="34" charset="-122"/>
+                <a:cs typeface="맑은 고딕" pitchFamily="34" charset="-120"/>
+              </a:rPr>
+              <a:t>주력</a:t>
+            </a:r>
+            <a:endParaRPr lang="en-US" sz="900" dirty="0"/>
+          </a:p>
+        </p:txBody>
+      </p:sp>
+      <p:sp>
+        <p:nvSpPr>
+          <p:cNvPr id="15" name="Text 11"/>
           <p:cNvSpPr/>
           <p:nvPr/>
         </p:nvSpPr>
@@ -24722,7 +24768,7 @@
       </p:sp>
       <p:sp>
         <p:nvSpPr>
-          <p:cNvPr id="14" name="Text 10"/>
+          <p:cNvPr id="16" name="Text 12"/>
           <p:cNvSpPr/>
           <p:nvPr/>
         </p:nvSpPr>
@@ -24766,7 +24812,7 @@
       </p:sp>
       <p:sp>
         <p:nvSpPr>
-          <p:cNvPr id="15" name="Text 11"/>
+          <p:cNvPr id="17" name="Text 13"/>
           <p:cNvSpPr/>
           <p:nvPr/>
         </p:nvSpPr>
@@ -24810,7 +24856,7 @@
       </p:sp>
       <p:pic>
         <p:nvPicPr>
-          <p:cNvPr id="16" name="Image 2" descr="/home/user/onewillco-meeting-2026/runnerpub-proposal/assets/ic_mega.png">    </p:cNvPr>
+          <p:cNvPr id="18" name="Image 2" descr="/home/user/onewillco-meeting-2026/runnerpub-proposal/assets/ic_store.png">    </p:cNvPr>
           <p:cNvPicPr>
             <a:picLocks noChangeAspect="1"/>
           </p:cNvPicPr>
@@ -24824,7 +24870,7 @@
         </p:blipFill>
         <p:spPr>
           <a:xfrm>
-            <a:off x="685800" y="3995928"/>
+            <a:off x="685800" y="3922776"/>
             <a:ext cx="237744" cy="237744"/>
           </a:xfrm>
           <a:prstGeom prst="rect">
@@ -24834,14 +24880,14 @@
       </p:pic>
       <p:sp>
         <p:nvSpPr>
-          <p:cNvPr id="17" name="Text 12"/>
-          <p:cNvSpPr/>
-          <p:nvPr/>
-        </p:nvSpPr>
-        <p:spPr>
-          <a:xfrm>
-            <a:off x="1014984" y="3986784"/>
-            <a:ext cx="3877056" cy="237744"/>
+          <p:cNvPr id="19" name="Text 14"/>
+          <p:cNvSpPr/>
+          <p:nvPr/>
+        </p:nvSpPr>
+        <p:spPr>
+          <a:xfrm>
+            <a:off x="1014984" y="3913632"/>
+            <a:ext cx="1383665" cy="237744"/>
           </a:xfrm>
           <a:prstGeom prst="rect">
             <a:avLst/>
@@ -24870,7 +24916,7 @@
                 <a:ea typeface="맑은 고딕" pitchFamily="34" charset="-122"/>
                 <a:cs typeface="맑은 고딕" pitchFamily="34" charset="-120"/>
               </a:rPr>
-              <a:t>마케팅</a:t>
+              <a:t>점포개발 · 물건화</a:t>
             </a:r>
             <a:endParaRPr lang="en-US" sz="1250" dirty="0"/>
           </a:p>
@@ -24878,13 +24924,81 @@
       </p:sp>
       <p:sp>
         <p:nvSpPr>
-          <p:cNvPr id="18" name="Text 13"/>
-          <p:cNvSpPr/>
-          <p:nvPr/>
-        </p:nvSpPr>
-        <p:spPr>
-          <a:xfrm>
-            <a:off x="1014984" y="4261104"/>
+          <p:cNvPr id="20" name="Shape 15"/>
+          <p:cNvSpPr/>
+          <p:nvPr/>
+        </p:nvSpPr>
+        <p:spPr>
+          <a:xfrm>
+            <a:off x="2398649" y="3922776"/>
+            <a:ext cx="630936" cy="246888"/>
+          </a:xfrm>
+          <a:prstGeom prst="roundRect">
+            <a:avLst>
+              <a:gd name="adj" fmla="val 48148"/>
+            </a:avLst>
+          </a:prstGeom>
+          <a:solidFill>
+            <a:srgbClr val="2868F0"/>
+          </a:solidFill>
+          <a:ln>
+            <a:noFill/>
+          </a:ln>
+        </p:spPr>
+      </p:sp>
+      <p:sp>
+        <p:nvSpPr>
+          <p:cNvPr id="21" name="Text 16"/>
+          <p:cNvSpPr/>
+          <p:nvPr/>
+        </p:nvSpPr>
+        <p:spPr>
+          <a:xfrm>
+            <a:off x="2563241" y="3922776"/>
+            <a:ext cx="301752" cy="246888"/>
+          </a:xfrm>
+          <a:prstGeom prst="rect">
+            <a:avLst/>
+          </a:prstGeom>
+          <a:noFill/>
+          <a:ln>
+            <a:noFill/>
+          </a:ln>
+        </p:spPr>
+        <p:txBody>
+          <a:bodyPr wrap="square" lIns="0" tIns="0" rIns="0" bIns="0" rtlCol="0" anchor="ctr"/>
+          <a:lstStyle/>
+          <a:p>
+            <a:pPr algn="l" indent="0" marL="0">
+              <a:lnSpc>
+                <a:spcPts val="1206"/>
+              </a:lnSpc>
+              <a:buNone/>
+            </a:pPr>
+            <a:r>
+              <a:rPr lang="en-US" sz="900" b="1" spc="80" kern="0" dirty="0">
+                <a:solidFill>
+                  <a:srgbClr val="FFFFFF"/>
+                </a:solidFill>
+                <a:latin typeface="맑은 고딕" pitchFamily="34" charset="0"/>
+                <a:ea typeface="맑은 고딕" pitchFamily="34" charset="-122"/>
+                <a:cs typeface="맑은 고딕" pitchFamily="34" charset="-120"/>
+              </a:rPr>
+              <a:t>주력</a:t>
+            </a:r>
+            <a:endParaRPr lang="en-US" sz="900" dirty="0"/>
+          </a:p>
+        </p:txBody>
+      </p:sp>
+      <p:sp>
+        <p:nvSpPr>
+          <p:cNvPr id="22" name="Text 17"/>
+          <p:cNvSpPr/>
+          <p:nvPr/>
+        </p:nvSpPr>
+        <p:spPr>
+          <a:xfrm>
+            <a:off x="1014984" y="4187952"/>
             <a:ext cx="3877056" cy="219456"/>
           </a:xfrm>
           <a:prstGeom prst="rect">
@@ -24914,7 +25028,7 @@
                 <a:ea typeface="맑은 고딕" pitchFamily="34" charset="-122"/>
                 <a:cs typeface="맑은 고딕" pitchFamily="34" charset="-120"/>
               </a:rPr>
-              <a:t>· 블로그 · 네이버 플레이스 · 검색광고 · SNS</a:t>
+              <a:t>· 보증금 · 권리금 · 월세 · 평수 수집</a:t>
             </a:r>
             <a:endParaRPr lang="en-US" sz="930" dirty="0"/>
           </a:p>
@@ -24922,13 +25036,13 @@
       </p:sp>
       <p:sp>
         <p:nvSpPr>
-          <p:cNvPr id="19" name="Text 14"/>
-          <p:cNvSpPr/>
-          <p:nvPr/>
-        </p:nvSpPr>
-        <p:spPr>
-          <a:xfrm>
-            <a:off x="1014984" y="4480560"/>
+          <p:cNvPr id="23" name="Text 18"/>
+          <p:cNvSpPr/>
+          <p:nvPr/>
+        </p:nvSpPr>
+        <p:spPr>
+          <a:xfrm>
+            <a:off x="1014984" y="4407408"/>
             <a:ext cx="3877056" cy="219456"/>
           </a:xfrm>
           <a:prstGeom prst="rect">
@@ -24958,7 +25072,7 @@
                 <a:ea typeface="맑은 고딕" pitchFamily="34" charset="-122"/>
                 <a:cs typeface="맑은 고딕" pitchFamily="34" charset="-120"/>
               </a:rPr>
-              <a:t>· 창업박람회 부스 · 사업설명회</a:t>
+              <a:t>· 실측 · 현장사진 · 인테리어 견적 산출</a:t>
             </a:r>
             <a:endParaRPr lang="en-US" sz="930" dirty="0"/>
           </a:p>
@@ -24966,13 +25080,13 @@
       </p:sp>
       <p:sp>
         <p:nvSpPr>
-          <p:cNvPr id="20" name="Text 15"/>
-          <p:cNvSpPr/>
-          <p:nvPr/>
-        </p:nvSpPr>
-        <p:spPr>
-          <a:xfrm>
-            <a:off x="1014984" y="4700016"/>
+          <p:cNvPr id="24" name="Text 19"/>
+          <p:cNvSpPr/>
+          <p:nvPr/>
+        </p:nvSpPr>
+        <p:spPr>
+          <a:xfrm>
+            <a:off x="1014984" y="4626864"/>
             <a:ext cx="3877056" cy="219456"/>
           </a:xfrm>
           <a:prstGeom prst="rect">
@@ -25002,7 +25116,7 @@
                 <a:ea typeface="맑은 고딕" pitchFamily="34" charset="-122"/>
                 <a:cs typeface="맑은 고딕" pitchFamily="34" charset="-120"/>
               </a:rPr>
-              <a:t>· 매장 오픈 마케팅</a:t>
+              <a:t>· 즉시 브리핑 가능한 상태로 완성</a:t>
             </a:r>
             <a:endParaRPr lang="en-US" sz="930" dirty="0"/>
           </a:p>
@@ -25010,7 +25124,7 @@
       </p:sp>
       <p:pic>
         <p:nvPicPr>
-          <p:cNvPr id="21" name="Image 3" descr="/home/user/onewillco-meeting-2026/runnerpub-proposal/assets/ic_store.png">    </p:cNvPr>
+          <p:cNvPr id="25" name="Image 3" descr="/home/user/onewillco-meeting-2026/runnerpub-proposal/assets/ic_mega.png">    </p:cNvPr>
           <p:cNvPicPr>
             <a:picLocks noChangeAspect="1"/>
           </p:cNvPicPr>
@@ -25024,7 +25138,7 @@
         </p:blipFill>
         <p:spPr>
           <a:xfrm>
-            <a:off x="685800" y="5093208"/>
+            <a:off x="685800" y="4946904"/>
             <a:ext cx="237744" cy="237744"/>
           </a:xfrm>
           <a:prstGeom prst="rect">
@@ -25034,14 +25148,14 @@
       </p:pic>
       <p:sp>
         <p:nvSpPr>
-          <p:cNvPr id="22" name="Text 16"/>
-          <p:cNvSpPr/>
-          <p:nvPr/>
-        </p:nvSpPr>
-        <p:spPr>
-          <a:xfrm>
-            <a:off x="1014984" y="5084064"/>
-            <a:ext cx="3877056" cy="237744"/>
+          <p:cNvPr id="26" name="Text 20"/>
+          <p:cNvSpPr/>
+          <p:nvPr/>
+        </p:nvSpPr>
+        <p:spPr>
+          <a:xfrm>
+            <a:off x="1014984" y="4937760"/>
+            <a:ext cx="929640" cy="237744"/>
           </a:xfrm>
           <a:prstGeom prst="rect">
             <a:avLst/>
@@ -25070,7 +25184,7 @@
                 <a:ea typeface="맑은 고딕" pitchFamily="34" charset="-122"/>
                 <a:cs typeface="맑은 고딕" pitchFamily="34" charset="-120"/>
               </a:rPr>
-              <a:t>점포개발 → 물건화</a:t>
+              <a:t>창업 마케팅</a:t>
             </a:r>
             <a:endParaRPr lang="en-US" sz="1250" dirty="0"/>
           </a:p>
@@ -25078,13 +25192,81 @@
       </p:sp>
       <p:sp>
         <p:nvSpPr>
-          <p:cNvPr id="23" name="Text 17"/>
-          <p:cNvSpPr/>
-          <p:nvPr/>
-        </p:nvSpPr>
-        <p:spPr>
-          <a:xfrm>
-            <a:off x="1014984" y="5358384"/>
+          <p:cNvPr id="27" name="Shape 21"/>
+          <p:cNvSpPr/>
+          <p:nvPr/>
+        </p:nvSpPr>
+        <p:spPr>
+          <a:xfrm>
+            <a:off x="1944624" y="4946904"/>
+            <a:ext cx="630936" cy="246888"/>
+          </a:xfrm>
+          <a:prstGeom prst="roundRect">
+            <a:avLst>
+              <a:gd name="adj" fmla="val 48148"/>
+            </a:avLst>
+          </a:prstGeom>
+          <a:solidFill>
+            <a:srgbClr val="EFF1F4"/>
+          </a:solidFill>
+          <a:ln>
+            <a:noFill/>
+          </a:ln>
+        </p:spPr>
+      </p:sp>
+      <p:sp>
+        <p:nvSpPr>
+          <p:cNvPr id="28" name="Text 22"/>
+          <p:cNvSpPr/>
+          <p:nvPr/>
+        </p:nvSpPr>
+        <p:spPr>
+          <a:xfrm>
+            <a:off x="2109216" y="4946904"/>
+            <a:ext cx="301752" cy="246888"/>
+          </a:xfrm>
+          <a:prstGeom prst="rect">
+            <a:avLst/>
+          </a:prstGeom>
+          <a:noFill/>
+          <a:ln>
+            <a:noFill/>
+          </a:ln>
+        </p:spPr>
+        <p:txBody>
+          <a:bodyPr wrap="square" lIns="0" tIns="0" rIns="0" bIns="0" rtlCol="0" anchor="ctr"/>
+          <a:lstStyle/>
+          <a:p>
+            <a:pPr algn="l" indent="0" marL="0">
+              <a:lnSpc>
+                <a:spcPts val="1206"/>
+              </a:lnSpc>
+              <a:buNone/>
+            </a:pPr>
+            <a:r>
+              <a:rPr lang="en-US" sz="900" b="1" spc="80" kern="0" dirty="0">
+                <a:solidFill>
+                  <a:srgbClr val="5C687F"/>
+                </a:solidFill>
+                <a:latin typeface="맑은 고딕" pitchFamily="34" charset="0"/>
+                <a:ea typeface="맑은 고딕" pitchFamily="34" charset="-122"/>
+                <a:cs typeface="맑은 고딕" pitchFamily="34" charset="-120"/>
+              </a:rPr>
+              <a:t>선택</a:t>
+            </a:r>
+            <a:endParaRPr lang="en-US" sz="900" dirty="0"/>
+          </a:p>
+        </p:txBody>
+      </p:sp>
+      <p:sp>
+        <p:nvSpPr>
+          <p:cNvPr id="29" name="Text 23"/>
+          <p:cNvSpPr/>
+          <p:nvPr/>
+        </p:nvSpPr>
+        <p:spPr>
+          <a:xfrm>
+            <a:off x="1014984" y="5212080"/>
             <a:ext cx="3877056" cy="219456"/>
           </a:xfrm>
           <a:prstGeom prst="rect">
@@ -25114,7 +25296,7 @@
                 <a:ea typeface="맑은 고딕" pitchFamily="34" charset="-122"/>
                 <a:cs typeface="맑은 고딕" pitchFamily="34" charset="-120"/>
               </a:rPr>
-              <a:t>· 보증금 · 권리금 · 월세 · 평수 수집</a:t>
+              <a:t>· 블로그 · 네이버 플레이스 · 검색광고 · SNS</a:t>
             </a:r>
             <a:endParaRPr lang="en-US" sz="930" dirty="0"/>
           </a:p>
@@ -25122,13 +25304,13 @@
       </p:sp>
       <p:sp>
         <p:nvSpPr>
-          <p:cNvPr id="24" name="Text 18"/>
-          <p:cNvSpPr/>
-          <p:nvPr/>
-        </p:nvSpPr>
-        <p:spPr>
-          <a:xfrm>
-            <a:off x="1014984" y="5577840"/>
+          <p:cNvPr id="30" name="Text 24"/>
+          <p:cNvSpPr/>
+          <p:nvPr/>
+        </p:nvSpPr>
+        <p:spPr>
+          <a:xfrm>
+            <a:off x="1014984" y="5431536"/>
             <a:ext cx="3877056" cy="219456"/>
           </a:xfrm>
           <a:prstGeom prst="rect">
@@ -25158,7 +25340,7 @@
                 <a:ea typeface="맑은 고딕" pitchFamily="34" charset="-122"/>
                 <a:cs typeface="맑은 고딕" pitchFamily="34" charset="-120"/>
               </a:rPr>
-              <a:t>· 실측 · 현장사진 · 인테리어 견적 산출</a:t>
+              <a:t>· 창업박람회 부스 · 사업설명회</a:t>
             </a:r>
             <a:endParaRPr lang="en-US" sz="930" dirty="0"/>
           </a:p>
@@ -25166,13 +25348,13 @@
       </p:sp>
       <p:sp>
         <p:nvSpPr>
-          <p:cNvPr id="25" name="Text 19"/>
-          <p:cNvSpPr/>
-          <p:nvPr/>
-        </p:nvSpPr>
-        <p:spPr>
-          <a:xfrm>
-            <a:off x="1014984" y="5797296"/>
+          <p:cNvPr id="31" name="Text 25"/>
+          <p:cNvSpPr/>
+          <p:nvPr/>
+        </p:nvSpPr>
+        <p:spPr>
+          <a:xfrm>
+            <a:off x="1014984" y="5650992"/>
             <a:ext cx="3877056" cy="219456"/>
           </a:xfrm>
           <a:prstGeom prst="rect">
@@ -25202,7 +25384,7 @@
                 <a:ea typeface="맑은 고딕" pitchFamily="34" charset="-122"/>
                 <a:cs typeface="맑은 고딕" pitchFamily="34" charset="-120"/>
               </a:rPr>
-              <a:t>· 즉시 브리핑 가능한 상태로 완성</a:t>
+              <a:t>· 매장 오픈 마케팅</a:t>
             </a:r>
             <a:endParaRPr lang="en-US" sz="930" dirty="0"/>
           </a:p>
@@ -25210,7 +25392,51 @@
       </p:sp>
       <p:sp>
         <p:nvSpPr>
-          <p:cNvPr id="26" name="Shape 20"/>
+          <p:cNvPr id="32" name="Text 26"/>
+          <p:cNvSpPr/>
+          <p:nvPr/>
+        </p:nvSpPr>
+        <p:spPr>
+          <a:xfrm>
+            <a:off x="685800" y="5943600"/>
+            <a:ext cx="4206240" cy="201168"/>
+          </a:xfrm>
+          <a:prstGeom prst="rect">
+            <a:avLst/>
+          </a:prstGeom>
+          <a:noFill/>
+          <a:ln>
+            <a:noFill/>
+          </a:ln>
+        </p:spPr>
+        <p:txBody>
+          <a:bodyPr wrap="square" lIns="0" tIns="0" rIns="0" bIns="0" rtlCol="0" anchor="ctr"/>
+          <a:lstStyle/>
+          <a:p>
+            <a:pPr algn="l" indent="0" marL="0">
+              <a:lnSpc>
+                <a:spcPts val="1200"/>
+              </a:lnSpc>
+              <a:buNone/>
+            </a:pPr>
+            <a:r>
+              <a:rPr lang="en-US" sz="850" dirty="0">
+                <a:solidFill>
+                  <a:srgbClr val="5C687F"/>
+                </a:solidFill>
+                <a:latin typeface="맑은 고딕" pitchFamily="34" charset="0"/>
+                <a:ea typeface="맑은 고딕" pitchFamily="34" charset="-122"/>
+                <a:cs typeface="맑은 고딕" pitchFamily="34" charset="-120"/>
+              </a:rPr>
+              <a:t>※ 창업 마케팅은 집행비 발생 선택 항목 · 성공보수 미포함 · 집행 여부 별도 협의</a:t>
+            </a:r>
+            <a:endParaRPr lang="en-US" sz="850" dirty="0"/>
+          </a:p>
+        </p:txBody>
+      </p:sp>
+      <p:sp>
+        <p:nvSpPr>
+          <p:cNvPr id="33" name="Shape 27"/>
           <p:cNvSpPr/>
           <p:nvPr/>
         </p:nvSpPr>
@@ -25232,7 +25458,7 @@
       </p:sp>
       <p:sp>
         <p:nvSpPr>
-          <p:cNvPr id="27" name="Text 21"/>
+          <p:cNvPr id="34" name="Text 28"/>
           <p:cNvSpPr/>
           <p:nvPr/>
         </p:nvSpPr>
@@ -25273,14 +25499,14 @@
       </p:sp>
       <p:sp>
         <p:nvSpPr>
-          <p:cNvPr id="28" name="Text 22"/>
+          <p:cNvPr id="35" name="Text 29"/>
           <p:cNvSpPr/>
           <p:nvPr/>
         </p:nvSpPr>
         <p:spPr>
           <a:xfrm>
             <a:off x="5632704" y="2359152"/>
-            <a:ext cx="2194560" cy="310896"/>
+            <a:ext cx="3108960" cy="310896"/>
           </a:xfrm>
           <a:prstGeom prst="rect">
             <a:avLst/>
@@ -25309,7 +25535,7 @@
                 <a:ea typeface="맑은 고딕" pitchFamily="34" charset="-122"/>
                 <a:cs typeface="맑은 고딕" pitchFamily="34" charset="-120"/>
               </a:rPr>
-              <a:t>수행 브랜드</a:t>
+              <a:t>2025~2026 영업 수행 브랜드</a:t>
             </a:r>
             <a:endParaRPr lang="en-US" sz="1250" dirty="0"/>
           </a:p>
@@ -25317,7 +25543,7 @@
       </p:sp>
       <p:sp>
         <p:nvSpPr>
-          <p:cNvPr id="29" name="Shape 23"/>
+          <p:cNvPr id="36" name="Shape 30"/>
           <p:cNvSpPr/>
           <p:nvPr/>
         </p:nvSpPr>
@@ -25339,7 +25565,7 @@
       </p:sp>
       <p:sp>
         <p:nvSpPr>
-          <p:cNvPr id="30" name="Text 24"/>
+          <p:cNvPr id="37" name="Text 31"/>
           <p:cNvSpPr/>
           <p:nvPr/>
         </p:nvSpPr>
@@ -25383,7 +25609,7 @@
       </p:sp>
       <p:sp>
         <p:nvSpPr>
-          <p:cNvPr id="31" name="Shape 25"/>
+          <p:cNvPr id="38" name="Shape 32"/>
           <p:cNvSpPr/>
           <p:nvPr/>
         </p:nvSpPr>
@@ -25407,7 +25633,7 @@
       </p:sp>
       <p:sp>
         <p:nvSpPr>
-          <p:cNvPr id="32" name="Text 26"/>
+          <p:cNvPr id="39" name="Text 33"/>
           <p:cNvSpPr/>
           <p:nvPr/>
         </p:nvSpPr>
@@ -25451,7 +25677,7 @@
       </p:sp>
       <p:sp>
         <p:nvSpPr>
-          <p:cNvPr id="33" name="Shape 27"/>
+          <p:cNvPr id="40" name="Shape 34"/>
           <p:cNvSpPr/>
           <p:nvPr/>
         </p:nvSpPr>
@@ -25475,7 +25701,7 @@
       </p:sp>
       <p:sp>
         <p:nvSpPr>
-          <p:cNvPr id="34" name="Text 28"/>
+          <p:cNvPr id="41" name="Text 35"/>
           <p:cNvSpPr/>
           <p:nvPr/>
         </p:nvSpPr>
@@ -25519,7 +25745,7 @@
       </p:sp>
       <p:sp>
         <p:nvSpPr>
-          <p:cNvPr id="35" name="Shape 29"/>
+          <p:cNvPr id="42" name="Shape 36"/>
           <p:cNvSpPr/>
           <p:nvPr/>
         </p:nvSpPr>
@@ -25543,7 +25769,7 @@
       </p:sp>
       <p:sp>
         <p:nvSpPr>
-          <p:cNvPr id="36" name="Text 30"/>
+          <p:cNvPr id="43" name="Text 37"/>
           <p:cNvSpPr/>
           <p:nvPr/>
         </p:nvSpPr>
@@ -25587,7 +25813,7 @@
       </p:sp>
       <p:sp>
         <p:nvSpPr>
-          <p:cNvPr id="37" name="Shape 31"/>
+          <p:cNvPr id="44" name="Shape 38"/>
           <p:cNvSpPr/>
           <p:nvPr/>
         </p:nvSpPr>
@@ -25611,7 +25837,7 @@
       </p:sp>
       <p:sp>
         <p:nvSpPr>
-          <p:cNvPr id="38" name="Text 32"/>
+          <p:cNvPr id="45" name="Text 39"/>
           <p:cNvSpPr/>
           <p:nvPr/>
         </p:nvSpPr>
@@ -25655,7 +25881,7 @@
       </p:sp>
       <p:sp>
         <p:nvSpPr>
-          <p:cNvPr id="39" name="Shape 33"/>
+          <p:cNvPr id="46" name="Shape 40"/>
           <p:cNvSpPr/>
           <p:nvPr/>
         </p:nvSpPr>
@@ -25679,7 +25905,7 @@
       </p:sp>
       <p:sp>
         <p:nvSpPr>
-          <p:cNvPr id="40" name="Text 34"/>
+          <p:cNvPr id="47" name="Text 41"/>
           <p:cNvSpPr/>
           <p:nvPr/>
         </p:nvSpPr>
@@ -25723,7 +25949,7 @@
       </p:sp>
       <p:sp>
         <p:nvSpPr>
-          <p:cNvPr id="41" name="Shape 35"/>
+          <p:cNvPr id="48" name="Shape 42"/>
           <p:cNvSpPr/>
           <p:nvPr/>
         </p:nvSpPr>
@@ -25747,7 +25973,7 @@
       </p:sp>
       <p:sp>
         <p:nvSpPr>
-          <p:cNvPr id="42" name="Text 36"/>
+          <p:cNvPr id="49" name="Text 43"/>
           <p:cNvSpPr/>
           <p:nvPr/>
         </p:nvSpPr>
@@ -25791,7 +26017,7 @@
       </p:sp>
       <p:sp>
         <p:nvSpPr>
-          <p:cNvPr id="43" name="Shape 37"/>
+          <p:cNvPr id="50" name="Shape 44"/>
           <p:cNvSpPr/>
           <p:nvPr/>
         </p:nvSpPr>
@@ -25815,7 +26041,7 @@
       </p:sp>
       <p:sp>
         <p:nvSpPr>
-          <p:cNvPr id="44" name="Text 38"/>
+          <p:cNvPr id="51" name="Text 45"/>
           <p:cNvSpPr/>
           <p:nvPr/>
         </p:nvSpPr>
@@ -25859,7 +26085,7 @@
       </p:sp>
       <p:sp>
         <p:nvSpPr>
-          <p:cNvPr id="45" name="Shape 39"/>
+          <p:cNvPr id="52" name="Shape 46"/>
           <p:cNvSpPr/>
           <p:nvPr/>
         </p:nvSpPr>
@@ -25883,7 +26109,7 @@
       </p:sp>
       <p:sp>
         <p:nvSpPr>
-          <p:cNvPr id="46" name="Text 40"/>
+          <p:cNvPr id="53" name="Text 47"/>
           <p:cNvSpPr/>
           <p:nvPr/>
         </p:nvSpPr>
@@ -25927,7 +26153,7 @@
       </p:sp>
       <p:sp>
         <p:nvSpPr>
-          <p:cNvPr id="47" name="Shape 41"/>
+          <p:cNvPr id="54" name="Shape 48"/>
           <p:cNvSpPr/>
           <p:nvPr/>
         </p:nvSpPr>
@@ -25951,7 +26177,7 @@
       </p:sp>
       <p:sp>
         <p:nvSpPr>
-          <p:cNvPr id="48" name="Text 42"/>
+          <p:cNvPr id="55" name="Text 49"/>
           <p:cNvSpPr/>
           <p:nvPr/>
         </p:nvSpPr>
@@ -25995,7 +26221,7 @@
       </p:sp>
       <p:sp>
         <p:nvSpPr>
-          <p:cNvPr id="49" name="Shape 43"/>
+          <p:cNvPr id="56" name="Shape 50"/>
           <p:cNvSpPr/>
           <p:nvPr/>
         </p:nvSpPr>
@@ -26019,7 +26245,7 @@
       </p:sp>
       <p:sp>
         <p:nvSpPr>
-          <p:cNvPr id="50" name="Text 44"/>
+          <p:cNvPr id="57" name="Text 51"/>
           <p:cNvSpPr/>
           <p:nvPr/>
         </p:nvSpPr>
@@ -26063,7 +26289,7 @@
       </p:sp>
       <p:sp>
         <p:nvSpPr>
-          <p:cNvPr id="51" name="Shape 45"/>
+          <p:cNvPr id="58" name="Shape 52"/>
           <p:cNvSpPr/>
           <p:nvPr/>
         </p:nvSpPr>
@@ -26087,7 +26313,7 @@
       </p:sp>
       <p:sp>
         <p:nvSpPr>
-          <p:cNvPr id="52" name="Text 46"/>
+          <p:cNvPr id="59" name="Text 53"/>
           <p:cNvSpPr/>
           <p:nvPr/>
         </p:nvSpPr>
@@ -26131,7 +26357,7 @@
       </p:sp>
       <p:sp>
         <p:nvSpPr>
-          <p:cNvPr id="53" name="Shape 47"/>
+          <p:cNvPr id="60" name="Shape 54"/>
           <p:cNvSpPr/>
           <p:nvPr/>
         </p:nvSpPr>
@@ -26155,7 +26381,7 @@
       </p:sp>
       <p:sp>
         <p:nvSpPr>
-          <p:cNvPr id="54" name="Text 48"/>
+          <p:cNvPr id="61" name="Text 55"/>
           <p:cNvSpPr/>
           <p:nvPr/>
         </p:nvSpPr>
@@ -26199,210 +26425,13 @@
       </p:sp>
       <p:sp>
         <p:nvSpPr>
-          <p:cNvPr id="55" name="Shape 49"/>
-          <p:cNvSpPr/>
-          <p:nvPr/>
-        </p:nvSpPr>
-        <p:spPr>
-          <a:xfrm>
-            <a:off x="5312664" y="4924044"/>
-            <a:ext cx="192024" cy="192024"/>
-          </a:xfrm>
-          <a:prstGeom prst="ellipse">
-            <a:avLst/>
-          </a:prstGeom>
-          <a:solidFill>
-            <a:srgbClr val="2868F0"/>
-          </a:solidFill>
-          <a:ln>
-            <a:noFill/>
-          </a:ln>
-        </p:spPr>
-      </p:sp>
-      <p:sp>
-        <p:nvSpPr>
-          <p:cNvPr id="56" name="Text 50"/>
-          <p:cNvSpPr/>
-          <p:nvPr/>
-        </p:nvSpPr>
-        <p:spPr>
-          <a:xfrm>
-            <a:off x="5312664" y="4924044"/>
-            <a:ext cx="192024" cy="192024"/>
-          </a:xfrm>
-          <a:prstGeom prst="rect">
-            <a:avLst/>
-          </a:prstGeom>
-          <a:noFill/>
-          <a:ln>
-            <a:noFill/>
-          </a:ln>
-        </p:spPr>
-        <p:txBody>
-          <a:bodyPr wrap="square" lIns="0" tIns="0" rIns="0" bIns="0" rtlCol="0" anchor="ctr"/>
-          <a:lstStyle/>
-          <a:p>
-            <a:pPr algn="ctr" indent="0" marL="0">
-              <a:buNone/>
-            </a:pPr>
-            <a:r>
-              <a:rPr lang="en-US" sz="966" b="1" dirty="0">
-                <a:solidFill>
-                  <a:srgbClr val="FFFFFF"/>
-                </a:solidFill>
-                <a:latin typeface="맑은 고딕" pitchFamily="34" charset="0"/>
-                <a:ea typeface="맑은 고딕" pitchFamily="34" charset="-122"/>
-                <a:cs typeface="맑은 고딕" pitchFamily="34" charset="-120"/>
-              </a:rPr>
-              <a:t>✓</a:t>
-            </a:r>
-            <a:endParaRPr lang="en-US" sz="966" dirty="0"/>
-          </a:p>
-        </p:txBody>
-      </p:sp>
-      <p:sp>
-        <p:nvSpPr>
-          <p:cNvPr id="57" name="Text 51"/>
-          <p:cNvSpPr/>
-          <p:nvPr/>
-        </p:nvSpPr>
-        <p:spPr>
-          <a:xfrm>
-            <a:off x="5632704" y="4864608"/>
-            <a:ext cx="5818327" cy="310896"/>
-          </a:xfrm>
-          <a:prstGeom prst="rect">
-            <a:avLst/>
-          </a:prstGeom>
-          <a:noFill/>
-          <a:ln>
-            <a:noFill/>
-          </a:ln>
-        </p:spPr>
-        <p:txBody>
-          <a:bodyPr wrap="square" lIns="0" tIns="0" rIns="0" bIns="0" rtlCol="0" anchor="ctr"/>
-          <a:lstStyle/>
-          <a:p>
-            <a:pPr algn="l" indent="0" marL="0">
-              <a:lnSpc>
-                <a:spcPts val="1900"/>
-              </a:lnSpc>
-              <a:buNone/>
-            </a:pPr>
-            <a:r>
-              <a:rPr lang="en-US" sz="1250" b="1" dirty="0">
-                <a:solidFill>
-                  <a:srgbClr val="1A55CC"/>
-                </a:solidFill>
-                <a:latin typeface="맑은 고딕" pitchFamily="34" charset="0"/>
-                <a:ea typeface="맑은 고딕" pitchFamily="34" charset="-122"/>
-                <a:cs typeface="맑은 고딕" pitchFamily="34" charset="-120"/>
-              </a:rPr>
-              <a:t>진행 사례</a:t>
-            </a:r>
-            <a:endParaRPr lang="en-US" sz="1250" dirty="0"/>
-          </a:p>
-        </p:txBody>
-      </p:sp>
-      <p:sp>
-        <p:nvSpPr>
-          <p:cNvPr id="58" name="Shape 52"/>
-          <p:cNvSpPr/>
-          <p:nvPr/>
-        </p:nvSpPr>
-        <p:spPr>
-          <a:xfrm>
-            <a:off x="5312664" y="5164531"/>
-            <a:ext cx="6193231" cy="7315"/>
-          </a:xfrm>
-          <a:prstGeom prst="rect">
-            <a:avLst/>
-          </a:prstGeom>
-          <a:solidFill>
-            <a:srgbClr val="DFE3EA"/>
-          </a:solidFill>
-          <a:ln>
-            <a:noFill/>
-          </a:ln>
-        </p:spPr>
-      </p:sp>
-      <p:sp>
-        <p:nvSpPr>
-          <p:cNvPr id="59" name="Shape 53"/>
-          <p:cNvSpPr/>
-          <p:nvPr/>
-        </p:nvSpPr>
-        <p:spPr>
-          <a:xfrm>
-            <a:off x="5312664" y="5303520"/>
-            <a:ext cx="6193231" cy="585216"/>
-          </a:xfrm>
-          <a:prstGeom prst="roundRect">
-            <a:avLst>
-              <a:gd name="adj" fmla="val 12500"/>
-            </a:avLst>
-          </a:prstGeom>
-          <a:solidFill>
-            <a:srgbClr val="E7EFFA"/>
-          </a:solidFill>
-          <a:ln>
-            <a:noFill/>
-          </a:ln>
-        </p:spPr>
-      </p:sp>
-      <p:sp>
-        <p:nvSpPr>
-          <p:cNvPr id="60" name="Text 54"/>
-          <p:cNvSpPr/>
-          <p:nvPr/>
-        </p:nvSpPr>
-        <p:spPr>
-          <a:xfrm>
-            <a:off x="5513832" y="5303520"/>
-            <a:ext cx="5790895" cy="585216"/>
-          </a:xfrm>
-          <a:prstGeom prst="rect">
-            <a:avLst/>
-          </a:prstGeom>
-          <a:noFill/>
-          <a:ln>
-            <a:noFill/>
-          </a:ln>
-        </p:spPr>
-        <p:txBody>
-          <a:bodyPr wrap="square" lIns="0" tIns="0" rIns="0" bIns="0" rtlCol="0" anchor="ctr"/>
-          <a:lstStyle/>
-          <a:p>
-            <a:pPr algn="l" indent="0" marL="0">
-              <a:lnSpc>
-                <a:spcPts val="1900"/>
-              </a:lnSpc>
-              <a:buNone/>
-            </a:pPr>
-            <a:r>
-              <a:rPr lang="en-US" sz="1200" b="1" dirty="0">
-                <a:solidFill>
-                  <a:srgbClr val="1E3457"/>
-                </a:solidFill>
-                <a:latin typeface="맑은 고딕" pitchFamily="34" charset="0"/>
-                <a:ea typeface="맑은 고딕" pitchFamily="34" charset="-122"/>
-                <a:cs typeface="맑은 고딕" pitchFamily="34" charset="-120"/>
-              </a:rPr>
-              <a:t>33떡볶이 강동역점 — 임대차 · 가맹 예약 완료 · 주간 실매출 2,150만원 / 1,500만원</a:t>
-            </a:r>
-            <a:endParaRPr lang="en-US" sz="1200" dirty="0"/>
-          </a:p>
-        </p:txBody>
-      </p:sp>
-      <p:sp>
-        <p:nvSpPr>
-          <p:cNvPr id="61" name="Text 55"/>
-          <p:cNvSpPr/>
-          <p:nvPr/>
-        </p:nvSpPr>
-        <p:spPr>
-          <a:xfrm>
-            <a:off x="5312664" y="5961888"/>
+          <p:cNvPr id="62" name="Text 56"/>
+          <p:cNvSpPr/>
+          <p:nvPr/>
+        </p:nvSpPr>
+        <p:spPr>
+          <a:xfrm>
+            <a:off x="5312664" y="4901184"/>
             <a:ext cx="6193231" cy="201168"/>
           </a:xfrm>
           <a:prstGeom prst="rect">
@@ -26432,7 +26461,7 @@
                 <a:ea typeface="맑은 고딕" pitchFamily="34" charset="-122"/>
                 <a:cs typeface="맑은 고딕" pitchFamily="34" charset="-120"/>
               </a:rPr>
-              <a:t>※ 2025~2026 영업 수행 브랜드 기준 · 브랜드별 계약 체결 건수는 미팅 시 원장 기준으로 제시</a:t>
+              <a:t>※ 브랜드별 수행 범위와 계약 체결 건수는 미팅 시 원장 기준으로 제시합니다.</a:t>
             </a:r>
             <a:endParaRPr lang="en-US" sz="850" dirty="0"/>
           </a:p>
@@ -28876,7 +28905,7 @@
                 <a:ea typeface="맑은 고딕" pitchFamily="34" charset="-122"/>
                 <a:cs typeface="맑은 고딕" pitchFamily="34" charset="-120"/>
               </a:rPr>
-              <a:t>상담 단계마다 근거 문서가 남습니다 — 홈택스 연동 · 검증 리포트 · 상권 분석 · 정보공개서 D-day</a:t>
+              <a:t>상담 단계마다 근거 문서가 남습니다 · 홈택스 연동 · 검증 리포트 · 상권 분석 · 정보공개서 D-day</a:t>
             </a:r>
             <a:endParaRPr lang="en-US" sz="1300" dirty="0"/>
           </a:p>
@@ -31087,7 +31116,7 @@
                 <a:ea typeface="맑은 고딕" pitchFamily="34" charset="-122"/>
                 <a:cs typeface="맑은 고딕" pitchFamily="34" charset="-120"/>
               </a:rPr>
-              <a:t>—</a:t>
+              <a:t>해당 없음</a:t>
             </a:r>
             <a:endParaRPr lang="en-US" sz="1050" dirty="0"/>
           </a:p>

--- a/runnerpub-proposal/runnerpub_proposal_naeilsajang.pptx
+++ b/runnerpub-proposal/runnerpub_proposal_naeilsajang.pptx
@@ -24529,7 +24529,7 @@
         <p:spPr>
           <a:xfrm>
             <a:off x="1005840" y="2359152"/>
-            <a:ext cx="3831336" cy="310896"/>
+            <a:ext cx="10445191" cy="310896"/>
           </a:xfrm>
           <a:prstGeom prst="rect">
             <a:avLst/>
@@ -24573,7 +24573,7 @@
         <p:spPr>
           <a:xfrm>
             <a:off x="685800" y="2659075"/>
-            <a:ext cx="4206240" cy="7315"/>
+            <a:ext cx="10820095" cy="7315"/>
           </a:xfrm>
           <a:prstGeom prst="rect">
             <a:avLst/>
@@ -24602,7 +24602,7 @@
         </p:blipFill>
         <p:spPr>
           <a:xfrm>
-            <a:off x="685800" y="2898648"/>
+            <a:off x="685800" y="2816352"/>
             <a:ext cx="237744" cy="237744"/>
           </a:xfrm>
           <a:prstGeom prst="rect">
@@ -24618,7 +24618,7 @@
         </p:nvSpPr>
         <p:spPr>
           <a:xfrm>
-            <a:off x="1014984" y="2889504"/>
+            <a:off x="1014984" y="2807208"/>
             <a:ext cx="1043940" cy="237744"/>
           </a:xfrm>
           <a:prstGeom prst="rect">
@@ -24662,7 +24662,7 @@
         </p:nvSpPr>
         <p:spPr>
           <a:xfrm>
-            <a:off x="2058924" y="2898648"/>
+            <a:off x="2058924" y="2816352"/>
             <a:ext cx="630936" cy="246888"/>
           </a:xfrm>
           <a:prstGeom prst="roundRect">
@@ -24686,7 +24686,7 @@
         </p:nvSpPr>
         <p:spPr>
           <a:xfrm>
-            <a:off x="2223516" y="2898648"/>
+            <a:off x="2223516" y="2816352"/>
             <a:ext cx="301752" cy="246888"/>
           </a:xfrm>
           <a:prstGeom prst="rect">
@@ -24730,19 +24730,19 @@
         </p:nvSpPr>
         <p:spPr>
           <a:xfrm>
-            <a:off x="1014984" y="3163824"/>
-            <a:ext cx="3877056" cy="219456"/>
-          </a:xfrm>
-          <a:prstGeom prst="rect">
-            <a:avLst/>
-          </a:prstGeom>
-          <a:noFill/>
-          <a:ln>
-            <a:noFill/>
-          </a:ln>
-        </p:spPr>
-        <p:txBody>
-          <a:bodyPr wrap="square" lIns="0" tIns="0" rIns="0" bIns="0" rtlCol="0" anchor="ctr"/>
+            <a:off x="685800" y="3182112"/>
+            <a:ext cx="3460394" cy="384048"/>
+          </a:xfrm>
+          <a:prstGeom prst="rect">
+            <a:avLst/>
+          </a:prstGeom>
+          <a:noFill/>
+          <a:ln>
+            <a:noFill/>
+          </a:ln>
+        </p:spPr>
+        <p:txBody>
+          <a:bodyPr wrap="square" lIns="0" tIns="0" rIns="0" bIns="0" rtlCol="0" anchor="t"/>
           <a:lstStyle/>
           <a:p>
             <a:pPr algn="l" indent="0" marL="0">
@@ -24774,19 +24774,19 @@
         </p:nvSpPr>
         <p:spPr>
           <a:xfrm>
-            <a:off x="1014984" y="3383280"/>
-            <a:ext cx="3877056" cy="219456"/>
-          </a:xfrm>
-          <a:prstGeom prst="rect">
-            <a:avLst/>
-          </a:prstGeom>
-          <a:noFill/>
-          <a:ln>
-            <a:noFill/>
-          </a:ln>
-        </p:spPr>
-        <p:txBody>
-          <a:bodyPr wrap="square" lIns="0" tIns="0" rIns="0" bIns="0" rtlCol="0" anchor="ctr"/>
+            <a:off x="685800" y="3584448"/>
+            <a:ext cx="3460394" cy="384048"/>
+          </a:xfrm>
+          <a:prstGeom prst="rect">
+            <a:avLst/>
+          </a:prstGeom>
+          <a:noFill/>
+          <a:ln>
+            <a:noFill/>
+          </a:ln>
+        </p:spPr>
+        <p:txBody>
+          <a:bodyPr wrap="square" lIns="0" tIns="0" rIns="0" bIns="0" rtlCol="0" anchor="t"/>
           <a:lstStyle/>
           <a:p>
             <a:pPr algn="l" indent="0" marL="0">
@@ -24818,19 +24818,19 @@
         </p:nvSpPr>
         <p:spPr>
           <a:xfrm>
-            <a:off x="1014984" y="3602736"/>
-            <a:ext cx="3877056" cy="219456"/>
-          </a:xfrm>
-          <a:prstGeom prst="rect">
-            <a:avLst/>
-          </a:prstGeom>
-          <a:noFill/>
-          <a:ln>
-            <a:noFill/>
-          </a:ln>
-        </p:spPr>
-        <p:txBody>
-          <a:bodyPr wrap="square" lIns="0" tIns="0" rIns="0" bIns="0" rtlCol="0" anchor="ctr"/>
+            <a:off x="685800" y="3986784"/>
+            <a:ext cx="3460394" cy="384048"/>
+          </a:xfrm>
+          <a:prstGeom prst="rect">
+            <a:avLst/>
+          </a:prstGeom>
+          <a:noFill/>
+          <a:ln>
+            <a:noFill/>
+          </a:ln>
+        </p:spPr>
+        <p:txBody>
+          <a:bodyPr wrap="square" lIns="0" tIns="0" rIns="0" bIns="0" rtlCol="0" anchor="t"/>
           <a:lstStyle/>
           <a:p>
             <a:pPr algn="l" indent="0" marL="0">
@@ -24853,10 +24853,32 @@
             <a:endParaRPr lang="en-US" sz="930" dirty="0"/>
           </a:p>
         </p:txBody>
+      </p:sp>
+      <p:sp>
+        <p:nvSpPr>
+          <p:cNvPr id="18" name="Shape 14"/>
+          <p:cNvSpPr/>
+          <p:nvPr/>
+        </p:nvSpPr>
+        <p:spPr>
+          <a:xfrm>
+            <a:off x="4255922" y="2816352"/>
+            <a:ext cx="7315" cy="1645920"/>
+          </a:xfrm>
+          <a:prstGeom prst="rect">
+            <a:avLst/>
+          </a:prstGeom>
+          <a:solidFill>
+            <a:srgbClr val="DFE3EA"/>
+          </a:solidFill>
+          <a:ln>
+            <a:noFill/>
+          </a:ln>
+        </p:spPr>
       </p:sp>
       <p:pic>
         <p:nvPicPr>
-          <p:cNvPr id="18" name="Image 2" descr="/home/user/onewillco-meeting-2026/runnerpub-proposal/assets/ic_store.png">    </p:cNvPr>
+          <p:cNvPr id="19" name="Image 2" descr="/home/user/onewillco-meeting-2026/runnerpub-proposal/assets/ic_store.png">    </p:cNvPr>
           <p:cNvPicPr>
             <a:picLocks noChangeAspect="1"/>
           </p:cNvPicPr>
@@ -24870,7 +24892,7 @@
         </p:blipFill>
         <p:spPr>
           <a:xfrm>
-            <a:off x="685800" y="3922776"/>
+            <a:off x="4365650" y="2816352"/>
             <a:ext cx="237744" cy="237744"/>
           </a:xfrm>
           <a:prstGeom prst="rect">
@@ -24880,13 +24902,13 @@
       </p:pic>
       <p:sp>
         <p:nvSpPr>
-          <p:cNvPr id="19" name="Text 14"/>
-          <p:cNvSpPr/>
-          <p:nvPr/>
-        </p:nvSpPr>
-        <p:spPr>
-          <a:xfrm>
-            <a:off x="1014984" y="3913632"/>
+          <p:cNvPr id="20" name="Text 15"/>
+          <p:cNvSpPr/>
+          <p:nvPr/>
+        </p:nvSpPr>
+        <p:spPr>
+          <a:xfrm>
+            <a:off x="4694834" y="2807208"/>
             <a:ext cx="1383665" cy="237744"/>
           </a:xfrm>
           <a:prstGeom prst="rect">
@@ -24924,13 +24946,13 @@
       </p:sp>
       <p:sp>
         <p:nvSpPr>
-          <p:cNvPr id="20" name="Shape 15"/>
-          <p:cNvSpPr/>
-          <p:nvPr/>
-        </p:nvSpPr>
-        <p:spPr>
-          <a:xfrm>
-            <a:off x="2398649" y="3922776"/>
+          <p:cNvPr id="21" name="Shape 16"/>
+          <p:cNvSpPr/>
+          <p:nvPr/>
+        </p:nvSpPr>
+        <p:spPr>
+          <a:xfrm>
+            <a:off x="6078499" y="2816352"/>
             <a:ext cx="630936" cy="246888"/>
           </a:xfrm>
           <a:prstGeom prst="roundRect">
@@ -24948,13 +24970,13 @@
       </p:sp>
       <p:sp>
         <p:nvSpPr>
-          <p:cNvPr id="21" name="Text 16"/>
-          <p:cNvSpPr/>
-          <p:nvPr/>
-        </p:nvSpPr>
-        <p:spPr>
-          <a:xfrm>
-            <a:off x="2563241" y="3922776"/>
+          <p:cNvPr id="22" name="Text 17"/>
+          <p:cNvSpPr/>
+          <p:nvPr/>
+        </p:nvSpPr>
+        <p:spPr>
+          <a:xfrm>
+            <a:off x="6243091" y="2816352"/>
             <a:ext cx="301752" cy="246888"/>
           </a:xfrm>
           <a:prstGeom prst="rect">
@@ -24992,25 +25014,25 @@
       </p:sp>
       <p:sp>
         <p:nvSpPr>
-          <p:cNvPr id="22" name="Text 17"/>
-          <p:cNvSpPr/>
-          <p:nvPr/>
-        </p:nvSpPr>
-        <p:spPr>
-          <a:xfrm>
-            <a:off x="1014984" y="4187952"/>
-            <a:ext cx="3877056" cy="219456"/>
-          </a:xfrm>
-          <a:prstGeom prst="rect">
-            <a:avLst/>
-          </a:prstGeom>
-          <a:noFill/>
-          <a:ln>
-            <a:noFill/>
-          </a:ln>
-        </p:spPr>
-        <p:txBody>
-          <a:bodyPr wrap="square" lIns="0" tIns="0" rIns="0" bIns="0" rtlCol="0" anchor="ctr"/>
+          <p:cNvPr id="23" name="Text 18"/>
+          <p:cNvSpPr/>
+          <p:nvPr/>
+        </p:nvSpPr>
+        <p:spPr>
+          <a:xfrm>
+            <a:off x="4365650" y="3182112"/>
+            <a:ext cx="3460394" cy="384048"/>
+          </a:xfrm>
+          <a:prstGeom prst="rect">
+            <a:avLst/>
+          </a:prstGeom>
+          <a:noFill/>
+          <a:ln>
+            <a:noFill/>
+          </a:ln>
+        </p:spPr>
+        <p:txBody>
+          <a:bodyPr wrap="square" lIns="0" tIns="0" rIns="0" bIns="0" rtlCol="0" anchor="t"/>
           <a:lstStyle/>
           <a:p>
             <a:pPr algn="l" indent="0" marL="0">
@@ -25036,25 +25058,25 @@
       </p:sp>
       <p:sp>
         <p:nvSpPr>
-          <p:cNvPr id="23" name="Text 18"/>
-          <p:cNvSpPr/>
-          <p:nvPr/>
-        </p:nvSpPr>
-        <p:spPr>
-          <a:xfrm>
-            <a:off x="1014984" y="4407408"/>
-            <a:ext cx="3877056" cy="219456"/>
-          </a:xfrm>
-          <a:prstGeom prst="rect">
-            <a:avLst/>
-          </a:prstGeom>
-          <a:noFill/>
-          <a:ln>
-            <a:noFill/>
-          </a:ln>
-        </p:spPr>
-        <p:txBody>
-          <a:bodyPr wrap="square" lIns="0" tIns="0" rIns="0" bIns="0" rtlCol="0" anchor="ctr"/>
+          <p:cNvPr id="24" name="Text 19"/>
+          <p:cNvSpPr/>
+          <p:nvPr/>
+        </p:nvSpPr>
+        <p:spPr>
+          <a:xfrm>
+            <a:off x="4365650" y="3584448"/>
+            <a:ext cx="3460394" cy="384048"/>
+          </a:xfrm>
+          <a:prstGeom prst="rect">
+            <a:avLst/>
+          </a:prstGeom>
+          <a:noFill/>
+          <a:ln>
+            <a:noFill/>
+          </a:ln>
+        </p:spPr>
+        <p:txBody>
+          <a:bodyPr wrap="square" lIns="0" tIns="0" rIns="0" bIns="0" rtlCol="0" anchor="t"/>
           <a:lstStyle/>
           <a:p>
             <a:pPr algn="l" indent="0" marL="0">
@@ -25080,25 +25102,25 @@
       </p:sp>
       <p:sp>
         <p:nvSpPr>
-          <p:cNvPr id="24" name="Text 19"/>
-          <p:cNvSpPr/>
-          <p:nvPr/>
-        </p:nvSpPr>
-        <p:spPr>
-          <a:xfrm>
-            <a:off x="1014984" y="4626864"/>
-            <a:ext cx="3877056" cy="219456"/>
-          </a:xfrm>
-          <a:prstGeom prst="rect">
-            <a:avLst/>
-          </a:prstGeom>
-          <a:noFill/>
-          <a:ln>
-            <a:noFill/>
-          </a:ln>
-        </p:spPr>
-        <p:txBody>
-          <a:bodyPr wrap="square" lIns="0" tIns="0" rIns="0" bIns="0" rtlCol="0" anchor="ctr"/>
+          <p:cNvPr id="25" name="Text 20"/>
+          <p:cNvSpPr/>
+          <p:nvPr/>
+        </p:nvSpPr>
+        <p:spPr>
+          <a:xfrm>
+            <a:off x="4365650" y="3986784"/>
+            <a:ext cx="3460394" cy="384048"/>
+          </a:xfrm>
+          <a:prstGeom prst="rect">
+            <a:avLst/>
+          </a:prstGeom>
+          <a:noFill/>
+          <a:ln>
+            <a:noFill/>
+          </a:ln>
+        </p:spPr>
+        <p:txBody>
+          <a:bodyPr wrap="square" lIns="0" tIns="0" rIns="0" bIns="0" rtlCol="0" anchor="t"/>
           <a:lstStyle/>
           <a:p>
             <a:pPr algn="l" indent="0" marL="0">
@@ -25121,10 +25143,32 @@
             <a:endParaRPr lang="en-US" sz="930" dirty="0"/>
           </a:p>
         </p:txBody>
+      </p:sp>
+      <p:sp>
+        <p:nvSpPr>
+          <p:cNvPr id="26" name="Shape 21"/>
+          <p:cNvSpPr/>
+          <p:nvPr/>
+        </p:nvSpPr>
+        <p:spPr>
+          <a:xfrm>
+            <a:off x="7935773" y="2816352"/>
+            <a:ext cx="7315" cy="1645920"/>
+          </a:xfrm>
+          <a:prstGeom prst="rect">
+            <a:avLst/>
+          </a:prstGeom>
+          <a:solidFill>
+            <a:srgbClr val="DFE3EA"/>
+          </a:solidFill>
+          <a:ln>
+            <a:noFill/>
+          </a:ln>
+        </p:spPr>
       </p:sp>
       <p:pic>
         <p:nvPicPr>
-          <p:cNvPr id="25" name="Image 3" descr="/home/user/onewillco-meeting-2026/runnerpub-proposal/assets/ic_mega.png">    </p:cNvPr>
+          <p:cNvPr id="27" name="Image 3" descr="/home/user/onewillco-meeting-2026/runnerpub-proposal/assets/ic_mega.png">    </p:cNvPr>
           <p:cNvPicPr>
             <a:picLocks noChangeAspect="1"/>
           </p:cNvPicPr>
@@ -25138,7 +25182,7 @@
         </p:blipFill>
         <p:spPr>
           <a:xfrm>
-            <a:off x="685800" y="4946904"/>
+            <a:off x="8045501" y="2816352"/>
             <a:ext cx="237744" cy="237744"/>
           </a:xfrm>
           <a:prstGeom prst="rect">
@@ -25148,13 +25192,13 @@
       </p:pic>
       <p:sp>
         <p:nvSpPr>
-          <p:cNvPr id="26" name="Text 20"/>
-          <p:cNvSpPr/>
-          <p:nvPr/>
-        </p:nvSpPr>
-        <p:spPr>
-          <a:xfrm>
-            <a:off x="1014984" y="4937760"/>
+          <p:cNvPr id="28" name="Text 22"/>
+          <p:cNvSpPr/>
+          <p:nvPr/>
+        </p:nvSpPr>
+        <p:spPr>
+          <a:xfrm>
+            <a:off x="8374685" y="2807208"/>
             <a:ext cx="929640" cy="237744"/>
           </a:xfrm>
           <a:prstGeom prst="rect">
@@ -25192,13 +25236,13 @@
       </p:sp>
       <p:sp>
         <p:nvSpPr>
-          <p:cNvPr id="27" name="Shape 21"/>
-          <p:cNvSpPr/>
-          <p:nvPr/>
-        </p:nvSpPr>
-        <p:spPr>
-          <a:xfrm>
-            <a:off x="1944624" y="4946904"/>
+          <p:cNvPr id="29" name="Shape 23"/>
+          <p:cNvSpPr/>
+          <p:nvPr/>
+        </p:nvSpPr>
+        <p:spPr>
+          <a:xfrm>
+            <a:off x="9304325" y="2816352"/>
             <a:ext cx="630936" cy="246888"/>
           </a:xfrm>
           <a:prstGeom prst="roundRect">
@@ -25216,13 +25260,13 @@
       </p:sp>
       <p:sp>
         <p:nvSpPr>
-          <p:cNvPr id="28" name="Text 22"/>
-          <p:cNvSpPr/>
-          <p:nvPr/>
-        </p:nvSpPr>
-        <p:spPr>
-          <a:xfrm>
-            <a:off x="2109216" y="4946904"/>
+          <p:cNvPr id="30" name="Text 24"/>
+          <p:cNvSpPr/>
+          <p:nvPr/>
+        </p:nvSpPr>
+        <p:spPr>
+          <a:xfrm>
+            <a:off x="9468917" y="2816352"/>
             <a:ext cx="301752" cy="246888"/>
           </a:xfrm>
           <a:prstGeom prst="rect">
@@ -25260,25 +25304,25 @@
       </p:sp>
       <p:sp>
         <p:nvSpPr>
-          <p:cNvPr id="29" name="Text 23"/>
-          <p:cNvSpPr/>
-          <p:nvPr/>
-        </p:nvSpPr>
-        <p:spPr>
-          <a:xfrm>
-            <a:off x="1014984" y="5212080"/>
-            <a:ext cx="3877056" cy="219456"/>
-          </a:xfrm>
-          <a:prstGeom prst="rect">
-            <a:avLst/>
-          </a:prstGeom>
-          <a:noFill/>
-          <a:ln>
-            <a:noFill/>
-          </a:ln>
-        </p:spPr>
-        <p:txBody>
-          <a:bodyPr wrap="square" lIns="0" tIns="0" rIns="0" bIns="0" rtlCol="0" anchor="ctr"/>
+          <p:cNvPr id="31" name="Text 25"/>
+          <p:cNvSpPr/>
+          <p:nvPr/>
+        </p:nvSpPr>
+        <p:spPr>
+          <a:xfrm>
+            <a:off x="8045501" y="3182112"/>
+            <a:ext cx="3460394" cy="384048"/>
+          </a:xfrm>
+          <a:prstGeom prst="rect">
+            <a:avLst/>
+          </a:prstGeom>
+          <a:noFill/>
+          <a:ln>
+            <a:noFill/>
+          </a:ln>
+        </p:spPr>
+        <p:txBody>
+          <a:bodyPr wrap="square" lIns="0" tIns="0" rIns="0" bIns="0" rtlCol="0" anchor="t"/>
           <a:lstStyle/>
           <a:p>
             <a:pPr algn="l" indent="0" marL="0">
@@ -25304,25 +25348,25 @@
       </p:sp>
       <p:sp>
         <p:nvSpPr>
-          <p:cNvPr id="30" name="Text 24"/>
-          <p:cNvSpPr/>
-          <p:nvPr/>
-        </p:nvSpPr>
-        <p:spPr>
-          <a:xfrm>
-            <a:off x="1014984" y="5431536"/>
-            <a:ext cx="3877056" cy="219456"/>
-          </a:xfrm>
-          <a:prstGeom prst="rect">
-            <a:avLst/>
-          </a:prstGeom>
-          <a:noFill/>
-          <a:ln>
-            <a:noFill/>
-          </a:ln>
-        </p:spPr>
-        <p:txBody>
-          <a:bodyPr wrap="square" lIns="0" tIns="0" rIns="0" bIns="0" rtlCol="0" anchor="ctr"/>
+          <p:cNvPr id="32" name="Text 26"/>
+          <p:cNvSpPr/>
+          <p:nvPr/>
+        </p:nvSpPr>
+        <p:spPr>
+          <a:xfrm>
+            <a:off x="8045501" y="3584448"/>
+            <a:ext cx="3460394" cy="384048"/>
+          </a:xfrm>
+          <a:prstGeom prst="rect">
+            <a:avLst/>
+          </a:prstGeom>
+          <a:noFill/>
+          <a:ln>
+            <a:noFill/>
+          </a:ln>
+        </p:spPr>
+        <p:txBody>
+          <a:bodyPr wrap="square" lIns="0" tIns="0" rIns="0" bIns="0" rtlCol="0" anchor="t"/>
           <a:lstStyle/>
           <a:p>
             <a:pPr algn="l" indent="0" marL="0">
@@ -25348,25 +25392,25 @@
       </p:sp>
       <p:sp>
         <p:nvSpPr>
-          <p:cNvPr id="31" name="Text 25"/>
-          <p:cNvSpPr/>
-          <p:nvPr/>
-        </p:nvSpPr>
-        <p:spPr>
-          <a:xfrm>
-            <a:off x="1014984" y="5650992"/>
-            <a:ext cx="3877056" cy="219456"/>
-          </a:xfrm>
-          <a:prstGeom prst="rect">
-            <a:avLst/>
-          </a:prstGeom>
-          <a:noFill/>
-          <a:ln>
-            <a:noFill/>
-          </a:ln>
-        </p:spPr>
-        <p:txBody>
-          <a:bodyPr wrap="square" lIns="0" tIns="0" rIns="0" bIns="0" rtlCol="0" anchor="ctr"/>
+          <p:cNvPr id="33" name="Text 27"/>
+          <p:cNvSpPr/>
+          <p:nvPr/>
+        </p:nvSpPr>
+        <p:spPr>
+          <a:xfrm>
+            <a:off x="8045501" y="3986784"/>
+            <a:ext cx="3460394" cy="384048"/>
+          </a:xfrm>
+          <a:prstGeom prst="rect">
+            <a:avLst/>
+          </a:prstGeom>
+          <a:noFill/>
+          <a:ln>
+            <a:noFill/>
+          </a:ln>
+        </p:spPr>
+        <p:txBody>
+          <a:bodyPr wrap="square" lIns="0" tIns="0" rIns="0" bIns="0" rtlCol="0" anchor="t"/>
           <a:lstStyle/>
           <a:p>
             <a:pPr algn="l" indent="0" marL="0">
@@ -25392,14 +25436,14 @@
       </p:sp>
       <p:sp>
         <p:nvSpPr>
-          <p:cNvPr id="32" name="Text 26"/>
-          <p:cNvSpPr/>
-          <p:nvPr/>
-        </p:nvSpPr>
-        <p:spPr>
-          <a:xfrm>
-            <a:off x="685800" y="5943600"/>
-            <a:ext cx="4206240" cy="201168"/>
+          <p:cNvPr id="34" name="Text 28"/>
+          <p:cNvSpPr/>
+          <p:nvPr/>
+        </p:nvSpPr>
+        <p:spPr>
+          <a:xfrm>
+            <a:off x="685800" y="4480560"/>
+            <a:ext cx="10820095" cy="201168"/>
           </a:xfrm>
           <a:prstGeom prst="rect">
             <a:avLst/>
@@ -25428,7 +25472,7 @@
                 <a:ea typeface="맑은 고딕" pitchFamily="34" charset="-122"/>
                 <a:cs typeface="맑은 고딕" pitchFamily="34" charset="-120"/>
               </a:rPr>
-              <a:t>※ 창업 마케팅은 집행비 발생 선택 항목 · 성공보수 미포함 · 집행 여부 별도 협의</a:t>
+              <a:t>※ 창업 마케팅은 집행비가 발생하는 선택 항목입니다. 성공보수에 포함되지 않으며, 집행 여부와 부담 주체는 별도 협의합니다.</a:t>
             </a:r>
             <a:endParaRPr lang="en-US" sz="850" dirty="0"/>
           </a:p>
@@ -25436,13 +25480,13 @@
       </p:sp>
       <p:sp>
         <p:nvSpPr>
-          <p:cNvPr id="33" name="Shape 27"/>
-          <p:cNvSpPr/>
-          <p:nvPr/>
-        </p:nvSpPr>
-        <p:spPr>
-          <a:xfrm>
-            <a:off x="5312664" y="2418588"/>
+          <p:cNvPr id="35" name="Shape 29"/>
+          <p:cNvSpPr/>
+          <p:nvPr/>
+        </p:nvSpPr>
+        <p:spPr>
+          <a:xfrm>
+            <a:off x="685800" y="4960620"/>
             <a:ext cx="192024" cy="192024"/>
           </a:xfrm>
           <a:prstGeom prst="ellipse">
@@ -25458,13 +25502,13 @@
       </p:sp>
       <p:sp>
         <p:nvSpPr>
-          <p:cNvPr id="34" name="Text 28"/>
-          <p:cNvSpPr/>
-          <p:nvPr/>
-        </p:nvSpPr>
-        <p:spPr>
-          <a:xfrm>
-            <a:off x="5312664" y="2418588"/>
+          <p:cNvPr id="36" name="Text 30"/>
+          <p:cNvSpPr/>
+          <p:nvPr/>
+        </p:nvSpPr>
+        <p:spPr>
+          <a:xfrm>
+            <a:off x="685800" y="4960620"/>
             <a:ext cx="192024" cy="192024"/>
           </a:xfrm>
           <a:prstGeom prst="rect">
@@ -25499,14 +25543,14 @@
       </p:sp>
       <p:sp>
         <p:nvSpPr>
-          <p:cNvPr id="35" name="Text 29"/>
-          <p:cNvSpPr/>
-          <p:nvPr/>
-        </p:nvSpPr>
-        <p:spPr>
-          <a:xfrm>
-            <a:off x="5632704" y="2359152"/>
-            <a:ext cx="3108960" cy="310896"/>
+          <p:cNvPr id="37" name="Text 31"/>
+          <p:cNvSpPr/>
+          <p:nvPr/>
+        </p:nvSpPr>
+        <p:spPr>
+          <a:xfrm>
+            <a:off x="1005840" y="4901184"/>
+            <a:ext cx="3291840" cy="310896"/>
           </a:xfrm>
           <a:prstGeom prst="rect">
             <a:avLst/>
@@ -25543,14 +25587,14 @@
       </p:sp>
       <p:sp>
         <p:nvSpPr>
-          <p:cNvPr id="36" name="Shape 30"/>
-          <p:cNvSpPr/>
-          <p:nvPr/>
-        </p:nvSpPr>
-        <p:spPr>
-          <a:xfrm>
-            <a:off x="5312664" y="2659075"/>
-            <a:ext cx="6193231" cy="7315"/>
+          <p:cNvPr id="38" name="Shape 32"/>
+          <p:cNvSpPr/>
+          <p:nvPr/>
+        </p:nvSpPr>
+        <p:spPr>
+          <a:xfrm>
+            <a:off x="685800" y="5201107"/>
+            <a:ext cx="10820095" cy="7315"/>
           </a:xfrm>
           <a:prstGeom prst="rect">
             <a:avLst/>
@@ -25565,13 +25609,13 @@
       </p:sp>
       <p:sp>
         <p:nvSpPr>
-          <p:cNvPr id="37" name="Text 31"/>
-          <p:cNvSpPr/>
-          <p:nvPr/>
-        </p:nvSpPr>
-        <p:spPr>
-          <a:xfrm>
-            <a:off x="10225735" y="2395728"/>
+          <p:cNvPr id="39" name="Text 33"/>
+          <p:cNvSpPr/>
+          <p:nvPr/>
+        </p:nvSpPr>
+        <p:spPr>
+          <a:xfrm>
+            <a:off x="10225735" y="4937760"/>
             <a:ext cx="1280160" cy="237744"/>
           </a:xfrm>
           <a:prstGeom prst="rect">
@@ -25601,7 +25645,7 @@
                 <a:ea typeface="맑은 고딕" pitchFamily="34" charset="-122"/>
                 <a:cs typeface="맑은 고딕" pitchFamily="34" charset="-120"/>
               </a:rPr>
-              <a:t>외 18개</a:t>
+              <a:t>외 다수</a:t>
             </a:r>
             <a:endParaRPr lang="en-US" sz="900" dirty="0"/>
           </a:p>
@@ -25609,18 +25653,18 @@
       </p:sp>
       <p:sp>
         <p:nvSpPr>
-          <p:cNvPr id="38" name="Shape 32"/>
-          <p:cNvSpPr/>
-          <p:nvPr/>
-        </p:nvSpPr>
-        <p:spPr>
-          <a:xfrm>
-            <a:off x="5312664" y="2834640"/>
-            <a:ext cx="1438580" cy="554736"/>
+          <p:cNvPr id="40" name="Shape 34"/>
+          <p:cNvSpPr/>
+          <p:nvPr/>
+        </p:nvSpPr>
+        <p:spPr>
+          <a:xfrm>
+            <a:off x="685800" y="5303520"/>
+            <a:ext cx="2540432" cy="658368"/>
           </a:xfrm>
           <a:prstGeom prst="roundRect">
             <a:avLst>
-              <a:gd name="adj" fmla="val 8242"/>
+              <a:gd name="adj" fmla="val 8333"/>
             </a:avLst>
           </a:prstGeom>
           <a:solidFill>
@@ -25633,14 +25677,14 @@
       </p:sp>
       <p:sp>
         <p:nvSpPr>
-          <p:cNvPr id="39" name="Text 33"/>
-          <p:cNvSpPr/>
-          <p:nvPr/>
-        </p:nvSpPr>
-        <p:spPr>
-          <a:xfrm>
-            <a:off x="5385816" y="2834640"/>
-            <a:ext cx="1292276" cy="554736"/>
+          <p:cNvPr id="41" name="Text 35"/>
+          <p:cNvSpPr/>
+          <p:nvPr/>
+        </p:nvSpPr>
+        <p:spPr>
+          <a:xfrm>
+            <a:off x="777240" y="5303520"/>
+            <a:ext cx="2357552" cy="658368"/>
           </a:xfrm>
           <a:prstGeom prst="rect">
             <a:avLst/>
@@ -25656,12 +25700,12 @@
           <a:p>
             <a:pPr algn="ctr" indent="0" marL="0">
               <a:lnSpc>
-                <a:spcPts val="1540"/>
-              </a:lnSpc>
-              <a:buNone/>
-            </a:pPr>
-            <a:r>
-              <a:rPr lang="en-US" sz="1050" dirty="0">
+                <a:spcPts val="1900"/>
+              </a:lnSpc>
+              <a:buNone/>
+            </a:pPr>
+            <a:r>
+              <a:rPr lang="en-US" sz="1300" b="1" dirty="0">
                 <a:solidFill>
                   <a:srgbClr val="1E3457"/>
                 </a:solidFill>
@@ -25669,26 +25713,26 @@
                 <a:ea typeface="맑은 고딕" pitchFamily="34" charset="-122"/>
                 <a:cs typeface="맑은 고딕" pitchFamily="34" charset="-120"/>
               </a:rPr>
-              <a:t>33떡볶이</a:t>
-            </a:r>
-            <a:endParaRPr lang="en-US" sz="1050" dirty="0"/>
-          </a:p>
-        </p:txBody>
-      </p:sp>
-      <p:sp>
-        <p:nvSpPr>
-          <p:cNvPr id="40" name="Shape 34"/>
-          <p:cNvSpPr/>
-          <p:nvPr/>
-        </p:nvSpPr>
-        <p:spPr>
-          <a:xfrm>
-            <a:off x="6897548" y="2834640"/>
-            <a:ext cx="1438580" cy="554736"/>
+              <a:t>차알</a:t>
+            </a:r>
+            <a:endParaRPr lang="en-US" sz="1300" dirty="0"/>
+          </a:p>
+        </p:txBody>
+      </p:sp>
+      <p:sp>
+        <p:nvSpPr>
+          <p:cNvPr id="42" name="Shape 36"/>
+          <p:cNvSpPr/>
+          <p:nvPr/>
+        </p:nvSpPr>
+        <p:spPr>
+          <a:xfrm>
+            <a:off x="3445688" y="5303520"/>
+            <a:ext cx="2540432" cy="658368"/>
           </a:xfrm>
           <a:prstGeom prst="roundRect">
             <a:avLst>
-              <a:gd name="adj" fmla="val 8242"/>
+              <a:gd name="adj" fmla="val 8333"/>
             </a:avLst>
           </a:prstGeom>
           <a:solidFill>
@@ -25701,14 +25745,14 @@
       </p:sp>
       <p:sp>
         <p:nvSpPr>
-          <p:cNvPr id="41" name="Text 35"/>
-          <p:cNvSpPr/>
-          <p:nvPr/>
-        </p:nvSpPr>
-        <p:spPr>
-          <a:xfrm>
-            <a:off x="6970700" y="2834640"/>
-            <a:ext cx="1292276" cy="554736"/>
+          <p:cNvPr id="43" name="Text 37"/>
+          <p:cNvSpPr/>
+          <p:nvPr/>
+        </p:nvSpPr>
+        <p:spPr>
+          <a:xfrm>
+            <a:off x="3537128" y="5303520"/>
+            <a:ext cx="2357552" cy="658368"/>
           </a:xfrm>
           <a:prstGeom prst="rect">
             <a:avLst/>
@@ -25724,12 +25768,12 @@
           <a:p>
             <a:pPr algn="ctr" indent="0" marL="0">
               <a:lnSpc>
-                <a:spcPts val="1540"/>
-              </a:lnSpc>
-              <a:buNone/>
-            </a:pPr>
-            <a:r>
-              <a:rPr lang="en-US" sz="1050" dirty="0">
+                <a:spcPts val="1900"/>
+              </a:lnSpc>
+              <a:buNone/>
+            </a:pPr>
+            <a:r>
+              <a:rPr lang="en-US" sz="1300" b="1" dirty="0">
                 <a:solidFill>
                   <a:srgbClr val="1E3457"/>
                 </a:solidFill>
@@ -25737,26 +25781,26 @@
                 <a:ea typeface="맑은 고딕" pitchFamily="34" charset="-122"/>
                 <a:cs typeface="맑은 고딕" pitchFamily="34" charset="-120"/>
               </a:rPr>
-              <a:t>백소정</a:t>
-            </a:r>
-            <a:endParaRPr lang="en-US" sz="1050" dirty="0"/>
-          </a:p>
-        </p:txBody>
-      </p:sp>
-      <p:sp>
-        <p:nvSpPr>
-          <p:cNvPr id="42" name="Shape 36"/>
-          <p:cNvSpPr/>
-          <p:nvPr/>
-        </p:nvSpPr>
-        <p:spPr>
-          <a:xfrm>
-            <a:off x="8482432" y="2834640"/>
-            <a:ext cx="1438580" cy="554736"/>
+              <a:t>오레노카츠</a:t>
+            </a:r>
+            <a:endParaRPr lang="en-US" sz="1300" dirty="0"/>
+          </a:p>
+        </p:txBody>
+      </p:sp>
+      <p:sp>
+        <p:nvSpPr>
+          <p:cNvPr id="44" name="Shape 38"/>
+          <p:cNvSpPr/>
+          <p:nvPr/>
+        </p:nvSpPr>
+        <p:spPr>
+          <a:xfrm>
+            <a:off x="6205576" y="5303520"/>
+            <a:ext cx="2540432" cy="658368"/>
           </a:xfrm>
           <a:prstGeom prst="roundRect">
             <a:avLst>
-              <a:gd name="adj" fmla="val 8242"/>
+              <a:gd name="adj" fmla="val 8333"/>
             </a:avLst>
           </a:prstGeom>
           <a:solidFill>
@@ -25769,14 +25813,14 @@
       </p:sp>
       <p:sp>
         <p:nvSpPr>
-          <p:cNvPr id="43" name="Text 37"/>
-          <p:cNvSpPr/>
-          <p:nvPr/>
-        </p:nvSpPr>
-        <p:spPr>
-          <a:xfrm>
-            <a:off x="8555584" y="2834640"/>
-            <a:ext cx="1292276" cy="554736"/>
+          <p:cNvPr id="45" name="Text 39"/>
+          <p:cNvSpPr/>
+          <p:nvPr/>
+        </p:nvSpPr>
+        <p:spPr>
+          <a:xfrm>
+            <a:off x="6297016" y="5303520"/>
+            <a:ext cx="2357552" cy="658368"/>
           </a:xfrm>
           <a:prstGeom prst="rect">
             <a:avLst/>
@@ -25792,12 +25836,12 @@
           <a:p>
             <a:pPr algn="ctr" indent="0" marL="0">
               <a:lnSpc>
-                <a:spcPts val="1540"/>
-              </a:lnSpc>
-              <a:buNone/>
-            </a:pPr>
-            <a:r>
-              <a:rPr lang="en-US" sz="1050" dirty="0">
+                <a:spcPts val="1900"/>
+              </a:lnSpc>
+              <a:buNone/>
+            </a:pPr>
+            <a:r>
+              <a:rPr lang="en-US" sz="1300" b="1" dirty="0">
                 <a:solidFill>
                   <a:srgbClr val="1E3457"/>
                 </a:solidFill>
@@ -25805,26 +25849,26 @@
                 <a:ea typeface="맑은 고딕" pitchFamily="34" charset="-122"/>
                 <a:cs typeface="맑은 고딕" pitchFamily="34" charset="-120"/>
               </a:rPr>
-              <a:t>원앤원</a:t>
-            </a:r>
-            <a:endParaRPr lang="en-US" sz="1050" dirty="0"/>
-          </a:p>
-        </p:txBody>
-      </p:sp>
-      <p:sp>
-        <p:nvSpPr>
-          <p:cNvPr id="44" name="Shape 38"/>
-          <p:cNvSpPr/>
-          <p:nvPr/>
-        </p:nvSpPr>
-        <p:spPr>
-          <a:xfrm>
-            <a:off x="10067315" y="2834640"/>
-            <a:ext cx="1438580" cy="554736"/>
+              <a:t>한촌설렁탕</a:t>
+            </a:r>
+            <a:endParaRPr lang="en-US" sz="1300" dirty="0"/>
+          </a:p>
+        </p:txBody>
+      </p:sp>
+      <p:sp>
+        <p:nvSpPr>
+          <p:cNvPr id="46" name="Shape 40"/>
+          <p:cNvSpPr/>
+          <p:nvPr/>
+        </p:nvSpPr>
+        <p:spPr>
+          <a:xfrm>
+            <a:off x="8965463" y="5303520"/>
+            <a:ext cx="2540432" cy="658368"/>
           </a:xfrm>
           <a:prstGeom prst="roundRect">
             <a:avLst>
-              <a:gd name="adj" fmla="val 8242"/>
+              <a:gd name="adj" fmla="val 8333"/>
             </a:avLst>
           </a:prstGeom>
           <a:solidFill>
@@ -25837,14 +25881,14 @@
       </p:sp>
       <p:sp>
         <p:nvSpPr>
-          <p:cNvPr id="45" name="Text 39"/>
-          <p:cNvSpPr/>
-          <p:nvPr/>
-        </p:nvSpPr>
-        <p:spPr>
-          <a:xfrm>
-            <a:off x="10140467" y="2834640"/>
-            <a:ext cx="1292276" cy="554736"/>
+          <p:cNvPr id="47" name="Text 41"/>
+          <p:cNvSpPr/>
+          <p:nvPr/>
+        </p:nvSpPr>
+        <p:spPr>
+          <a:xfrm>
+            <a:off x="9056903" y="5303520"/>
+            <a:ext cx="2357552" cy="658368"/>
           </a:xfrm>
           <a:prstGeom prst="rect">
             <a:avLst/>
@@ -25860,12 +25904,12 @@
           <a:p>
             <a:pPr algn="ctr" indent="0" marL="0">
               <a:lnSpc>
-                <a:spcPts val="1540"/>
-              </a:lnSpc>
-              <a:buNone/>
-            </a:pPr>
-            <a:r>
-              <a:rPr lang="en-US" sz="1050" dirty="0">
+                <a:spcPts val="1900"/>
+              </a:lnSpc>
+              <a:buNone/>
+            </a:pPr>
+            <a:r>
+              <a:rPr lang="en-US" sz="1300" b="1" dirty="0">
                 <a:solidFill>
                   <a:srgbClr val="1E3457"/>
                 </a:solidFill>
@@ -25873,566 +25917,22 @@
                 <a:ea typeface="맑은 고딕" pitchFamily="34" charset="-122"/>
                 <a:cs typeface="맑은 고딕" pitchFamily="34" charset="-120"/>
               </a:rPr>
-              <a:t>투썸플레이스</a:t>
-            </a:r>
-            <a:endParaRPr lang="en-US" sz="1050" dirty="0"/>
-          </a:p>
-        </p:txBody>
-      </p:sp>
-      <p:sp>
-        <p:nvSpPr>
-          <p:cNvPr id="46" name="Shape 40"/>
-          <p:cNvSpPr/>
-          <p:nvPr/>
-        </p:nvSpPr>
-        <p:spPr>
-          <a:xfrm>
-            <a:off x="5312664" y="3517392"/>
-            <a:ext cx="1438580" cy="554736"/>
-          </a:xfrm>
-          <a:prstGeom prst="roundRect">
-            <a:avLst>
-              <a:gd name="adj" fmla="val 8242"/>
-            </a:avLst>
-          </a:prstGeom>
-          <a:solidFill>
-            <a:srgbClr val="F4F7FD"/>
-          </a:solidFill>
-          <a:ln>
-            <a:noFill/>
-          </a:ln>
-        </p:spPr>
-      </p:sp>
-      <p:sp>
-        <p:nvSpPr>
-          <p:cNvPr id="47" name="Text 41"/>
-          <p:cNvSpPr/>
-          <p:nvPr/>
-        </p:nvSpPr>
-        <p:spPr>
-          <a:xfrm>
-            <a:off x="5385816" y="3517392"/>
-            <a:ext cx="1292276" cy="554736"/>
-          </a:xfrm>
-          <a:prstGeom prst="rect">
-            <a:avLst/>
-          </a:prstGeom>
-          <a:noFill/>
-          <a:ln>
-            <a:noFill/>
-          </a:ln>
-        </p:spPr>
-        <p:txBody>
-          <a:bodyPr wrap="square" lIns="0" tIns="0" rIns="0" bIns="0" rtlCol="0" anchor="ctr"/>
-          <a:lstStyle/>
-          <a:p>
-            <a:pPr algn="ctr" indent="0" marL="0">
-              <a:lnSpc>
-                <a:spcPts val="1540"/>
-              </a:lnSpc>
-              <a:buNone/>
-            </a:pPr>
-            <a:r>
-              <a:rPr lang="en-US" sz="1050" dirty="0">
-                <a:solidFill>
-                  <a:srgbClr val="1E3457"/>
-                </a:solidFill>
-                <a:latin typeface="맑은 고딕" pitchFamily="34" charset="0"/>
-                <a:ea typeface="맑은 고딕" pitchFamily="34" charset="-122"/>
-                <a:cs typeface="맑은 고딕" pitchFamily="34" charset="-120"/>
-              </a:rPr>
-              <a:t>명륜진사갈비</a:t>
-            </a:r>
-            <a:endParaRPr lang="en-US" sz="1050" dirty="0"/>
-          </a:p>
-        </p:txBody>
-      </p:sp>
-      <p:sp>
-        <p:nvSpPr>
-          <p:cNvPr id="48" name="Shape 42"/>
-          <p:cNvSpPr/>
-          <p:nvPr/>
-        </p:nvSpPr>
-        <p:spPr>
-          <a:xfrm>
-            <a:off x="6897548" y="3517392"/>
-            <a:ext cx="1438580" cy="554736"/>
-          </a:xfrm>
-          <a:prstGeom prst="roundRect">
-            <a:avLst>
-              <a:gd name="adj" fmla="val 8242"/>
-            </a:avLst>
-          </a:prstGeom>
-          <a:solidFill>
-            <a:srgbClr val="F4F7FD"/>
-          </a:solidFill>
-          <a:ln>
-            <a:noFill/>
-          </a:ln>
-        </p:spPr>
-      </p:sp>
-      <p:sp>
-        <p:nvSpPr>
-          <p:cNvPr id="49" name="Text 43"/>
-          <p:cNvSpPr/>
-          <p:nvPr/>
-        </p:nvSpPr>
-        <p:spPr>
-          <a:xfrm>
-            <a:off x="6970700" y="3517392"/>
-            <a:ext cx="1292276" cy="554736"/>
-          </a:xfrm>
-          <a:prstGeom prst="rect">
-            <a:avLst/>
-          </a:prstGeom>
-          <a:noFill/>
-          <a:ln>
-            <a:noFill/>
-          </a:ln>
-        </p:spPr>
-        <p:txBody>
-          <a:bodyPr wrap="square" lIns="0" tIns="0" rIns="0" bIns="0" rtlCol="0" anchor="ctr"/>
-          <a:lstStyle/>
-          <a:p>
-            <a:pPr algn="ctr" indent="0" marL="0">
-              <a:lnSpc>
-                <a:spcPts val="1540"/>
-              </a:lnSpc>
-              <a:buNone/>
-            </a:pPr>
-            <a:r>
-              <a:rPr lang="en-US" sz="1050" dirty="0">
-                <a:solidFill>
-                  <a:srgbClr val="1E3457"/>
-                </a:solidFill>
-                <a:latin typeface="맑은 고딕" pitchFamily="34" charset="0"/>
-                <a:ea typeface="맑은 고딕" pitchFamily="34" charset="-122"/>
-                <a:cs typeface="맑은 고딕" pitchFamily="34" charset="-120"/>
-              </a:rPr>
-              <a:t>요아정</a:t>
-            </a:r>
-            <a:endParaRPr lang="en-US" sz="1050" dirty="0"/>
-          </a:p>
-        </p:txBody>
-      </p:sp>
-      <p:sp>
-        <p:nvSpPr>
-          <p:cNvPr id="50" name="Shape 44"/>
-          <p:cNvSpPr/>
-          <p:nvPr/>
-        </p:nvSpPr>
-        <p:spPr>
-          <a:xfrm>
-            <a:off x="8482432" y="3517392"/>
-            <a:ext cx="1438580" cy="554736"/>
-          </a:xfrm>
-          <a:prstGeom prst="roundRect">
-            <a:avLst>
-              <a:gd name="adj" fmla="val 8242"/>
-            </a:avLst>
-          </a:prstGeom>
-          <a:solidFill>
-            <a:srgbClr val="F4F7FD"/>
-          </a:solidFill>
-          <a:ln>
-            <a:noFill/>
-          </a:ln>
-        </p:spPr>
-      </p:sp>
-      <p:sp>
-        <p:nvSpPr>
-          <p:cNvPr id="51" name="Text 45"/>
-          <p:cNvSpPr/>
-          <p:nvPr/>
-        </p:nvSpPr>
-        <p:spPr>
-          <a:xfrm>
-            <a:off x="8555584" y="3517392"/>
-            <a:ext cx="1292276" cy="554736"/>
-          </a:xfrm>
-          <a:prstGeom prst="rect">
-            <a:avLst/>
-          </a:prstGeom>
-          <a:noFill/>
-          <a:ln>
-            <a:noFill/>
-          </a:ln>
-        </p:spPr>
-        <p:txBody>
-          <a:bodyPr wrap="square" lIns="0" tIns="0" rIns="0" bIns="0" rtlCol="0" anchor="ctr"/>
-          <a:lstStyle/>
-          <a:p>
-            <a:pPr algn="ctr" indent="0" marL="0">
-              <a:lnSpc>
-                <a:spcPts val="1540"/>
-              </a:lnSpc>
-              <a:buNone/>
-            </a:pPr>
-            <a:r>
-              <a:rPr lang="en-US" sz="1050" dirty="0">
-                <a:solidFill>
-                  <a:srgbClr val="1E3457"/>
-                </a:solidFill>
-                <a:latin typeface="맑은 고딕" pitchFamily="34" charset="0"/>
-                <a:ea typeface="맑은 고딕" pitchFamily="34" charset="-122"/>
-                <a:cs typeface="맑은 고딕" pitchFamily="34" charset="-120"/>
-              </a:rPr>
-              <a:t>차알</a:t>
-            </a:r>
-            <a:endParaRPr lang="en-US" sz="1050" dirty="0"/>
-          </a:p>
-        </p:txBody>
-      </p:sp>
-      <p:sp>
-        <p:nvSpPr>
-          <p:cNvPr id="52" name="Shape 46"/>
-          <p:cNvSpPr/>
-          <p:nvPr/>
-        </p:nvSpPr>
-        <p:spPr>
-          <a:xfrm>
-            <a:off x="10067315" y="3517392"/>
-            <a:ext cx="1438580" cy="554736"/>
-          </a:xfrm>
-          <a:prstGeom prst="roundRect">
-            <a:avLst>
-              <a:gd name="adj" fmla="val 8242"/>
-            </a:avLst>
-          </a:prstGeom>
-          <a:solidFill>
-            <a:srgbClr val="F4F7FD"/>
-          </a:solidFill>
-          <a:ln>
-            <a:noFill/>
-          </a:ln>
-        </p:spPr>
-      </p:sp>
-      <p:sp>
-        <p:nvSpPr>
-          <p:cNvPr id="53" name="Text 47"/>
-          <p:cNvSpPr/>
-          <p:nvPr/>
-        </p:nvSpPr>
-        <p:spPr>
-          <a:xfrm>
-            <a:off x="10140467" y="3517392"/>
-            <a:ext cx="1292276" cy="554736"/>
-          </a:xfrm>
-          <a:prstGeom prst="rect">
-            <a:avLst/>
-          </a:prstGeom>
-          <a:noFill/>
-          <a:ln>
-            <a:noFill/>
-          </a:ln>
-        </p:spPr>
-        <p:txBody>
-          <a:bodyPr wrap="square" lIns="0" tIns="0" rIns="0" bIns="0" rtlCol="0" anchor="ctr"/>
-          <a:lstStyle/>
-          <a:p>
-            <a:pPr algn="ctr" indent="0" marL="0">
-              <a:lnSpc>
-                <a:spcPts val="1540"/>
-              </a:lnSpc>
-              <a:buNone/>
-            </a:pPr>
-            <a:r>
-              <a:rPr lang="en-US" sz="1050" dirty="0">
-                <a:solidFill>
-                  <a:srgbClr val="1E3457"/>
-                </a:solidFill>
-                <a:latin typeface="맑은 고딕" pitchFamily="34" charset="0"/>
-                <a:ea typeface="맑은 고딕" pitchFamily="34" charset="-122"/>
-                <a:cs typeface="맑은 고딕" pitchFamily="34" charset="-120"/>
-              </a:rPr>
-              <a:t>밀본</a:t>
-            </a:r>
-            <a:endParaRPr lang="en-US" sz="1050" dirty="0"/>
-          </a:p>
-        </p:txBody>
-      </p:sp>
-      <p:sp>
-        <p:nvSpPr>
-          <p:cNvPr id="54" name="Shape 48"/>
-          <p:cNvSpPr/>
-          <p:nvPr/>
-        </p:nvSpPr>
-        <p:spPr>
-          <a:xfrm>
-            <a:off x="5312664" y="4200144"/>
-            <a:ext cx="1438580" cy="554736"/>
-          </a:xfrm>
-          <a:prstGeom prst="roundRect">
-            <a:avLst>
-              <a:gd name="adj" fmla="val 8242"/>
-            </a:avLst>
-          </a:prstGeom>
-          <a:solidFill>
-            <a:srgbClr val="F4F7FD"/>
-          </a:solidFill>
-          <a:ln>
-            <a:noFill/>
-          </a:ln>
-        </p:spPr>
-      </p:sp>
-      <p:sp>
-        <p:nvSpPr>
-          <p:cNvPr id="55" name="Text 49"/>
-          <p:cNvSpPr/>
-          <p:nvPr/>
-        </p:nvSpPr>
-        <p:spPr>
-          <a:xfrm>
-            <a:off x="5385816" y="4200144"/>
-            <a:ext cx="1292276" cy="554736"/>
-          </a:xfrm>
-          <a:prstGeom prst="rect">
-            <a:avLst/>
-          </a:prstGeom>
-          <a:noFill/>
-          <a:ln>
-            <a:noFill/>
-          </a:ln>
-        </p:spPr>
-        <p:txBody>
-          <a:bodyPr wrap="square" lIns="0" tIns="0" rIns="0" bIns="0" rtlCol="0" anchor="ctr"/>
-          <a:lstStyle/>
-          <a:p>
-            <a:pPr algn="ctr" indent="0" marL="0">
-              <a:lnSpc>
-                <a:spcPts val="1540"/>
-              </a:lnSpc>
-              <a:buNone/>
-            </a:pPr>
-            <a:r>
-              <a:rPr lang="en-US" sz="1050" dirty="0">
-                <a:solidFill>
-                  <a:srgbClr val="1E3457"/>
-                </a:solidFill>
-                <a:latin typeface="맑은 고딕" pitchFamily="34" charset="0"/>
-                <a:ea typeface="맑은 고딕" pitchFamily="34" charset="-122"/>
-                <a:cs typeface="맑은 고딕" pitchFamily="34" charset="-120"/>
-              </a:rPr>
-              <a:t>오레노카츠</a:t>
-            </a:r>
-            <a:endParaRPr lang="en-US" sz="1050" dirty="0"/>
-          </a:p>
-        </p:txBody>
-      </p:sp>
-      <p:sp>
-        <p:nvSpPr>
-          <p:cNvPr id="56" name="Shape 50"/>
-          <p:cNvSpPr/>
-          <p:nvPr/>
-        </p:nvSpPr>
-        <p:spPr>
-          <a:xfrm>
-            <a:off x="6897548" y="4200144"/>
-            <a:ext cx="1438580" cy="554736"/>
-          </a:xfrm>
-          <a:prstGeom prst="roundRect">
-            <a:avLst>
-              <a:gd name="adj" fmla="val 8242"/>
-            </a:avLst>
-          </a:prstGeom>
-          <a:solidFill>
-            <a:srgbClr val="F4F7FD"/>
-          </a:solidFill>
-          <a:ln>
-            <a:noFill/>
-          </a:ln>
-        </p:spPr>
-      </p:sp>
-      <p:sp>
-        <p:nvSpPr>
-          <p:cNvPr id="57" name="Text 51"/>
-          <p:cNvSpPr/>
-          <p:nvPr/>
-        </p:nvSpPr>
-        <p:spPr>
-          <a:xfrm>
-            <a:off x="6970700" y="4200144"/>
-            <a:ext cx="1292276" cy="554736"/>
-          </a:xfrm>
-          <a:prstGeom prst="rect">
-            <a:avLst/>
-          </a:prstGeom>
-          <a:noFill/>
-          <a:ln>
-            <a:noFill/>
-          </a:ln>
-        </p:spPr>
-        <p:txBody>
-          <a:bodyPr wrap="square" lIns="0" tIns="0" rIns="0" bIns="0" rtlCol="0" anchor="ctr"/>
-          <a:lstStyle/>
-          <a:p>
-            <a:pPr algn="ctr" indent="0" marL="0">
-              <a:lnSpc>
-                <a:spcPts val="1540"/>
-              </a:lnSpc>
-              <a:buNone/>
-            </a:pPr>
-            <a:r>
-              <a:rPr lang="en-US" sz="1050" dirty="0">
-                <a:solidFill>
-                  <a:srgbClr val="1E3457"/>
-                </a:solidFill>
-                <a:latin typeface="맑은 고딕" pitchFamily="34" charset="0"/>
-                <a:ea typeface="맑은 고딕" pitchFamily="34" charset="-122"/>
-                <a:cs typeface="맑은 고딕" pitchFamily="34" charset="-120"/>
-              </a:rPr>
-              <a:t>랑데자뷰</a:t>
-            </a:r>
-            <a:endParaRPr lang="en-US" sz="1050" dirty="0"/>
-          </a:p>
-        </p:txBody>
-      </p:sp>
-      <p:sp>
-        <p:nvSpPr>
-          <p:cNvPr id="58" name="Shape 52"/>
-          <p:cNvSpPr/>
-          <p:nvPr/>
-        </p:nvSpPr>
-        <p:spPr>
-          <a:xfrm>
-            <a:off x="8482432" y="4200144"/>
-            <a:ext cx="1438580" cy="554736"/>
-          </a:xfrm>
-          <a:prstGeom prst="roundRect">
-            <a:avLst>
-              <a:gd name="adj" fmla="val 8242"/>
-            </a:avLst>
-          </a:prstGeom>
-          <a:solidFill>
-            <a:srgbClr val="F4F7FD"/>
-          </a:solidFill>
-          <a:ln>
-            <a:noFill/>
-          </a:ln>
-        </p:spPr>
-      </p:sp>
-      <p:sp>
-        <p:nvSpPr>
-          <p:cNvPr id="59" name="Text 53"/>
-          <p:cNvSpPr/>
-          <p:nvPr/>
-        </p:nvSpPr>
-        <p:spPr>
-          <a:xfrm>
-            <a:off x="8555584" y="4200144"/>
-            <a:ext cx="1292276" cy="554736"/>
-          </a:xfrm>
-          <a:prstGeom prst="rect">
-            <a:avLst/>
-          </a:prstGeom>
-          <a:noFill/>
-          <a:ln>
-            <a:noFill/>
-          </a:ln>
-        </p:spPr>
-        <p:txBody>
-          <a:bodyPr wrap="square" lIns="0" tIns="0" rIns="0" bIns="0" rtlCol="0" anchor="ctr"/>
-          <a:lstStyle/>
-          <a:p>
-            <a:pPr algn="ctr" indent="0" marL="0">
-              <a:lnSpc>
-                <a:spcPts val="1540"/>
-              </a:lnSpc>
-              <a:buNone/>
-            </a:pPr>
-            <a:r>
-              <a:rPr lang="en-US" sz="1050" dirty="0">
-                <a:solidFill>
-                  <a:srgbClr val="1E3457"/>
-                </a:solidFill>
-                <a:latin typeface="맑은 고딕" pitchFamily="34" charset="0"/>
-                <a:ea typeface="맑은 고딕" pitchFamily="34" charset="-122"/>
-                <a:cs typeface="맑은 고딕" pitchFamily="34" charset="-120"/>
-              </a:rPr>
-              <a:t>청년피자</a:t>
-            </a:r>
-            <a:endParaRPr lang="en-US" sz="1050" dirty="0"/>
-          </a:p>
-        </p:txBody>
-      </p:sp>
-      <p:sp>
-        <p:nvSpPr>
-          <p:cNvPr id="60" name="Shape 54"/>
-          <p:cNvSpPr/>
-          <p:nvPr/>
-        </p:nvSpPr>
-        <p:spPr>
-          <a:xfrm>
-            <a:off x="10067315" y="4200144"/>
-            <a:ext cx="1438580" cy="554736"/>
-          </a:xfrm>
-          <a:prstGeom prst="roundRect">
-            <a:avLst>
-              <a:gd name="adj" fmla="val 8242"/>
-            </a:avLst>
-          </a:prstGeom>
-          <a:solidFill>
-            <a:srgbClr val="F4F7FD"/>
-          </a:solidFill>
-          <a:ln>
-            <a:noFill/>
-          </a:ln>
-        </p:spPr>
-      </p:sp>
-      <p:sp>
-        <p:nvSpPr>
-          <p:cNvPr id="61" name="Text 55"/>
-          <p:cNvSpPr/>
-          <p:nvPr/>
-        </p:nvSpPr>
-        <p:spPr>
-          <a:xfrm>
-            <a:off x="10140467" y="4200144"/>
-            <a:ext cx="1292276" cy="554736"/>
-          </a:xfrm>
-          <a:prstGeom prst="rect">
-            <a:avLst/>
-          </a:prstGeom>
-          <a:noFill/>
-          <a:ln>
-            <a:noFill/>
-          </a:ln>
-        </p:spPr>
-        <p:txBody>
-          <a:bodyPr wrap="square" lIns="0" tIns="0" rIns="0" bIns="0" rtlCol="0" anchor="ctr"/>
-          <a:lstStyle/>
-          <a:p>
-            <a:pPr algn="ctr" indent="0" marL="0">
-              <a:lnSpc>
-                <a:spcPts val="1540"/>
-              </a:lnSpc>
-              <a:buNone/>
-            </a:pPr>
-            <a:r>
-              <a:rPr lang="en-US" sz="1050" dirty="0">
-                <a:solidFill>
-                  <a:srgbClr val="1E3457"/>
-                </a:solidFill>
-                <a:latin typeface="맑은 고딕" pitchFamily="34" charset="0"/>
-                <a:ea typeface="맑은 고딕" pitchFamily="34" charset="-122"/>
-                <a:cs typeface="맑은 고딕" pitchFamily="34" charset="-120"/>
-              </a:rPr>
-              <a:t>셀렉토커피</a:t>
-            </a:r>
-            <a:endParaRPr lang="en-US" sz="1050" dirty="0"/>
-          </a:p>
-        </p:txBody>
-      </p:sp>
-      <p:sp>
-        <p:nvSpPr>
-          <p:cNvPr id="62" name="Text 56"/>
-          <p:cNvSpPr/>
-          <p:nvPr/>
-        </p:nvSpPr>
-        <p:spPr>
-          <a:xfrm>
-            <a:off x="5312664" y="4901184"/>
-            <a:ext cx="6193231" cy="201168"/>
+              <a:t>33떡볶이</a:t>
+            </a:r>
+            <a:endParaRPr lang="en-US" sz="1300" dirty="0"/>
+          </a:p>
+        </p:txBody>
+      </p:sp>
+      <p:sp>
+        <p:nvSpPr>
+          <p:cNvPr id="48" name="Text 42"/>
+          <p:cNvSpPr/>
+          <p:nvPr/>
+        </p:nvSpPr>
+        <p:spPr>
+          <a:xfrm>
+            <a:off x="685800" y="5971032"/>
+            <a:ext cx="10820095" cy="201168"/>
           </a:xfrm>
           <a:prstGeom prst="rect">
             <a:avLst/>

--- a/runnerpub-proposal/runnerpub_proposal_naeilsajang.pptx
+++ b/runnerpub-proposal/runnerpub_proposal_naeilsajang.pptx
@@ -2178,7 +2178,7 @@
         <p:spPr>
           <a:xfrm>
             <a:off x="685800" y="859536"/>
-            <a:ext cx="6217920" cy="237744"/>
+            <a:ext cx="5760720" cy="237744"/>
           </a:xfrm>
           <a:prstGeom prst="rect">
             <a:avLst/>
@@ -2244,7 +2244,7 @@
         <p:spPr>
           <a:xfrm>
             <a:off x="685800" y="1444752"/>
-            <a:ext cx="6217920" cy="804672"/>
+            <a:ext cx="5760720" cy="804672"/>
           </a:xfrm>
           <a:prstGeom prst="rect">
             <a:avLst/>
@@ -2288,7 +2288,7 @@
         <p:spPr>
           <a:xfrm>
             <a:off x="685800" y="2304288"/>
-            <a:ext cx="6217920" cy="493776"/>
+            <a:ext cx="5760720" cy="493776"/>
           </a:xfrm>
           <a:prstGeom prst="rect">
             <a:avLst/>
@@ -2352,7 +2352,7 @@
         <p:spPr>
           <a:xfrm>
             <a:off x="685800" y="2926080"/>
-            <a:ext cx="6217920" cy="7315"/>
+            <a:ext cx="5760720" cy="7315"/>
           </a:xfrm>
           <a:prstGeom prst="rect">
             <a:avLst/>
@@ -2374,7 +2374,7 @@
         <p:spPr>
           <a:xfrm>
             <a:off x="685800" y="3035808"/>
-            <a:ext cx="6217920" cy="219456"/>
+            <a:ext cx="5760720" cy="219456"/>
           </a:xfrm>
           <a:prstGeom prst="rect">
             <a:avLst/>
@@ -2418,7 +2418,7 @@
         <p:spPr>
           <a:xfrm>
             <a:off x="685800" y="3310128"/>
-            <a:ext cx="6217920" cy="731520"/>
+            <a:ext cx="5760720" cy="731520"/>
           </a:xfrm>
           <a:prstGeom prst="rect">
             <a:avLst/>
@@ -2473,7 +2473,7 @@
         <p:spPr>
           <a:xfrm>
             <a:off x="685800" y="4114800"/>
-            <a:ext cx="6217920" cy="256032"/>
+            <a:ext cx="5760720" cy="256032"/>
           </a:xfrm>
           <a:prstGeom prst="rect">
             <a:avLst/>
@@ -2517,7 +2517,7 @@
         <p:spPr>
           <a:xfrm>
             <a:off x="685800" y="4645152"/>
-            <a:ext cx="6217920" cy="201168"/>
+            <a:ext cx="5760720" cy="201168"/>
           </a:xfrm>
           <a:prstGeom prst="rect">
             <a:avLst/>
@@ -2546,7 +2546,7 @@
                 <a:ea typeface="맑은 고딕" pitchFamily="34" charset="-122"/>
                 <a:cs typeface="맑은 고딕" pitchFamily="34" charset="-120"/>
               </a:rPr>
-              <a:t>※ 계약 체결 및 가맹비 입금 완료 건에만 청구하며, 착수금 · 월 고정비 · 광고비 없음 (러너펍 공개 가맹 안내 기준)</a:t>
+              <a:t>※ 계약 체결 및 가맹비 입금 완료 건에만 청구 · 착수금 · 월 고정비 · 광고비 없음</a:t>
             </a:r>
             <a:endParaRPr lang="en-US" sz="900" dirty="0"/>
           </a:p>
@@ -2560,8 +2560,8 @@
         </p:nvSpPr>
         <p:spPr>
           <a:xfrm>
-            <a:off x="7269480" y="1513508"/>
-            <a:ext cx="4236415" cy="237744"/>
+            <a:off x="6729984" y="1032568"/>
+            <a:ext cx="4775911" cy="237744"/>
           </a:xfrm>
           <a:prstGeom prst="rect">
             <a:avLst/>
@@ -2590,39 +2590,15 @@
                 <a:ea typeface="맑은 고딕" pitchFamily="34" charset="-122"/>
                 <a:cs typeface="맑은 고딕" pitchFamily="34" charset="-120"/>
               </a:rPr>
-              <a:t>제안 대상 업종  ·  RUNNER PUB 홀덤 라운지</a:t>
+              <a:t>RUNNER PUB 홀덤 라운지</a:t>
             </a:r>
             <a:endParaRPr lang="en-US" sz="1000" dirty="0"/>
           </a:p>
         </p:txBody>
-      </p:sp>
-      <p:sp>
-        <p:nvSpPr>
-          <p:cNvPr id="14" name="Shape 10"/>
-          <p:cNvSpPr/>
-          <p:nvPr/>
-        </p:nvSpPr>
-        <p:spPr>
-          <a:xfrm>
-            <a:off x="7269480" y="1879268"/>
-            <a:ext cx="4236415" cy="2313080"/>
-          </a:xfrm>
-          <a:prstGeom prst="roundRect">
-            <a:avLst>
-              <a:gd name="adj" fmla="val 2372"/>
-            </a:avLst>
-          </a:prstGeom>
-          <a:solidFill>
-            <a:srgbClr val="F4F7FD"/>
-          </a:solidFill>
-          <a:ln>
-            <a:noFill/>
-          </a:ln>
-        </p:spPr>
       </p:sp>
       <p:pic>
         <p:nvPicPr>
-          <p:cNvPr id="15" name="Image 2" descr="/home/user/onewillco-meeting-2026/runnerpub-proposal/assets/p11_pub.png">    </p:cNvPr>
+          <p:cNvPr id="14" name="Image 2" descr="/home/user/onewillco-meeting-2026/runnerpub-proposal/assets/cover_pub.png">    </p:cNvPr>
           <p:cNvPicPr>
             <a:picLocks noChangeAspect="1"/>
           </p:cNvPicPr>
@@ -2636,8 +2612,8 @@
         </p:blipFill>
         <p:spPr>
           <a:xfrm>
-            <a:off x="7543800" y="2153588"/>
-            <a:ext cx="3687775" cy="1544984"/>
+            <a:off x="6729984" y="1398328"/>
+            <a:ext cx="4775911" cy="2982353"/>
           </a:xfrm>
           <a:prstGeom prst="rect">
             <a:avLst/>
@@ -2646,51 +2622,51 @@
       </p:pic>
       <p:sp>
         <p:nvSpPr>
+          <p:cNvPr id="15" name="Text 10"/>
+          <p:cNvSpPr/>
+          <p:nvPr/>
+        </p:nvSpPr>
+        <p:spPr>
+          <a:xfrm>
+            <a:off x="6729984" y="4472120"/>
+            <a:ext cx="4775911" cy="201168"/>
+          </a:xfrm>
+          <a:prstGeom prst="rect">
+            <a:avLst/>
+          </a:prstGeom>
+          <a:noFill/>
+          <a:ln>
+            <a:noFill/>
+          </a:ln>
+        </p:spPr>
+        <p:txBody>
+          <a:bodyPr wrap="square" lIns="0" tIns="0" rIns="0" bIns="0" rtlCol="0" anchor="ctr"/>
+          <a:lstStyle/>
+          <a:p>
+            <a:pPr algn="ctr" indent="0" marL="0">
+              <a:lnSpc>
+                <a:spcPts val="1200"/>
+              </a:lnSpc>
+              <a:buNone/>
+            </a:pPr>
+            <a:r>
+              <a:rPr lang="en-US" sz="900" dirty="0">
+                <a:solidFill>
+                  <a:srgbClr val="5C687F"/>
+                </a:solidFill>
+                <a:latin typeface="맑은 고딕" pitchFamily="34" charset="0"/>
+                <a:ea typeface="맑은 고딕" pitchFamily="34" charset="-122"/>
+                <a:cs typeface="맑은 고딕" pitchFamily="34" charset="-120"/>
+              </a:rPr>
+              <a:t>토너먼트 운영 · 파이널 테이블 · 바 라운지를 갖춘 실매장</a:t>
+            </a:r>
+            <a:endParaRPr lang="en-US" sz="900" dirty="0"/>
+          </a:p>
+        </p:txBody>
+      </p:sp>
+      <p:sp>
+        <p:nvSpPr>
           <p:cNvPr id="16" name="Text 11"/>
-          <p:cNvSpPr/>
-          <p:nvPr/>
-        </p:nvSpPr>
-        <p:spPr>
-          <a:xfrm>
-            <a:off x="7452360" y="3790012"/>
-            <a:ext cx="3870655" cy="201168"/>
-          </a:xfrm>
-          <a:prstGeom prst="rect">
-            <a:avLst/>
-          </a:prstGeom>
-          <a:noFill/>
-          <a:ln>
-            <a:noFill/>
-          </a:ln>
-        </p:spPr>
-        <p:txBody>
-          <a:bodyPr wrap="square" lIns="0" tIns="0" rIns="0" bIns="0" rtlCol="0" anchor="ctr"/>
-          <a:lstStyle/>
-          <a:p>
-            <a:pPr algn="ctr" indent="0" marL="0">
-              <a:lnSpc>
-                <a:spcPts val="1200"/>
-              </a:lnSpc>
-              <a:buNone/>
-            </a:pPr>
-            <a:r>
-              <a:rPr lang="en-US" sz="900" dirty="0">
-                <a:solidFill>
-                  <a:srgbClr val="5C687F"/>
-                </a:solidFill>
-                <a:latin typeface="맑은 고딕" pitchFamily="34" charset="0"/>
-                <a:ea typeface="맑은 고딕" pitchFamily="34" charset="-122"/>
-                <a:cs typeface="맑은 고딕" pitchFamily="34" charset="-120"/>
-              </a:rPr>
-              <a:t>가맹 개설 대상 매장 구성 · 홀덤 테이블 · 바 · 라운지</a:t>
-            </a:r>
-            <a:endParaRPr lang="en-US" sz="900" dirty="0"/>
-          </a:p>
-        </p:txBody>
-      </p:sp>
-      <p:sp>
-        <p:nvSpPr>
-          <p:cNvPr id="17" name="Text 12"/>
           <p:cNvSpPr/>
           <p:nvPr/>
         </p:nvSpPr>
@@ -2734,7 +2710,7 @@
       </p:sp>
       <p:sp>
         <p:nvSpPr>
-          <p:cNvPr id="18" name="Text 13"/>
+          <p:cNvPr id="17" name="Text 12"/>
           <p:cNvSpPr/>
           <p:nvPr/>
         </p:nvSpPr>
@@ -2778,7 +2754,7 @@
       </p:sp>
       <p:sp>
         <p:nvSpPr>
-          <p:cNvPr id="19" name="Shape 14"/>
+          <p:cNvPr id="18" name="Shape 13"/>
           <p:cNvSpPr/>
           <p:nvPr/>
         </p:nvSpPr>
@@ -2800,7 +2776,7 @@
       </p:sp>
       <p:sp>
         <p:nvSpPr>
-          <p:cNvPr id="20" name="Text 15"/>
+          <p:cNvPr id="19" name="Text 14"/>
           <p:cNvSpPr/>
           <p:nvPr/>
         </p:nvSpPr>
@@ -2844,7 +2820,7 @@
       </p:sp>
       <p:sp>
         <p:nvSpPr>
-          <p:cNvPr id="21" name="Text 16"/>
+          <p:cNvPr id="20" name="Text 15"/>
           <p:cNvSpPr/>
           <p:nvPr/>
         </p:nvSpPr>
@@ -2888,7 +2864,7 @@
       </p:sp>
       <p:sp>
         <p:nvSpPr>
-          <p:cNvPr id="22" name="Shape 17"/>
+          <p:cNvPr id="21" name="Shape 16"/>
           <p:cNvSpPr/>
           <p:nvPr/>
         </p:nvSpPr>
@@ -2910,7 +2886,7 @@
       </p:sp>
       <p:sp>
         <p:nvSpPr>
-          <p:cNvPr id="23" name="Text 18"/>
+          <p:cNvPr id="22" name="Text 17"/>
           <p:cNvSpPr/>
           <p:nvPr/>
         </p:nvSpPr>
@@ -2954,7 +2930,7 @@
       </p:sp>
       <p:sp>
         <p:nvSpPr>
-          <p:cNvPr id="24" name="Text 19"/>
+          <p:cNvPr id="23" name="Text 18"/>
           <p:cNvSpPr/>
           <p:nvPr/>
         </p:nvSpPr>
@@ -2998,7 +2974,7 @@
       </p:sp>
       <p:sp>
         <p:nvSpPr>
-          <p:cNvPr id="25" name="Shape 20"/>
+          <p:cNvPr id="24" name="Shape 19"/>
           <p:cNvSpPr/>
           <p:nvPr/>
         </p:nvSpPr>
@@ -3020,7 +2996,7 @@
       </p:sp>
       <p:sp>
         <p:nvSpPr>
-          <p:cNvPr id="26" name="Text 21"/>
+          <p:cNvPr id="25" name="Text 20"/>
           <p:cNvSpPr/>
           <p:nvPr/>
         </p:nvSpPr>
@@ -3064,7 +3040,7 @@
       </p:sp>
       <p:sp>
         <p:nvSpPr>
-          <p:cNvPr id="27" name="Text 22"/>
+          <p:cNvPr id="26" name="Text 21"/>
           <p:cNvSpPr/>
           <p:nvPr/>
         </p:nvSpPr>
@@ -3108,7 +3084,7 @@
       </p:sp>
       <p:sp>
         <p:nvSpPr>
-          <p:cNvPr id="28" name="Shape 23"/>
+          <p:cNvPr id="27" name="Shape 22"/>
           <p:cNvSpPr/>
           <p:nvPr/>
         </p:nvSpPr>
@@ -3130,7 +3106,7 @@
       </p:sp>
       <p:pic>
         <p:nvPicPr>
-          <p:cNvPr id="29" name="Image 3" descr="/home/user/onewillco-meeting-2026/runnerpub-proposal/assets/ns_logo_w.png">    </p:cNvPr>
+          <p:cNvPr id="28" name="Image 3" descr="/home/user/onewillco-meeting-2026/runnerpub-proposal/assets/ns_logo_w.png">    </p:cNvPr>
           <p:cNvPicPr>
             <a:picLocks noChangeAspect="1"/>
           </p:cNvPicPr>
@@ -3154,7 +3130,7 @@
       </p:pic>
       <p:pic>
         <p:nvPicPr>
-          <p:cNvPr id="30" name="Image 4" descr="/home/user/onewillco-meeting-2026/runnerpub-proposal/assets/ic_arrow_w.png">    </p:cNvPr>
+          <p:cNvPr id="29" name="Image 4" descr="/home/user/onewillco-meeting-2026/runnerpub-proposal/assets/ic_arrow_w.png">    </p:cNvPr>
           <p:cNvPicPr>
             <a:picLocks noChangeAspect="1"/>
           </p:cNvPicPr>
@@ -3178,7 +3154,7 @@
       </p:pic>
       <p:pic>
         <p:nvPicPr>
-          <p:cNvPr id="31" name="Image 5" descr="/home/user/onewillco-meeting-2026/runnerpub-proposal/assets/logo.png">    </p:cNvPr>
+          <p:cNvPr id="30" name="Image 5" descr="/home/user/onewillco-meeting-2026/runnerpub-proposal/assets/logo.png">    </p:cNvPr>
           <p:cNvPicPr>
             <a:picLocks noChangeAspect="1"/>
           </p:cNvPicPr>
@@ -3202,7 +3178,7 @@
       </p:pic>
       <p:sp>
         <p:nvSpPr>
-          <p:cNvPr id="32" name="Text 24"/>
+          <p:cNvPr id="31" name="Text 23"/>
           <p:cNvSpPr/>
           <p:nvPr/>
         </p:nvSpPr>
@@ -3246,7 +3222,7 @@
       </p:sp>
       <p:sp>
         <p:nvSpPr>
-          <p:cNvPr id="33" name="Text 25"/>
+          <p:cNvPr id="32" name="Text 24"/>
           <p:cNvSpPr/>
           <p:nvPr/>
         </p:nvSpPr>
@@ -20099,7 +20075,7 @@
         <p:spPr>
           <a:xfrm>
             <a:off x="1005840" y="2359152"/>
-            <a:ext cx="4471416" cy="310896"/>
+            <a:ext cx="5020056" cy="310896"/>
           </a:xfrm>
           <a:prstGeom prst="rect">
             <a:avLst/>
@@ -20143,7 +20119,7 @@
         <p:spPr>
           <a:xfrm>
             <a:off x="685800" y="2659075"/>
-            <a:ext cx="4846320" cy="7315"/>
+            <a:ext cx="5394960" cy="7315"/>
           </a:xfrm>
           <a:prstGeom prst="rect">
             <a:avLst/>
@@ -20165,7 +20141,7 @@
         <p:spPr>
           <a:xfrm>
             <a:off x="685800" y="2743200"/>
-            <a:ext cx="4846320" cy="18288"/>
+            <a:ext cx="5394960" cy="18288"/>
           </a:xfrm>
           <a:prstGeom prst="rect">
             <a:avLst/>
@@ -20253,7 +20229,7 @@
         <p:spPr>
           <a:xfrm>
             <a:off x="2240280" y="2761488"/>
-            <a:ext cx="3218688" cy="402336"/>
+            <a:ext cx="3767328" cy="402336"/>
           </a:xfrm>
           <a:prstGeom prst="rect">
             <a:avLst/>
@@ -20297,7 +20273,7 @@
         <p:spPr>
           <a:xfrm>
             <a:off x="2057400" y="3163824"/>
-            <a:ext cx="3474720" cy="7315"/>
+            <a:ext cx="4023360" cy="7315"/>
           </a:xfrm>
           <a:prstGeom prst="rect">
             <a:avLst/>
@@ -20385,7 +20361,7 @@
         <p:spPr>
           <a:xfrm>
             <a:off x="2240280" y="3163824"/>
-            <a:ext cx="3218688" cy="402336"/>
+            <a:ext cx="3767328" cy="402336"/>
           </a:xfrm>
           <a:prstGeom prst="rect">
             <a:avLst/>
@@ -20429,7 +20405,7 @@
         <p:spPr>
           <a:xfrm>
             <a:off x="2057400" y="3566160"/>
-            <a:ext cx="3474720" cy="7315"/>
+            <a:ext cx="4023360" cy="7315"/>
           </a:xfrm>
           <a:prstGeom prst="rect">
             <a:avLst/>
@@ -20517,7 +20493,7 @@
         <p:spPr>
           <a:xfrm>
             <a:off x="2240280" y="3566160"/>
-            <a:ext cx="3218688" cy="402336"/>
+            <a:ext cx="3767328" cy="402336"/>
           </a:xfrm>
           <a:prstGeom prst="rect">
             <a:avLst/>
@@ -20561,7 +20537,7 @@
         <p:spPr>
           <a:xfrm>
             <a:off x="685800" y="3968496"/>
-            <a:ext cx="4846320" cy="18288"/>
+            <a:ext cx="5394960" cy="18288"/>
           </a:xfrm>
           <a:prstGeom prst="rect">
             <a:avLst/>
@@ -20646,7 +20622,7 @@
         <p:spPr>
           <a:xfrm>
             <a:off x="1005840" y="4261104"/>
-            <a:ext cx="4471416" cy="310896"/>
+            <a:ext cx="5020056" cy="310896"/>
           </a:xfrm>
           <a:prstGeom prst="rect">
             <a:avLst/>
@@ -20690,7 +20666,7 @@
         <p:spPr>
           <a:xfrm>
             <a:off x="685800" y="4561027"/>
-            <a:ext cx="4846320" cy="7315"/>
+            <a:ext cx="5394960" cy="7315"/>
           </a:xfrm>
           <a:prstGeom prst="rect">
             <a:avLst/>
@@ -20712,7 +20688,7 @@
         <p:spPr>
           <a:xfrm>
             <a:off x="685800" y="4645152"/>
-            <a:ext cx="4846320" cy="18288"/>
+            <a:ext cx="5394960" cy="18288"/>
           </a:xfrm>
           <a:prstGeom prst="rect">
             <a:avLst/>
@@ -20800,7 +20776,7 @@
         <p:spPr>
           <a:xfrm>
             <a:off x="2240280" y="4663440"/>
-            <a:ext cx="3218688" cy="420624"/>
+            <a:ext cx="3767328" cy="420624"/>
           </a:xfrm>
           <a:prstGeom prst="rect">
             <a:avLst/>
@@ -20844,7 +20820,7 @@
         <p:spPr>
           <a:xfrm>
             <a:off x="2057400" y="5084064"/>
-            <a:ext cx="3474720" cy="7315"/>
+            <a:ext cx="4023360" cy="7315"/>
           </a:xfrm>
           <a:prstGeom prst="rect">
             <a:avLst/>
@@ -20932,7 +20908,7 @@
         <p:spPr>
           <a:xfrm>
             <a:off x="2240280" y="5084064"/>
-            <a:ext cx="3218688" cy="420624"/>
+            <a:ext cx="3767328" cy="420624"/>
           </a:xfrm>
           <a:prstGeom prst="rect">
             <a:avLst/>
@@ -20976,7 +20952,7 @@
         <p:spPr>
           <a:xfrm>
             <a:off x="2057400" y="5504688"/>
-            <a:ext cx="3474720" cy="7315"/>
+            <a:ext cx="4023360" cy="7315"/>
           </a:xfrm>
           <a:prstGeom prst="rect">
             <a:avLst/>
@@ -21064,7 +21040,7 @@
         <p:spPr>
           <a:xfrm>
             <a:off x="2240280" y="5504688"/>
-            <a:ext cx="3218688" cy="420624"/>
+            <a:ext cx="3767328" cy="420624"/>
           </a:xfrm>
           <a:prstGeom prst="rect">
             <a:avLst/>
@@ -21108,7 +21084,7 @@
         <p:spPr>
           <a:xfrm>
             <a:off x="685800" y="5925312"/>
-            <a:ext cx="4846320" cy="18288"/>
+            <a:ext cx="5394960" cy="18288"/>
           </a:xfrm>
           <a:prstGeom prst="rect">
             <a:avLst/>
@@ -21129,7 +21105,7 @@
         </p:nvSpPr>
         <p:spPr>
           <a:xfrm>
-            <a:off x="5916168" y="2418588"/>
+            <a:off x="6483096" y="2418588"/>
             <a:ext cx="192024" cy="192024"/>
           </a:xfrm>
           <a:prstGeom prst="ellipse">
@@ -21151,7 +21127,7 @@
         </p:nvSpPr>
         <p:spPr>
           <a:xfrm>
-            <a:off x="5916168" y="2418588"/>
+            <a:off x="6483096" y="2418588"/>
             <a:ext cx="192024" cy="192024"/>
           </a:xfrm>
           <a:prstGeom prst="rect">
@@ -21192,8 +21168,8 @@
         </p:nvSpPr>
         <p:spPr>
           <a:xfrm>
-            <a:off x="6236208" y="2359152"/>
-            <a:ext cx="5214823" cy="310896"/>
+            <a:off x="6803136" y="2359152"/>
+            <a:ext cx="4647895" cy="310896"/>
           </a:xfrm>
           <a:prstGeom prst="rect">
             <a:avLst/>
@@ -21236,8 +21212,8 @@
         </p:nvSpPr>
         <p:spPr>
           <a:xfrm>
-            <a:off x="5916168" y="2659075"/>
-            <a:ext cx="5589727" cy="7315"/>
+            <a:off x="6483096" y="2659075"/>
+            <a:ext cx="5022799" cy="7315"/>
           </a:xfrm>
           <a:prstGeom prst="rect">
             <a:avLst/>
@@ -21258,7 +21234,7 @@
         </p:nvSpPr>
         <p:spPr>
           <a:xfrm>
-            <a:off x="5998464" y="2798064"/>
+            <a:off x="6565392" y="2798064"/>
             <a:ext cx="20117" cy="2962656"/>
           </a:xfrm>
           <a:prstGeom prst="rect">
@@ -21280,7 +21256,7 @@
         </p:nvSpPr>
         <p:spPr>
           <a:xfrm>
-            <a:off x="5934456" y="2816352"/>
+            <a:off x="6501384" y="2816352"/>
             <a:ext cx="146304" cy="146304"/>
           </a:xfrm>
           <a:prstGeom prst="ellipse">
@@ -21302,7 +21278,7 @@
         </p:nvSpPr>
         <p:spPr>
           <a:xfrm>
-            <a:off x="5934456" y="3593592"/>
+            <a:off x="6501384" y="3593592"/>
             <a:ext cx="146304" cy="146304"/>
           </a:xfrm>
           <a:prstGeom prst="ellipse">
@@ -21324,7 +21300,7 @@
         </p:nvSpPr>
         <p:spPr>
           <a:xfrm>
-            <a:off x="5934456" y="4567428"/>
+            <a:off x="6501384" y="4567428"/>
             <a:ext cx="146304" cy="146304"/>
           </a:xfrm>
           <a:prstGeom prst="ellipse">
@@ -21346,7 +21322,7 @@
         </p:nvSpPr>
         <p:spPr>
           <a:xfrm>
-            <a:off x="5934456" y="5541264"/>
+            <a:off x="6501384" y="5541264"/>
             <a:ext cx="146304" cy="146304"/>
           </a:xfrm>
           <a:prstGeom prst="ellipse">
@@ -21368,7 +21344,7 @@
         </p:nvSpPr>
         <p:spPr>
           <a:xfrm>
-            <a:off x="6227064" y="2766060"/>
+            <a:off x="6793992" y="2766060"/>
             <a:ext cx="950976" cy="246888"/>
           </a:xfrm>
           <a:prstGeom prst="roundRect">
@@ -21392,7 +21368,7 @@
         </p:nvSpPr>
         <p:spPr>
           <a:xfrm>
-            <a:off x="6391656" y="2766060"/>
+            <a:off x="6958584" y="2766060"/>
             <a:ext cx="621792" cy="246888"/>
           </a:xfrm>
           <a:prstGeom prst="rect">
@@ -21436,8 +21412,8 @@
         </p:nvSpPr>
         <p:spPr>
           <a:xfrm>
-            <a:off x="7324344" y="2743200"/>
-            <a:ext cx="4181551" cy="292608"/>
+            <a:off x="7891272" y="2743200"/>
+            <a:ext cx="3614623" cy="292608"/>
           </a:xfrm>
           <a:prstGeom prst="rect">
             <a:avLst/>
@@ -21480,8 +21456,8 @@
         </p:nvSpPr>
         <p:spPr>
           <a:xfrm>
-            <a:off x="6318504" y="3035808"/>
-            <a:ext cx="5187391" cy="196596"/>
+            <a:off x="6885432" y="3035808"/>
+            <a:ext cx="4620463" cy="196596"/>
           </a:xfrm>
           <a:prstGeom prst="rect">
             <a:avLst/>
@@ -21524,8 +21500,8 @@
         </p:nvSpPr>
         <p:spPr>
           <a:xfrm>
-            <a:off x="6318504" y="3232404"/>
-            <a:ext cx="5187391" cy="196596"/>
+            <a:off x="6885432" y="3232404"/>
+            <a:ext cx="4620463" cy="196596"/>
           </a:xfrm>
           <a:prstGeom prst="rect">
             <a:avLst/>
@@ -21568,7 +21544,7 @@
         </p:nvSpPr>
         <p:spPr>
           <a:xfrm>
-            <a:off x="6227064" y="3543300"/>
+            <a:off x="6793992" y="3543300"/>
             <a:ext cx="950976" cy="246888"/>
           </a:xfrm>
           <a:prstGeom prst="roundRect">
@@ -21592,7 +21568,7 @@
         </p:nvSpPr>
         <p:spPr>
           <a:xfrm>
-            <a:off x="6391656" y="3543300"/>
+            <a:off x="6958584" y="3543300"/>
             <a:ext cx="621792" cy="246888"/>
           </a:xfrm>
           <a:prstGeom prst="rect">
@@ -21636,8 +21612,8 @@
         </p:nvSpPr>
         <p:spPr>
           <a:xfrm>
-            <a:off x="7324344" y="3520440"/>
-            <a:ext cx="4181551" cy="292608"/>
+            <a:off x="7891272" y="3520440"/>
+            <a:ext cx="3614623" cy="292608"/>
           </a:xfrm>
           <a:prstGeom prst="rect">
             <a:avLst/>
@@ -21680,8 +21656,8 @@
         </p:nvSpPr>
         <p:spPr>
           <a:xfrm>
-            <a:off x="6318504" y="3813048"/>
-            <a:ext cx="5187391" cy="196596"/>
+            <a:off x="6885432" y="3813048"/>
+            <a:ext cx="4620463" cy="196596"/>
           </a:xfrm>
           <a:prstGeom prst="rect">
             <a:avLst/>
@@ -21724,8 +21700,8 @@
         </p:nvSpPr>
         <p:spPr>
           <a:xfrm>
-            <a:off x="6318504" y="4009644"/>
-            <a:ext cx="5187391" cy="196596"/>
+            <a:off x="6885432" y="4009644"/>
+            <a:ext cx="4620463" cy="196596"/>
           </a:xfrm>
           <a:prstGeom prst="rect">
             <a:avLst/>
@@ -21768,8 +21744,8 @@
         </p:nvSpPr>
         <p:spPr>
           <a:xfrm>
-            <a:off x="6318504" y="4206240"/>
-            <a:ext cx="5187391" cy="196596"/>
+            <a:off x="6885432" y="4206240"/>
+            <a:ext cx="4620463" cy="196596"/>
           </a:xfrm>
           <a:prstGeom prst="rect">
             <a:avLst/>
@@ -21812,7 +21788,7 @@
         </p:nvSpPr>
         <p:spPr>
           <a:xfrm>
-            <a:off x="6227064" y="4517136"/>
+            <a:off x="6793992" y="4517136"/>
             <a:ext cx="950976" cy="246888"/>
           </a:xfrm>
           <a:prstGeom prst="roundRect">
@@ -21836,7 +21812,7 @@
         </p:nvSpPr>
         <p:spPr>
           <a:xfrm>
-            <a:off x="6391656" y="4517136"/>
+            <a:off x="6958584" y="4517136"/>
             <a:ext cx="621792" cy="246888"/>
           </a:xfrm>
           <a:prstGeom prst="rect">
@@ -21880,8 +21856,8 @@
         </p:nvSpPr>
         <p:spPr>
           <a:xfrm>
-            <a:off x="7324344" y="4494276"/>
-            <a:ext cx="4181551" cy="292608"/>
+            <a:off x="7891272" y="4494276"/>
+            <a:ext cx="3614623" cy="292608"/>
           </a:xfrm>
           <a:prstGeom prst="rect">
             <a:avLst/>
@@ -21924,8 +21900,8 @@
         </p:nvSpPr>
         <p:spPr>
           <a:xfrm>
-            <a:off x="6318504" y="4786884"/>
-            <a:ext cx="5187391" cy="196596"/>
+            <a:off x="6885432" y="4786884"/>
+            <a:ext cx="4620463" cy="196596"/>
           </a:xfrm>
           <a:prstGeom prst="rect">
             <a:avLst/>
@@ -21968,8 +21944,8 @@
         </p:nvSpPr>
         <p:spPr>
           <a:xfrm>
-            <a:off x="6318504" y="4983480"/>
-            <a:ext cx="5187391" cy="196596"/>
+            <a:off x="6885432" y="4983480"/>
+            <a:ext cx="4620463" cy="196596"/>
           </a:xfrm>
           <a:prstGeom prst="rect">
             <a:avLst/>
@@ -22012,8 +21988,8 @@
         </p:nvSpPr>
         <p:spPr>
           <a:xfrm>
-            <a:off x="6318504" y="5180076"/>
-            <a:ext cx="5187391" cy="196596"/>
+            <a:off x="6885432" y="5180076"/>
+            <a:ext cx="4620463" cy="196596"/>
           </a:xfrm>
           <a:prstGeom prst="rect">
             <a:avLst/>
@@ -22056,7 +22032,7 @@
         </p:nvSpPr>
         <p:spPr>
           <a:xfrm>
-            <a:off x="6227064" y="5490972"/>
+            <a:off x="6793992" y="5490972"/>
             <a:ext cx="950976" cy="246888"/>
           </a:xfrm>
           <a:prstGeom prst="roundRect">
@@ -22080,7 +22056,7 @@
         </p:nvSpPr>
         <p:spPr>
           <a:xfrm>
-            <a:off x="6391656" y="5490972"/>
+            <a:off x="6958584" y="5490972"/>
             <a:ext cx="621792" cy="246888"/>
           </a:xfrm>
           <a:prstGeom prst="rect">
@@ -22124,8 +22100,8 @@
         </p:nvSpPr>
         <p:spPr>
           <a:xfrm>
-            <a:off x="7324344" y="5468112"/>
-            <a:ext cx="4181551" cy="292608"/>
+            <a:off x="7891272" y="5468112"/>
+            <a:ext cx="3614623" cy="292608"/>
           </a:xfrm>
           <a:prstGeom prst="rect">
             <a:avLst/>
@@ -22168,8 +22144,8 @@
         </p:nvSpPr>
         <p:spPr>
           <a:xfrm>
-            <a:off x="6318504" y="5760720"/>
-            <a:ext cx="5187391" cy="196596"/>
+            <a:off x="6885432" y="5760720"/>
+            <a:ext cx="4620463" cy="196596"/>
           </a:xfrm>
           <a:prstGeom prst="rect">
             <a:avLst/>
@@ -22212,8 +22188,8 @@
         </p:nvSpPr>
         <p:spPr>
           <a:xfrm>
-            <a:off x="6318504" y="5957316"/>
-            <a:ext cx="5187391" cy="196596"/>
+            <a:off x="6885432" y="5957316"/>
+            <a:ext cx="4620463" cy="196596"/>
           </a:xfrm>
           <a:prstGeom prst="rect">
             <a:avLst/>

--- a/runnerpub-proposal/runnerpub_proposal_naeilsajang.pptx
+++ b/runnerpub-proposal/runnerpub_proposal_naeilsajang.pptx
@@ -2560,7 +2560,7 @@
         </p:nvSpPr>
         <p:spPr>
           <a:xfrm>
-            <a:off x="6729984" y="1032568"/>
+            <a:off x="6729984" y="1169728"/>
             <a:ext cx="4775911" cy="237744"/>
           </a:xfrm>
           <a:prstGeom prst="rect">
@@ -2612,7 +2612,7 @@
         </p:blipFill>
         <p:spPr>
           <a:xfrm>
-            <a:off x="6729984" y="1398328"/>
+            <a:off x="6729984" y="1553776"/>
             <a:ext cx="4775911" cy="2982353"/>
           </a:xfrm>
           <a:prstGeom prst="rect">
@@ -2623,50 +2623,6 @@
       <p:sp>
         <p:nvSpPr>
           <p:cNvPr id="15" name="Text 10"/>
-          <p:cNvSpPr/>
-          <p:nvPr/>
-        </p:nvSpPr>
-        <p:spPr>
-          <a:xfrm>
-            <a:off x="6729984" y="4472120"/>
-            <a:ext cx="4775911" cy="201168"/>
-          </a:xfrm>
-          <a:prstGeom prst="rect">
-            <a:avLst/>
-          </a:prstGeom>
-          <a:noFill/>
-          <a:ln>
-            <a:noFill/>
-          </a:ln>
-        </p:spPr>
-        <p:txBody>
-          <a:bodyPr wrap="square" lIns="0" tIns="0" rIns="0" bIns="0" rtlCol="0" anchor="ctr"/>
-          <a:lstStyle/>
-          <a:p>
-            <a:pPr algn="ctr" indent="0" marL="0">
-              <a:lnSpc>
-                <a:spcPts val="1200"/>
-              </a:lnSpc>
-              <a:buNone/>
-            </a:pPr>
-            <a:r>
-              <a:rPr lang="en-US" sz="900" dirty="0">
-                <a:solidFill>
-                  <a:srgbClr val="5C687F"/>
-                </a:solidFill>
-                <a:latin typeface="맑은 고딕" pitchFamily="34" charset="0"/>
-                <a:ea typeface="맑은 고딕" pitchFamily="34" charset="-122"/>
-                <a:cs typeface="맑은 고딕" pitchFamily="34" charset="-120"/>
-              </a:rPr>
-              <a:t>토너먼트 운영 · 파이널 테이블 · 바 라운지를 갖춘 실매장</a:t>
-            </a:r>
-            <a:endParaRPr lang="en-US" sz="900" dirty="0"/>
-          </a:p>
-        </p:txBody>
-      </p:sp>
-      <p:sp>
-        <p:nvSpPr>
-          <p:cNvPr id="16" name="Text 11"/>
           <p:cNvSpPr/>
           <p:nvPr/>
         </p:nvSpPr>
@@ -2710,7 +2666,7 @@
       </p:sp>
       <p:sp>
         <p:nvSpPr>
-          <p:cNvPr id="17" name="Text 12"/>
+          <p:cNvPr id="16" name="Text 11"/>
           <p:cNvSpPr/>
           <p:nvPr/>
         </p:nvSpPr>
@@ -2754,7 +2710,7 @@
       </p:sp>
       <p:sp>
         <p:nvSpPr>
-          <p:cNvPr id="18" name="Shape 13"/>
+          <p:cNvPr id="17" name="Shape 12"/>
           <p:cNvSpPr/>
           <p:nvPr/>
         </p:nvSpPr>
@@ -2776,7 +2732,7 @@
       </p:sp>
       <p:sp>
         <p:nvSpPr>
-          <p:cNvPr id="19" name="Text 14"/>
+          <p:cNvPr id="18" name="Text 13"/>
           <p:cNvSpPr/>
           <p:nvPr/>
         </p:nvSpPr>
@@ -2820,7 +2776,7 @@
       </p:sp>
       <p:sp>
         <p:nvSpPr>
-          <p:cNvPr id="20" name="Text 15"/>
+          <p:cNvPr id="19" name="Text 14"/>
           <p:cNvSpPr/>
           <p:nvPr/>
         </p:nvSpPr>
@@ -2864,7 +2820,7 @@
       </p:sp>
       <p:sp>
         <p:nvSpPr>
-          <p:cNvPr id="21" name="Shape 16"/>
+          <p:cNvPr id="20" name="Shape 15"/>
           <p:cNvSpPr/>
           <p:nvPr/>
         </p:nvSpPr>
@@ -2886,7 +2842,7 @@
       </p:sp>
       <p:sp>
         <p:nvSpPr>
-          <p:cNvPr id="22" name="Text 17"/>
+          <p:cNvPr id="21" name="Text 16"/>
           <p:cNvSpPr/>
           <p:nvPr/>
         </p:nvSpPr>
@@ -2930,7 +2886,7 @@
       </p:sp>
       <p:sp>
         <p:nvSpPr>
-          <p:cNvPr id="23" name="Text 18"/>
+          <p:cNvPr id="22" name="Text 17"/>
           <p:cNvSpPr/>
           <p:nvPr/>
         </p:nvSpPr>
@@ -2974,7 +2930,7 @@
       </p:sp>
       <p:sp>
         <p:nvSpPr>
-          <p:cNvPr id="24" name="Shape 19"/>
+          <p:cNvPr id="23" name="Shape 18"/>
           <p:cNvSpPr/>
           <p:nvPr/>
         </p:nvSpPr>
@@ -2996,7 +2952,7 @@
       </p:sp>
       <p:sp>
         <p:nvSpPr>
-          <p:cNvPr id="25" name="Text 20"/>
+          <p:cNvPr id="24" name="Text 19"/>
           <p:cNvSpPr/>
           <p:nvPr/>
         </p:nvSpPr>
@@ -3040,7 +2996,7 @@
       </p:sp>
       <p:sp>
         <p:nvSpPr>
-          <p:cNvPr id="26" name="Text 21"/>
+          <p:cNvPr id="25" name="Text 20"/>
           <p:cNvSpPr/>
           <p:nvPr/>
         </p:nvSpPr>
@@ -3084,7 +3040,7 @@
       </p:sp>
       <p:sp>
         <p:nvSpPr>
-          <p:cNvPr id="27" name="Shape 22"/>
+          <p:cNvPr id="26" name="Shape 21"/>
           <p:cNvSpPr/>
           <p:nvPr/>
         </p:nvSpPr>
@@ -3106,7 +3062,7 @@
       </p:sp>
       <p:pic>
         <p:nvPicPr>
-          <p:cNvPr id="28" name="Image 3" descr="/home/user/onewillco-meeting-2026/runnerpub-proposal/assets/ns_logo_w.png">    </p:cNvPr>
+          <p:cNvPr id="27" name="Image 3" descr="/home/user/onewillco-meeting-2026/runnerpub-proposal/assets/ns_logo_w.png">    </p:cNvPr>
           <p:cNvPicPr>
             <a:picLocks noChangeAspect="1"/>
           </p:cNvPicPr>
@@ -3130,7 +3086,7 @@
       </p:pic>
       <p:pic>
         <p:nvPicPr>
-          <p:cNvPr id="29" name="Image 4" descr="/home/user/onewillco-meeting-2026/runnerpub-proposal/assets/ic_arrow_w.png">    </p:cNvPr>
+          <p:cNvPr id="28" name="Image 4" descr="/home/user/onewillco-meeting-2026/runnerpub-proposal/assets/ic_arrow_w.png">    </p:cNvPr>
           <p:cNvPicPr>
             <a:picLocks noChangeAspect="1"/>
           </p:cNvPicPr>
@@ -3154,7 +3110,7 @@
       </p:pic>
       <p:pic>
         <p:nvPicPr>
-          <p:cNvPr id="30" name="Image 5" descr="/home/user/onewillco-meeting-2026/runnerpub-proposal/assets/logo.png">    </p:cNvPr>
+          <p:cNvPr id="29" name="Image 5" descr="/home/user/onewillco-meeting-2026/runnerpub-proposal/assets/logo.png">    </p:cNvPr>
           <p:cNvPicPr>
             <a:picLocks noChangeAspect="1"/>
           </p:cNvPicPr>
@@ -3178,7 +3134,7 @@
       </p:pic>
       <p:sp>
         <p:nvSpPr>
-          <p:cNvPr id="31" name="Text 23"/>
+          <p:cNvPr id="30" name="Text 22"/>
           <p:cNvSpPr/>
           <p:nvPr/>
         </p:nvSpPr>
@@ -3222,7 +3178,7 @@
       </p:sp>
       <p:sp>
         <p:nvSpPr>
-          <p:cNvPr id="32" name="Text 24"/>
+          <p:cNvPr id="31" name="Text 23"/>
           <p:cNvSpPr/>
           <p:nvPr/>
         </p:nvSpPr>
